--- a/examples/outputs/video/dark-minimalist/structured/deck.pptx
+++ b/examples/outputs/video/dark-minimalist/structured/deck.pptx
@@ -304,10 +304,275 @@
           <c:layoutTarget val="inner"/>
           <c:xMode val="edge"/>
           <c:yMode val="edge"/>
-          <c:x val="0.0962"/>
-          <c:y val="0.0206"/>
-          <c:w val="0.8713"/>
-          <c:h val="0.9587"/>
+          <c:x val="0.0293"/>
+          <c:y val="0.0293"/>
+          <c:w val="0.9415"/>
+          <c:h val="0.9415"/>
+        </c:manualLayout>
+      </c:layout>
+      <c:doughnutChart>
+        <c:varyColors val="1"/>
+        <c:ser>
+          <c:idx val="0"/>
+          <c:order val="0"/>
+          <c:tx>
+            <c:strRef>
+              <c:f>Sheet1!$B$1</c:f>
+              <c:strCache>
+                <c:ptCount val="1"/>
+                <c:pt idx="0">
+                  <c:v>Состав</c:v>
+                </c:pt>
+              </c:strCache>
+            </c:strRef>
+          </c:tx>
+          <c:dPt>
+            <c:idx val="0"/>
+            <c:spPr>
+              <a:solidFill>
+                <a:srgbClr val="C2D076"/>
+              </a:solidFill>
+              <a:ln w="25400">
+                <a:solidFill>
+                  <a:srgbClr val="001514"/>
+                </a:solidFill>
+              </a:ln>
+            </c:spPr>
+          </c:dPt>
+          <c:dPt>
+            <c:idx val="1"/>
+            <c:spPr>
+              <a:solidFill>
+                <a:srgbClr val="E8EDCB"/>
+              </a:solidFill>
+              <a:ln w="25400">
+                <a:solidFill>
+                  <a:srgbClr val="001514"/>
+                </a:solidFill>
+              </a:ln>
+            </c:spPr>
+          </c:dPt>
+          <c:dLbls>
+            <c:dLbl>
+              <c:idx val="0"/>
+              <c:numFmt formatCode="0&quot;%&quot;;&quot;−&quot;0&quot;%&quot;;" sourceLinked="0"/>
+              <c:spPr>
+                <a:noFill/>
+                <a:ln>
+                  <a:noFill/>
+                </a:ln>
+              </c:spPr>
+              <c:txPr>
+                <a:bodyPr wrap="none"/>
+                <a:lstStyle/>
+                <a:p>
+                  <a:pPr>
+                    <a:defRPr sz="1800" b="0">
+                      <a:solidFill>
+                        <a:srgbClr val="001514"/>
+                      </a:solidFill>
+                      <a:latin typeface="Inter Light"/>
+                      <a:ea typeface="Inter Light"/>
+                      <a:cs typeface="Inter Light"/>
+                    </a:defRPr>
+                  </a:pPr>
+                  <a:endParaRPr lang="ru-RU"/>
+                </a:p>
+              </c:txPr>
+              <c:showLegendKey val="0"/>
+              <c:showVal val="1"/>
+              <c:showCatName val="0"/>
+              <c:showSerName val="0"/>
+              <c:showPercent val="0"/>
+              <c:showBubbleSize val="0"/>
+            </c:dLbl>
+            <c:dLbl>
+              <c:idx val="1"/>
+              <c:numFmt formatCode="0&quot;%&quot;;&quot;−&quot;0&quot;%&quot;;" sourceLinked="0"/>
+              <c:spPr>
+                <a:noFill/>
+                <a:ln>
+                  <a:noFill/>
+                </a:ln>
+              </c:spPr>
+              <c:txPr>
+                <a:bodyPr wrap="none"/>
+                <a:lstStyle/>
+                <a:p>
+                  <a:pPr>
+                    <a:defRPr sz="1800" b="0">
+                      <a:solidFill>
+                        <a:srgbClr val="001514"/>
+                      </a:solidFill>
+                      <a:latin typeface="Inter Light"/>
+                      <a:ea typeface="Inter Light"/>
+                      <a:cs typeface="Inter Light"/>
+                    </a:defRPr>
+                  </a:pPr>
+                  <a:endParaRPr lang="ru-RU"/>
+                </a:p>
+              </c:txPr>
+              <c:showLegendKey val="0"/>
+              <c:showVal val="1"/>
+              <c:showCatName val="0"/>
+              <c:showSerName val="0"/>
+              <c:showPercent val="0"/>
+              <c:showBubbleSize val="0"/>
+            </c:dLbl>
+            <c:numFmt formatCode="0&quot;%&quot;;&quot;−&quot;0&quot;%&quot;;" sourceLinked="0"/>
+            <c:spPr>
+              <a:noFill/>
+              <a:ln>
+                <a:noFill/>
+              </a:ln>
+            </c:spPr>
+            <c:txPr>
+              <a:bodyPr wrap="none"/>
+              <a:lstStyle/>
+              <a:p>
+                <a:pPr>
+                  <a:defRPr sz="1800" b="0">
+                    <a:solidFill>
+                      <a:srgbClr val="FFFFFF"/>
+                    </a:solidFill>
+                    <a:latin typeface="Inter Light"/>
+                    <a:ea typeface="Inter Light"/>
+                    <a:cs typeface="Inter Light"/>
+                  </a:defRPr>
+                </a:pPr>
+                <a:endParaRPr lang="ru-RU"/>
+              </a:p>
+            </c:txPr>
+            <c:showLegendKey val="0"/>
+            <c:showVal val="1"/>
+            <c:showCatName val="0"/>
+            <c:showSerName val="0"/>
+            <c:showPercent val="0"/>
+            <c:showBubbleSize val="0"/>
+            <c:showLeaderLines val="0"/>
+          </c:dLbls>
+          <c:cat>
+            <c:strRef>
+              <c:f>Sheet1!$A$2:$A$3</c:f>
+              <c:strCache>
+                <c:ptCount val="2"/>
+                <c:pt idx="0">
+                  <c:v>Свободные фигуры</c:v>
+                </c:pt>
+                <c:pt idx="1">
+                  <c:v>Плейсхолдеры</c:v>
+                </c:pt>
+              </c:strCache>
+            </c:strRef>
+          </c:cat>
+          <c:val>
+            <c:numRef>
+              <c:f>Sheet1!$B$2:$B$3</c:f>
+              <c:numCache>
+                <c:formatCode>General</c:formatCode>
+                <c:ptCount val="2"/>
+                <c:pt idx="0">
+                  <c:v>95.0</c:v>
+                </c:pt>
+                <c:pt idx="1">
+                  <c:v>5.0</c:v>
+                </c:pt>
+              </c:numCache>
+            </c:numRef>
+          </c:val>
+        </c:ser>
+        <c:dLbls>
+          <c:numFmt formatCode="0&quot;%&quot;;&quot;−&quot;0&quot;%&quot;;" sourceLinked="0"/>
+          <c:spPr>
+            <a:noFill/>
+            <a:ln>
+              <a:noFill/>
+            </a:ln>
+          </c:spPr>
+          <c:txPr>
+            <a:bodyPr wrap="none"/>
+            <a:lstStyle/>
+            <a:p>
+              <a:pPr>
+                <a:defRPr sz="1800" b="0">
+                  <a:solidFill>
+                    <a:srgbClr val="FFFFFF"/>
+                  </a:solidFill>
+                  <a:latin typeface="Inter Light"/>
+                  <a:ea typeface="Inter Light"/>
+                  <a:cs typeface="Inter Light"/>
+                </a:defRPr>
+              </a:pPr>
+              <a:endParaRPr lang="ru-RU"/>
+            </a:p>
+          </c:txPr>
+          <c:showLegendKey val="0"/>
+          <c:showVal val="1"/>
+          <c:showCatName val="0"/>
+          <c:showSerName val="0"/>
+          <c:showPercent val="0"/>
+          <c:showBubbleSize val="0"/>
+          <c:showLeaderLines val="0"/>
+        </c:dLbls>
+        <c:firstSliceAng val="0"/>
+        <c:holeSize val="56"/>
+      </c:doughnutChart>
+      <c:spPr>
+        <a:noFill/>
+        <a:ln>
+          <a:noFill/>
+        </a:ln>
+      </c:spPr>
+    </c:plotArea>
+    <c:plotVisOnly val="1"/>
+    <c:dispBlanksAs val="gap"/>
+    <c:showDLblsOverMax val="0"/>
+  </c:chart>
+  <c:spPr>
+    <a:noFill/>
+    <a:ln>
+      <a:noFill/>
+    </a:ln>
+  </c:spPr>
+  <c:txPr>
+    <a:bodyPr/>
+    <a:lstStyle/>
+    <a:p>
+      <a:pPr>
+        <a:defRPr sz="1800">
+          <a:solidFill>
+            <a:srgbClr val="FFFFFF"/>
+          </a:solidFill>
+          <a:latin typeface="Inter Light"/>
+          <a:ea typeface="Inter Light"/>
+          <a:cs typeface="Inter Light"/>
+        </a:defRPr>
+      </a:pPr>
+      <a:endParaRPr/>
+    </a:p>
+  </c:txPr>
+  <c:externalData r:id="rId1">
+    <c:autoUpdate val="0"/>
+  </c:externalData>
+</c:chartSpace>
+</file>
+
+<file path=ppt/charts/chart2.xml><?xml version="1.0" encoding="utf-8"?>
+<c:chartSpace xmlns:c="http://schemas.openxmlformats.org/drawingml/2006/chart" xmlns:a="http://schemas.openxmlformats.org/drawingml/2006/main" xmlns:r="http://schemas.openxmlformats.org/officeDocument/2006/relationships">
+  <c:date1904 val="0"/>
+  <c:roundedCorners val="0"/>
+  <c:chart>
+    <c:autoTitleDeleted val="1"/>
+    <c:plotArea>
+      <c:layout>
+        <c:manualLayout>
+          <c:layoutTarget val="inner"/>
+          <c:xMode val="edge"/>
+          <c:yMode val="edge"/>
+          <c:x val="0.1503"/>
+          <c:y val="0.0218"/>
+          <c:w val="0.7988"/>
+          <c:h val="0.9564"/>
         </c:manualLayout>
       </c:layout>
       <c:barChart>
@@ -323,7 +588,7 @@
               <c:strCache>
                 <c:ptCount val="1"/>
                 <c:pt idx="0">
-                  <c:v>Число проверок</c:v>
+                  <c:v>Проверки</c:v>
                 </c:pt>
               </c:strCache>
             </c:strRef>
@@ -454,7 +719,7 @@
           </c:val>
         </c:ser>
         <c:dLbls>
-          <c:numFmt formatCode="#,##0&quot; проверок&quot;;&quot;−&quot;#,##0&quot; проверок&quot;;" sourceLinked="0"/>
+          <c:numFmt formatCode="#,##0;&quot;−&quot;#,##0;" sourceLinked="0"/>
           <c:spPr>
             <a:noFill/>
             <a:ln>
@@ -583,7 +848,7 @@
 </c:chartSpace>
 </file>
 
-<file path=ppt/charts/chart2.xml><?xml version="1.0" encoding="utf-8"?>
+<file path=ppt/charts/chart3.xml><?xml version="1.0" encoding="utf-8"?>
 <c:chartSpace xmlns:c="http://schemas.openxmlformats.org/drawingml/2006/chart" xmlns:a="http://schemas.openxmlformats.org/drawingml/2006/main" xmlns:r="http://schemas.openxmlformats.org/officeDocument/2006/relationships">
   <c:date1904 val="0"/>
   <c:roundedCorners val="0"/>
@@ -733,7 +998,7 @@
           </c:val>
         </c:ser>
         <c:dLbls>
-          <c:numFmt formatCode="#,##0&quot; сек&quot;;&quot;−&quot;#,##0&quot; сек&quot;;" sourceLinked="0"/>
+          <c:numFmt formatCode="#,##0&quot; секунд&quot;;&quot;−&quot;#,##0&quot; секунд&quot;;" sourceLinked="0"/>
           <c:spPr>
             <a:noFill/>
             <a:ln>
@@ -1336,7 +1601,7 @@
           <a:p>
             <a:r>
               <a:rPr lang="ru-RU"/>
-              <a:t>Три основные проблемы: ручная вёрстка, ИИ, который не воспроизводит стиль компании, и шаблоны, которые не являются инструкциями.</a:t>
+              <a:t>ИИ пока не способен воспроизводить фирменный стиль, а шаблоны не дают понятной инструкции для новых слайдов.</a:t>
             </a:r>
           </a:p>
           <a:p>
@@ -1400,7 +1665,7 @@
           <a:p>
             <a:r>
               <a:rPr lang="ru-RU"/>
-              <a:t>Verstka использует шаблон как набор дизайнерских правил и на его основе генерирует три редактируемые презентации.</a:t>
+              <a:t>В реальных шаблонах 95% фигур — свободные, поэтому правила оформления приходится выводить из самих слайдов-образцов, включая палитру, кегли, сетку, поля, логотипы и колонтитулы.</a:t>
             </a:r>
           </a:p>
           <a:p>
@@ -1463,6 +1728,12 @@
           <a:lstStyle/>
           <a:p>
             <a:r>
+              <a:rPr lang="ru-RU"/>
+              <a:t>Verstka использует шаблон как набор правил, а не макетов, чтобы автоматически создать три редактируемые презентации на основе текста.</a:t>
+            </a:r>
+          </a:p>
+          <a:p>
+            <a:r>
               <a:t>[verstka:sl4]</a:t>
             </a:r>
           </a:p>
@@ -1522,7 +1793,7 @@
           <a:p>
             <a:r>
               <a:rPr lang="ru-RU"/>
-              <a:t>Одинаковое содержание, разная подача.</a:t>
+              <a:t>Агент работает на открытых моделях до 35 миллиардов параметров с лицензией Apache 2.0. Процесс включает анализ текста, проектирование, проверку и вёрстку слайдов.</a:t>
             </a:r>
           </a:p>
           <a:p>
@@ -1586,7 +1857,7 @@
           <a:p>
             <a:r>
               <a:rPr lang="ru-RU"/>
-              <a:t>На диаграмме показано распределение 41 проверки по категориям: 12 — целостность, 11 — вёрстка, 7 — шаблон, 6 — контент, 5 — плотность.</a:t>
+              <a:t>Содержание одно, подача разная. | Вариант | Подача | Когда подходит |. |---|---|---|. | Структурный | одна мысль на слайд, строгая сетка | отчёт и защита проекта |. | Визуальный | крупные цифры и наглядные схемы | питч и выступление со сцены |. | Компактный | вывод первой строкой, данные справа | рассылка руководителю |.</a:t>
             </a:r>
           </a:p>
           <a:p>
@@ -1650,7 +1921,7 @@
           <a:p>
             <a:r>
               <a:rPr lang="ru-RU"/>
-              <a:t>Каждое число плана сверяется с текстом до вёрстки и ещё раз в готовом PPTX.</a:t>
+              <a:t>Каждый слайд проходит 41 проверку: 12 на целостность, 11 на вёрстку, 7 на шаблон, 6 на контент и 5 на плотность. Найденные проблемы помечаются на слайде и исправляются автоматически.</a:t>
             </a:r>
           </a:p>
           <a:p>
@@ -1714,7 +1985,7 @@
           <a:p>
             <a:r>
               <a:rPr lang="ru-RU"/>
-              <a:t>Регрессионный корпус включает 87 чужих шаблонов и 261 презентацию на них. Средняя оценка проверки качества по корпусу — 99 из 100. Сервис поддерживает 12 форматов: pptx, potx, ppt, odp, thmx и другие.</a:t>
+              <a:t>Каждое число в презентации сверяется дважды: до вёрстки и после. Всего было подготовлено 9 демонстрационных презентаций без выдуманных чисел.</a:t>
             </a:r>
           </a:p>
           <a:p>
@@ -1778,7 +2049,7 @@
           <a:p>
             <a:r>
               <a:rPr lang="ru-RU"/>
-              <a:t>Время генерации всех шаблонов меньше 5 минут, что подтверждает высокую скорость работы системы. VK Tech генерируется за 113 секунд, VK Education — за 145 секунд, VK WorkSpace — за 175 секунд.</a:t>
+              <a:t>Сервис поддерживает 12 форматов файлов, включая pptx, potx, ppt, odp, thmx и другие. Он проверяет качество презентаций по 87 чужим шаблонам, средняя оценка качества — 99 из 100.</a:t>
             </a:r>
           </a:p>
           <a:p>
@@ -1842,7 +2113,7 @@
           <a:p>
             <a:r>
               <a:rPr lang="ru-RU"/>
-              <a:t>Все три модели используют лицензию Apache 2.0 и предназначены для разных сценариев использования: основная модель и два запасных звена.</a:t>
+              <a:t>Время генерации трёх вариантов на шаблонах датасета: VK Tech — 113 секунд, VK Education — 145 секунд, VK WorkSpace — 175 секунд. Все значения значительно ниже установленного лимита в 5 минут.</a:t>
             </a:r>
           </a:p>
           <a:p>
@@ -1906,7 +2177,7 @@
           <a:p>
             <a:r>
               <a:rPr lang="ru-RU"/>
-              <a:t>2 028 автотестов, PPTX с редактируемыми объектами, PDF и HTML, чат с агентом для правок. Дальше — генерация изображений внутри слайдов и переход на инференс VK.</a:t>
+              <a:t>После финала компания планирует три ключевых шага: переход на более мощные технологии инференса, внедрение генерации изображений в слайдах и запуск пилота на шаблонах и сценариях VK Tech.</a:t>
             </a:r>
           </a:p>
           <a:p>
@@ -4241,7 +4512,7 @@
         <p:spPr>
           <a:xfrm>
             <a:off x="619057" y="2623820"/>
-            <a:ext cx="9424071" cy="1527657"/>
+            <a:ext cx="9651876" cy="1527657"/>
           </a:xfrm>
           <a:prstGeom prst="rect">
             <a:avLst/>
@@ -4284,7 +4555,7 @@
                 <a:cs typeface="Inter Medium"/>
                 <a:sym typeface="Inter Medium"/>
               </a:rPr>
-              <a:t>Оформление отнимает больше времени, чем содержание</a:t>
+              <a:t>Вёрстка забирает больше времени, чем написание текста</a:t>
             </a:r>
             <a:endParaRPr>
               <a:latin typeface="Inter Medium"/>
@@ -4304,11 +4575,11 @@
         <p:spPr>
           <a:xfrm>
             <a:off x="1024128" y="4665827"/>
-            <a:ext cx="5120640" cy="4273111"/>
+            <a:ext cx="5120640" cy="3261861"/>
           </a:xfrm>
           <a:prstGeom prst="roundRect">
             <a:avLst>
-              <a:gd name="adj" fmla="val 2567"/>
+              <a:gd name="adj" fmla="val 3363"/>
             </a:avLst>
           </a:prstGeom>
           <a:solidFill>
@@ -4370,7 +4641,7 @@
         <p:spPr>
           <a:xfrm>
             <a:off x="1459382" y="5927203"/>
-            <a:ext cx="4250132" cy="2576481"/>
+            <a:ext cx="4250132" cy="1565231"/>
           </a:xfrm>
           <a:prstGeom prst="rect">
             <a:avLst/>
@@ -4388,12 +4659,12 @@
                 <a:spcPct val="100000"/>
               </a:lnSpc>
               <a:spcAft>
-                <a:spcPts val="4733"/>
+                <a:spcPts val="1209"/>
               </a:spcAft>
               <a:buNone/>
             </a:pPr>
             <a:r>
-              <a:rPr lang="ru-RU" sz="2799" b="0" cap="none" spc="0" baseline="0" dirty="0">
+              <a:rPr lang="ru-RU" sz="2499" b="0" cap="none" spc="0" baseline="0" dirty="0">
                 <a:solidFill>
                   <a:srgbClr val="C2D076"/>
                 </a:solidFill>
@@ -4402,7 +4673,7 @@
               </a:rPr>
               <a:t>Ручная вёрстка</a:t>
             </a:r>
-            <a:endParaRPr lang="ru-RU" sz="2799"/>
+            <a:endParaRPr lang="ru-RU" sz="2499"/>
           </a:p>
           <a:p>
             <a:pPr algn="l" marL="0" indent="0">
@@ -4412,7 +4683,7 @@
               <a:buNone/>
             </a:pPr>
             <a:r>
-              <a:rPr lang="ru-RU" sz="2499" b="0" cap="none" spc="0" baseline="0" dirty="0">
+              <a:rPr lang="ru-RU" sz="2199" b="0" cap="none" spc="0" baseline="0" dirty="0">
                 <a:solidFill>
                   <a:srgbClr val="FFFFFF"/>
                 </a:solidFill>
@@ -4421,7 +4692,7 @@
               </a:rPr>
               <a:t>Подобрать макет, подвинуть блоки, подогнать цвета под фирменный стиль</a:t>
             </a:r>
-            <a:endParaRPr lang="ru-RU" sz="2499"/>
+            <a:endParaRPr lang="ru-RU" sz="2199"/>
           </a:p>
         </p:txBody>
       </p:sp>
@@ -4434,11 +4705,11 @@
         <p:spPr>
           <a:xfrm>
             <a:off x="6583680" y="4665827"/>
-            <a:ext cx="5120640" cy="4273111"/>
+            <a:ext cx="5120640" cy="3261861"/>
           </a:xfrm>
           <a:prstGeom prst="roundRect">
             <a:avLst>
-              <a:gd name="adj" fmla="val 2567"/>
+              <a:gd name="adj" fmla="val 3363"/>
             </a:avLst>
           </a:prstGeom>
           <a:solidFill>
@@ -4500,7 +4771,7 @@
         <p:spPr>
           <a:xfrm>
             <a:off x="7018934" y="5927203"/>
-            <a:ext cx="4250132" cy="2576481"/>
+            <a:ext cx="4250132" cy="1565231"/>
           </a:xfrm>
           <a:prstGeom prst="rect">
             <a:avLst/>
@@ -4518,12 +4789,12 @@
                 <a:spcPct val="100000"/>
               </a:lnSpc>
               <a:spcAft>
-                <a:spcPts val="4733"/>
+                <a:spcPts val="1209"/>
               </a:spcAft>
               <a:buNone/>
             </a:pPr>
             <a:r>
-              <a:rPr lang="ru-RU" sz="2799" b="0" cap="none" spc="0" baseline="0" dirty="0">
+              <a:rPr lang="ru-RU" sz="2499" b="0" cap="none" spc="0" baseline="0" dirty="0">
                 <a:solidFill>
                   <a:srgbClr val="C2D076"/>
                 </a:solidFill>
@@ -4532,7 +4803,7 @@
               </a:rPr>
               <a:t>ИИ ломает стиль</a:t>
             </a:r>
-            <a:endParaRPr lang="ru-RU" sz="2799"/>
+            <a:endParaRPr lang="ru-RU" sz="2499"/>
           </a:p>
           <a:p>
             <a:pPr algn="l" marL="0" indent="0">
@@ -4542,16 +4813,16 @@
               <a:buNone/>
             </a:pPr>
             <a:r>
-              <a:rPr lang="ru-RU" sz="2499" b="0" cap="none" spc="0" baseline="0" dirty="0">
+              <a:rPr lang="ru-RU" sz="2199" b="0" cap="none" spc="0" baseline="0" dirty="0">
                 <a:solidFill>
                   <a:srgbClr val="FFFFFF"/>
                 </a:solidFill>
                 <a:latin typeface="Inter Light"/>
                 <a:cs typeface="Inter Light"/>
               </a:rPr>
-              <a:t>Нейросети неплохо пишут текст, но не воспроизводят дизайн-⁠систему компании</a:t>
+              <a:t>Нейросети пишут текст, но не воспроизводят дизайн-⁠систему</a:t>
             </a:r>
-            <a:endParaRPr lang="ru-RU" sz="2499"/>
+            <a:endParaRPr lang="ru-RU" sz="2199"/>
           </a:p>
         </p:txBody>
       </p:sp>
@@ -4564,11 +4835,11 @@
         <p:spPr>
           <a:xfrm>
             <a:off x="12143232" y="4665827"/>
-            <a:ext cx="5120640" cy="4273111"/>
+            <a:ext cx="5120640" cy="3261861"/>
           </a:xfrm>
           <a:prstGeom prst="roundRect">
             <a:avLst>
-              <a:gd name="adj" fmla="val 2567"/>
+              <a:gd name="adj" fmla="val 3363"/>
             </a:avLst>
           </a:prstGeom>
           <a:solidFill>
@@ -4630,7 +4901,7 @@
         <p:spPr>
           <a:xfrm>
             <a:off x="12578486" y="5927203"/>
-            <a:ext cx="4250132" cy="2576481"/>
+            <a:ext cx="4250132" cy="1565231"/>
           </a:xfrm>
           <a:prstGeom prst="rect">
             <a:avLst/>
@@ -4648,12 +4919,12 @@
                 <a:spcPct val="100000"/>
               </a:lnSpc>
               <a:spcAft>
-                <a:spcPts val="1374"/>
+                <a:spcPts val="1209"/>
               </a:spcAft>
               <a:buNone/>
             </a:pPr>
             <a:r>
-              <a:rPr lang="ru-RU" sz="2799" b="0" cap="none" spc="0" baseline="0" dirty="0">
+              <a:rPr lang="ru-RU" sz="2499" b="0" cap="none" spc="0" baseline="0" dirty="0">
                 <a:solidFill>
                   <a:srgbClr val="C2D076"/>
                 </a:solidFill>
@@ -4662,7 +4933,7 @@
               </a:rPr>
               <a:t>Шаблон — не инструкция</a:t>
             </a:r>
-            <a:endParaRPr lang="ru-RU" sz="2799"/>
+            <a:endParaRPr lang="ru-RU" sz="2499"/>
           </a:p>
           <a:p>
             <a:pPr algn="l" marL="0" indent="0">
@@ -4672,16 +4943,104 @@
               <a:buNone/>
             </a:pPr>
             <a:r>
-              <a:rPr lang="ru-RU" sz="2499" b="0" cap="none" spc="0" baseline="0" dirty="0">
+              <a:rPr lang="ru-RU" sz="2199" b="0" cap="none" spc="0" baseline="0" dirty="0">
                 <a:solidFill>
                   <a:srgbClr val="FFFFFF"/>
                 </a:solidFill>
                 <a:latin typeface="Inter Light"/>
                 <a:cs typeface="Inter Light"/>
               </a:rPr>
-              <a:t>Плейсхолдеры не объясняют, как построить новый слайд</a:t>
+              <a:t>по слайдам-⁠образцам не понять, как собрать новый слайд</a:t>
             </a:r>
-            <a:endParaRPr lang="ru-RU" sz="2499"/>
+            <a:endParaRPr lang="ru-RU" sz="2199"/>
+          </a:p>
+        </p:txBody>
+      </p:sp>
+      <p:sp>
+        <p:nvSpPr>
+          <p:cNvPr id="52" name="Conclusion strip 52"/>
+          <p:cNvSpPr/>
+          <p:nvPr/>
+        </p:nvSpPr>
+        <p:spPr>
+          <a:xfrm>
+            <a:off x="1024128" y="8355259"/>
+            <a:ext cx="16239744" cy="892754"/>
+          </a:xfrm>
+          <a:prstGeom prst="roundRect">
+            <a:avLst>
+              <a:gd name="adj" fmla="val 12290"/>
+            </a:avLst>
+          </a:prstGeom>
+          <a:solidFill>
+            <a:srgbClr val="000000"/>
+          </a:solidFill>
+          <a:ln>
+            <a:noFill/>
+          </a:ln>
+        </p:spPr>
+      </p:sp>
+      <p:sp>
+        <p:nvSpPr>
+          <p:cNvPr id="53" name="Conclusion bar 53"/>
+          <p:cNvSpPr/>
+          <p:nvPr/>
+        </p:nvSpPr>
+        <p:spPr>
+          <a:xfrm>
+            <a:off x="1379601" y="8618309"/>
+            <a:ext cx="61722" cy="366654"/>
+          </a:xfrm>
+          <a:prstGeom prst="rect">
+            <a:avLst/>
+          </a:prstGeom>
+          <a:solidFill>
+            <a:srgbClr val="C2D076"/>
+          </a:solidFill>
+          <a:ln>
+            <a:noFill/>
+          </a:ln>
+        </p:spPr>
+      </p:sp>
+      <p:sp>
+        <p:nvSpPr>
+          <p:cNvPr id="54" name="Conclusion 54"/>
+          <p:cNvSpPr txBox="1"/>
+          <p:nvPr/>
+        </p:nvSpPr>
+        <p:spPr>
+          <a:xfrm>
+            <a:off x="1725701" y="8575652"/>
+            <a:ext cx="15182698" cy="451968"/>
+          </a:xfrm>
+          <a:prstGeom prst="rect">
+            <a:avLst/>
+          </a:prstGeom>
+          <a:noFill/>
+        </p:spPr>
+        <p:txBody>
+          <a:bodyPr wrap="square" lIns="0" tIns="0" rIns="0" bIns="0" anchor="t" rtlCol="0">
+            <a:noAutofit/>
+          </a:bodyPr>
+          <a:lstStyle/>
+          <a:p>
+            <a:pPr algn="l" marL="0" indent="0">
+              <a:lnSpc>
+                <a:spcPct val="100000"/>
+              </a:lnSpc>
+              <a:buNone/>
+            </a:pPr>
+            <a:r>
+              <a:rPr lang="ru-RU" sz="2799" b="0" cap="none" spc="0" baseline="0" dirty="0">
+                <a:solidFill>
+                  <a:srgbClr val="C2D076"/>
+                </a:solidFill>
+                <a:latin typeface="Inter Light"/>
+                <a:cs typeface="Inter Light"/>
+              </a:rPr>
+              <a:t>Ручная вёрстка, ИИ и шаблоны — три проблемы, которые тормозят</a:t>
+            </a:r>
+            <a:endParaRPr lang="ru-RU" sz="2799"/>
           </a:p>
         </p:txBody>
       </p:sp>
@@ -4719,7 +5078,7 @@
         <p:spPr>
           <a:xfrm>
             <a:off x="619057" y="2623820"/>
-            <a:ext cx="15727680" cy="809548"/>
+            <a:ext cx="15727680" cy="944880"/>
           </a:xfrm>
           <a:prstGeom prst="rect">
             <a:avLst/>
@@ -4762,7 +5121,7 @@
                 <a:cs typeface="Inter Medium"/>
                 <a:sym typeface="Inter Medium"/>
               </a:rPr>
-              <a:t>2 028 автотестов и форматы PPTX, PDF и HTML</a:t>
+              <a:t>Три шага развития после финала</a:t>
             </a:r>
             <a:endParaRPr>
               <a:latin typeface="Inter Medium"/>
@@ -4775,22 +5134,20 @@
       </p:sp>
       <p:sp>
         <p:nvSpPr>
-          <p:cNvPr id="43" name="Card 43"/>
+          <p:cNvPr id="43" name="Marker 43"/>
           <p:cNvSpPr/>
           <p:nvPr/>
         </p:nvSpPr>
         <p:spPr>
           <a:xfrm>
-            <a:off x="1024128" y="3947718"/>
-            <a:ext cx="5120640" cy="4172451"/>
-          </a:xfrm>
-          <a:prstGeom prst="roundRect">
-            <a:avLst>
-              <a:gd name="adj" fmla="val 2629"/>
-            </a:avLst>
+            <a:off x="1024128" y="4383014"/>
+            <a:ext cx="227401" cy="227401"/>
+          </a:xfrm>
+          <a:prstGeom prst="ellipse">
+            <a:avLst/>
           </a:prstGeom>
           <a:solidFill>
-            <a:srgbClr val="000000"/>
+            <a:srgbClr val="C2D076"/>
           </a:solidFill>
           <a:ln>
             <a:noFill/>
@@ -4799,14 +5156,14 @@
       </p:sp>
       <p:sp>
         <p:nvSpPr>
-          <p:cNvPr id="44" name="Index 44"/>
+          <p:cNvPr id="44" name="Item 44"/>
           <p:cNvSpPr txBox="1"/>
           <p:nvPr/>
         </p:nvSpPr>
         <p:spPr>
           <a:xfrm>
-            <a:off x="1459382" y="4382972"/>
-            <a:ext cx="4250132" cy="975208"/>
+            <a:off x="1981606" y="4137660"/>
+            <a:ext cx="12034317" cy="1461618"/>
           </a:xfrm>
           <a:prstGeom prst="rect">
             <a:avLst/>
@@ -4826,29 +5183,72 @@
               <a:buNone/>
             </a:pPr>
             <a:r>
-              <a:rPr lang="ru-RU" sz="6399" b="0" cap="none" spc="0" baseline="0" dirty="0">
-                <a:solidFill>
-                  <a:srgbClr val="C2D076"/>
+              <a:rPr lang="ru-RU" sz="4712" b="0" cap="none" spc="0" baseline="0" dirty="0">
+                <a:solidFill>
+                  <a:srgbClr val="FFFFFF"/>
                 </a:solidFill>
                 <a:latin typeface="Inter Light"/>
                 <a:cs typeface="Inter Light"/>
               </a:rPr>
-              <a:t>01</a:t>
+              <a:t>Переход на инференс VK и модель Qwen3.8-⁠27B</a:t>
             </a:r>
-            <a:endParaRPr lang="ru-RU" sz="6399"/>
+            <a:endParaRPr lang="ru-RU" sz="4712"/>
           </a:p>
         </p:txBody>
       </p:sp>
-      <p:sp>
-        <p:nvSpPr>
-          <p:cNvPr id="45" name="Card text 45"/>
+      <p:cxnSp>
+        <p:nvCxnSpPr>
+          <p:cNvPr id="45" name="Line 45"/>
+          <p:cNvCxnSpPr/>
+          <p:nvPr/>
+        </p:nvCxnSpPr>
+        <p:spPr>
+          <a:xfrm>
+            <a:off x="1981606" y="6048095"/>
+            <a:ext cx="12034317" cy="0"/>
+          </a:xfrm>
+          <a:prstGeom prst="line">
+            <a:avLst/>
+          </a:prstGeom>
+          <a:ln w="9525">
+            <a:solidFill>
+              <a:srgbClr val="384848"/>
+            </a:solidFill>
+          </a:ln>
+        </p:spPr>
+      </p:cxnSp>
+      <p:sp>
+        <p:nvSpPr>
+          <p:cNvPr id="46" name="Marker 46"/>
+          <p:cNvSpPr/>
+          <p:nvPr/>
+        </p:nvSpPr>
+        <p:spPr>
+          <a:xfrm>
+            <a:off x="1024128" y="6742266"/>
+            <a:ext cx="227401" cy="227401"/>
+          </a:xfrm>
+          <a:prstGeom prst="ellipse">
+            <a:avLst/>
+          </a:prstGeom>
+          <a:solidFill>
+            <a:srgbClr val="C2D076"/>
+          </a:solidFill>
+          <a:ln>
+            <a:noFill/>
+          </a:ln>
+        </p:spPr>
+      </p:sp>
+      <p:sp>
+        <p:nvSpPr>
+          <p:cNvPr id="47" name="Item 47"/>
           <p:cNvSpPr txBox="1"/>
           <p:nvPr/>
         </p:nvSpPr>
         <p:spPr>
           <a:xfrm>
-            <a:off x="1459382" y="5466193"/>
-            <a:ext cx="4250132" cy="2218722"/>
+            <a:off x="1981606" y="6496912"/>
+            <a:ext cx="12034317" cy="743509"/>
           </a:xfrm>
           <a:prstGeom prst="rect">
             <a:avLst/>
@@ -4865,62 +5265,59 @@
               <a:lnSpc>
                 <a:spcPct val="100000"/>
               </a:lnSpc>
-              <a:spcAft>
-                <a:spcPts val="1539"/>
-              </a:spcAft>
               <a:buNone/>
             </a:pPr>
             <a:r>
               <a:rPr lang="ru-RU" sz="4712" b="0" cap="none" spc="0" baseline="0" dirty="0">
                 <a:solidFill>
-                  <a:srgbClr val="C2D076"/>
+                  <a:srgbClr val="FFFFFF"/>
                 </a:solidFill>
                 <a:latin typeface="Inter Light"/>
                 <a:cs typeface="Inter Light"/>
               </a:rPr>
-              <a:t>Автотесты</a:t>
+              <a:t>Генерация изображений внутри слайдов</a:t>
             </a:r>
             <a:endParaRPr lang="ru-RU" sz="4712"/>
           </a:p>
-          <a:p>
-            <a:pPr algn="l" marL="0" indent="0">
-              <a:lnSpc>
-                <a:spcPct val="100000"/>
-              </a:lnSpc>
-              <a:buNone/>
-            </a:pPr>
-            <a:r>
-              <a:rPr lang="ru-RU" sz="2799" b="0" cap="none" spc="0" baseline="0" dirty="0">
-                <a:solidFill>
-                  <a:srgbClr val="FFFFFF"/>
-                </a:solidFill>
-                <a:latin typeface="Inter Light"/>
-                <a:cs typeface="Inter Light"/>
-              </a:rPr>
-              <a:t>2 028 автотестов для проверки функциональности</a:t>
-            </a:r>
-            <a:endParaRPr lang="ru-RU" sz="2799"/>
-          </a:p>
         </p:txBody>
       </p:sp>
-      <p:sp>
-        <p:nvSpPr>
-          <p:cNvPr id="46" name="Card 46"/>
+      <p:cxnSp>
+        <p:nvCxnSpPr>
+          <p:cNvPr id="48" name="Line 48"/>
+          <p:cNvCxnSpPr/>
+          <p:nvPr/>
+        </p:nvCxnSpPr>
+        <p:spPr>
+          <a:xfrm>
+            <a:off x="1981606" y="7689238"/>
+            <a:ext cx="12034317" cy="0"/>
+          </a:xfrm>
+          <a:prstGeom prst="line">
+            <a:avLst/>
+          </a:prstGeom>
+          <a:ln w="9525">
+            <a:solidFill>
+              <a:srgbClr val="384848"/>
+            </a:solidFill>
+          </a:ln>
+        </p:spPr>
+      </p:cxnSp>
+      <p:sp>
+        <p:nvSpPr>
+          <p:cNvPr id="49" name="Marker 49"/>
           <p:cNvSpPr/>
           <p:nvPr/>
         </p:nvSpPr>
         <p:spPr>
           <a:xfrm>
-            <a:off x="6583680" y="3947718"/>
-            <a:ext cx="5120640" cy="4172451"/>
-          </a:xfrm>
-          <a:prstGeom prst="roundRect">
-            <a:avLst>
-              <a:gd name="adj" fmla="val 2629"/>
-            </a:avLst>
+            <a:off x="1024128" y="8383409"/>
+            <a:ext cx="227401" cy="227401"/>
+          </a:xfrm>
+          <a:prstGeom prst="ellipse">
+            <a:avLst/>
           </a:prstGeom>
           <a:solidFill>
-            <a:srgbClr val="000000"/>
+            <a:srgbClr val="C2D076"/>
           </a:solidFill>
           <a:ln>
             <a:noFill/>
@@ -4929,14 +5326,14 @@
       </p:sp>
       <p:sp>
         <p:nvSpPr>
-          <p:cNvPr id="47" name="Index 47"/>
+          <p:cNvPr id="50" name="Item 50"/>
           <p:cNvSpPr txBox="1"/>
           <p:nvPr/>
         </p:nvSpPr>
         <p:spPr>
           <a:xfrm>
-            <a:off x="7018934" y="4382972"/>
-            <a:ext cx="4250132" cy="975208"/>
+            <a:off x="1981606" y="8138055"/>
+            <a:ext cx="12034317" cy="743509"/>
           </a:xfrm>
           <a:prstGeom prst="rect">
             <a:avLst/>
@@ -4956,210 +5353,16 @@
               <a:buNone/>
             </a:pPr>
             <a:r>
-              <a:rPr lang="ru-RU" sz="6399" b="0" cap="none" spc="0" baseline="0" dirty="0">
-                <a:solidFill>
-                  <a:srgbClr val="C2D076"/>
+              <a:rPr lang="ru-RU" sz="4712" b="0" cap="none" spc="0" baseline="0" dirty="0">
+                <a:solidFill>
+                  <a:srgbClr val="FFFFFF"/>
                 </a:solidFill>
                 <a:latin typeface="Inter Light"/>
                 <a:cs typeface="Inter Light"/>
               </a:rPr>
-              <a:t>02</a:t>
-            </a:r>
-            <a:endParaRPr lang="ru-RU" sz="6399"/>
-          </a:p>
-        </p:txBody>
-      </p:sp>
-      <p:sp>
-        <p:nvSpPr>
-          <p:cNvPr id="48" name="Card text 48"/>
-          <p:cNvSpPr txBox="1"/>
-          <p:nvPr/>
-        </p:nvSpPr>
-        <p:spPr>
-          <a:xfrm>
-            <a:off x="7018934" y="5466193"/>
-            <a:ext cx="4250132" cy="2218722"/>
-          </a:xfrm>
-          <a:prstGeom prst="rect">
-            <a:avLst/>
-          </a:prstGeom>
-          <a:noFill/>
-        </p:spPr>
-        <p:txBody>
-          <a:bodyPr wrap="square" lIns="0" tIns="0" rIns="0" bIns="0" anchor="t" rtlCol="0">
-            <a:noAutofit/>
-          </a:bodyPr>
-          <a:lstStyle/>
-          <a:p>
-            <a:pPr algn="l" marL="0" indent="0">
-              <a:lnSpc>
-                <a:spcPct val="100000"/>
-              </a:lnSpc>
-              <a:spcAft>
-                <a:spcPts val="1539"/>
-              </a:spcAft>
-              <a:buNone/>
-            </a:pPr>
-            <a:r>
-              <a:rPr lang="ru-RU" sz="4712" b="0" cap="none" spc="0" baseline="0" dirty="0">
-                <a:solidFill>
-                  <a:srgbClr val="C2D076"/>
-                </a:solidFill>
-                <a:latin typeface="Inter Light"/>
-                <a:cs typeface="Inter Light"/>
-              </a:rPr>
-              <a:t>Форматы</a:t>
+              <a:t>Пилот на шаблонах и сценариях VK Tech</a:t>
             </a:r>
             <a:endParaRPr lang="ru-RU" sz="4712"/>
-          </a:p>
-          <a:p>
-            <a:pPr algn="l" marL="0" indent="0">
-              <a:lnSpc>
-                <a:spcPct val="100000"/>
-              </a:lnSpc>
-              <a:buNone/>
-            </a:pPr>
-            <a:r>
-              <a:rPr lang="ru-RU" sz="2799" b="0" cap="none" spc="0" baseline="0" dirty="0">
-                <a:solidFill>
-                  <a:srgbClr val="FFFFFF"/>
-                </a:solidFill>
-                <a:latin typeface="Inter Light"/>
-                <a:cs typeface="Inter Light"/>
-              </a:rPr>
-              <a:t>PPTX с редактируемыми объектами, PDF и HTML</a:t>
-            </a:r>
-            <a:endParaRPr lang="ru-RU" sz="2799"/>
-          </a:p>
-        </p:txBody>
-      </p:sp>
-      <p:sp>
-        <p:nvSpPr>
-          <p:cNvPr id="49" name="Card 49"/>
-          <p:cNvSpPr/>
-          <p:nvPr/>
-        </p:nvSpPr>
-        <p:spPr>
-          <a:xfrm>
-            <a:off x="12143232" y="3947718"/>
-            <a:ext cx="5120640" cy="4172451"/>
-          </a:xfrm>
-          <a:prstGeom prst="roundRect">
-            <a:avLst>
-              <a:gd name="adj" fmla="val 2629"/>
-            </a:avLst>
-          </a:prstGeom>
-          <a:solidFill>
-            <a:srgbClr val="000000"/>
-          </a:solidFill>
-          <a:ln>
-            <a:noFill/>
-          </a:ln>
-        </p:spPr>
-      </p:sp>
-      <p:sp>
-        <p:nvSpPr>
-          <p:cNvPr id="50" name="Index 50"/>
-          <p:cNvSpPr txBox="1"/>
-          <p:nvPr/>
-        </p:nvSpPr>
-        <p:spPr>
-          <a:xfrm>
-            <a:off x="12578486" y="4382972"/>
-            <a:ext cx="4250132" cy="975208"/>
-          </a:xfrm>
-          <a:prstGeom prst="rect">
-            <a:avLst/>
-          </a:prstGeom>
-          <a:noFill/>
-        </p:spPr>
-        <p:txBody>
-          <a:bodyPr wrap="square" lIns="0" tIns="0" rIns="0" bIns="0" anchor="t" rtlCol="0">
-            <a:noAutofit/>
-          </a:bodyPr>
-          <a:lstStyle/>
-          <a:p>
-            <a:pPr algn="l" marL="0" indent="0">
-              <a:lnSpc>
-                <a:spcPct val="100000"/>
-              </a:lnSpc>
-              <a:buNone/>
-            </a:pPr>
-            <a:r>
-              <a:rPr lang="ru-RU" sz="6399" b="0" cap="none" spc="0" baseline="0" dirty="0">
-                <a:solidFill>
-                  <a:srgbClr val="C2D076"/>
-                </a:solidFill>
-                <a:latin typeface="Inter Light"/>
-                <a:cs typeface="Inter Light"/>
-              </a:rPr>
-              <a:t>03</a:t>
-            </a:r>
-            <a:endParaRPr lang="ru-RU" sz="6399"/>
-          </a:p>
-        </p:txBody>
-      </p:sp>
-      <p:sp>
-        <p:nvSpPr>
-          <p:cNvPr id="51" name="Card text 51"/>
-          <p:cNvSpPr txBox="1"/>
-          <p:nvPr/>
-        </p:nvSpPr>
-        <p:spPr>
-          <a:xfrm>
-            <a:off x="12578486" y="5466193"/>
-            <a:ext cx="4250132" cy="2218722"/>
-          </a:xfrm>
-          <a:prstGeom prst="rect">
-            <a:avLst/>
-          </a:prstGeom>
-          <a:noFill/>
-        </p:spPr>
-        <p:txBody>
-          <a:bodyPr wrap="square" lIns="0" tIns="0" rIns="0" bIns="0" anchor="t" rtlCol="0">
-            <a:noAutofit/>
-          </a:bodyPr>
-          <a:lstStyle/>
-          <a:p>
-            <a:pPr algn="l" marL="0" indent="0">
-              <a:lnSpc>
-                <a:spcPct val="100000"/>
-              </a:lnSpc>
-              <a:spcAft>
-                <a:spcPts val="1539"/>
-              </a:spcAft>
-              <a:buNone/>
-            </a:pPr>
-            <a:r>
-              <a:rPr lang="ru-RU" sz="4712" b="0" cap="none" spc="0" baseline="0" dirty="0">
-                <a:solidFill>
-                  <a:srgbClr val="C2D076"/>
-                </a:solidFill>
-                <a:latin typeface="Inter Light"/>
-                <a:cs typeface="Inter Light"/>
-              </a:rPr>
-              <a:t>Планы</a:t>
-            </a:r>
-            <a:endParaRPr lang="ru-RU" sz="4712"/>
-          </a:p>
-          <a:p>
-            <a:pPr algn="l" marL="0" indent="0">
-              <a:lnSpc>
-                <a:spcPct val="100000"/>
-              </a:lnSpc>
-              <a:buNone/>
-            </a:pPr>
-            <a:r>
-              <a:rPr lang="ru-RU" sz="2799" b="0" cap="none" spc="0" baseline="0" dirty="0">
-                <a:solidFill>
-                  <a:srgbClr val="FFFFFF"/>
-                </a:solidFill>
-                <a:latin typeface="Inter Light"/>
-                <a:cs typeface="Inter Light"/>
-              </a:rPr>
-              <a:t>Генерация изображений и переход на инференс VK</a:t>
-            </a:r>
-            <a:endParaRPr lang="ru-RU" sz="2799"/>
           </a:p>
         </p:txBody>
       </p:sp>
@@ -5240,7 +5443,7 @@
                 <a:cs typeface="Inter Medium"/>
                 <a:sym typeface="Inter Medium"/>
               </a:rPr>
-              <a:t>Verstka создаёт три презентации за 2⁠–⁠3 минуты</a:t>
+              <a:t>95% фигур — свободные, 5% — плейсхолдеры</a:t>
             </a:r>
             <a:endParaRPr>
               <a:latin typeface="Inter Medium"/>
@@ -5251,38 +5454,34 @@
           </a:p>
         </p:txBody>
       </p:sp>
-      <p:sp>
-        <p:nvSpPr>
-          <p:cNvPr id="59" name="Marker 59"/>
-          <p:cNvSpPr/>
+      <p:graphicFrame>
+        <p:nvGraphicFramePr>
+          <p:cNvPr id="43" name="Chart 42"/>
+          <p:cNvGraphicFramePr>
+            <a:graphicFrameLocks noGrp="1"/>
+          </p:cNvGraphicFramePr>
           <p:nvPr/>
-        </p:nvSpPr>
-        <p:spPr>
-          <a:xfrm>
-            <a:off x="1024128" y="4093462"/>
-            <a:ext cx="135080" cy="135080"/>
-          </a:xfrm>
-          <a:prstGeom prst="ellipse">
-            <a:avLst/>
-          </a:prstGeom>
-          <a:solidFill>
-            <a:srgbClr val="C2D076"/>
-          </a:solidFill>
-          <a:ln>
-            <a:noFill/>
-          </a:ln>
-        </p:spPr>
-      </p:sp>
-      <p:sp>
-        <p:nvSpPr>
-          <p:cNvPr id="60" name="Item 60"/>
+        </p:nvGraphicFramePr>
+        <p:xfrm>
+          <a:off x="1024128" y="3947718"/>
+          <a:ext cx="4687877" cy="4687877"/>
+        </p:xfrm>
+        <a:graphic>
+          <a:graphicData uri="http://schemas.openxmlformats.org/drawingml/2006/chart">
+            <c:chart xmlns:c="http://schemas.openxmlformats.org/drawingml/2006/chart" r:id="rId2"/>
+          </a:graphicData>
+        </a:graphic>
+      </p:graphicFrame>
+      <p:sp>
+        <p:nvSpPr>
+          <p:cNvPr id="44" name="Legend title 44"/>
           <p:cNvSpPr txBox="1"/>
           <p:nvPr/>
         </p:nvSpPr>
         <p:spPr>
           <a:xfrm>
-            <a:off x="1592885" y="3947718"/>
-            <a:ext cx="12423038" cy="878535"/>
+            <a:off x="6589829" y="5400421"/>
+            <a:ext cx="4827735" cy="700799"/>
           </a:xfrm>
           <a:prstGeom prst="rect">
             <a:avLst/>
@@ -5309,46 +5508,27 @@
                 <a:latin typeface="Inter Light"/>
                 <a:cs typeface="Inter Light"/>
               </a:rPr>
-              <a:t>На входе — шаблон и текст — шаблон и текст для генерации презентаций</a:t>
+              <a:t>Состав фигур в шаблоне</a:t>
             </a:r>
             <a:endParaRPr lang="ru-RU" sz="2799"/>
           </a:p>
         </p:txBody>
       </p:sp>
-      <p:cxnSp>
-        <p:nvCxnSpPr>
-          <p:cNvPr id="61" name="Line 61"/>
-          <p:cNvCxnSpPr/>
-          <p:nvPr/>
-        </p:nvCxnSpPr>
-        <p:spPr>
-          <a:xfrm>
-            <a:off x="1592885" y="5306915"/>
-            <a:ext cx="12423038" cy="0"/>
-          </a:xfrm>
-          <a:prstGeom prst="line">
-            <a:avLst/>
-          </a:prstGeom>
-          <a:ln w="9525">
-            <a:solidFill>
-              <a:srgbClr val="384848"/>
-            </a:solidFill>
-          </a:ln>
-        </p:spPr>
-      </p:cxnSp>
-      <p:sp>
-        <p:nvSpPr>
-          <p:cNvPr id="62" name="Marker 62"/>
+      <p:sp>
+        <p:nvSpPr>
+          <p:cNvPr id="45" name="Swatch 45"/>
           <p:cNvSpPr/>
           <p:nvPr/>
         </p:nvSpPr>
         <p:spPr>
           <a:xfrm>
-            <a:off x="1024128" y="5933321"/>
-            <a:ext cx="135080" cy="135080"/>
-          </a:xfrm>
-          <a:prstGeom prst="ellipse">
-            <a:avLst/>
+            <a:off x="6589829" y="6186533"/>
+            <a:ext cx="255941" cy="255941"/>
+          </a:xfrm>
+          <a:prstGeom prst="roundRect">
+            <a:avLst>
+              <a:gd name="adj" fmla="val 24999"/>
+            </a:avLst>
           </a:prstGeom>
           <a:solidFill>
             <a:srgbClr val="C2D076"/>
@@ -5360,14 +5540,14 @@
       </p:sp>
       <p:sp>
         <p:nvSpPr>
-          <p:cNvPr id="63" name="Item 63"/>
+          <p:cNvPr id="46" name="Legend 46"/>
           <p:cNvSpPr txBox="1"/>
           <p:nvPr/>
         </p:nvSpPr>
         <p:spPr>
           <a:xfrm>
-            <a:off x="1592885" y="5787577"/>
-            <a:ext cx="12423038" cy="878535"/>
+            <a:off x="7050522" y="6101220"/>
+            <a:ext cx="3451310" cy="451968"/>
           </a:xfrm>
           <a:prstGeom prst="rect">
             <a:avLst/>
@@ -5394,49 +5574,72 @@
                 <a:latin typeface="Inter Light"/>
                 <a:cs typeface="Inter Light"/>
               </a:rPr>
-              <a:t>Шаблон — набор правил — палитра, кегли, сетка, поля, логотипы и колонтитулы</a:t>
+              <a:t>Свободные фигуры</a:t>
             </a:r>
             <a:endParaRPr lang="ru-RU" sz="2799"/>
           </a:p>
         </p:txBody>
       </p:sp>
-      <p:cxnSp>
-        <p:nvCxnSpPr>
-          <p:cNvPr id="64" name="Line 64"/>
-          <p:cNvCxnSpPr/>
+      <p:sp>
+        <p:nvSpPr>
+          <p:cNvPr id="47" name="Share 47"/>
+          <p:cNvSpPr txBox="1"/>
           <p:nvPr/>
-        </p:nvCxnSpPr>
-        <p:spPr>
-          <a:xfrm>
-            <a:off x="1592885" y="7146774"/>
-            <a:ext cx="12423038" cy="0"/>
-          </a:xfrm>
-          <a:prstGeom prst="line">
+        </p:nvSpPr>
+        <p:spPr>
+          <a:xfrm>
+            <a:off x="10501832" y="6101220"/>
+            <a:ext cx="915732" cy="451968"/>
+          </a:xfrm>
+          <a:prstGeom prst="rect">
             <a:avLst/>
           </a:prstGeom>
-          <a:ln w="9525">
-            <a:solidFill>
-              <a:srgbClr val="384848"/>
-            </a:solidFill>
-          </a:ln>
-        </p:spPr>
-      </p:cxnSp>
-      <p:sp>
-        <p:nvSpPr>
-          <p:cNvPr id="65" name="Marker 65"/>
+          <a:noFill/>
+        </p:spPr>
+        <p:txBody>
+          <a:bodyPr wrap="square" lIns="0" tIns="0" rIns="0" bIns="0" anchor="t" rtlCol="0">
+            <a:noAutofit/>
+          </a:bodyPr>
+          <a:lstStyle/>
+          <a:p>
+            <a:pPr algn="r" marL="0" indent="0">
+              <a:lnSpc>
+                <a:spcPct val="100000"/>
+              </a:lnSpc>
+              <a:buNone/>
+            </a:pPr>
+            <a:r>
+              <a:rPr lang="ru-RU" sz="2799" b="1" cap="none" spc="0" baseline="0" dirty="0">
+                <a:solidFill>
+                  <a:srgbClr val="C2D076"/>
+                </a:solidFill>
+                <a:latin typeface="Inter Light"/>
+                <a:cs typeface="Inter Light"/>
+              </a:rPr>
+              <a:t>95%</a:t>
+            </a:r>
+            <a:endParaRPr lang="ru-RU" sz="2799"/>
+          </a:p>
+        </p:txBody>
+      </p:sp>
+      <p:sp>
+        <p:nvSpPr>
+          <p:cNvPr id="48" name="Swatch 48"/>
           <p:cNvSpPr/>
           <p:nvPr/>
         </p:nvSpPr>
         <p:spPr>
           <a:xfrm>
-            <a:off x="1024128" y="7773180"/>
-            <a:ext cx="135080" cy="135080"/>
-          </a:xfrm>
-          <a:prstGeom prst="ellipse">
-            <a:avLst/>
+            <a:off x="6589829" y="6816237"/>
+            <a:ext cx="255941" cy="255941"/>
+          </a:xfrm>
+          <a:prstGeom prst="roundRect">
+            <a:avLst>
+              <a:gd name="adj" fmla="val 24999"/>
+            </a:avLst>
           </a:prstGeom>
           <a:solidFill>
-            <a:srgbClr val="C2D076"/>
+            <a:srgbClr val="E8EDCB"/>
           </a:solidFill>
           <a:ln>
             <a:noFill/>
@@ -5445,14 +5648,14 @@
       </p:sp>
       <p:sp>
         <p:nvSpPr>
-          <p:cNvPr id="66" name="Item 66"/>
+          <p:cNvPr id="49" name="Legend 49"/>
           <p:cNvSpPr txBox="1"/>
           <p:nvPr/>
         </p:nvSpPr>
         <p:spPr>
           <a:xfrm>
-            <a:off x="1592885" y="7627436"/>
-            <a:ext cx="12423038" cy="878535"/>
+            <a:off x="7050522" y="6730924"/>
+            <a:ext cx="3451310" cy="451968"/>
           </a:xfrm>
           <a:prstGeom prst="rect">
             <a:avLst/>
@@ -5479,7 +5682,145 @@
                 <a:latin typeface="Inter Light"/>
                 <a:cs typeface="Inter Light"/>
               </a:rPr>
-              <a:t>На выходе — три редактируемые презентации — готовые файлы в стиле шаблона</a:t>
+              <a:t>Плейсхолдеры</a:t>
+            </a:r>
+            <a:endParaRPr lang="ru-RU" sz="2799"/>
+          </a:p>
+        </p:txBody>
+      </p:sp>
+      <p:sp>
+        <p:nvSpPr>
+          <p:cNvPr id="50" name="Share 50"/>
+          <p:cNvSpPr txBox="1"/>
+          <p:nvPr/>
+        </p:nvSpPr>
+        <p:spPr>
+          <a:xfrm>
+            <a:off x="10501832" y="6730924"/>
+            <a:ext cx="915732" cy="451968"/>
+          </a:xfrm>
+          <a:prstGeom prst="rect">
+            <a:avLst/>
+          </a:prstGeom>
+          <a:noFill/>
+        </p:spPr>
+        <p:txBody>
+          <a:bodyPr wrap="square" lIns="0" tIns="0" rIns="0" bIns="0" anchor="t" rtlCol="0">
+            <a:noAutofit/>
+          </a:bodyPr>
+          <a:lstStyle/>
+          <a:p>
+            <a:pPr algn="r" marL="0" indent="0">
+              <a:lnSpc>
+                <a:spcPct val="100000"/>
+              </a:lnSpc>
+              <a:buNone/>
+            </a:pPr>
+            <a:r>
+              <a:rPr lang="ru-RU" sz="2799" b="1" cap="none" spc="0" baseline="0" dirty="0">
+                <a:solidFill>
+                  <a:srgbClr val="FFFFFF"/>
+                </a:solidFill>
+                <a:latin typeface="Inter Light"/>
+                <a:cs typeface="Inter Light"/>
+              </a:rPr>
+              <a:t>5%</a:t>
+            </a:r>
+            <a:endParaRPr lang="ru-RU" sz="2799"/>
+          </a:p>
+        </p:txBody>
+      </p:sp>
+      <p:cxnSp>
+        <p:nvCxnSpPr>
+          <p:cNvPr id="51" name="Line 51"/>
+          <p:cNvCxnSpPr/>
+          <p:nvPr/>
+        </p:nvCxnSpPr>
+        <p:spPr>
+          <a:xfrm>
+            <a:off x="11856476" y="4680418"/>
+            <a:ext cx="0" cy="3206864"/>
+          </a:xfrm>
+          <a:prstGeom prst="line">
+            <a:avLst/>
+          </a:prstGeom>
+          <a:ln w="12700">
+            <a:solidFill>
+              <a:srgbClr val="384848"/>
+            </a:solidFill>
+          </a:ln>
+        </p:spPr>
+      </p:cxnSp>
+      <p:sp>
+        <p:nvSpPr>
+          <p:cNvPr id="52" name="Takeaway 52"/>
+          <p:cNvSpPr txBox="1"/>
+          <p:nvPr/>
+        </p:nvSpPr>
+        <p:spPr>
+          <a:xfrm>
+            <a:off x="12295388" y="4680418"/>
+            <a:ext cx="4968484" cy="3206864"/>
+          </a:xfrm>
+          <a:prstGeom prst="rect">
+            <a:avLst/>
+          </a:prstGeom>
+          <a:noFill/>
+        </p:spPr>
+        <p:txBody>
+          <a:bodyPr wrap="square" lIns="0" tIns="0" rIns="0" bIns="0" anchor="t" rtlCol="0">
+            <a:noAutofit/>
+          </a:bodyPr>
+          <a:lstStyle/>
+          <a:p>
+            <a:pPr algn="l" marL="391020" indent="-391020">
+              <a:lnSpc>
+                <a:spcPct val="100000"/>
+              </a:lnSpc>
+              <a:spcAft>
+                <a:spcPts val="1539"/>
+              </a:spcAft>
+              <a:buClr>
+                <a:srgbClr val="C2D076"/>
+              </a:buClr>
+              <a:buFont typeface="Arial"/>
+              <a:buChar char="•"/>
+            </a:pPr>
+            <a:r>
+              <a:rPr lang="ru-RU" sz="2799" b="0" cap="none" spc="0" baseline="0" dirty="0">
+                <a:solidFill>
+                  <a:srgbClr val="FFFFFF"/>
+                </a:solidFill>
+                <a:latin typeface="Inter Light"/>
+                <a:cs typeface="Inter Light"/>
+              </a:rPr>
+              <a:t>Правила оформления приходится выводить из образцов</a:t>
+            </a:r>
+            <a:endParaRPr lang="ru-RU" sz="2799"/>
+          </a:p>
+          <a:p>
+            <a:pPr algn="l" marL="391020" indent="-391020">
+              <a:lnSpc>
+                <a:spcPct val="100000"/>
+              </a:lnSpc>
+              <a:spcAft>
+                <a:spcPts val="1539"/>
+              </a:spcAft>
+              <a:buClr>
+                <a:srgbClr val="C2D076"/>
+              </a:buClr>
+              <a:buFont typeface="Arial"/>
+              <a:buChar char="•"/>
+            </a:pPr>
+            <a:r>
+              <a:rPr lang="ru-RU" sz="2799" b="0" cap="none" spc="0" baseline="0" dirty="0">
+                <a:solidFill>
+                  <a:srgbClr val="FFFFFF"/>
+                </a:solidFill>
+                <a:latin typeface="Inter Light"/>
+                <a:cs typeface="Inter Light"/>
+              </a:rPr>
+              <a:t>Палитра, кегли, сетка, поля, логотипы и колонтитулы не автоматизированы</a:t>
             </a:r>
             <a:endParaRPr lang="ru-RU" sz="2799"/>
           </a:p>
@@ -5519,7 +5860,7 @@
         <p:spPr>
           <a:xfrm>
             <a:off x="619057" y="2623820"/>
-            <a:ext cx="15727680" cy="809548"/>
+            <a:ext cx="15727680" cy="944880"/>
           </a:xfrm>
           <a:prstGeom prst="rect">
             <a:avLst/>
@@ -5562,7 +5903,7 @@
                 <a:cs typeface="Inter Medium"/>
                 <a:sym typeface="Inter Medium"/>
               </a:rPr>
-              <a:t>Команда из пяти специалистов создаёт презентацию</a:t>
+              <a:t>Шаблон читается как набор правил</a:t>
             </a:r>
             <a:endParaRPr>
               <a:latin typeface="Inter Medium"/>
@@ -5573,76 +5914,342 @@
           </a:p>
         </p:txBody>
       </p:sp>
-      <p:cxnSp>
-        <p:nvCxnSpPr>
-          <p:cNvPr id="76" name="Axis 76"/>
-          <p:cNvCxnSpPr/>
-          <p:nvPr/>
-        </p:nvCxnSpPr>
-        <p:spPr>
-          <a:xfrm>
-            <a:off x="1409890" y="4333480"/>
-            <a:ext cx="13202472" cy="0"/>
-          </a:xfrm>
-          <a:prstGeom prst="line">
-            <a:avLst/>
-          </a:prstGeom>
-          <a:ln w="19050">
-            <a:solidFill>
-              <a:srgbClr val="C2D076"/>
-            </a:solidFill>
-          </a:ln>
-        </p:spPr>
-      </p:cxnSp>
-      <p:sp>
-        <p:nvSpPr>
-          <p:cNvPr id="77" name="Badge 77"/>
+      <p:sp>
+        <p:nvSpPr>
+          <p:cNvPr id="43" name="Card 43"/>
           <p:cNvSpPr/>
           <p:nvPr/>
         </p:nvSpPr>
         <p:spPr>
           <a:xfrm>
-            <a:off x="1024128" y="3947718"/>
-            <a:ext cx="771525" cy="771525"/>
-          </a:xfrm>
-          <a:prstGeom prst="ellipse">
-            <a:avLst/>
+            <a:off x="1024128" y="4137660"/>
+            <a:ext cx="5120640" cy="3825588"/>
+          </a:xfrm>
+          <a:prstGeom prst="roundRect">
+            <a:avLst>
+              <a:gd name="adj" fmla="val 2868"/>
+            </a:avLst>
           </a:prstGeom>
           <a:solidFill>
-            <a:srgbClr val="C2D076"/>
+            <a:srgbClr val="000000"/>
           </a:solidFill>
           <a:ln>
             <a:noFill/>
           </a:ln>
         </p:spPr>
+      </p:sp>
+      <p:sp>
+        <p:nvSpPr>
+          <p:cNvPr id="44" name="Index 44"/>
+          <p:cNvSpPr txBox="1"/>
+          <p:nvPr/>
+        </p:nvSpPr>
+        <p:spPr>
+          <a:xfrm>
+            <a:off x="1459382" y="4572914"/>
+            <a:ext cx="4250132" cy="718109"/>
+          </a:xfrm>
+          <a:prstGeom prst="rect">
+            <a:avLst/>
+          </a:prstGeom>
+          <a:noFill/>
+        </p:spPr>
         <p:txBody>
-          <a:bodyPr lIns="0" tIns="0" rIns="0" bIns="0" anchor="ctr" wrap="none"/>
+          <a:bodyPr wrap="square" lIns="0" tIns="0" rIns="0" bIns="0" anchor="t" rtlCol="0">
+            <a:noAutofit/>
+          </a:bodyPr>
           <a:lstStyle/>
           <a:p>
-            <a:pPr algn="ctr"/>
+            <a:pPr algn="l" marL="0" indent="0">
+              <a:lnSpc>
+                <a:spcPct val="100000"/>
+              </a:lnSpc>
+              <a:buNone/>
+            </a:pPr>
             <a:r>
-              <a:rPr lang="ru-RU" sz="2799" b="0" cap="none" spc="0" baseline="0">
-                <a:solidFill>
-                  <a:srgbClr val="000000"/>
+              <a:rPr lang="ru-RU" sz="4712" b="0" cap="none" spc="0" baseline="0" dirty="0">
+                <a:solidFill>
+                  <a:srgbClr val="C2D076"/>
                 </a:solidFill>
                 <a:latin typeface="Inter Light"/>
                 <a:cs typeface="Inter Light"/>
               </a:rPr>
-              <a:t>1</a:t>
+              <a:t>01</a:t>
             </a:r>
+            <a:endParaRPr lang="ru-RU" sz="4712"/>
           </a:p>
         </p:txBody>
       </p:sp>
       <p:sp>
         <p:nvSpPr>
-          <p:cNvPr id="78" name="Step 78"/>
+          <p:cNvPr id="45" name="Card text 45"/>
           <p:cNvSpPr txBox="1"/>
           <p:nvPr/>
         </p:nvSpPr>
         <p:spPr>
           <a:xfrm>
-            <a:off x="1024128" y="4996992"/>
-            <a:ext cx="3037271" cy="1610951"/>
+            <a:off x="1459382" y="5399036"/>
+            <a:ext cx="4250132" cy="2128958"/>
+          </a:xfrm>
+          <a:prstGeom prst="rect">
+            <a:avLst/>
+          </a:prstGeom>
+          <a:noFill/>
+        </p:spPr>
+        <p:txBody>
+          <a:bodyPr wrap="square" lIns="0" tIns="0" rIns="0" bIns="0" anchor="t" rtlCol="0">
+            <a:noAutofit/>
+          </a:bodyPr>
+          <a:lstStyle/>
+          <a:p>
+            <a:pPr algn="l" marL="0" indent="0">
+              <a:lnSpc>
+                <a:spcPct val="100000"/>
+              </a:lnSpc>
+              <a:spcAft>
+                <a:spcPts val="4568"/>
+              </a:spcAft>
+              <a:buNone/>
+            </a:pPr>
+            <a:r>
+              <a:rPr lang="ru-RU" sz="2799" b="0" cap="none" spc="0" baseline="0" dirty="0">
+                <a:solidFill>
+                  <a:srgbClr val="C2D076"/>
+                </a:solidFill>
+                <a:latin typeface="Inter Light"/>
+                <a:cs typeface="Inter Light"/>
+              </a:rPr>
+              <a:t>На входе — шаблон и текст</a:t>
+            </a:r>
+            <a:endParaRPr lang="ru-RU" sz="2799"/>
+          </a:p>
+          <a:p>
+            <a:pPr algn="l" marL="0" indent="0">
+              <a:lnSpc>
+                <a:spcPct val="100000"/>
+              </a:lnSpc>
+              <a:buNone/>
+            </a:pPr>
+            <a:r>
+              <a:rPr lang="ru-RU" sz="2199" b="0" cap="none" spc="0" baseline="0" dirty="0">
+                <a:solidFill>
+                  <a:srgbClr val="FFFFFF"/>
+                </a:solidFill>
+                <a:latin typeface="Inter Light"/>
+                <a:cs typeface="Inter Light"/>
+              </a:rPr>
+              <a:t>Verstka берёт шаблон и текст</a:t>
+            </a:r>
+            <a:endParaRPr lang="ru-RU" sz="2199"/>
+          </a:p>
+        </p:txBody>
+      </p:sp>
+      <p:sp>
+        <p:nvSpPr>
+          <p:cNvPr id="46" name="Card 46"/>
+          <p:cNvSpPr/>
+          <p:nvPr/>
+        </p:nvSpPr>
+        <p:spPr>
+          <a:xfrm>
+            <a:off x="6583680" y="4137660"/>
+            <a:ext cx="5120640" cy="3825588"/>
+          </a:xfrm>
+          <a:prstGeom prst="roundRect">
+            <a:avLst>
+              <a:gd name="adj" fmla="val 2868"/>
+            </a:avLst>
+          </a:prstGeom>
+          <a:solidFill>
+            <a:srgbClr val="000000"/>
+          </a:solidFill>
+          <a:ln>
+            <a:noFill/>
+          </a:ln>
+        </p:spPr>
+      </p:sp>
+      <p:sp>
+        <p:nvSpPr>
+          <p:cNvPr id="47" name="Index 47"/>
+          <p:cNvSpPr txBox="1"/>
+          <p:nvPr/>
+        </p:nvSpPr>
+        <p:spPr>
+          <a:xfrm>
+            <a:off x="7018934" y="4572914"/>
+            <a:ext cx="4250132" cy="718109"/>
+          </a:xfrm>
+          <a:prstGeom prst="rect">
+            <a:avLst/>
+          </a:prstGeom>
+          <a:noFill/>
+        </p:spPr>
+        <p:txBody>
+          <a:bodyPr wrap="square" lIns="0" tIns="0" rIns="0" bIns="0" anchor="t" rtlCol="0">
+            <a:noAutofit/>
+          </a:bodyPr>
+          <a:lstStyle/>
+          <a:p>
+            <a:pPr algn="l" marL="0" indent="0">
+              <a:lnSpc>
+                <a:spcPct val="100000"/>
+              </a:lnSpc>
+              <a:buNone/>
+            </a:pPr>
+            <a:r>
+              <a:rPr lang="ru-RU" sz="4712" b="0" cap="none" spc="0" baseline="0" dirty="0">
+                <a:solidFill>
+                  <a:srgbClr val="C2D076"/>
+                </a:solidFill>
+                <a:latin typeface="Inter Light"/>
+                <a:cs typeface="Inter Light"/>
+              </a:rPr>
+              <a:t>02</a:t>
+            </a:r>
+            <a:endParaRPr lang="ru-RU" sz="4712"/>
+          </a:p>
+        </p:txBody>
+      </p:sp>
+      <p:sp>
+        <p:nvSpPr>
+          <p:cNvPr id="48" name="Card text 48"/>
+          <p:cNvSpPr txBox="1"/>
+          <p:nvPr/>
+        </p:nvSpPr>
+        <p:spPr>
+          <a:xfrm>
+            <a:off x="7018934" y="5399036"/>
+            <a:ext cx="4250132" cy="2128958"/>
+          </a:xfrm>
+          <a:prstGeom prst="rect">
+            <a:avLst/>
+          </a:prstGeom>
+          <a:noFill/>
+        </p:spPr>
+        <p:txBody>
+          <a:bodyPr wrap="square" lIns="0" tIns="0" rIns="0" bIns="0" anchor="t" rtlCol="0">
+            <a:noAutofit/>
+          </a:bodyPr>
+          <a:lstStyle/>
+          <a:p>
+            <a:pPr algn="l" marL="0" indent="0">
+              <a:lnSpc>
+                <a:spcPct val="100000"/>
+              </a:lnSpc>
+              <a:spcAft>
+                <a:spcPts val="7927"/>
+              </a:spcAft>
+              <a:buNone/>
+            </a:pPr>
+            <a:r>
+              <a:rPr lang="ru-RU" sz="2799" b="0" cap="none" spc="0" baseline="0" dirty="0">
+                <a:solidFill>
+                  <a:srgbClr val="C2D076"/>
+                </a:solidFill>
+                <a:latin typeface="Inter Light"/>
+                <a:cs typeface="Inter Light"/>
+              </a:rPr>
+              <a:t>Шаблон — набор правил</a:t>
+            </a:r>
+            <a:endParaRPr lang="ru-RU" sz="2799"/>
+          </a:p>
+          <a:p>
+            <a:pPr algn="l" marL="0" indent="0">
+              <a:lnSpc>
+                <a:spcPct val="100000"/>
+              </a:lnSpc>
+              <a:buNone/>
+            </a:pPr>
+            <a:r>
+              <a:rPr lang="ru-RU" sz="2199" b="0" cap="none" spc="0" baseline="0" dirty="0">
+                <a:solidFill>
+                  <a:srgbClr val="FFFFFF"/>
+                </a:solidFill>
+                <a:latin typeface="Inter Light"/>
+                <a:cs typeface="Inter Light"/>
+              </a:rPr>
+              <a:t>Шаблон читается как набор правил, а не как набор макетов</a:t>
+            </a:r>
+            <a:endParaRPr lang="ru-RU" sz="2199"/>
+          </a:p>
+        </p:txBody>
+      </p:sp>
+      <p:sp>
+        <p:nvSpPr>
+          <p:cNvPr id="49" name="Card 49"/>
+          <p:cNvSpPr/>
+          <p:nvPr/>
+        </p:nvSpPr>
+        <p:spPr>
+          <a:xfrm>
+            <a:off x="12143232" y="4137660"/>
+            <a:ext cx="5120640" cy="3825588"/>
+          </a:xfrm>
+          <a:prstGeom prst="roundRect">
+            <a:avLst>
+              <a:gd name="adj" fmla="val 2868"/>
+            </a:avLst>
+          </a:prstGeom>
+          <a:solidFill>
+            <a:srgbClr val="000000"/>
+          </a:solidFill>
+          <a:ln>
+            <a:noFill/>
+          </a:ln>
+        </p:spPr>
+      </p:sp>
+      <p:sp>
+        <p:nvSpPr>
+          <p:cNvPr id="50" name="Index 50"/>
+          <p:cNvSpPr txBox="1"/>
+          <p:nvPr/>
+        </p:nvSpPr>
+        <p:spPr>
+          <a:xfrm>
+            <a:off x="12578486" y="4572914"/>
+            <a:ext cx="4250132" cy="718109"/>
+          </a:xfrm>
+          <a:prstGeom prst="rect">
+            <a:avLst/>
+          </a:prstGeom>
+          <a:noFill/>
+        </p:spPr>
+        <p:txBody>
+          <a:bodyPr wrap="square" lIns="0" tIns="0" rIns="0" bIns="0" anchor="t" rtlCol="0">
+            <a:noAutofit/>
+          </a:bodyPr>
+          <a:lstStyle/>
+          <a:p>
+            <a:pPr algn="l" marL="0" indent="0">
+              <a:lnSpc>
+                <a:spcPct val="100000"/>
+              </a:lnSpc>
+              <a:buNone/>
+            </a:pPr>
+            <a:r>
+              <a:rPr lang="ru-RU" sz="4712" b="0" cap="none" spc="0" baseline="0" dirty="0">
+                <a:solidFill>
+                  <a:srgbClr val="C2D076"/>
+                </a:solidFill>
+                <a:latin typeface="Inter Light"/>
+                <a:cs typeface="Inter Light"/>
+              </a:rPr>
+              <a:t>03</a:t>
+            </a:r>
+            <a:endParaRPr lang="ru-RU" sz="4712"/>
+          </a:p>
+        </p:txBody>
+      </p:sp>
+      <p:sp>
+        <p:nvSpPr>
+          <p:cNvPr id="51" name="Card text 51"/>
+          <p:cNvSpPr txBox="1"/>
+          <p:nvPr/>
+        </p:nvSpPr>
+        <p:spPr>
+          <a:xfrm>
+            <a:off x="12578486" y="5399036"/>
+            <a:ext cx="4250132" cy="2128958"/>
           </a:xfrm>
           <a:prstGeom prst="rect">
             <a:avLst/>
@@ -5672,7 +6279,7 @@
                 <a:latin typeface="Inter Light"/>
                 <a:cs typeface="Inter Light"/>
               </a:rPr>
-              <a:t>Аналитик</a:t>
+              <a:t>На выходе — три редактируемые презентации</a:t>
             </a:r>
             <a:endParaRPr lang="ru-RU" sz="2799"/>
           </a:p>
@@ -5691,7 +6298,7 @@
                 <a:latin typeface="Inter Light"/>
                 <a:cs typeface="Inter Light"/>
               </a:rPr>
-              <a:t>Находит слайды, ряды данных и просьбы</a:t>
+              <a:t>Создаются три редактируемые презентации в стиле шаблона</a:t>
             </a:r>
             <a:endParaRPr lang="ru-RU" sz="2199"/>
           </a:p>
@@ -5699,16 +6306,40 @@
       </p:sp>
       <p:sp>
         <p:nvSpPr>
-          <p:cNvPr id="79" name="Badge 79"/>
+          <p:cNvPr id="52" name="Conclusion strip 52"/>
           <p:cNvSpPr/>
           <p:nvPr/>
         </p:nvSpPr>
         <p:spPr>
           <a:xfrm>
-            <a:off x="4324746" y="3947718"/>
-            <a:ext cx="771525" cy="771525"/>
-          </a:xfrm>
-          <a:prstGeom prst="ellipse">
+            <a:off x="1024128" y="8355259"/>
+            <a:ext cx="16239744" cy="892754"/>
+          </a:xfrm>
+          <a:prstGeom prst="roundRect">
+            <a:avLst>
+              <a:gd name="adj" fmla="val 12290"/>
+            </a:avLst>
+          </a:prstGeom>
+          <a:solidFill>
+            <a:srgbClr val="000000"/>
+          </a:solidFill>
+          <a:ln>
+            <a:noFill/>
+          </a:ln>
+        </p:spPr>
+      </p:sp>
+      <p:sp>
+        <p:nvSpPr>
+          <p:cNvPr id="53" name="Conclusion bar 53"/>
+          <p:cNvSpPr/>
+          <p:nvPr/>
+        </p:nvSpPr>
+        <p:spPr>
+          <a:xfrm>
+            <a:off x="1379601" y="8618309"/>
+            <a:ext cx="61722" cy="366654"/>
+          </a:xfrm>
+          <a:prstGeom prst="rect">
             <a:avLst/>
           </a:prstGeom>
           <a:solidFill>
@@ -5718,34 +6349,17 @@
             <a:noFill/>
           </a:ln>
         </p:spPr>
-        <p:txBody>
-          <a:bodyPr lIns="0" tIns="0" rIns="0" bIns="0" anchor="ctr" wrap="none"/>
-          <a:lstStyle/>
-          <a:p>
-            <a:pPr algn="ctr"/>
-            <a:r>
-              <a:rPr lang="ru-RU" sz="2799" b="0" cap="none" spc="0" baseline="0">
-                <a:solidFill>
-                  <a:srgbClr val="000000"/>
-                </a:solidFill>
-                <a:latin typeface="Inter Light"/>
-                <a:cs typeface="Inter Light"/>
-              </a:rPr>
-              <a:t>2</a:t>
-            </a:r>
-          </a:p>
-        </p:txBody>
-      </p:sp>
-      <p:sp>
-        <p:nvSpPr>
-          <p:cNvPr id="80" name="Step 80"/>
+      </p:sp>
+      <p:sp>
+        <p:nvSpPr>
+          <p:cNvPr id="54" name="Conclusion 54"/>
           <p:cNvSpPr txBox="1"/>
           <p:nvPr/>
         </p:nvSpPr>
         <p:spPr>
           <a:xfrm>
-            <a:off x="4324746" y="4996992"/>
-            <a:ext cx="3037271" cy="1610951"/>
+            <a:off x="1725701" y="8575652"/>
+            <a:ext cx="15182698" cy="451968"/>
           </a:xfrm>
           <a:prstGeom prst="rect">
             <a:avLst/>
@@ -5762,9 +6376,6 @@
               <a:lnSpc>
                 <a:spcPct val="100000"/>
               </a:lnSpc>
-              <a:spcAft>
-                <a:spcPts val="1209"/>
-              </a:spcAft>
               <a:buNone/>
             </a:pPr>
             <a:r>
@@ -5775,337 +6386,9 @@
                 <a:latin typeface="Inter Light"/>
                 <a:cs typeface="Inter Light"/>
               </a:rPr>
-              <a:t>Дизайнер</a:t>
+              <a:t>Презентация в фирменном стиле без ручной вёрстки</a:t>
             </a:r>
             <a:endParaRPr lang="ru-RU" sz="2799"/>
-          </a:p>
-          <a:p>
-            <a:pPr algn="l" marL="0" indent="0">
-              <a:lnSpc>
-                <a:spcPct val="100000"/>
-              </a:lnSpc>
-              <a:buNone/>
-            </a:pPr>
-            <a:r>
-              <a:rPr lang="ru-RU" sz="2199" b="0" cap="none" spc="0" baseline="0" dirty="0">
-                <a:solidFill>
-                  <a:srgbClr val="FFFFFF"/>
-                </a:solidFill>
-                <a:latin typeface="Inter Light"/>
-                <a:cs typeface="Inter Light"/>
-              </a:rPr>
-              <a:t>Продумывает каждый слайд отдельно</a:t>
-            </a:r>
-            <a:endParaRPr lang="ru-RU" sz="2199"/>
-          </a:p>
-        </p:txBody>
-      </p:sp>
-      <p:sp>
-        <p:nvSpPr>
-          <p:cNvPr id="81" name="Badge 81"/>
-          <p:cNvSpPr/>
-          <p:nvPr/>
-        </p:nvSpPr>
-        <p:spPr>
-          <a:xfrm>
-            <a:off x="7625364" y="3947718"/>
-            <a:ext cx="771525" cy="771525"/>
-          </a:xfrm>
-          <a:prstGeom prst="ellipse">
-            <a:avLst/>
-          </a:prstGeom>
-          <a:solidFill>
-            <a:srgbClr val="C2D076"/>
-          </a:solidFill>
-          <a:ln>
-            <a:noFill/>
-          </a:ln>
-        </p:spPr>
-        <p:txBody>
-          <a:bodyPr lIns="0" tIns="0" rIns="0" bIns="0" anchor="ctr" wrap="none"/>
-          <a:lstStyle/>
-          <a:p>
-            <a:pPr algn="ctr"/>
-            <a:r>
-              <a:rPr lang="ru-RU" sz="2799" b="0" cap="none" spc="0" baseline="0">
-                <a:solidFill>
-                  <a:srgbClr val="000000"/>
-                </a:solidFill>
-                <a:latin typeface="Inter Light"/>
-                <a:cs typeface="Inter Light"/>
-              </a:rPr>
-              <a:t>3</a:t>
-            </a:r>
-          </a:p>
-        </p:txBody>
-      </p:sp>
-      <p:sp>
-        <p:nvSpPr>
-          <p:cNvPr id="82" name="Step 82"/>
-          <p:cNvSpPr txBox="1"/>
-          <p:nvPr/>
-        </p:nvSpPr>
-        <p:spPr>
-          <a:xfrm>
-            <a:off x="7625364" y="4996992"/>
-            <a:ext cx="3037271" cy="1610951"/>
-          </a:xfrm>
-          <a:prstGeom prst="rect">
-            <a:avLst/>
-          </a:prstGeom>
-          <a:noFill/>
-        </p:spPr>
-        <p:txBody>
-          <a:bodyPr wrap="square" lIns="0" tIns="0" rIns="0" bIns="0" anchor="t" rtlCol="0">
-            <a:noAutofit/>
-          </a:bodyPr>
-          <a:lstStyle/>
-          <a:p>
-            <a:pPr algn="l" marL="0" indent="0">
-              <a:lnSpc>
-                <a:spcPct val="100000"/>
-              </a:lnSpc>
-              <a:spcAft>
-                <a:spcPts val="1209"/>
-              </a:spcAft>
-              <a:buNone/>
-            </a:pPr>
-            <a:r>
-              <a:rPr lang="ru-RU" sz="2799" b="0" cap="none" spc="0" baseline="0" dirty="0">
-                <a:solidFill>
-                  <a:srgbClr val="C2D076"/>
-                </a:solidFill>
-                <a:latin typeface="Inter Light"/>
-                <a:cs typeface="Inter Light"/>
-              </a:rPr>
-              <a:t>Критик</a:t>
-            </a:r>
-            <a:endParaRPr lang="ru-RU" sz="2799"/>
-          </a:p>
-          <a:p>
-            <a:pPr algn="l" marL="0" indent="0">
-              <a:lnSpc>
-                <a:spcPct val="100000"/>
-              </a:lnSpc>
-              <a:buNone/>
-            </a:pPr>
-            <a:r>
-              <a:rPr lang="ru-RU" sz="2199" b="0" cap="none" spc="0" baseline="0" dirty="0">
-                <a:solidFill>
-                  <a:srgbClr val="FFFFFF"/>
-                </a:solidFill>
-                <a:latin typeface="Inter Light"/>
-                <a:cs typeface="Inter Light"/>
-              </a:rPr>
-              <a:t>Сверяет план с текстом и правилами</a:t>
-            </a:r>
-            <a:endParaRPr lang="ru-RU" sz="2199"/>
-          </a:p>
-        </p:txBody>
-      </p:sp>
-      <p:sp>
-        <p:nvSpPr>
-          <p:cNvPr id="83" name="Badge 83"/>
-          <p:cNvSpPr/>
-          <p:nvPr/>
-        </p:nvSpPr>
-        <p:spPr>
-          <a:xfrm>
-            <a:off x="10925982" y="3947718"/>
-            <a:ext cx="771525" cy="771525"/>
-          </a:xfrm>
-          <a:prstGeom prst="ellipse">
-            <a:avLst/>
-          </a:prstGeom>
-          <a:solidFill>
-            <a:srgbClr val="C2D076"/>
-          </a:solidFill>
-          <a:ln>
-            <a:noFill/>
-          </a:ln>
-        </p:spPr>
-        <p:txBody>
-          <a:bodyPr lIns="0" tIns="0" rIns="0" bIns="0" anchor="ctr" wrap="none"/>
-          <a:lstStyle/>
-          <a:p>
-            <a:pPr algn="ctr"/>
-            <a:r>
-              <a:rPr lang="ru-RU" sz="2799" b="0" cap="none" spc="0" baseline="0">
-                <a:solidFill>
-                  <a:srgbClr val="000000"/>
-                </a:solidFill>
-                <a:latin typeface="Inter Light"/>
-                <a:cs typeface="Inter Light"/>
-              </a:rPr>
-              <a:t>4</a:t>
-            </a:r>
-          </a:p>
-        </p:txBody>
-      </p:sp>
-      <p:sp>
-        <p:nvSpPr>
-          <p:cNvPr id="84" name="Step 84"/>
-          <p:cNvSpPr txBox="1"/>
-          <p:nvPr/>
-        </p:nvSpPr>
-        <p:spPr>
-          <a:xfrm>
-            <a:off x="10925982" y="4996992"/>
-            <a:ext cx="3037271" cy="1610951"/>
-          </a:xfrm>
-          <a:prstGeom prst="rect">
-            <a:avLst/>
-          </a:prstGeom>
-          <a:noFill/>
-        </p:spPr>
-        <p:txBody>
-          <a:bodyPr wrap="square" lIns="0" tIns="0" rIns="0" bIns="0" anchor="t" rtlCol="0">
-            <a:noAutofit/>
-          </a:bodyPr>
-          <a:lstStyle/>
-          <a:p>
-            <a:pPr algn="l" marL="0" indent="0">
-              <a:lnSpc>
-                <a:spcPct val="100000"/>
-              </a:lnSpc>
-              <a:spcAft>
-                <a:spcPts val="1209"/>
-              </a:spcAft>
-              <a:buNone/>
-            </a:pPr>
-            <a:r>
-              <a:rPr lang="ru-RU" sz="2799" b="0" cap="none" spc="0" baseline="0" dirty="0">
-                <a:solidFill>
-                  <a:srgbClr val="C2D076"/>
-                </a:solidFill>
-                <a:latin typeface="Inter Light"/>
-                <a:cs typeface="Inter Light"/>
-              </a:rPr>
-              <a:t>Компилятор</a:t>
-            </a:r>
-            <a:endParaRPr lang="ru-RU" sz="2799"/>
-          </a:p>
-          <a:p>
-            <a:pPr algn="l" marL="0" indent="0">
-              <a:lnSpc>
-                <a:spcPct val="100000"/>
-              </a:lnSpc>
-              <a:buNone/>
-            </a:pPr>
-            <a:r>
-              <a:rPr lang="ru-RU" sz="2199" b="0" cap="none" spc="0" baseline="0" dirty="0">
-                <a:solidFill>
-                  <a:srgbClr val="FFFFFF"/>
-                </a:solidFill>
-                <a:latin typeface="Inter Light"/>
-                <a:cs typeface="Inter Light"/>
-              </a:rPr>
-              <a:t>Проверяет каждое число</a:t>
-            </a:r>
-            <a:endParaRPr lang="ru-RU" sz="2199"/>
-          </a:p>
-        </p:txBody>
-      </p:sp>
-      <p:sp>
-        <p:nvSpPr>
-          <p:cNvPr id="85" name="Badge 85"/>
-          <p:cNvSpPr/>
-          <p:nvPr/>
-        </p:nvSpPr>
-        <p:spPr>
-          <a:xfrm>
-            <a:off x="14226600" y="3947718"/>
-            <a:ext cx="771525" cy="771525"/>
-          </a:xfrm>
-          <a:prstGeom prst="ellipse">
-            <a:avLst/>
-          </a:prstGeom>
-          <a:solidFill>
-            <a:srgbClr val="C2D076"/>
-          </a:solidFill>
-          <a:ln>
-            <a:noFill/>
-          </a:ln>
-        </p:spPr>
-        <p:txBody>
-          <a:bodyPr lIns="0" tIns="0" rIns="0" bIns="0" anchor="ctr" wrap="none"/>
-          <a:lstStyle/>
-          <a:p>
-            <a:pPr algn="ctr"/>
-            <a:r>
-              <a:rPr lang="ru-RU" sz="2799" b="0" cap="none" spc="0" baseline="0">
-                <a:solidFill>
-                  <a:srgbClr val="000000"/>
-                </a:solidFill>
-                <a:latin typeface="Inter Light"/>
-                <a:cs typeface="Inter Light"/>
-              </a:rPr>
-              <a:t>5</a:t>
-            </a:r>
-          </a:p>
-        </p:txBody>
-      </p:sp>
-      <p:sp>
-        <p:nvSpPr>
-          <p:cNvPr id="86" name="Step 86"/>
-          <p:cNvSpPr txBox="1"/>
-          <p:nvPr/>
-        </p:nvSpPr>
-        <p:spPr>
-          <a:xfrm>
-            <a:off x="14226600" y="4996992"/>
-            <a:ext cx="3037271" cy="1610951"/>
-          </a:xfrm>
-          <a:prstGeom prst="rect">
-            <a:avLst/>
-          </a:prstGeom>
-          <a:noFill/>
-        </p:spPr>
-        <p:txBody>
-          <a:bodyPr wrap="square" lIns="0" tIns="0" rIns="0" bIns="0" anchor="t" rtlCol="0">
-            <a:noAutofit/>
-          </a:bodyPr>
-          <a:lstStyle/>
-          <a:p>
-            <a:pPr algn="l" marL="0" indent="0">
-              <a:lnSpc>
-                <a:spcPct val="100000"/>
-              </a:lnSpc>
-              <a:spcAft>
-                <a:spcPts val="1209"/>
-              </a:spcAft>
-              <a:buNone/>
-            </a:pPr>
-            <a:r>
-              <a:rPr lang="ru-RU" sz="2799" b="0" cap="none" spc="0" baseline="0" dirty="0">
-                <a:solidFill>
-                  <a:srgbClr val="C2D076"/>
-                </a:solidFill>
-                <a:latin typeface="Inter Light"/>
-                <a:cs typeface="Inter Light"/>
-              </a:rPr>
-              <a:t>Вёрстка</a:t>
-            </a:r>
-            <a:endParaRPr lang="ru-RU" sz="2799"/>
-          </a:p>
-          <a:p>
-            <a:pPr algn="l" marL="0" indent="0">
-              <a:lnSpc>
-                <a:spcPct val="100000"/>
-              </a:lnSpc>
-              <a:buNone/>
-            </a:pPr>
-            <a:r>
-              <a:rPr lang="ru-RU" sz="2199" b="0" cap="none" spc="0" baseline="0" dirty="0">
-                <a:solidFill>
-                  <a:srgbClr val="FFFFFF"/>
-                </a:solidFill>
-                <a:latin typeface="Inter Light"/>
-                <a:cs typeface="Inter Light"/>
-              </a:rPr>
-              <a:t>Собирает слайды по дизайн-⁠системе</a:t>
-            </a:r>
-            <a:endParaRPr lang="ru-RU" sz="2199"/>
           </a:p>
         </p:txBody>
       </p:sp>
@@ -6143,7 +6426,7 @@
         <p:spPr>
           <a:xfrm>
             <a:off x="619057" y="2623820"/>
-            <a:ext cx="15727680" cy="944880"/>
+            <a:ext cx="10417162" cy="1527657"/>
           </a:xfrm>
           <a:prstGeom prst="rect">
             <a:avLst/>
@@ -6177,7 +6460,7 @@
               <a:buNone/>
             </a:pPr>
             <a:r>
-              <a:rPr i="0" lang="ru-RU" sz="4712" u="none" cap="none" strike="noStrike">
+              <a:rPr i="0" lang="ru-RU" sz="2799" u="none" cap="none" strike="noStrike">
                 <a:solidFill>
                   <a:srgbClr val="C2D076"/>
                 </a:solidFill>
@@ -6186,7 +6469,7 @@
                 <a:cs typeface="Inter Medium"/>
                 <a:sym typeface="Inter Medium"/>
               </a:rPr>
-              <a:t>Одинаковое содержание, разная подача</a:t>
+              <a:t>Открытые модели до 35 млрд параметров создают презентации</a:t>
             </a:r>
             <a:endParaRPr>
               <a:latin typeface="Inter Medium"/>
@@ -6197,82 +6480,76 @@
           </a:p>
         </p:txBody>
       </p:sp>
-      <p:sp>
-        <p:nvSpPr>
-          <p:cNvPr id="43" name="Card 43"/>
+      <p:cxnSp>
+        <p:nvCxnSpPr>
+          <p:cNvPr id="76" name="Axis 76"/>
+          <p:cNvCxnSpPr/>
+          <p:nvPr/>
+        </p:nvCxnSpPr>
+        <p:spPr>
+          <a:xfrm>
+            <a:off x="1409890" y="5051589"/>
+            <a:ext cx="13202472" cy="0"/>
+          </a:xfrm>
+          <a:prstGeom prst="line">
+            <a:avLst/>
+          </a:prstGeom>
+          <a:ln w="19050">
+            <a:solidFill>
+              <a:srgbClr val="C2D076"/>
+            </a:solidFill>
+          </a:ln>
+        </p:spPr>
+      </p:cxnSp>
+      <p:sp>
+        <p:nvSpPr>
+          <p:cNvPr id="77" name="Badge 77"/>
           <p:cNvSpPr/>
           <p:nvPr/>
         </p:nvSpPr>
         <p:spPr>
           <a:xfrm>
-            <a:off x="1024128" y="4137660"/>
-            <a:ext cx="5120640" cy="4172451"/>
-          </a:xfrm>
-          <a:prstGeom prst="roundRect">
-            <a:avLst>
-              <a:gd name="adj" fmla="val 2629"/>
-            </a:avLst>
+            <a:off x="1024128" y="4665827"/>
+            <a:ext cx="771525" cy="771525"/>
+          </a:xfrm>
+          <a:prstGeom prst="ellipse">
+            <a:avLst/>
           </a:prstGeom>
           <a:solidFill>
-            <a:srgbClr val="000000"/>
+            <a:srgbClr val="C2D076"/>
           </a:solidFill>
           <a:ln>
             <a:noFill/>
           </a:ln>
         </p:spPr>
-      </p:sp>
-      <p:sp>
-        <p:nvSpPr>
-          <p:cNvPr id="44" name="Index 44"/>
-          <p:cNvSpPr txBox="1"/>
-          <p:nvPr/>
-        </p:nvSpPr>
-        <p:spPr>
-          <a:xfrm>
-            <a:off x="1459382" y="4572914"/>
-            <a:ext cx="4250132" cy="975208"/>
-          </a:xfrm>
-          <a:prstGeom prst="rect">
-            <a:avLst/>
-          </a:prstGeom>
-          <a:noFill/>
-        </p:spPr>
         <p:txBody>
-          <a:bodyPr wrap="square" lIns="0" tIns="0" rIns="0" bIns="0" anchor="t" rtlCol="0">
-            <a:noAutofit/>
-          </a:bodyPr>
+          <a:bodyPr lIns="0" tIns="0" rIns="0" bIns="0" anchor="ctr" wrap="none"/>
           <a:lstStyle/>
           <a:p>
-            <a:pPr algn="l" marL="0" indent="0">
-              <a:lnSpc>
-                <a:spcPct val="100000"/>
-              </a:lnSpc>
-              <a:buNone/>
-            </a:pPr>
+            <a:pPr algn="ctr"/>
             <a:r>
-              <a:rPr lang="ru-RU" sz="6399" b="0" cap="none" spc="0" baseline="0" dirty="0">
-                <a:solidFill>
-                  <a:srgbClr val="C2D076"/>
+              <a:rPr lang="ru-RU" sz="2799" b="0" cap="none" spc="0" baseline="0">
+                <a:solidFill>
+                  <a:srgbClr val="000000"/>
                 </a:solidFill>
                 <a:latin typeface="Inter Light"/>
                 <a:cs typeface="Inter Light"/>
               </a:rPr>
-              <a:t>01</a:t>
+              <a:t>1</a:t>
             </a:r>
-            <a:endParaRPr lang="ru-RU" sz="6399"/>
           </a:p>
         </p:txBody>
       </p:sp>
       <p:sp>
         <p:nvSpPr>
-          <p:cNvPr id="45" name="Card text 45"/>
+          <p:cNvPr id="78" name="Step 78"/>
           <p:cNvSpPr txBox="1"/>
           <p:nvPr/>
         </p:nvSpPr>
         <p:spPr>
           <a:xfrm>
-            <a:off x="1459382" y="5656135"/>
-            <a:ext cx="4250132" cy="2218722"/>
+            <a:off x="1024128" y="5715101"/>
+            <a:ext cx="3037271" cy="1610951"/>
           </a:xfrm>
           <a:prstGeom prst="rect">
             <a:avLst/>
@@ -6290,21 +6567,21 @@
                 <a:spcPct val="100000"/>
               </a:lnSpc>
               <a:spcAft>
-                <a:spcPts val="1539"/>
+                <a:spcPts val="1209"/>
               </a:spcAft>
               <a:buNone/>
             </a:pPr>
             <a:r>
-              <a:rPr lang="ru-RU" sz="4712" b="0" cap="none" spc="0" baseline="0" dirty="0">
+              <a:rPr lang="ru-RU" sz="2799" b="0" cap="none" spc="0" baseline="0" dirty="0">
                 <a:solidFill>
                   <a:srgbClr val="C2D076"/>
                 </a:solidFill>
                 <a:latin typeface="Inter Light"/>
                 <a:cs typeface="Inter Light"/>
               </a:rPr>
-              <a:t>Структурный</a:t>
+              <a:t>Аналитик</a:t>
             </a:r>
-            <a:endParaRPr lang="ru-RU" sz="4712"/>
+            <a:endParaRPr lang="ru-RU" sz="2799"/>
           </a:p>
           <a:p>
             <a:pPr algn="l" marL="0" indent="0">
@@ -6314,95 +6591,68 @@
               <a:buNone/>
             </a:pPr>
             <a:r>
-              <a:rPr lang="ru-RU" sz="2799" b="0" cap="none" spc="0" baseline="0" dirty="0">
+              <a:rPr lang="ru-RU" sz="2199" b="0" cap="none" spc="0" baseline="0" dirty="0">
                 <a:solidFill>
                   <a:srgbClr val="FFFFFF"/>
                 </a:solidFill>
                 <a:latin typeface="Inter Light"/>
                 <a:cs typeface="Inter Light"/>
               </a:rPr>
-              <a:t>Одна мысль на слайде, строгая сетка</a:t>
+              <a:t>Находит слайды, ряды данных и просьбы</a:t>
             </a:r>
-            <a:endParaRPr lang="ru-RU" sz="2799"/>
+            <a:endParaRPr lang="ru-RU" sz="2199"/>
           </a:p>
         </p:txBody>
       </p:sp>
       <p:sp>
         <p:nvSpPr>
-          <p:cNvPr id="46" name="Card 46"/>
+          <p:cNvPr id="79" name="Badge 79"/>
           <p:cNvSpPr/>
           <p:nvPr/>
         </p:nvSpPr>
         <p:spPr>
           <a:xfrm>
-            <a:off x="6583680" y="4137660"/>
-            <a:ext cx="5120640" cy="4172451"/>
-          </a:xfrm>
-          <a:prstGeom prst="roundRect">
-            <a:avLst>
-              <a:gd name="adj" fmla="val 2629"/>
-            </a:avLst>
+            <a:off x="4324746" y="4665827"/>
+            <a:ext cx="771525" cy="771525"/>
+          </a:xfrm>
+          <a:prstGeom prst="ellipse">
+            <a:avLst/>
           </a:prstGeom>
           <a:solidFill>
-            <a:srgbClr val="000000"/>
+            <a:srgbClr val="C2D076"/>
           </a:solidFill>
           <a:ln>
             <a:noFill/>
           </a:ln>
         </p:spPr>
-      </p:sp>
-      <p:sp>
-        <p:nvSpPr>
-          <p:cNvPr id="47" name="Index 47"/>
-          <p:cNvSpPr txBox="1"/>
-          <p:nvPr/>
-        </p:nvSpPr>
-        <p:spPr>
-          <a:xfrm>
-            <a:off x="7018934" y="4572914"/>
-            <a:ext cx="4250132" cy="975208"/>
-          </a:xfrm>
-          <a:prstGeom prst="rect">
-            <a:avLst/>
-          </a:prstGeom>
-          <a:noFill/>
-        </p:spPr>
         <p:txBody>
-          <a:bodyPr wrap="square" lIns="0" tIns="0" rIns="0" bIns="0" anchor="t" rtlCol="0">
-            <a:noAutofit/>
-          </a:bodyPr>
+          <a:bodyPr lIns="0" tIns="0" rIns="0" bIns="0" anchor="ctr" wrap="none"/>
           <a:lstStyle/>
           <a:p>
-            <a:pPr algn="l" marL="0" indent="0">
-              <a:lnSpc>
-                <a:spcPct val="100000"/>
-              </a:lnSpc>
-              <a:buNone/>
-            </a:pPr>
+            <a:pPr algn="ctr"/>
             <a:r>
-              <a:rPr lang="ru-RU" sz="6399" b="0" cap="none" spc="0" baseline="0" dirty="0">
-                <a:solidFill>
-                  <a:srgbClr val="C2D076"/>
+              <a:rPr lang="ru-RU" sz="2799" b="0" cap="none" spc="0" baseline="0">
+                <a:solidFill>
+                  <a:srgbClr val="000000"/>
                 </a:solidFill>
                 <a:latin typeface="Inter Light"/>
                 <a:cs typeface="Inter Light"/>
               </a:rPr>
-              <a:t>02</a:t>
+              <a:t>2</a:t>
             </a:r>
-            <a:endParaRPr lang="ru-RU" sz="6399"/>
           </a:p>
         </p:txBody>
       </p:sp>
       <p:sp>
         <p:nvSpPr>
-          <p:cNvPr id="48" name="Card text 48"/>
+          <p:cNvPr id="80" name="Step 80"/>
           <p:cNvSpPr txBox="1"/>
           <p:nvPr/>
         </p:nvSpPr>
         <p:spPr>
           <a:xfrm>
-            <a:off x="7018934" y="5656135"/>
-            <a:ext cx="4250132" cy="2218722"/>
+            <a:off x="4324746" y="5715101"/>
+            <a:ext cx="3037271" cy="1610951"/>
           </a:xfrm>
           <a:prstGeom prst="rect">
             <a:avLst/>
@@ -6420,21 +6670,21 @@
                 <a:spcPct val="100000"/>
               </a:lnSpc>
               <a:spcAft>
-                <a:spcPts val="1539"/>
+                <a:spcPts val="1209"/>
               </a:spcAft>
               <a:buNone/>
             </a:pPr>
             <a:r>
-              <a:rPr lang="ru-RU" sz="4712" b="0" cap="none" spc="0" baseline="0" dirty="0">
+              <a:rPr lang="ru-RU" sz="2799" b="0" cap="none" spc="0" baseline="0" dirty="0">
                 <a:solidFill>
                   <a:srgbClr val="C2D076"/>
                 </a:solidFill>
                 <a:latin typeface="Inter Light"/>
                 <a:cs typeface="Inter Light"/>
               </a:rPr>
-              <a:t>Визуальный</a:t>
+              <a:t>Дизайнер</a:t>
             </a:r>
-            <a:endParaRPr lang="ru-RU" sz="4712"/>
+            <a:endParaRPr lang="ru-RU" sz="2799"/>
           </a:p>
           <a:p>
             <a:pPr algn="l" marL="0" indent="0">
@@ -6444,95 +6694,68 @@
               <a:buNone/>
             </a:pPr>
             <a:r>
-              <a:rPr lang="ru-RU" sz="2799" b="0" cap="none" spc="0" baseline="0" dirty="0">
+              <a:rPr lang="ru-RU" sz="2199" b="0" cap="none" spc="0" baseline="0" dirty="0">
                 <a:solidFill>
                   <a:srgbClr val="FFFFFF"/>
                 </a:solidFill>
                 <a:latin typeface="Inter Light"/>
                 <a:cs typeface="Inter Light"/>
               </a:rPr>
-              <a:t>Крупные цифры и наглядные схемы</a:t>
+              <a:t>Продумывает каждый слайд отдельно</a:t>
             </a:r>
-            <a:endParaRPr lang="ru-RU" sz="2799"/>
+            <a:endParaRPr lang="ru-RU" sz="2199"/>
           </a:p>
         </p:txBody>
       </p:sp>
       <p:sp>
         <p:nvSpPr>
-          <p:cNvPr id="49" name="Card 49"/>
+          <p:cNvPr id="81" name="Badge 81"/>
           <p:cNvSpPr/>
           <p:nvPr/>
         </p:nvSpPr>
         <p:spPr>
           <a:xfrm>
-            <a:off x="12143232" y="4137660"/>
-            <a:ext cx="5120640" cy="4172451"/>
-          </a:xfrm>
-          <a:prstGeom prst="roundRect">
-            <a:avLst>
-              <a:gd name="adj" fmla="val 2629"/>
-            </a:avLst>
+            <a:off x="7625364" y="4665827"/>
+            <a:ext cx="771525" cy="771525"/>
+          </a:xfrm>
+          <a:prstGeom prst="ellipse">
+            <a:avLst/>
           </a:prstGeom>
           <a:solidFill>
-            <a:srgbClr val="000000"/>
+            <a:srgbClr val="C2D076"/>
           </a:solidFill>
           <a:ln>
             <a:noFill/>
           </a:ln>
         </p:spPr>
-      </p:sp>
-      <p:sp>
-        <p:nvSpPr>
-          <p:cNvPr id="50" name="Index 50"/>
-          <p:cNvSpPr txBox="1"/>
-          <p:nvPr/>
-        </p:nvSpPr>
-        <p:spPr>
-          <a:xfrm>
-            <a:off x="12578486" y="4572914"/>
-            <a:ext cx="4250132" cy="975208"/>
-          </a:xfrm>
-          <a:prstGeom prst="rect">
-            <a:avLst/>
-          </a:prstGeom>
-          <a:noFill/>
-        </p:spPr>
         <p:txBody>
-          <a:bodyPr wrap="square" lIns="0" tIns="0" rIns="0" bIns="0" anchor="t" rtlCol="0">
-            <a:noAutofit/>
-          </a:bodyPr>
+          <a:bodyPr lIns="0" tIns="0" rIns="0" bIns="0" anchor="ctr" wrap="none"/>
           <a:lstStyle/>
           <a:p>
-            <a:pPr algn="l" marL="0" indent="0">
-              <a:lnSpc>
-                <a:spcPct val="100000"/>
-              </a:lnSpc>
-              <a:buNone/>
-            </a:pPr>
+            <a:pPr algn="ctr"/>
             <a:r>
-              <a:rPr lang="ru-RU" sz="6399" b="0" cap="none" spc="0" baseline="0" dirty="0">
-                <a:solidFill>
-                  <a:srgbClr val="C2D076"/>
+              <a:rPr lang="ru-RU" sz="2799" b="0" cap="none" spc="0" baseline="0">
+                <a:solidFill>
+                  <a:srgbClr val="000000"/>
                 </a:solidFill>
                 <a:latin typeface="Inter Light"/>
                 <a:cs typeface="Inter Light"/>
               </a:rPr>
-              <a:t>03</a:t>
+              <a:t>3</a:t>
             </a:r>
-            <a:endParaRPr lang="ru-RU" sz="6399"/>
           </a:p>
         </p:txBody>
       </p:sp>
       <p:sp>
         <p:nvSpPr>
-          <p:cNvPr id="51" name="Card text 51"/>
+          <p:cNvPr id="82" name="Step 82"/>
           <p:cNvSpPr txBox="1"/>
           <p:nvPr/>
         </p:nvSpPr>
         <p:spPr>
           <a:xfrm>
-            <a:off x="12578486" y="5656135"/>
-            <a:ext cx="4250132" cy="2218722"/>
+            <a:off x="7625364" y="5715101"/>
+            <a:ext cx="3037271" cy="1610951"/>
           </a:xfrm>
           <a:prstGeom prst="rect">
             <a:avLst/>
@@ -6550,21 +6773,21 @@
                 <a:spcPct val="100000"/>
               </a:lnSpc>
               <a:spcAft>
-                <a:spcPts val="1539"/>
+                <a:spcPts val="1209"/>
               </a:spcAft>
               <a:buNone/>
             </a:pPr>
             <a:r>
-              <a:rPr lang="ru-RU" sz="4712" b="0" cap="none" spc="0" baseline="0" dirty="0">
+              <a:rPr lang="ru-RU" sz="2799" b="0" cap="none" spc="0" baseline="0" dirty="0">
                 <a:solidFill>
                   <a:srgbClr val="C2D076"/>
                 </a:solidFill>
                 <a:latin typeface="Inter Light"/>
                 <a:cs typeface="Inter Light"/>
               </a:rPr>
-              <a:t>Компактный</a:t>
+              <a:t>Критик</a:t>
             </a:r>
-            <a:endParaRPr lang="ru-RU" sz="4712"/>
+            <a:endParaRPr lang="ru-RU" sz="2799"/>
           </a:p>
           <a:p>
             <a:pPr algn="l" marL="0" indent="0">
@@ -6574,16 +6797,222 @@
               <a:buNone/>
             </a:pPr>
             <a:r>
-              <a:rPr lang="ru-RU" sz="2799" b="0" cap="none" spc="0" baseline="0" dirty="0">
+              <a:rPr lang="ru-RU" sz="2199" b="0" cap="none" spc="0" baseline="0" dirty="0">
                 <a:solidFill>
                   <a:srgbClr val="FFFFFF"/>
                 </a:solidFill>
                 <a:latin typeface="Inter Light"/>
                 <a:cs typeface="Inter Light"/>
               </a:rPr>
-              <a:t>Вывод первой строкой, текст слева, данные справа</a:t>
+              <a:t>Сверяет план с текстом и правилами шаблона</a:t>
+            </a:r>
+            <a:endParaRPr lang="ru-RU" sz="2199"/>
+          </a:p>
+        </p:txBody>
+      </p:sp>
+      <p:sp>
+        <p:nvSpPr>
+          <p:cNvPr id="83" name="Badge 83"/>
+          <p:cNvSpPr/>
+          <p:nvPr/>
+        </p:nvSpPr>
+        <p:spPr>
+          <a:xfrm>
+            <a:off x="10925982" y="4665827"/>
+            <a:ext cx="771525" cy="771525"/>
+          </a:xfrm>
+          <a:prstGeom prst="ellipse">
+            <a:avLst/>
+          </a:prstGeom>
+          <a:solidFill>
+            <a:srgbClr val="C2D076"/>
+          </a:solidFill>
+          <a:ln>
+            <a:noFill/>
+          </a:ln>
+        </p:spPr>
+        <p:txBody>
+          <a:bodyPr lIns="0" tIns="0" rIns="0" bIns="0" anchor="ctr" wrap="none"/>
+          <a:lstStyle/>
+          <a:p>
+            <a:pPr algn="ctr"/>
+            <a:r>
+              <a:rPr lang="ru-RU" sz="2799" b="0" cap="none" spc="0" baseline="0">
+                <a:solidFill>
+                  <a:srgbClr val="000000"/>
+                </a:solidFill>
+                <a:latin typeface="Inter Light"/>
+                <a:cs typeface="Inter Light"/>
+              </a:rPr>
+              <a:t>4</a:t>
+            </a:r>
+          </a:p>
+        </p:txBody>
+      </p:sp>
+      <p:sp>
+        <p:nvSpPr>
+          <p:cNvPr id="84" name="Step 84"/>
+          <p:cNvSpPr txBox="1"/>
+          <p:nvPr/>
+        </p:nvSpPr>
+        <p:spPr>
+          <a:xfrm>
+            <a:off x="10925982" y="5715101"/>
+            <a:ext cx="3037271" cy="1610951"/>
+          </a:xfrm>
+          <a:prstGeom prst="rect">
+            <a:avLst/>
+          </a:prstGeom>
+          <a:noFill/>
+        </p:spPr>
+        <p:txBody>
+          <a:bodyPr wrap="square" lIns="0" tIns="0" rIns="0" bIns="0" anchor="t" rtlCol="0">
+            <a:noAutofit/>
+          </a:bodyPr>
+          <a:lstStyle/>
+          <a:p>
+            <a:pPr algn="l" marL="0" indent="0">
+              <a:lnSpc>
+                <a:spcPct val="100000"/>
+              </a:lnSpc>
+              <a:spcAft>
+                <a:spcPts val="1209"/>
+              </a:spcAft>
+              <a:buNone/>
+            </a:pPr>
+            <a:r>
+              <a:rPr lang="ru-RU" sz="2799" b="0" cap="none" spc="0" baseline="0" dirty="0">
+                <a:solidFill>
+                  <a:srgbClr val="C2D076"/>
+                </a:solidFill>
+                <a:latin typeface="Inter Light"/>
+                <a:cs typeface="Inter Light"/>
+              </a:rPr>
+              <a:t>Компилятор</a:t>
             </a:r>
             <a:endParaRPr lang="ru-RU" sz="2799"/>
+          </a:p>
+          <a:p>
+            <a:pPr algn="l" marL="0" indent="0">
+              <a:lnSpc>
+                <a:spcPct val="100000"/>
+              </a:lnSpc>
+              <a:buNone/>
+            </a:pPr>
+            <a:r>
+              <a:rPr lang="ru-RU" sz="2199" b="0" cap="none" spc="0" baseline="0" dirty="0">
+                <a:solidFill>
+                  <a:srgbClr val="FFFFFF"/>
+                </a:solidFill>
+                <a:latin typeface="Inter Light"/>
+                <a:cs typeface="Inter Light"/>
+              </a:rPr>
+              <a:t>Проверяет каждое число</a:t>
+            </a:r>
+            <a:endParaRPr lang="ru-RU" sz="2199"/>
+          </a:p>
+        </p:txBody>
+      </p:sp>
+      <p:sp>
+        <p:nvSpPr>
+          <p:cNvPr id="85" name="Badge 85"/>
+          <p:cNvSpPr/>
+          <p:nvPr/>
+        </p:nvSpPr>
+        <p:spPr>
+          <a:xfrm>
+            <a:off x="14226600" y="4665827"/>
+            <a:ext cx="771525" cy="771525"/>
+          </a:xfrm>
+          <a:prstGeom prst="ellipse">
+            <a:avLst/>
+          </a:prstGeom>
+          <a:solidFill>
+            <a:srgbClr val="C2D076"/>
+          </a:solidFill>
+          <a:ln>
+            <a:noFill/>
+          </a:ln>
+        </p:spPr>
+        <p:txBody>
+          <a:bodyPr lIns="0" tIns="0" rIns="0" bIns="0" anchor="ctr" wrap="none"/>
+          <a:lstStyle/>
+          <a:p>
+            <a:pPr algn="ctr"/>
+            <a:r>
+              <a:rPr lang="ru-RU" sz="2799" b="0" cap="none" spc="0" baseline="0">
+                <a:solidFill>
+                  <a:srgbClr val="000000"/>
+                </a:solidFill>
+                <a:latin typeface="Inter Light"/>
+                <a:cs typeface="Inter Light"/>
+              </a:rPr>
+              <a:t>5</a:t>
+            </a:r>
+          </a:p>
+        </p:txBody>
+      </p:sp>
+      <p:sp>
+        <p:nvSpPr>
+          <p:cNvPr id="86" name="Step 86"/>
+          <p:cNvSpPr txBox="1"/>
+          <p:nvPr/>
+        </p:nvSpPr>
+        <p:spPr>
+          <a:xfrm>
+            <a:off x="14226600" y="5715101"/>
+            <a:ext cx="3037271" cy="1610951"/>
+          </a:xfrm>
+          <a:prstGeom prst="rect">
+            <a:avLst/>
+          </a:prstGeom>
+          <a:noFill/>
+        </p:spPr>
+        <p:txBody>
+          <a:bodyPr wrap="square" lIns="0" tIns="0" rIns="0" bIns="0" anchor="t" rtlCol="0">
+            <a:noAutofit/>
+          </a:bodyPr>
+          <a:lstStyle/>
+          <a:p>
+            <a:pPr algn="l" marL="0" indent="0">
+              <a:lnSpc>
+                <a:spcPct val="100000"/>
+              </a:lnSpc>
+              <a:spcAft>
+                <a:spcPts val="1209"/>
+              </a:spcAft>
+              <a:buNone/>
+            </a:pPr>
+            <a:r>
+              <a:rPr lang="ru-RU" sz="2799" b="0" cap="none" spc="0" baseline="0" dirty="0">
+                <a:solidFill>
+                  <a:srgbClr val="C2D076"/>
+                </a:solidFill>
+                <a:latin typeface="Inter Light"/>
+                <a:cs typeface="Inter Light"/>
+              </a:rPr>
+              <a:t>Вёрстка</a:t>
+            </a:r>
+            <a:endParaRPr lang="ru-RU" sz="2799"/>
+          </a:p>
+          <a:p>
+            <a:pPr algn="l" marL="0" indent="0">
+              <a:lnSpc>
+                <a:spcPct val="100000"/>
+              </a:lnSpc>
+              <a:buNone/>
+            </a:pPr>
+            <a:r>
+              <a:rPr lang="ru-RU" sz="2199" b="0" cap="none" spc="0" baseline="0" dirty="0">
+                <a:solidFill>
+                  <a:srgbClr val="FFFFFF"/>
+                </a:solidFill>
+                <a:latin typeface="Inter Light"/>
+                <a:cs typeface="Inter Light"/>
+              </a:rPr>
+              <a:t>Собирает слайды по дизайн-⁠системе шаблона</a:t>
+            </a:r>
+            <a:endParaRPr lang="ru-RU" sz="2199"/>
           </a:p>
         </p:txBody>
       </p:sp>
@@ -6621,7 +7050,7 @@
         <p:spPr>
           <a:xfrm>
             <a:off x="619057" y="2623820"/>
-            <a:ext cx="15727680" cy="809548"/>
+            <a:ext cx="15727680" cy="944880"/>
           </a:xfrm>
           <a:prstGeom prst="rect">
             <a:avLst/>
@@ -6664,735 +7093,7 @@
                 <a:cs typeface="Inter Medium"/>
                 <a:sym typeface="Inter Medium"/>
               </a:rPr>
-              <a:t>Целостность — основная категория проверок</a:t>
-            </a:r>
-            <a:endParaRPr>
-              <a:latin typeface="Inter Medium"/>
-              <a:ea typeface="Inter Medium"/>
-              <a:cs typeface="Inter Medium"/>
-              <a:sym typeface="Inter Medium"/>
-            </a:endParaRPr>
-          </a:p>
-        </p:txBody>
-      </p:sp>
-      <p:sp>
-        <p:nvSpPr>
-          <p:cNvPr id="43" name="Unit 43"/>
-          <p:cNvSpPr txBox="1"/>
-          <p:nvPr/>
-        </p:nvSpPr>
-        <p:spPr>
-          <a:xfrm>
-            <a:off x="1024128" y="3947718"/>
-            <a:ext cx="16239744" cy="299720"/>
-          </a:xfrm>
-          <a:prstGeom prst="rect">
-            <a:avLst/>
-          </a:prstGeom>
-          <a:noFill/>
-        </p:spPr>
-        <p:txBody>
-          <a:bodyPr wrap="square" lIns="0" tIns="0" rIns="0" bIns="0" anchor="t" rtlCol="0">
-            <a:noAutofit/>
-          </a:bodyPr>
-          <a:lstStyle/>
-          <a:p>
-            <a:pPr algn="l" marL="0" indent="0">
-              <a:lnSpc>
-                <a:spcPct val="100000"/>
-              </a:lnSpc>
-              <a:buNone/>
-            </a:pPr>
-            <a:r>
-              <a:rPr lang="ru-RU" sz="1800" b="0" cap="none" spc="0" baseline="0" dirty="0">
-                <a:solidFill>
-                  <a:srgbClr val="FFFFFF"/>
-                </a:solidFill>
-                <a:latin typeface="Inter Light"/>
-                <a:cs typeface="Inter Light"/>
-              </a:rPr>
-              <a:t>Число проверок по категориям</a:t>
-            </a:r>
-            <a:endParaRPr lang="ru-RU" sz="1800"/>
-          </a:p>
-        </p:txBody>
-      </p:sp>
-      <p:graphicFrame>
-        <p:nvGraphicFramePr>
-          <p:cNvPr id="44" name="Chart 43"/>
-          <p:cNvGraphicFramePr>
-            <a:graphicFrameLocks noGrp="1"/>
-          </p:cNvGraphicFramePr>
-          <p:nvPr/>
-        </p:nvGraphicFramePr>
-        <p:xfrm>
-          <a:off x="1024128" y="4340021"/>
-          <a:ext cx="16239744" cy="3321929"/>
-        </p:xfrm>
-        <a:graphic>
-          <a:graphicData uri="http://schemas.openxmlformats.org/drawingml/2006/chart">
-            <c:chart xmlns:c="http://schemas.openxmlformats.org/drawingml/2006/chart" r:id="rId2"/>
-          </a:graphicData>
-        </a:graphic>
-      </p:graphicFrame>
-      <p:sp>
-        <p:nvSpPr>
-          <p:cNvPr id="45" name="Conclusion strip 45"/>
-          <p:cNvSpPr/>
-          <p:nvPr/>
-        </p:nvSpPr>
-        <p:spPr>
-          <a:xfrm>
-            <a:off x="1024128" y="8094004"/>
-            <a:ext cx="16239744" cy="892754"/>
-          </a:xfrm>
-          <a:prstGeom prst="roundRect">
-            <a:avLst>
-              <a:gd name="adj" fmla="val 12290"/>
-            </a:avLst>
-          </a:prstGeom>
-          <a:solidFill>
-            <a:srgbClr val="000000"/>
-          </a:solidFill>
-          <a:ln>
-            <a:noFill/>
-          </a:ln>
-        </p:spPr>
-      </p:sp>
-      <p:sp>
-        <p:nvSpPr>
-          <p:cNvPr id="46" name="Conclusion bar 46"/>
-          <p:cNvSpPr/>
-          <p:nvPr/>
-        </p:nvSpPr>
-        <p:spPr>
-          <a:xfrm>
-            <a:off x="1379601" y="8357054"/>
-            <a:ext cx="61722" cy="366654"/>
-          </a:xfrm>
-          <a:prstGeom prst="rect">
-            <a:avLst/>
-          </a:prstGeom>
-          <a:solidFill>
-            <a:srgbClr val="C2D076"/>
-          </a:solidFill>
-          <a:ln>
-            <a:noFill/>
-          </a:ln>
-        </p:spPr>
-      </p:sp>
-      <p:sp>
-        <p:nvSpPr>
-          <p:cNvPr id="47" name="Conclusion 47"/>
-          <p:cNvSpPr txBox="1"/>
-          <p:nvPr/>
-        </p:nvSpPr>
-        <p:spPr>
-          <a:xfrm>
-            <a:off x="1725701" y="8314397"/>
-            <a:ext cx="15182698" cy="451968"/>
-          </a:xfrm>
-          <a:prstGeom prst="rect">
-            <a:avLst/>
-          </a:prstGeom>
-          <a:noFill/>
-        </p:spPr>
-        <p:txBody>
-          <a:bodyPr wrap="square" lIns="0" tIns="0" rIns="0" bIns="0" anchor="t" rtlCol="0">
-            <a:noAutofit/>
-          </a:bodyPr>
-          <a:lstStyle/>
-          <a:p>
-            <a:pPr algn="l" marL="0" indent="0">
-              <a:lnSpc>
-                <a:spcPct val="100000"/>
-              </a:lnSpc>
-              <a:buNone/>
-            </a:pPr>
-            <a:r>
-              <a:rPr lang="ru-RU" sz="2799" b="0" cap="none" spc="0" baseline="0" dirty="0">
-                <a:solidFill>
-                  <a:srgbClr val="C2D076"/>
-                </a:solidFill>
-                <a:latin typeface="Inter Light"/>
-                <a:cs typeface="Inter Light"/>
-              </a:rPr>
-              <a:t>Всего </a:t>
-            </a:r>
-            <a:r>
-              <a:rPr lang="ru-RU" sz="2799" b="0" cap="none" spc="0" baseline="0" dirty="0">
-                <a:solidFill>
-                  <a:srgbClr val="C2D076"/>
-                </a:solidFill>
-                <a:latin typeface="Inter Light"/>
-                <a:cs typeface="Inter Light"/>
-              </a:rPr>
-              <a:t>41 </a:t>
-            </a:r>
-            <a:r>
-              <a:rPr lang="ru-RU" sz="2799" b="0" cap="none" spc="0" baseline="0" dirty="0">
-                <a:solidFill>
-                  <a:srgbClr val="C2D076"/>
-                </a:solidFill>
-                <a:latin typeface="Inter Light"/>
-                <a:cs typeface="Inter Light"/>
-              </a:rPr>
-              <a:t>проверка: </a:t>
-            </a:r>
-            <a:r>
-              <a:rPr lang="ru-RU" sz="2799" b="0" cap="none" spc="0" baseline="0" dirty="0">
-                <a:solidFill>
-                  <a:srgbClr val="C2D076"/>
-                </a:solidFill>
-                <a:latin typeface="Inter Light"/>
-                <a:cs typeface="Inter Light"/>
-              </a:rPr>
-              <a:t>12 </a:t>
-            </a:r>
-            <a:r>
-              <a:rPr lang="ru-RU" sz="2799" b="0" cap="none" spc="0" baseline="0" dirty="0">
-                <a:solidFill>
-                  <a:srgbClr val="C2D076"/>
-                </a:solidFill>
-                <a:latin typeface="Inter Light"/>
-                <a:cs typeface="Inter Light"/>
-              </a:rPr>
-              <a:t>на целостность, </a:t>
-            </a:r>
-            <a:r>
-              <a:rPr lang="ru-RU" sz="2799" b="0" cap="none" spc="0" baseline="0" dirty="0">
-                <a:solidFill>
-                  <a:srgbClr val="C2D076"/>
-                </a:solidFill>
-                <a:latin typeface="Inter Light"/>
-                <a:cs typeface="Inter Light"/>
-              </a:rPr>
-              <a:t>11 </a:t>
-            </a:r>
-            <a:r>
-              <a:rPr lang="ru-RU" sz="2799" b="0" cap="none" spc="0" baseline="0" dirty="0">
-                <a:solidFill>
-                  <a:srgbClr val="C2D076"/>
-                </a:solidFill>
-                <a:latin typeface="Inter Light"/>
-                <a:cs typeface="Inter Light"/>
-              </a:rPr>
-              <a:t>на вёрстку</a:t>
-            </a:r>
-            <a:endParaRPr lang="ru-RU" sz="2799"/>
-          </a:p>
-        </p:txBody>
-      </p:sp>
-    </p:spTree>
-  </p:cSld>
-  <p:clrMapOvr>
-    <a:masterClrMapping/>
-  </p:clrMapOvr>
-</p:sld>
-</file>
-
-<file path=ppt/slides/slide6.xml><?xml version="1.0" encoding="utf-8"?>
-<p:sld xmlns:a="http://schemas.openxmlformats.org/drawingml/2006/main" xmlns:p="http://schemas.openxmlformats.org/presentationml/2006/main" xmlns:r="http://schemas.openxmlformats.org/officeDocument/2006/relationships">
-  <p:cSld>
-    <p:bg>
-      <p:bgPr>
-        <a:solidFill>
-          <a:srgbClr val="001514"/>
-        </a:solidFill>
-      </p:bgPr>
-    </p:bg>
-    <p:spTree>
-      <p:nvGrpSpPr>
-        <p:cNvPr id="1" name=""/>
-        <p:cNvGrpSpPr/>
-        <p:nvPr/>
-      </p:nvGrpSpPr>
-      <p:grpSpPr/>
-      <p:sp>
-        <p:nvSpPr>
-          <p:cNvPr id="42" name="Google Shape;42;p8"/>
-          <p:cNvSpPr txBox="1"/>
-          <p:nvPr/>
-        </p:nvSpPr>
-        <p:spPr>
-          <a:xfrm>
-            <a:off x="619057" y="2623820"/>
-            <a:ext cx="15727680" cy="809548"/>
-          </a:xfrm>
-          <a:prstGeom prst="rect">
-            <a:avLst/>
-          </a:prstGeom>
-          <a:noFill/>
-          <a:ln>
-            <a:noFill/>
-          </a:ln>
-        </p:spPr>
-        <p:txBody>
-          <a:bodyPr anchorCtr="0" anchor="t" bIns="0" lIns="0" spcFirstLastPara="1" rIns="0" wrap="square" tIns="0">
-            <a:spAutoFit/>
-          </a:bodyPr>
-          <a:lstStyle/>
-          <a:p>
-            <a:pPr indent="0" lvl="1" marL="0" marR="0" rtl="0" algn="l">
-              <a:lnSpc>
-                <a:spcPct val="120000"/>
-              </a:lnSpc>
-              <a:spcBef>
-                <a:spcPts val="0"/>
-              </a:spcBef>
-              <a:spcAft>
-                <a:spcPts val="0"/>
-              </a:spcAft>
-              <a:buClr>
-                <a:srgbClr val="C2D076"/>
-              </a:buClr>
-              <a:buSzPts val="5600"/>
-              <a:buFont typeface="Inter Medium"/>
-              <a:buNone/>
-            </a:pPr>
-            <a:r>
-              <a:rPr i="0" lang="ru-RU" sz="4712" u="none" cap="none" strike="noStrike">
-                <a:solidFill>
-                  <a:srgbClr val="C2D076"/>
-                </a:solidFill>
-                <a:latin typeface="Inter Medium"/>
-                <a:ea typeface="Inter Medium"/>
-                <a:cs typeface="Inter Medium"/>
-                <a:sym typeface="Inter Medium"/>
-              </a:rPr>
-              <a:t>9 демонстрационных презентаций без лишних чисел</a:t>
-            </a:r>
-            <a:endParaRPr>
-              <a:latin typeface="Inter Medium"/>
-              <a:ea typeface="Inter Medium"/>
-              <a:cs typeface="Inter Medium"/>
-              <a:sym typeface="Inter Medium"/>
-            </a:endParaRPr>
-          </a:p>
-        </p:txBody>
-      </p:sp>
-      <p:sp>
-        <p:nvSpPr>
-          <p:cNvPr id="61" name="Card 61"/>
-          <p:cNvSpPr/>
-          <p:nvPr/>
-        </p:nvSpPr>
-        <p:spPr>
-          <a:xfrm>
-            <a:off x="1024128" y="3947718"/>
-            <a:ext cx="5120640" cy="4299846"/>
-          </a:xfrm>
-          <a:prstGeom prst="roundRect">
-            <a:avLst>
-              <a:gd name="adj" fmla="val 2551"/>
-            </a:avLst>
-          </a:prstGeom>
-          <a:solidFill>
-            <a:srgbClr val="000000"/>
-          </a:solidFill>
-          <a:ln>
-            <a:noFill/>
-          </a:ln>
-        </p:spPr>
-      </p:sp>
-      <p:sp>
-        <p:nvSpPr>
-          <p:cNvPr id="62" name="Figure 62"/>
-          <p:cNvSpPr txBox="1"/>
-          <p:nvPr/>
-        </p:nvSpPr>
-        <p:spPr>
-          <a:xfrm>
-            <a:off x="1528013" y="4221957"/>
-            <a:ext cx="4104691" cy="1341120"/>
-          </a:xfrm>
-          <a:prstGeom prst="rect">
-            <a:avLst/>
-          </a:prstGeom>
-          <a:noFill/>
-        </p:spPr>
-        <p:txBody>
-          <a:bodyPr wrap="square" lIns="0" tIns="0" rIns="0" bIns="0" anchor="b" rtlCol="0">
-            <a:noAutofit/>
-          </a:bodyPr>
-          <a:lstStyle/>
-          <a:p>
-            <a:pPr algn="l" marL="0" indent="0">
-              <a:lnSpc>
-                <a:spcPct val="100000"/>
-              </a:lnSpc>
-              <a:buNone/>
-            </a:pPr>
-            <a:r>
-              <a:rPr lang="ru-RU" sz="8800" b="1" cap="none" spc="0" baseline="0" dirty="0">
-                <a:solidFill>
-                  <a:srgbClr val="C2D076"/>
-                </a:solidFill>
-                <a:latin typeface="Inter Light"/>
-                <a:cs typeface="Inter Light"/>
-              </a:rPr>
-              <a:t>9</a:t>
-            </a:r>
-            <a:endParaRPr lang="ru-RU" sz="8800"/>
-          </a:p>
-        </p:txBody>
-      </p:sp>
-      <p:sp>
-        <p:nvSpPr>
-          <p:cNvPr id="63" name="Label 63"/>
-          <p:cNvSpPr txBox="1"/>
-          <p:nvPr/>
-        </p:nvSpPr>
-        <p:spPr>
-          <a:xfrm>
-            <a:off x="1536192" y="5671090"/>
-            <a:ext cx="4096512" cy="2064410"/>
-          </a:xfrm>
-          <a:prstGeom prst="rect">
-            <a:avLst/>
-          </a:prstGeom>
-          <a:noFill/>
-        </p:spPr>
-        <p:txBody>
-          <a:bodyPr wrap="square" lIns="0" tIns="0" rIns="0" bIns="0" anchor="t" rtlCol="0">
-            <a:noAutofit/>
-          </a:bodyPr>
-          <a:lstStyle/>
-          <a:p>
-            <a:pPr algn="l" marL="0" indent="0">
-              <a:lnSpc>
-                <a:spcPct val="100000"/>
-              </a:lnSpc>
-              <a:buNone/>
-            </a:pPr>
-            <a:r>
-              <a:rPr lang="ru-RU" sz="2799" b="0" cap="none" spc="0" baseline="0" dirty="0">
-                <a:solidFill>
-                  <a:srgbClr val="FFFFFF"/>
-                </a:solidFill>
-                <a:latin typeface="Inter Light"/>
-                <a:cs typeface="Inter Light"/>
-              </a:rPr>
-              <a:t>Демо-⁠презентаций</a:t>
-            </a:r>
-            <a:endParaRPr lang="ru-RU" sz="2799"/>
-          </a:p>
-        </p:txBody>
-      </p:sp>
-      <p:sp>
-        <p:nvSpPr>
-          <p:cNvPr id="64" name="Card 64"/>
-          <p:cNvSpPr/>
-          <p:nvPr/>
-        </p:nvSpPr>
-        <p:spPr>
-          <a:xfrm>
-            <a:off x="6583680" y="3947718"/>
-            <a:ext cx="5120640" cy="4299846"/>
-          </a:xfrm>
-          <a:prstGeom prst="roundRect">
-            <a:avLst>
-              <a:gd name="adj" fmla="val 2551"/>
-            </a:avLst>
-          </a:prstGeom>
-          <a:solidFill>
-            <a:srgbClr val="000000"/>
-          </a:solidFill>
-          <a:ln>
-            <a:noFill/>
-          </a:ln>
-        </p:spPr>
-      </p:sp>
-      <p:sp>
-        <p:nvSpPr>
-          <p:cNvPr id="65" name="Figure 65"/>
-          <p:cNvSpPr txBox="1"/>
-          <p:nvPr/>
-        </p:nvSpPr>
-        <p:spPr>
-          <a:xfrm>
-            <a:off x="7094987" y="4221957"/>
-            <a:ext cx="4097269" cy="1341120"/>
-          </a:xfrm>
-          <a:prstGeom prst="rect">
-            <a:avLst/>
-          </a:prstGeom>
-          <a:noFill/>
-        </p:spPr>
-        <p:txBody>
-          <a:bodyPr wrap="square" lIns="0" tIns="0" rIns="0" bIns="0" anchor="b" rtlCol="0">
-            <a:noAutofit/>
-          </a:bodyPr>
-          <a:lstStyle/>
-          <a:p>
-            <a:pPr algn="l" marL="0" indent="0">
-              <a:lnSpc>
-                <a:spcPct val="100000"/>
-              </a:lnSpc>
-              <a:buNone/>
-            </a:pPr>
-            <a:r>
-              <a:rPr lang="ru-RU" sz="4712" b="1" cap="none" spc="0" baseline="0" dirty="0">
-                <a:solidFill>
-                  <a:srgbClr val="FFFFFF"/>
-                </a:solidFill>
-                <a:latin typeface="Inter Light"/>
-                <a:cs typeface="Inter Light"/>
-              </a:rPr>
-              <a:t>116</a:t>
-            </a:r>
-            <a:r>
-              <a:rPr lang="ru-RU" sz="4712" b="0" cap="none" spc="0" baseline="0" dirty="0">
-                <a:solidFill>
-                  <a:srgbClr val="FFFFFF"/>
-                </a:solidFill>
-                <a:latin typeface="Inter Light"/>
-                <a:cs typeface="Inter Light"/>
-              </a:rPr>
-              <a:t> → </a:t>
-            </a:r>
-            <a:r>
-              <a:rPr lang="ru-RU" sz="8800" b="1" cap="none" spc="0" baseline="0" dirty="0">
-                <a:solidFill>
-                  <a:srgbClr val="C2D076"/>
-                </a:solidFill>
-                <a:latin typeface="Inter Light"/>
-                <a:cs typeface="Inter Light"/>
-              </a:rPr>
-              <a:t>123</a:t>
-            </a:r>
-            <a:endParaRPr lang="ru-RU" sz="8800"/>
-          </a:p>
-        </p:txBody>
-      </p:sp>
-      <p:sp>
-        <p:nvSpPr>
-          <p:cNvPr id="66" name="Label 66"/>
-          <p:cNvSpPr txBox="1"/>
-          <p:nvPr/>
-        </p:nvSpPr>
-        <p:spPr>
-          <a:xfrm>
-            <a:off x="7095744" y="5671090"/>
-            <a:ext cx="4096512" cy="2064410"/>
-          </a:xfrm>
-          <a:prstGeom prst="rect">
-            <a:avLst/>
-          </a:prstGeom>
-          <a:noFill/>
-        </p:spPr>
-        <p:txBody>
-          <a:bodyPr wrap="square" lIns="0" tIns="0" rIns="0" bIns="0" anchor="t" rtlCol="0">
-            <a:noAutofit/>
-          </a:bodyPr>
-          <a:lstStyle/>
-          <a:p>
-            <a:pPr algn="l" marL="0" indent="0">
-              <a:lnSpc>
-                <a:spcPct val="100000"/>
-              </a:lnSpc>
-              <a:buNone/>
-            </a:pPr>
-            <a:r>
-              <a:rPr lang="ru-RU" sz="2799" b="0" cap="none" spc="0" baseline="0" dirty="0">
-                <a:solidFill>
-                  <a:srgbClr val="FFFFFF"/>
-                </a:solidFill>
-                <a:latin typeface="Inter Light"/>
-                <a:cs typeface="Inter Light"/>
-              </a:rPr>
-              <a:t>Сверенных чисел</a:t>
-            </a:r>
-            <a:endParaRPr lang="ru-RU" sz="2799"/>
-          </a:p>
-        </p:txBody>
-      </p:sp>
-      <p:sp>
-        <p:nvSpPr>
-          <p:cNvPr id="67" name="Card 67"/>
-          <p:cNvSpPr/>
-          <p:nvPr/>
-        </p:nvSpPr>
-        <p:spPr>
-          <a:xfrm>
-            <a:off x="12143232" y="3947718"/>
-            <a:ext cx="5120640" cy="4299846"/>
-          </a:xfrm>
-          <a:prstGeom prst="roundRect">
-            <a:avLst>
-              <a:gd name="adj" fmla="val 2551"/>
-            </a:avLst>
-          </a:prstGeom>
-          <a:solidFill>
-            <a:srgbClr val="000000"/>
-          </a:solidFill>
-          <a:ln>
-            <a:noFill/>
-          </a:ln>
-        </p:spPr>
-      </p:sp>
-      <p:sp>
-        <p:nvSpPr>
-          <p:cNvPr id="68" name="Figure 68"/>
-          <p:cNvSpPr txBox="1"/>
-          <p:nvPr/>
-        </p:nvSpPr>
-        <p:spPr>
-          <a:xfrm>
-            <a:off x="12651029" y="4221957"/>
-            <a:ext cx="4100779" cy="1341120"/>
-          </a:xfrm>
-          <a:prstGeom prst="rect">
-            <a:avLst/>
-          </a:prstGeom>
-          <a:noFill/>
-        </p:spPr>
-        <p:txBody>
-          <a:bodyPr wrap="square" lIns="0" tIns="0" rIns="0" bIns="0" anchor="b" rtlCol="0">
-            <a:noAutofit/>
-          </a:bodyPr>
-          <a:lstStyle/>
-          <a:p>
-            <a:pPr algn="l" marL="0" indent="0">
-              <a:lnSpc>
-                <a:spcPct val="100000"/>
-              </a:lnSpc>
-              <a:buNone/>
-            </a:pPr>
-            <a:r>
-              <a:rPr lang="ru-RU" sz="8800" b="1" cap="none" spc="0" baseline="0" dirty="0">
-                <a:solidFill>
-                  <a:srgbClr val="C2D076"/>
-                </a:solidFill>
-                <a:latin typeface="Inter Light"/>
-                <a:cs typeface="Inter Light"/>
-              </a:rPr>
-              <a:t>0</a:t>
-            </a:r>
-            <a:endParaRPr lang="ru-RU" sz="8800"/>
-          </a:p>
-        </p:txBody>
-      </p:sp>
-      <p:sp>
-        <p:nvSpPr>
-          <p:cNvPr id="69" name="Label 69"/>
-          <p:cNvSpPr txBox="1"/>
-          <p:nvPr/>
-        </p:nvSpPr>
-        <p:spPr>
-          <a:xfrm>
-            <a:off x="12655296" y="5671090"/>
-            <a:ext cx="4096512" cy="2064410"/>
-          </a:xfrm>
-          <a:prstGeom prst="rect">
-            <a:avLst/>
-          </a:prstGeom>
-          <a:noFill/>
-        </p:spPr>
-        <p:txBody>
-          <a:bodyPr wrap="square" lIns="0" tIns="0" rIns="0" bIns="0" anchor="t" rtlCol="0">
-            <a:noAutofit/>
-          </a:bodyPr>
-          <a:lstStyle/>
-          <a:p>
-            <a:pPr algn="l" marL="0" indent="0">
-              <a:lnSpc>
-                <a:spcPct val="100000"/>
-              </a:lnSpc>
-              <a:buNone/>
-            </a:pPr>
-            <a:r>
-              <a:rPr lang="ru-RU" sz="2799" b="0" cap="none" spc="0" baseline="0" dirty="0">
-                <a:solidFill>
-                  <a:srgbClr val="FFFFFF"/>
-                </a:solidFill>
-                <a:latin typeface="Inter Light"/>
-                <a:cs typeface="Inter Light"/>
-              </a:rPr>
-              <a:t>Лишних чисел</a:t>
-            </a:r>
-            <a:endParaRPr lang="ru-RU" sz="2799"/>
-          </a:p>
-        </p:txBody>
-      </p:sp>
-    </p:spTree>
-  </p:cSld>
-  <p:clrMapOvr>
-    <a:masterClrMapping/>
-  </p:clrMapOvr>
-</p:sld>
-</file>
-
-<file path=ppt/slides/slide7.xml><?xml version="1.0" encoding="utf-8"?>
-<p:sld xmlns:a="http://schemas.openxmlformats.org/drawingml/2006/main" xmlns:p="http://schemas.openxmlformats.org/presentationml/2006/main" xmlns:r="http://schemas.openxmlformats.org/officeDocument/2006/relationships">
-  <p:cSld>
-    <p:bg>
-      <p:bgPr>
-        <a:solidFill>
-          <a:srgbClr val="001514"/>
-        </a:solidFill>
-      </p:bgPr>
-    </p:bg>
-    <p:spTree>
-      <p:nvGrpSpPr>
-        <p:cNvPr id="1" name=""/>
-        <p:cNvGrpSpPr/>
-        <p:nvPr/>
-      </p:nvGrpSpPr>
-      <p:grpSpPr/>
-      <p:sp>
-        <p:nvSpPr>
-          <p:cNvPr id="42" name="Google Shape;42;p8"/>
-          <p:cNvSpPr txBox="1"/>
-          <p:nvPr/>
-        </p:nvSpPr>
-        <p:spPr>
-          <a:xfrm>
-            <a:off x="619057" y="2623820"/>
-            <a:ext cx="15727680" cy="944880"/>
-          </a:xfrm>
-          <a:prstGeom prst="rect">
-            <a:avLst/>
-          </a:prstGeom>
-          <a:noFill/>
-          <a:ln>
-            <a:noFill/>
-          </a:ln>
-        </p:spPr>
-        <p:txBody>
-          <a:bodyPr anchorCtr="0" anchor="t" bIns="0" lIns="0" spcFirstLastPara="1" rIns="0" wrap="square" tIns="0">
-            <a:spAutoFit/>
-          </a:bodyPr>
-          <a:lstStyle/>
-          <a:p>
-            <a:pPr indent="0" lvl="1" marL="0" marR="0" rtl="0" algn="l">
-              <a:lnSpc>
-                <a:spcPct val="120000"/>
-              </a:lnSpc>
-              <a:spcBef>
-                <a:spcPts val="0"/>
-              </a:spcBef>
-              <a:spcAft>
-                <a:spcPts val="0"/>
-              </a:spcAft>
-              <a:buClr>
-                <a:srgbClr val="C2D076"/>
-              </a:buClr>
-              <a:buSzPts val="5600"/>
-              <a:buFont typeface="Inter Medium"/>
-              <a:buNone/>
-            </a:pPr>
-            <a:r>
-              <a:rPr i="0" lang="ru-RU" sz="4712" u="none" cap="none" strike="noStrike">
-                <a:solidFill>
-                  <a:srgbClr val="C2D076"/>
-                </a:solidFill>
-                <a:latin typeface="Inter Medium"/>
-                <a:ea typeface="Inter Medium"/>
-                <a:cs typeface="Inter Medium"/>
-                <a:sym typeface="Inter Medium"/>
-              </a:rPr>
-              <a:t>87 шаблонов и 99/100 качества</a:t>
+              <a:t>Одно содержание, три подхода к подаче</a:t>
             </a:r>
             <a:endParaRPr>
               <a:latin typeface="Inter Medium"/>
@@ -7413,7 +7114,7 @@
         </p:nvGraphicFramePr>
         <p:xfrm>
           <a:off x="1024128" y="4137660"/>
-          <a:ext cx="11692615" cy="4599318"/>
+          <a:ext cx="16239744" cy="4599318"/>
         </p:xfrm>
         <a:graphic>
           <a:graphicData uri="http://schemas.openxmlformats.org/drawingml/2006/table">
@@ -7422,8 +7123,9 @@
                 <a:tableStyleId>{2D5ABB26-0587-4C30-8999-92F81FD0307C}</a:tableStyleId>
               </a:tblPr>
               <a:tblGrid>
-                <a:gridCol w="5846308"/>
-                <a:gridCol w="5846307"/>
+                <a:gridCol w="2992235"/>
+                <a:gridCol w="7485664"/>
+                <a:gridCol w="5761845"/>
               </a:tblGrid>
               <a:tr h="919863">
                 <a:tc>
@@ -7448,7 +7150,7 @@
                           <a:ea typeface="Inter Light"/>
                           <a:cs typeface="Inter Light"/>
                         </a:rPr>
-                        <a:t>Показатель</a:t>
+                        <a:t>Вариант</a:t>
                       </a:r>
                     </a:p>
                   </a:txBody>
@@ -7492,7 +7194,51 @@
                           <a:ea typeface="Inter Light"/>
                           <a:cs typeface="Inter Light"/>
                         </a:rPr>
-                        <a:t>Значение</a:t>
+                        <a:t>Подача</a:t>
+                      </a:r>
+                    </a:p>
+                  </a:txBody>
+                  <a:tcPr marL="177800" marR="177800" marT="76200" marB="76200" anchor="ctr">
+                    <a:lnL w="0">
+                      <a:noFill/>
+                    </a:lnL>
+                    <a:lnR w="0">
+                      <a:noFill/>
+                    </a:lnR>
+                    <a:lnT w="0">
+                      <a:noFill/>
+                    </a:lnT>
+                    <a:lnB w="0">
+                      <a:noFill/>
+                    </a:lnB>
+                    <a:solidFill>
+                      <a:srgbClr val="C2D076"/>
+                    </a:solidFill>
+                  </a:tcPr>
+                </a:tc>
+                <a:tc>
+                  <a:txBody>
+                    <a:bodyPr wrap="square"/>
+                    <a:lstStyle/>
+                    <a:p>
+                      <a:pPr algn="l">
+                        <a:spcBef>
+                          <a:spcPts val="0"/>
+                        </a:spcBef>
+                        <a:spcAft>
+                          <a:spcPts val="0"/>
+                        </a:spcAft>
+                      </a:pPr>
+                      <a:r>
+                        <a:rPr sz="2799" b="0" i="0" cap="none" spc="0" baseline="0" lang="ru-RU">
+                          <a:solidFill>
+                            <a:srgbClr val="000000"/>
+                          </a:solidFill>
+                          <a:latin typeface="Inter Light"/>
+                          <a:ea typeface="Inter Light"/>
+                          <a:cs typeface="Inter Light"/>
+                        </a:rPr>
+                        <a:t>Когда подходит</a:t>
                       </a:r>
                     </a:p>
                   </a:txBody>
@@ -7538,7 +7284,7 @@
                           <a:ea typeface="Inter Light"/>
                           <a:cs typeface="Inter Light"/>
                         </a:rPr>
-                        <a:t>Чужих шаблонов</a:t>
+                        <a:t>Структурный</a:t>
                       </a:r>
                     </a:p>
                   </a:txBody>
@@ -7575,7 +7321,7 @@
                         </a:spcAft>
                       </a:pPr>
                       <a:r>
-                        <a:rPr sz="2799" b="0" i="0" cap="none" spc="0" baseline="0">
+                        <a:rPr sz="2799" b="0" i="0" cap="none" spc="0" baseline="0" lang="ru-RU">
                           <a:solidFill>
                             <a:srgbClr val="FFFFFF"/>
                           </a:solidFill>
@@ -7583,7 +7329,52 @@
                           <a:ea typeface="Inter Light"/>
                           <a:cs typeface="Inter Light"/>
                         </a:rPr>
-                        <a:t>87</a:t>
+                        <a:t>одна мысль на слайд, строгая сетка</a:t>
+                      </a:r>
+                    </a:p>
+                  </a:txBody>
+                  <a:tcPr marL="177800" marR="177800" marT="76200" marB="76200" anchor="ctr">
+                    <a:lnL w="0">
+                      <a:noFill/>
+                    </a:lnL>
+                    <a:lnR w="0">
+                      <a:noFill/>
+                    </a:lnR>
+                    <a:lnT w="0">
+                      <a:noFill/>
+                    </a:lnT>
+                    <a:lnB w="9525" cap="flat" cmpd="sng" algn="ctr">
+                      <a:solidFill>
+                        <a:srgbClr val="384848"/>
+                      </a:solidFill>
+                      <a:prstDash val="solid"/>
+                    </a:lnB>
+                    <a:noFill/>
+                  </a:tcPr>
+                </a:tc>
+                <a:tc>
+                  <a:txBody>
+                    <a:bodyPr wrap="square"/>
+                    <a:lstStyle/>
+                    <a:p>
+                      <a:pPr algn="l">
+                        <a:spcBef>
+                          <a:spcPts val="0"/>
+                        </a:spcBef>
+                        <a:spcAft>
+                          <a:spcPts val="0"/>
+                        </a:spcAft>
+                      </a:pPr>
+                      <a:r>
+                        <a:rPr sz="2799" b="0" i="0" cap="none" spc="0" baseline="0" lang="ru-RU">
+                          <a:solidFill>
+                            <a:srgbClr val="FFFFFF"/>
+                          </a:solidFill>
+                          <a:latin typeface="Inter Light"/>
+                          <a:ea typeface="Inter Light"/>
+                          <a:cs typeface="Inter Light"/>
+                        </a:rPr>
+                        <a:t>отчёт и защита проекта</a:t>
                       </a:r>
                     </a:p>
                   </a:txBody>
@@ -7630,7 +7421,7 @@
                           <a:ea typeface="Inter Light"/>
                           <a:cs typeface="Inter Light"/>
                         </a:rPr>
-                        <a:t>Средняя оценка качества</a:t>
+                        <a:t>Визуальный</a:t>
                       </a:r>
                     </a:p>
                   </a:txBody>
@@ -7667,7 +7458,7 @@
                         </a:spcAft>
                       </a:pPr>
                       <a:r>
-                        <a:rPr sz="2799" b="0" i="0" cap="none" spc="0" baseline="0">
+                        <a:rPr sz="2799" b="0" i="0" cap="none" spc="0" baseline="0" lang="ru-RU">
                           <a:solidFill>
                             <a:srgbClr val="FFFFFF"/>
                           </a:solidFill>
@@ -7675,7 +7466,52 @@
                           <a:ea typeface="Inter Light"/>
                           <a:cs typeface="Inter Light"/>
                         </a:rPr>
-                        <a:t>99/100</a:t>
+                        <a:t>крупные цифры и наглядные схемы</a:t>
+                      </a:r>
+                    </a:p>
+                  </a:txBody>
+                  <a:tcPr marL="177800" marR="177800" marT="76200" marB="76200" anchor="ctr">
+                    <a:lnL w="0">
+                      <a:noFill/>
+                    </a:lnL>
+                    <a:lnR w="0">
+                      <a:noFill/>
+                    </a:lnR>
+                    <a:lnT w="0">
+                      <a:noFill/>
+                    </a:lnT>
+                    <a:lnB w="9525" cap="flat" cmpd="sng" algn="ctr">
+                      <a:solidFill>
+                        <a:srgbClr val="384848"/>
+                      </a:solidFill>
+                      <a:prstDash val="solid"/>
+                    </a:lnB>
+                    <a:noFill/>
+                  </a:tcPr>
+                </a:tc>
+                <a:tc>
+                  <a:txBody>
+                    <a:bodyPr wrap="square"/>
+                    <a:lstStyle/>
+                    <a:p>
+                      <a:pPr algn="l">
+                        <a:spcBef>
+                          <a:spcPts val="0"/>
+                        </a:spcBef>
+                        <a:spcAft>
+                          <a:spcPts val="0"/>
+                        </a:spcAft>
+                      </a:pPr>
+                      <a:r>
+                        <a:rPr sz="2799" b="0" i="0" cap="none" spc="0" baseline="0" lang="ru-RU">
+                          <a:solidFill>
+                            <a:srgbClr val="FFFFFF"/>
+                          </a:solidFill>
+                          <a:latin typeface="Inter Light"/>
+                          <a:ea typeface="Inter Light"/>
+                          <a:cs typeface="Inter Light"/>
+                        </a:rPr>
+                        <a:t>питч и выступление со сцены</a:t>
                       </a:r>
                     </a:p>
                   </a:txBody>
@@ -7722,7 +7558,7 @@
                           <a:ea typeface="Inter Light"/>
                           <a:cs typeface="Inter Light"/>
                         </a:rPr>
-                        <a:t>Форматов</a:t>
+                        <a:t>Компактный</a:t>
                       </a:r>
                     </a:p>
                   </a:txBody>
@@ -7759,7 +7595,7 @@
                         </a:spcAft>
                       </a:pPr>
                       <a:r>
-                        <a:rPr sz="2799" b="0" i="0" cap="none" spc="0" baseline="0">
+                        <a:rPr sz="2799" b="0" i="0" cap="none" spc="0" baseline="0" lang="ru-RU">
                           <a:solidFill>
                             <a:srgbClr val="FFFFFF"/>
                           </a:solidFill>
@@ -7767,7 +7603,52 @@
                           <a:ea typeface="Inter Light"/>
                           <a:cs typeface="Inter Light"/>
                         </a:rPr>
-                        <a:t>12</a:t>
+                        <a:t>вывод первой строкой, данные справа</a:t>
+                      </a:r>
+                    </a:p>
+                  </a:txBody>
+                  <a:tcPr marL="177800" marR="177800" marT="76200" marB="76200" anchor="ctr">
+                    <a:lnL w="0">
+                      <a:noFill/>
+                    </a:lnL>
+                    <a:lnR w="0">
+                      <a:noFill/>
+                    </a:lnR>
+                    <a:lnT w="0">
+                      <a:noFill/>
+                    </a:lnT>
+                    <a:lnB w="9525" cap="flat" cmpd="sng" algn="ctr">
+                      <a:solidFill>
+                        <a:srgbClr val="384848"/>
+                      </a:solidFill>
+                      <a:prstDash val="solid"/>
+                    </a:lnB>
+                    <a:noFill/>
+                  </a:tcPr>
+                </a:tc>
+                <a:tc>
+                  <a:txBody>
+                    <a:bodyPr wrap="square"/>
+                    <a:lstStyle/>
+                    <a:p>
+                      <a:pPr algn="l">
+                        <a:spcBef>
+                          <a:spcPts val="0"/>
+                        </a:spcBef>
+                        <a:spcAft>
+                          <a:spcPts val="0"/>
+                        </a:spcAft>
+                      </a:pPr>
+                      <a:r>
+                        <a:rPr sz="2799" b="0" i="0" cap="none" spc="0" baseline="0" lang="ru-RU">
+                          <a:solidFill>
+                            <a:srgbClr val="FFFFFF"/>
+                          </a:solidFill>
+                          <a:latin typeface="Inter Light"/>
+                          <a:ea typeface="Inter Light"/>
+                          <a:cs typeface="Inter Light"/>
+                        </a:rPr>
+                        <a:t>рассылка руководителю</a:t>
                       </a:r>
                     </a:p>
                   </a:txBody>
@@ -7803,6 +7684,730 @@
 </p:sld>
 </file>
 
+<file path=ppt/slides/slide6.xml><?xml version="1.0" encoding="utf-8"?>
+<p:sld xmlns:a="http://schemas.openxmlformats.org/drawingml/2006/main" xmlns:p="http://schemas.openxmlformats.org/presentationml/2006/main" xmlns:r="http://schemas.openxmlformats.org/officeDocument/2006/relationships">
+  <p:cSld>
+    <p:bg>
+      <p:bgPr>
+        <a:solidFill>
+          <a:srgbClr val="001514"/>
+        </a:solidFill>
+      </p:bgPr>
+    </p:bg>
+    <p:spTree>
+      <p:nvGrpSpPr>
+        <p:cNvPr id="1" name=""/>
+        <p:cNvGrpSpPr/>
+        <p:nvPr/>
+      </p:nvGrpSpPr>
+      <p:grpSpPr/>
+      <p:sp>
+        <p:nvSpPr>
+          <p:cNvPr id="42" name="Google Shape;42;p8"/>
+          <p:cNvSpPr txBox="1"/>
+          <p:nvPr/>
+        </p:nvSpPr>
+        <p:spPr>
+          <a:xfrm>
+            <a:off x="619057" y="2623820"/>
+            <a:ext cx="15727680" cy="944880"/>
+          </a:xfrm>
+          <a:prstGeom prst="rect">
+            <a:avLst/>
+          </a:prstGeom>
+          <a:noFill/>
+          <a:ln>
+            <a:noFill/>
+          </a:ln>
+        </p:spPr>
+        <p:txBody>
+          <a:bodyPr anchorCtr="0" anchor="t" bIns="0" lIns="0" spcFirstLastPara="1" rIns="0" wrap="square" tIns="0">
+            <a:spAutoFit/>
+          </a:bodyPr>
+          <a:lstStyle/>
+          <a:p>
+            <a:pPr indent="0" lvl="1" marL="0" marR="0" rtl="0" algn="l">
+              <a:lnSpc>
+                <a:spcPct val="120000"/>
+              </a:lnSpc>
+              <a:spcBef>
+                <a:spcPts val="0"/>
+              </a:spcBef>
+              <a:spcAft>
+                <a:spcPts val="0"/>
+              </a:spcAft>
+              <a:buClr>
+                <a:srgbClr val="C2D076"/>
+              </a:buClr>
+              <a:buSzPts val="5600"/>
+              <a:buFont typeface="Inter Medium"/>
+              <a:buNone/>
+            </a:pPr>
+            <a:r>
+              <a:rPr i="0" lang="ru-RU" sz="4712" u="none" cap="none" strike="noStrike">
+                <a:solidFill>
+                  <a:srgbClr val="C2D076"/>
+                </a:solidFill>
+                <a:latin typeface="Inter Medium"/>
+                <a:ea typeface="Inter Medium"/>
+                <a:cs typeface="Inter Medium"/>
+                <a:sym typeface="Inter Medium"/>
+              </a:rPr>
+              <a:t>41 проверка качества на слайд</a:t>
+            </a:r>
+            <a:endParaRPr>
+              <a:latin typeface="Inter Medium"/>
+              <a:ea typeface="Inter Medium"/>
+              <a:cs typeface="Inter Medium"/>
+              <a:sym typeface="Inter Medium"/>
+            </a:endParaRPr>
+          </a:p>
+        </p:txBody>
+      </p:sp>
+      <p:sp>
+        <p:nvSpPr>
+          <p:cNvPr id="43" name="Unit 43"/>
+          <p:cNvSpPr txBox="1"/>
+          <p:nvPr/>
+        </p:nvSpPr>
+        <p:spPr>
+          <a:xfrm>
+            <a:off x="1024128" y="4137660"/>
+            <a:ext cx="10393436" cy="299720"/>
+          </a:xfrm>
+          <a:prstGeom prst="rect">
+            <a:avLst/>
+          </a:prstGeom>
+          <a:noFill/>
+        </p:spPr>
+        <p:txBody>
+          <a:bodyPr wrap="square" lIns="0" tIns="0" rIns="0" bIns="0" anchor="t" rtlCol="0">
+            <a:noAutofit/>
+          </a:bodyPr>
+          <a:lstStyle/>
+          <a:p>
+            <a:pPr algn="l" marL="0" indent="0">
+              <a:lnSpc>
+                <a:spcPct val="100000"/>
+              </a:lnSpc>
+              <a:buNone/>
+            </a:pPr>
+            <a:r>
+              <a:rPr lang="ru-RU" sz="1800" b="0" cap="none" spc="0" baseline="0" dirty="0">
+                <a:solidFill>
+                  <a:srgbClr val="FFFFFF"/>
+                </a:solidFill>
+                <a:latin typeface="Inter Light"/>
+                <a:cs typeface="Inter Light"/>
+              </a:rPr>
+              <a:t>Число проверок по категориям</a:t>
+            </a:r>
+            <a:endParaRPr lang="ru-RU" sz="1800"/>
+          </a:p>
+        </p:txBody>
+      </p:sp>
+      <p:graphicFrame>
+        <p:nvGraphicFramePr>
+          <p:cNvPr id="44" name="Chart 43"/>
+          <p:cNvGraphicFramePr>
+            <a:graphicFrameLocks noGrp="1"/>
+          </p:cNvGraphicFramePr>
+          <p:nvPr/>
+        </p:nvGraphicFramePr>
+        <p:xfrm>
+          <a:off x="1024128" y="4529963"/>
+          <a:ext cx="10393436" cy="3147182"/>
+        </p:xfrm>
+        <a:graphic>
+          <a:graphicData uri="http://schemas.openxmlformats.org/drawingml/2006/chart">
+            <c:chart xmlns:c="http://schemas.openxmlformats.org/drawingml/2006/chart" r:id="rId2"/>
+          </a:graphicData>
+        </a:graphic>
+      </p:graphicFrame>
+      <p:cxnSp>
+        <p:nvCxnSpPr>
+          <p:cNvPr id="45" name="Line 45"/>
+          <p:cNvCxnSpPr/>
+          <p:nvPr/>
+        </p:nvCxnSpPr>
+        <p:spPr>
+          <a:xfrm>
+            <a:off x="11856476" y="5176716"/>
+            <a:ext cx="0" cy="878535"/>
+          </a:xfrm>
+          <a:prstGeom prst="line">
+            <a:avLst/>
+          </a:prstGeom>
+          <a:ln w="12700">
+            <a:solidFill>
+              <a:srgbClr val="384848"/>
+            </a:solidFill>
+          </a:ln>
+        </p:spPr>
+      </p:cxnSp>
+      <p:sp>
+        <p:nvSpPr>
+          <p:cNvPr id="46" name="Takeaway 46"/>
+          <p:cNvSpPr txBox="1"/>
+          <p:nvPr/>
+        </p:nvSpPr>
+        <p:spPr>
+          <a:xfrm>
+            <a:off x="12295388" y="5176716"/>
+            <a:ext cx="4968484" cy="878535"/>
+          </a:xfrm>
+          <a:prstGeom prst="rect">
+            <a:avLst/>
+          </a:prstGeom>
+          <a:noFill/>
+        </p:spPr>
+        <p:txBody>
+          <a:bodyPr wrap="square" lIns="0" tIns="0" rIns="0" bIns="0" anchor="t" rtlCol="0">
+            <a:noAutofit/>
+          </a:bodyPr>
+          <a:lstStyle/>
+          <a:p>
+            <a:pPr algn="l" marL="0" indent="0">
+              <a:lnSpc>
+                <a:spcPct val="100000"/>
+              </a:lnSpc>
+              <a:spcAft>
+                <a:spcPts val="1539"/>
+              </a:spcAft>
+              <a:buNone/>
+            </a:pPr>
+            <a:r>
+              <a:rPr lang="ru-RU" sz="2799" b="0" cap="none" spc="0" baseline="0" dirty="0">
+                <a:solidFill>
+                  <a:srgbClr val="FFFFFF"/>
+                </a:solidFill>
+                <a:latin typeface="Inter Light"/>
+                <a:cs typeface="Inter Light"/>
+              </a:rPr>
+              <a:t>Найденные проблемы помечаются на слайде</a:t>
+            </a:r>
+            <a:endParaRPr lang="ru-RU" sz="2799"/>
+          </a:p>
+        </p:txBody>
+      </p:sp>
+      <p:sp>
+        <p:nvSpPr>
+          <p:cNvPr id="47" name="Conclusion strip 47"/>
+          <p:cNvSpPr/>
+          <p:nvPr/>
+        </p:nvSpPr>
+        <p:spPr>
+          <a:xfrm>
+            <a:off x="1024128" y="8109199"/>
+            <a:ext cx="16239744" cy="892754"/>
+          </a:xfrm>
+          <a:prstGeom prst="roundRect">
+            <a:avLst>
+              <a:gd name="adj" fmla="val 12290"/>
+            </a:avLst>
+          </a:prstGeom>
+          <a:solidFill>
+            <a:srgbClr val="000000"/>
+          </a:solidFill>
+          <a:ln>
+            <a:noFill/>
+          </a:ln>
+        </p:spPr>
+      </p:sp>
+      <p:sp>
+        <p:nvSpPr>
+          <p:cNvPr id="48" name="Conclusion bar 48"/>
+          <p:cNvSpPr/>
+          <p:nvPr/>
+        </p:nvSpPr>
+        <p:spPr>
+          <a:xfrm>
+            <a:off x="1379601" y="8372249"/>
+            <a:ext cx="61722" cy="366654"/>
+          </a:xfrm>
+          <a:prstGeom prst="rect">
+            <a:avLst/>
+          </a:prstGeom>
+          <a:solidFill>
+            <a:srgbClr val="C2D076"/>
+          </a:solidFill>
+          <a:ln>
+            <a:noFill/>
+          </a:ln>
+        </p:spPr>
+      </p:sp>
+      <p:sp>
+        <p:nvSpPr>
+          <p:cNvPr id="49" name="Conclusion 49"/>
+          <p:cNvSpPr txBox="1"/>
+          <p:nvPr/>
+        </p:nvSpPr>
+        <p:spPr>
+          <a:xfrm>
+            <a:off x="1725701" y="8329592"/>
+            <a:ext cx="15182698" cy="451968"/>
+          </a:xfrm>
+          <a:prstGeom prst="rect">
+            <a:avLst/>
+          </a:prstGeom>
+          <a:noFill/>
+        </p:spPr>
+        <p:txBody>
+          <a:bodyPr wrap="square" lIns="0" tIns="0" rIns="0" bIns="0" anchor="t" rtlCol="0">
+            <a:noAutofit/>
+          </a:bodyPr>
+          <a:lstStyle/>
+          <a:p>
+            <a:pPr algn="l" marL="0" indent="0">
+              <a:lnSpc>
+                <a:spcPct val="100000"/>
+              </a:lnSpc>
+              <a:buNone/>
+            </a:pPr>
+            <a:r>
+              <a:rPr lang="ru-RU" sz="2799" b="0" cap="none" spc="0" baseline="0" dirty="0">
+                <a:solidFill>
+                  <a:srgbClr val="C2D076"/>
+                </a:solidFill>
+                <a:latin typeface="Inter Light"/>
+                <a:cs typeface="Inter Light"/>
+              </a:rPr>
+              <a:t>12 </a:t>
+            </a:r>
+            <a:r>
+              <a:rPr lang="ru-RU" sz="2799" b="0" cap="none" spc="0" baseline="0" dirty="0">
+                <a:solidFill>
+                  <a:srgbClr val="C2D076"/>
+                </a:solidFill>
+                <a:latin typeface="Inter Light"/>
+                <a:cs typeface="Inter Light"/>
+              </a:rPr>
+              <a:t>проверок на целостность — самая большая группа</a:t>
+            </a:r>
+            <a:endParaRPr lang="ru-RU" sz="2799"/>
+          </a:p>
+        </p:txBody>
+      </p:sp>
+    </p:spTree>
+  </p:cSld>
+  <p:clrMapOvr>
+    <a:masterClrMapping/>
+  </p:clrMapOvr>
+</p:sld>
+</file>
+
+<file path=ppt/slides/slide7.xml><?xml version="1.0" encoding="utf-8"?>
+<p:sld xmlns:a="http://schemas.openxmlformats.org/drawingml/2006/main" xmlns:p="http://schemas.openxmlformats.org/presentationml/2006/main" xmlns:r="http://schemas.openxmlformats.org/officeDocument/2006/relationships">
+  <p:cSld>
+    <p:bg>
+      <p:bgPr>
+        <a:solidFill>
+          <a:srgbClr val="001514"/>
+        </a:solidFill>
+      </p:bgPr>
+    </p:bg>
+    <p:spTree>
+      <p:nvGrpSpPr>
+        <p:cNvPr id="1" name=""/>
+        <p:cNvGrpSpPr/>
+        <p:nvPr/>
+      </p:nvGrpSpPr>
+      <p:grpSpPr/>
+      <p:sp>
+        <p:nvSpPr>
+          <p:cNvPr id="42" name="Google Shape;42;p8"/>
+          <p:cNvSpPr txBox="1"/>
+          <p:nvPr/>
+        </p:nvSpPr>
+        <p:spPr>
+          <a:xfrm>
+            <a:off x="619057" y="2623820"/>
+            <a:ext cx="10495470" cy="1527657"/>
+          </a:xfrm>
+          <a:prstGeom prst="rect">
+            <a:avLst/>
+          </a:prstGeom>
+          <a:noFill/>
+          <a:ln>
+            <a:noFill/>
+          </a:ln>
+        </p:spPr>
+        <p:txBody>
+          <a:bodyPr anchorCtr="0" anchor="t" bIns="0" lIns="0" spcFirstLastPara="1" rIns="0" wrap="square" tIns="0">
+            <a:spAutoFit/>
+          </a:bodyPr>
+          <a:lstStyle/>
+          <a:p>
+            <a:pPr indent="0" lvl="1" marL="0" marR="0" rtl="0" algn="l">
+              <a:lnSpc>
+                <a:spcPct val="120000"/>
+              </a:lnSpc>
+              <a:spcBef>
+                <a:spcPts val="0"/>
+              </a:spcBef>
+              <a:spcAft>
+                <a:spcPts val="0"/>
+              </a:spcAft>
+              <a:buClr>
+                <a:srgbClr val="C2D076"/>
+              </a:buClr>
+              <a:buSzPts val="5600"/>
+              <a:buFont typeface="Inter Medium"/>
+              <a:buNone/>
+            </a:pPr>
+            <a:r>
+              <a:rPr i="0" lang="ru-RU" sz="2799" u="none" cap="none" strike="noStrike">
+                <a:solidFill>
+                  <a:srgbClr val="C2D076"/>
+                </a:solidFill>
+                <a:latin typeface="Inter Medium"/>
+                <a:ea typeface="Inter Medium"/>
+                <a:cs typeface="Inter Medium"/>
+                <a:sym typeface="Inter Medium"/>
+              </a:rPr>
+              <a:t>9 демонстрационных презентаций без выдуманных чисел</a:t>
+            </a:r>
+            <a:endParaRPr>
+              <a:latin typeface="Inter Medium"/>
+              <a:ea typeface="Inter Medium"/>
+              <a:cs typeface="Inter Medium"/>
+              <a:sym typeface="Inter Medium"/>
+            </a:endParaRPr>
+          </a:p>
+        </p:txBody>
+      </p:sp>
+      <p:sp>
+        <p:nvSpPr>
+          <p:cNvPr id="61" name="Card 61"/>
+          <p:cNvSpPr/>
+          <p:nvPr/>
+        </p:nvSpPr>
+        <p:spPr>
+          <a:xfrm>
+            <a:off x="1024128" y="4665827"/>
+            <a:ext cx="5120640" cy="3818208"/>
+          </a:xfrm>
+          <a:prstGeom prst="roundRect">
+            <a:avLst>
+              <a:gd name="adj" fmla="val 2873"/>
+            </a:avLst>
+          </a:prstGeom>
+          <a:solidFill>
+            <a:srgbClr val="000000"/>
+          </a:solidFill>
+          <a:ln>
+            <a:noFill/>
+          </a:ln>
+        </p:spPr>
+      </p:sp>
+      <p:sp>
+        <p:nvSpPr>
+          <p:cNvPr id="62" name="Figure 62"/>
+          <p:cNvSpPr txBox="1"/>
+          <p:nvPr/>
+        </p:nvSpPr>
+        <p:spPr>
+          <a:xfrm>
+            <a:off x="1536192" y="5004954"/>
+            <a:ext cx="4096512" cy="975208"/>
+          </a:xfrm>
+          <a:prstGeom prst="rect">
+            <a:avLst/>
+          </a:prstGeom>
+          <a:noFill/>
+        </p:spPr>
+        <p:txBody>
+          <a:bodyPr wrap="square" lIns="0" tIns="0" rIns="0" bIns="0" anchor="b" rtlCol="0">
+            <a:noAutofit/>
+          </a:bodyPr>
+          <a:lstStyle/>
+          <a:p>
+            <a:pPr algn="l" marL="0" indent="0">
+              <a:lnSpc>
+                <a:spcPct val="100000"/>
+              </a:lnSpc>
+              <a:buNone/>
+            </a:pPr>
+            <a:r>
+              <a:rPr lang="ru-RU" sz="6399" b="1" cap="none" spc="0" baseline="0" dirty="0">
+                <a:solidFill>
+                  <a:srgbClr val="C2D076"/>
+                </a:solidFill>
+                <a:latin typeface="Inter Light"/>
+                <a:cs typeface="Inter Light"/>
+              </a:rPr>
+              <a:t>9</a:t>
+            </a:r>
+            <a:endParaRPr lang="ru-RU" sz="6399"/>
+          </a:p>
+        </p:txBody>
+      </p:sp>
+      <p:sp>
+        <p:nvSpPr>
+          <p:cNvPr id="63" name="Label 63"/>
+          <p:cNvSpPr txBox="1"/>
+          <p:nvPr/>
+        </p:nvSpPr>
+        <p:spPr>
+          <a:xfrm>
+            <a:off x="1536192" y="6088175"/>
+            <a:ext cx="4096512" cy="1883796"/>
+          </a:xfrm>
+          <a:prstGeom prst="rect">
+            <a:avLst/>
+          </a:prstGeom>
+          <a:noFill/>
+        </p:spPr>
+        <p:txBody>
+          <a:bodyPr wrap="square" lIns="0" tIns="0" rIns="0" bIns="0" anchor="t" rtlCol="0">
+            <a:noAutofit/>
+          </a:bodyPr>
+          <a:lstStyle/>
+          <a:p>
+            <a:pPr algn="l" marL="0" indent="0">
+              <a:lnSpc>
+                <a:spcPct val="100000"/>
+              </a:lnSpc>
+              <a:buNone/>
+            </a:pPr>
+            <a:r>
+              <a:rPr lang="ru-RU" sz="2799" b="0" cap="none" spc="0" baseline="0" dirty="0">
+                <a:solidFill>
+                  <a:srgbClr val="FFFFFF"/>
+                </a:solidFill>
+                <a:latin typeface="Inter Light"/>
+                <a:cs typeface="Inter Light"/>
+              </a:rPr>
+              <a:t>Демо-⁠презентаций</a:t>
+            </a:r>
+            <a:endParaRPr lang="ru-RU" sz="2799"/>
+          </a:p>
+        </p:txBody>
+      </p:sp>
+      <p:sp>
+        <p:nvSpPr>
+          <p:cNvPr id="64" name="Card 64"/>
+          <p:cNvSpPr/>
+          <p:nvPr/>
+        </p:nvSpPr>
+        <p:spPr>
+          <a:xfrm>
+            <a:off x="6583680" y="4665827"/>
+            <a:ext cx="5120640" cy="3818208"/>
+          </a:xfrm>
+          <a:prstGeom prst="roundRect">
+            <a:avLst>
+              <a:gd name="adj" fmla="val 2873"/>
+            </a:avLst>
+          </a:prstGeom>
+          <a:solidFill>
+            <a:srgbClr val="000000"/>
+          </a:solidFill>
+          <a:ln>
+            <a:noFill/>
+          </a:ln>
+        </p:spPr>
+      </p:sp>
+      <p:sp>
+        <p:nvSpPr>
+          <p:cNvPr id="65" name="Figure 65"/>
+          <p:cNvSpPr txBox="1"/>
+          <p:nvPr/>
+        </p:nvSpPr>
+        <p:spPr>
+          <a:xfrm>
+            <a:off x="7082239" y="5004954"/>
+            <a:ext cx="4110017" cy="975208"/>
+          </a:xfrm>
+          <a:prstGeom prst="rect">
+            <a:avLst/>
+          </a:prstGeom>
+          <a:noFill/>
+        </p:spPr>
+        <p:txBody>
+          <a:bodyPr wrap="square" lIns="0" tIns="0" rIns="0" bIns="0" anchor="b" rtlCol="0">
+            <a:noAutofit/>
+          </a:bodyPr>
+          <a:lstStyle/>
+          <a:p>
+            <a:pPr algn="l" marL="0" indent="0">
+              <a:lnSpc>
+                <a:spcPct val="100000"/>
+              </a:lnSpc>
+              <a:buNone/>
+            </a:pPr>
+            <a:r>
+              <a:rPr lang="ru-RU" sz="6399" b="1" cap="none" spc="0" baseline="0" dirty="0">
+                <a:solidFill>
+                  <a:srgbClr val="C2D076"/>
+                </a:solidFill>
+                <a:latin typeface="Inter Light"/>
+                <a:cs typeface="Inter Light"/>
+              </a:rPr>
+              <a:t>116⁠–⁠123</a:t>
+            </a:r>
+            <a:endParaRPr lang="ru-RU" sz="6399"/>
+          </a:p>
+        </p:txBody>
+      </p:sp>
+      <p:sp>
+        <p:nvSpPr>
+          <p:cNvPr id="66" name="Label 66"/>
+          <p:cNvSpPr txBox="1"/>
+          <p:nvPr/>
+        </p:nvSpPr>
+        <p:spPr>
+          <a:xfrm>
+            <a:off x="7095744" y="6088175"/>
+            <a:ext cx="4096512" cy="1883796"/>
+          </a:xfrm>
+          <a:prstGeom prst="rect">
+            <a:avLst/>
+          </a:prstGeom>
+          <a:noFill/>
+        </p:spPr>
+        <p:txBody>
+          <a:bodyPr wrap="square" lIns="0" tIns="0" rIns="0" bIns="0" anchor="t" rtlCol="0">
+            <a:noAutofit/>
+          </a:bodyPr>
+          <a:lstStyle/>
+          <a:p>
+            <a:pPr algn="l" marL="0" indent="0">
+              <a:lnSpc>
+                <a:spcPct val="100000"/>
+              </a:lnSpc>
+              <a:buNone/>
+            </a:pPr>
+            <a:r>
+              <a:rPr lang="ru-RU" sz="2799" b="0" cap="none" spc="0" baseline="0" dirty="0">
+                <a:solidFill>
+                  <a:srgbClr val="FFFFFF"/>
+                </a:solidFill>
+                <a:latin typeface="Inter Light"/>
+                <a:cs typeface="Inter Light"/>
+              </a:rPr>
+              <a:t>Проверенных чисел</a:t>
+            </a:r>
+            <a:endParaRPr lang="ru-RU" sz="2799"/>
+          </a:p>
+        </p:txBody>
+      </p:sp>
+      <p:sp>
+        <p:nvSpPr>
+          <p:cNvPr id="67" name="Card 67"/>
+          <p:cNvSpPr/>
+          <p:nvPr/>
+        </p:nvSpPr>
+        <p:spPr>
+          <a:xfrm>
+            <a:off x="12143232" y="4665827"/>
+            <a:ext cx="5120640" cy="3818208"/>
+          </a:xfrm>
+          <a:prstGeom prst="roundRect">
+            <a:avLst>
+              <a:gd name="adj" fmla="val 2873"/>
+            </a:avLst>
+          </a:prstGeom>
+          <a:solidFill>
+            <a:srgbClr val="000000"/>
+          </a:solidFill>
+          <a:ln>
+            <a:noFill/>
+          </a:ln>
+        </p:spPr>
+      </p:sp>
+      <p:sp>
+        <p:nvSpPr>
+          <p:cNvPr id="68" name="Figure 68"/>
+          <p:cNvSpPr txBox="1"/>
+          <p:nvPr/>
+        </p:nvSpPr>
+        <p:spPr>
+          <a:xfrm>
+            <a:off x="12655296" y="5004954"/>
+            <a:ext cx="4096512" cy="975208"/>
+          </a:xfrm>
+          <a:prstGeom prst="rect">
+            <a:avLst/>
+          </a:prstGeom>
+          <a:noFill/>
+        </p:spPr>
+        <p:txBody>
+          <a:bodyPr wrap="square" lIns="0" tIns="0" rIns="0" bIns="0" anchor="b" rtlCol="0">
+            <a:noAutofit/>
+          </a:bodyPr>
+          <a:lstStyle/>
+          <a:p>
+            <a:pPr algn="l" marL="0" indent="0">
+              <a:lnSpc>
+                <a:spcPct val="100000"/>
+              </a:lnSpc>
+              <a:buNone/>
+            </a:pPr>
+            <a:r>
+              <a:rPr lang="ru-RU" sz="6399" b="1" cap="none" spc="0" baseline="0" dirty="0">
+                <a:solidFill>
+                  <a:srgbClr val="C2D076"/>
+                </a:solidFill>
+                <a:latin typeface="Inter Light"/>
+                <a:cs typeface="Inter Light"/>
+              </a:rPr>
+              <a:t>0</a:t>
+            </a:r>
+            <a:endParaRPr lang="ru-RU" sz="6399"/>
+          </a:p>
+        </p:txBody>
+      </p:sp>
+      <p:sp>
+        <p:nvSpPr>
+          <p:cNvPr id="69" name="Label 69"/>
+          <p:cNvSpPr txBox="1"/>
+          <p:nvPr/>
+        </p:nvSpPr>
+        <p:spPr>
+          <a:xfrm>
+            <a:off x="12655296" y="6088175"/>
+            <a:ext cx="4096512" cy="1883796"/>
+          </a:xfrm>
+          <a:prstGeom prst="rect">
+            <a:avLst/>
+          </a:prstGeom>
+          <a:noFill/>
+        </p:spPr>
+        <p:txBody>
+          <a:bodyPr wrap="square" lIns="0" tIns="0" rIns="0" bIns="0" anchor="t" rtlCol="0">
+            <a:noAutofit/>
+          </a:bodyPr>
+          <a:lstStyle/>
+          <a:p>
+            <a:pPr algn="l" marL="0" indent="0">
+              <a:lnSpc>
+                <a:spcPct val="100000"/>
+              </a:lnSpc>
+              <a:buNone/>
+            </a:pPr>
+            <a:r>
+              <a:rPr lang="ru-RU" sz="2799" b="0" cap="none" spc="0" baseline="0" dirty="0">
+                <a:solidFill>
+                  <a:srgbClr val="FFFFFF"/>
+                </a:solidFill>
+                <a:latin typeface="Inter Light"/>
+                <a:cs typeface="Inter Light"/>
+              </a:rPr>
+              <a:t>Выдуманных чисел</a:t>
+            </a:r>
+            <a:endParaRPr lang="ru-RU" sz="2799"/>
+          </a:p>
+        </p:txBody>
+      </p:sp>
+    </p:spTree>
+  </p:cSld>
+  <p:clrMapOvr>
+    <a:masterClrMapping/>
+  </p:clrMapOvr>
+</p:sld>
+</file>
+
 <file path=ppt/slides/slide8.xml><?xml version="1.0" encoding="utf-8"?>
 <p:sld xmlns:a="http://schemas.openxmlformats.org/drawingml/2006/main" xmlns:p="http://schemas.openxmlformats.org/presentationml/2006/main" xmlns:r="http://schemas.openxmlformats.org/officeDocument/2006/relationships">
   <p:cSld>
@@ -7829,7 +8434,7 @@
         <p:spPr>
           <a:xfrm>
             <a:off x="619057" y="2623820"/>
-            <a:ext cx="15727680" cy="809548"/>
+            <a:ext cx="15727680" cy="944880"/>
           </a:xfrm>
           <a:prstGeom prst="rect">
             <a:avLst/>
@@ -7872,7 +8477,7 @@
                 <a:cs typeface="Inter Medium"/>
                 <a:sym typeface="Inter Medium"/>
               </a:rPr>
-              <a:t>Генерация шаблонов укладывается в 5 минут</a:t>
+              <a:t>87 шаблонов, 99 из 100 и 12 форматов</a:t>
             </a:r>
             <a:endParaRPr>
               <a:latin typeface="Inter Medium"/>
@@ -7885,14 +8490,80 @@
       </p:sp>
       <p:sp>
         <p:nvSpPr>
-          <p:cNvPr id="43" name="Unit 43"/>
+          <p:cNvPr id="43" name="Card 43"/>
+          <p:cNvSpPr/>
+          <p:nvPr/>
+        </p:nvSpPr>
+        <p:spPr>
+          <a:xfrm>
+            <a:off x="1024128" y="4137660"/>
+            <a:ext cx="5120640" cy="3113971"/>
+          </a:xfrm>
+          <a:prstGeom prst="roundRect">
+            <a:avLst>
+              <a:gd name="adj" fmla="val 3523"/>
+            </a:avLst>
+          </a:prstGeom>
+          <a:solidFill>
+            <a:srgbClr val="000000"/>
+          </a:solidFill>
+          <a:ln>
+            <a:noFill/>
+          </a:ln>
+        </p:spPr>
+      </p:sp>
+      <p:sp>
+        <p:nvSpPr>
+          <p:cNvPr id="44" name="Figure 44"/>
           <p:cNvSpPr txBox="1"/>
           <p:nvPr/>
         </p:nvSpPr>
         <p:spPr>
           <a:xfrm>
-            <a:off x="1024128" y="3947718"/>
-            <a:ext cx="16239744" cy="299720"/>
+            <a:off x="1536192" y="4411899"/>
+            <a:ext cx="4096512" cy="1341120"/>
+          </a:xfrm>
+          <a:prstGeom prst="rect">
+            <a:avLst/>
+          </a:prstGeom>
+          <a:noFill/>
+        </p:spPr>
+        <p:txBody>
+          <a:bodyPr wrap="square" lIns="0" tIns="0" rIns="0" bIns="0" anchor="b" rtlCol="0">
+            <a:noAutofit/>
+          </a:bodyPr>
+          <a:lstStyle/>
+          <a:p>
+            <a:pPr algn="l" marL="0" indent="0">
+              <a:lnSpc>
+                <a:spcPct val="100000"/>
+              </a:lnSpc>
+              <a:buNone/>
+            </a:pPr>
+            <a:r>
+              <a:rPr lang="ru-RU" sz="8800" b="1" cap="none" spc="0" baseline="0" dirty="0">
+                <a:solidFill>
+                  <a:srgbClr val="C2D076"/>
+                </a:solidFill>
+                <a:latin typeface="Inter Light"/>
+                <a:cs typeface="Inter Light"/>
+              </a:rPr>
+              <a:t>87</a:t>
+            </a:r>
+            <a:endParaRPr lang="ru-RU" sz="8800"/>
+          </a:p>
+        </p:txBody>
+      </p:sp>
+      <p:sp>
+        <p:nvSpPr>
+          <p:cNvPr id="45" name="Label 45"/>
+          <p:cNvSpPr txBox="1"/>
+          <p:nvPr/>
+        </p:nvSpPr>
+        <p:spPr>
+          <a:xfrm>
+            <a:off x="1536192" y="5861032"/>
+            <a:ext cx="4096512" cy="878535"/>
           </a:xfrm>
           <a:prstGeom prst="rect">
             <a:avLst/>
@@ -7912,51 +8583,33 @@
               <a:buNone/>
             </a:pPr>
             <a:r>
-              <a:rPr lang="ru-RU" sz="1800" b="0" cap="none" spc="0" baseline="0" dirty="0">
+              <a:rPr lang="ru-RU" sz="2799" b="0" cap="none" spc="0" baseline="0" dirty="0">
                 <a:solidFill>
                   <a:srgbClr val="FFFFFF"/>
                 </a:solidFill>
                 <a:latin typeface="Inter Light"/>
                 <a:cs typeface="Inter Light"/>
               </a:rPr>
-              <a:t>Время генерации шаблонов (секунды)</a:t>
+              <a:t>Чужих шаблонов</a:t>
             </a:r>
-            <a:endParaRPr lang="ru-RU" sz="1800"/>
+            <a:endParaRPr lang="ru-RU" sz="2799"/>
           </a:p>
         </p:txBody>
       </p:sp>
-      <p:graphicFrame>
-        <p:nvGraphicFramePr>
-          <p:cNvPr id="44" name="Chart 43"/>
-          <p:cNvGraphicFramePr>
-            <a:graphicFrameLocks noGrp="1"/>
-          </p:cNvGraphicFramePr>
-          <p:nvPr/>
-        </p:nvGraphicFramePr>
-        <p:xfrm>
-          <a:off x="1024128" y="4340021"/>
-          <a:ext cx="16239744" cy="2918208"/>
-        </p:xfrm>
-        <a:graphic>
-          <a:graphicData uri="http://schemas.openxmlformats.org/drawingml/2006/chart">
-            <c:chart xmlns:c="http://schemas.openxmlformats.org/drawingml/2006/chart" r:id="rId2"/>
-          </a:graphicData>
-        </a:graphic>
-      </p:graphicFrame>
-      <p:sp>
-        <p:nvSpPr>
-          <p:cNvPr id="45" name="Conclusion strip 45"/>
+      <p:sp>
+        <p:nvSpPr>
+          <p:cNvPr id="46" name="Card 46"/>
           <p:cNvSpPr/>
           <p:nvPr/>
         </p:nvSpPr>
         <p:spPr>
           <a:xfrm>
-            <a:off x="1024128" y="7690283"/>
-            <a:ext cx="16239744" cy="892754"/>
+            <a:off x="6583680" y="4137660"/>
+            <a:ext cx="5120640" cy="3113971"/>
           </a:xfrm>
           <a:prstGeom prst="roundRect">
             <a:avLst>
-              <a:gd name="adj" fmla="val 12290"/>
+              <a:gd name="adj" fmla="val 3523"/>
             </a:avLst>
           </a:prstGeom>
           <a:solidFill>
@@ -7969,36 +8622,66 @@
       </p:sp>
       <p:sp>
         <p:nvSpPr>
-          <p:cNvPr id="46" name="Conclusion bar 46"/>
-          <p:cNvSpPr/>
+          <p:cNvPr id="47" name="Figure 47"/>
+          <p:cNvSpPr txBox="1"/>
           <p:nvPr/>
         </p:nvSpPr>
         <p:spPr>
           <a:xfrm>
-            <a:off x="1379601" y="7953333"/>
-            <a:ext cx="61722" cy="366654"/>
+            <a:off x="7087565" y="4411899"/>
+            <a:ext cx="4104691" cy="1341120"/>
           </a:xfrm>
           <a:prstGeom prst="rect">
             <a:avLst/>
           </a:prstGeom>
-          <a:solidFill>
-            <a:srgbClr val="C2D076"/>
-          </a:solidFill>
-          <a:ln>
-            <a:noFill/>
-          </a:ln>
-        </p:spPr>
-      </p:sp>
-      <p:sp>
-        <p:nvSpPr>
-          <p:cNvPr id="47" name="Conclusion 47"/>
+          <a:noFill/>
+        </p:spPr>
+        <p:txBody>
+          <a:bodyPr wrap="square" lIns="0" tIns="0" rIns="0" bIns="0" anchor="b" rtlCol="0">
+            <a:noAutofit/>
+          </a:bodyPr>
+          <a:lstStyle/>
+          <a:p>
+            <a:pPr algn="l" marL="0" indent="0">
+              <a:lnSpc>
+                <a:spcPct val="100000"/>
+              </a:lnSpc>
+              <a:buNone/>
+            </a:pPr>
+            <a:r>
+              <a:rPr lang="ru-RU" sz="8800" b="1" cap="none" spc="0" baseline="0" dirty="0">
+                <a:solidFill>
+                  <a:srgbClr val="C2D076"/>
+                </a:solidFill>
+                <a:latin typeface="Inter Light"/>
+                <a:cs typeface="Inter Light"/>
+              </a:rPr>
+              <a:t>99</a:t>
+            </a:r>
+            <a:r>
+              <a:rPr lang="ru-RU" sz="4712" b="1" cap="none" spc="0" baseline="0" dirty="0">
+                <a:solidFill>
+                  <a:srgbClr val="C2D076"/>
+                </a:solidFill>
+                <a:latin typeface="Inter Light"/>
+                <a:cs typeface="Inter Light"/>
+              </a:rPr>
+              <a:t> из 100</a:t>
+            </a:r>
+            <a:endParaRPr lang="ru-RU" sz="8800"/>
+          </a:p>
+        </p:txBody>
+      </p:sp>
+      <p:sp>
+        <p:nvSpPr>
+          <p:cNvPr id="48" name="Label 48"/>
           <p:cNvSpPr txBox="1"/>
           <p:nvPr/>
         </p:nvSpPr>
         <p:spPr>
           <a:xfrm>
-            <a:off x="1725701" y="7910676"/>
-            <a:ext cx="15182698" cy="451968"/>
+            <a:off x="7095744" y="5861032"/>
+            <a:ext cx="4096512" cy="878535"/>
           </a:xfrm>
           <a:prstGeom prst="rect">
             <a:avLst/>
@@ -8020,32 +8703,208 @@
             <a:r>
               <a:rPr lang="ru-RU" sz="2799" b="0" cap="none" spc="0" baseline="0" dirty="0">
                 <a:solidFill>
-                  <a:srgbClr val="C2D076"/>
+                  <a:srgbClr val="FFFFFF"/>
                 </a:solidFill>
                 <a:latin typeface="Inter Light"/>
                 <a:cs typeface="Inter Light"/>
               </a:rPr>
-              <a:t>Все шаблоны укладываются в лимит </a:t>
+              <a:t>Средняя оценка качества</a:t>
             </a:r>
+            <a:endParaRPr lang="ru-RU" sz="2799"/>
+          </a:p>
+        </p:txBody>
+      </p:sp>
+      <p:sp>
+        <p:nvSpPr>
+          <p:cNvPr id="49" name="Card 49"/>
+          <p:cNvSpPr/>
+          <p:nvPr/>
+        </p:nvSpPr>
+        <p:spPr>
+          <a:xfrm>
+            <a:off x="12143232" y="4137660"/>
+            <a:ext cx="5120640" cy="3113971"/>
+          </a:xfrm>
+          <a:prstGeom prst="roundRect">
+            <a:avLst>
+              <a:gd name="adj" fmla="val 3523"/>
+            </a:avLst>
+          </a:prstGeom>
+          <a:solidFill>
+            <a:srgbClr val="000000"/>
+          </a:solidFill>
+          <a:ln>
+            <a:noFill/>
+          </a:ln>
+        </p:spPr>
+      </p:sp>
+      <p:sp>
+        <p:nvSpPr>
+          <p:cNvPr id="50" name="Figure 50"/>
+          <p:cNvSpPr txBox="1"/>
+          <p:nvPr/>
+        </p:nvSpPr>
+        <p:spPr>
+          <a:xfrm>
+            <a:off x="12623648" y="4411899"/>
+            <a:ext cx="4128160" cy="1341120"/>
+          </a:xfrm>
+          <a:prstGeom prst="rect">
+            <a:avLst/>
+          </a:prstGeom>
+          <a:noFill/>
+        </p:spPr>
+        <p:txBody>
+          <a:bodyPr wrap="square" lIns="0" tIns="0" rIns="0" bIns="0" anchor="b" rtlCol="0">
+            <a:noAutofit/>
+          </a:bodyPr>
+          <a:lstStyle/>
+          <a:p>
+            <a:pPr algn="l" marL="0" indent="0">
+              <a:lnSpc>
+                <a:spcPct val="100000"/>
+              </a:lnSpc>
+              <a:buNone/>
+            </a:pPr>
             <a:r>
-              <a:rPr lang="ru-RU" sz="2799" b="0" cap="none" spc="0" baseline="0" dirty="0">
+              <a:rPr lang="ru-RU" sz="8800" b="1" cap="none" spc="0" baseline="0" dirty="0">
                 <a:solidFill>
                   <a:srgbClr val="C2D076"/>
                 </a:solidFill>
                 <a:latin typeface="Inter Light"/>
                 <a:cs typeface="Inter Light"/>
               </a:rPr>
-              <a:t>5 минут</a:t>
+              <a:t>12</a:t>
             </a:r>
+            <a:endParaRPr lang="ru-RU" sz="8800"/>
+          </a:p>
+        </p:txBody>
+      </p:sp>
+      <p:sp>
+        <p:nvSpPr>
+          <p:cNvPr id="51" name="Label 51"/>
+          <p:cNvSpPr txBox="1"/>
+          <p:nvPr/>
+        </p:nvSpPr>
+        <p:spPr>
+          <a:xfrm>
+            <a:off x="12655296" y="5861032"/>
+            <a:ext cx="4096512" cy="878535"/>
+          </a:xfrm>
+          <a:prstGeom prst="rect">
+            <a:avLst/>
+          </a:prstGeom>
+          <a:noFill/>
+        </p:spPr>
+        <p:txBody>
+          <a:bodyPr wrap="square" lIns="0" tIns="0" rIns="0" bIns="0" anchor="t" rtlCol="0">
+            <a:noAutofit/>
+          </a:bodyPr>
+          <a:lstStyle/>
+          <a:p>
+            <a:pPr algn="l" marL="0" indent="0">
+              <a:lnSpc>
+                <a:spcPct val="100000"/>
+              </a:lnSpc>
+              <a:buNone/>
+            </a:pPr>
             <a:r>
               <a:rPr lang="ru-RU" sz="2799" b="0" cap="none" spc="0" baseline="0" dirty="0">
                 <a:solidFill>
-                  <a:srgbClr val="C2D076"/>
+                  <a:srgbClr val="FFFFFF"/>
                 </a:solidFill>
                 <a:latin typeface="Inter Light"/>
                 <a:cs typeface="Inter Light"/>
               </a:rPr>
-              <a:t> с запасом</a:t>
+              <a:t>Форматов</a:t>
+            </a:r>
+            <a:endParaRPr lang="ru-RU" sz="2799"/>
+          </a:p>
+        </p:txBody>
+      </p:sp>
+      <p:sp>
+        <p:nvSpPr>
+          <p:cNvPr id="52" name="Conclusion strip 52"/>
+          <p:cNvSpPr/>
+          <p:nvPr/>
+        </p:nvSpPr>
+        <p:spPr>
+          <a:xfrm>
+            <a:off x="1024128" y="7683685"/>
+            <a:ext cx="16239744" cy="892754"/>
+          </a:xfrm>
+          <a:prstGeom prst="roundRect">
+            <a:avLst>
+              <a:gd name="adj" fmla="val 12290"/>
+            </a:avLst>
+          </a:prstGeom>
+          <a:solidFill>
+            <a:srgbClr val="000000"/>
+          </a:solidFill>
+          <a:ln>
+            <a:noFill/>
+          </a:ln>
+        </p:spPr>
+      </p:sp>
+      <p:sp>
+        <p:nvSpPr>
+          <p:cNvPr id="53" name="Conclusion bar 53"/>
+          <p:cNvSpPr/>
+          <p:nvPr/>
+        </p:nvSpPr>
+        <p:spPr>
+          <a:xfrm>
+            <a:off x="1379601" y="7946735"/>
+            <a:ext cx="61722" cy="366654"/>
+          </a:xfrm>
+          <a:prstGeom prst="rect">
+            <a:avLst/>
+          </a:prstGeom>
+          <a:solidFill>
+            <a:srgbClr val="C2D076"/>
+          </a:solidFill>
+          <a:ln>
+            <a:noFill/>
+          </a:ln>
+        </p:spPr>
+      </p:sp>
+      <p:sp>
+        <p:nvSpPr>
+          <p:cNvPr id="54" name="Conclusion 54"/>
+          <p:cNvSpPr txBox="1"/>
+          <p:nvPr/>
+        </p:nvSpPr>
+        <p:spPr>
+          <a:xfrm>
+            <a:off x="1725701" y="7904078"/>
+            <a:ext cx="15182698" cy="451968"/>
+          </a:xfrm>
+          <a:prstGeom prst="rect">
+            <a:avLst/>
+          </a:prstGeom>
+          <a:noFill/>
+        </p:spPr>
+        <p:txBody>
+          <a:bodyPr wrap="square" lIns="0" tIns="0" rIns="0" bIns="0" anchor="t" rtlCol="0">
+            <a:noAutofit/>
+          </a:bodyPr>
+          <a:lstStyle/>
+          <a:p>
+            <a:pPr algn="l" marL="0" indent="0">
+              <a:lnSpc>
+                <a:spcPct val="100000"/>
+              </a:lnSpc>
+              <a:buNone/>
+            </a:pPr>
+            <a:r>
+              <a:rPr lang="ru-RU" sz="2799" b="0" cap="none" spc="0" baseline="0" dirty="0">
+                <a:solidFill>
+                  <a:srgbClr val="C2D076"/>
+                </a:solidFill>
+                <a:latin typeface="Inter Light"/>
+                <a:cs typeface="Inter Light"/>
+              </a:rPr>
+              <a:t>Сервис работает с любыми шаблонами и форматами</a:t>
             </a:r>
             <a:endParaRPr lang="ru-RU" sz="2799"/>
           </a:p>
@@ -8128,7 +8987,7 @@
                 <a:cs typeface="Inter Medium"/>
                 <a:sym typeface="Inter Medium"/>
               </a:rPr>
-              <a:t>Три открытые модели с лицензией Apache 2.0</a:t>
+              <a:t>VK WorkSpace — самый долгий, но всё в лимите</a:t>
             </a:r>
             <a:endParaRPr>
               <a:latin typeface="Inter Medium"/>
@@ -8141,38 +9000,14 @@
       </p:sp>
       <p:sp>
         <p:nvSpPr>
-          <p:cNvPr id="43" name="Card 43"/>
-          <p:cNvSpPr/>
-          <p:nvPr/>
-        </p:nvSpPr>
-        <p:spPr>
-          <a:xfrm>
-            <a:off x="1024128" y="3947718"/>
-            <a:ext cx="5120640" cy="3623811"/>
-          </a:xfrm>
-          <a:prstGeom prst="roundRect">
-            <a:avLst>
-              <a:gd name="adj" fmla="val 3027"/>
-            </a:avLst>
-          </a:prstGeom>
-          <a:solidFill>
-            <a:srgbClr val="000000"/>
-          </a:solidFill>
-          <a:ln>
-            <a:noFill/>
-          </a:ln>
-        </p:spPr>
-      </p:sp>
-      <p:sp>
-        <p:nvSpPr>
-          <p:cNvPr id="44" name="Index 44"/>
+          <p:cNvPr id="43" name="Unit 43"/>
           <p:cNvSpPr txBox="1"/>
           <p:nvPr/>
         </p:nvSpPr>
         <p:spPr>
           <a:xfrm>
-            <a:off x="1459382" y="4382972"/>
-            <a:ext cx="4250132" cy="718109"/>
+            <a:off x="1024128" y="3947718"/>
+            <a:ext cx="16239744" cy="299720"/>
           </a:xfrm>
           <a:prstGeom prst="rect">
             <a:avLst/>
@@ -8192,29 +9027,93 @@
               <a:buNone/>
             </a:pPr>
             <a:r>
-              <a:rPr lang="ru-RU" sz="4712" b="0" cap="none" spc="0" baseline="0" dirty="0">
-                <a:solidFill>
-                  <a:srgbClr val="C2D076"/>
+              <a:rPr lang="ru-RU" sz="1800" b="0" cap="none" spc="0" baseline="0" dirty="0">
+                <a:solidFill>
+                  <a:srgbClr val="FFFFFF"/>
                 </a:solidFill>
                 <a:latin typeface="Inter Light"/>
                 <a:cs typeface="Inter Light"/>
               </a:rPr>
-              <a:t>01</a:t>
+              <a:t>Время генерации трёх вариантов на шаблонах датасета, секунд</a:t>
             </a:r>
-            <a:endParaRPr lang="ru-RU" sz="4712"/>
+            <a:endParaRPr lang="ru-RU" sz="1800"/>
           </a:p>
         </p:txBody>
       </p:sp>
-      <p:sp>
-        <p:nvSpPr>
-          <p:cNvPr id="45" name="Card text 45"/>
+      <p:graphicFrame>
+        <p:nvGraphicFramePr>
+          <p:cNvPr id="44" name="Chart 43"/>
+          <p:cNvGraphicFramePr>
+            <a:graphicFrameLocks noGrp="1"/>
+          </p:cNvGraphicFramePr>
+          <p:nvPr/>
+        </p:nvGraphicFramePr>
+        <p:xfrm>
+          <a:off x="1024128" y="4340021"/>
+          <a:ext cx="16239744" cy="2918208"/>
+        </p:xfrm>
+        <a:graphic>
+          <a:graphicData uri="http://schemas.openxmlformats.org/drawingml/2006/chart">
+            <c:chart xmlns:c="http://schemas.openxmlformats.org/drawingml/2006/chart" r:id="rId2"/>
+          </a:graphicData>
+        </a:graphic>
+      </p:graphicFrame>
+      <p:sp>
+        <p:nvSpPr>
+          <p:cNvPr id="45" name="Conclusion strip 45"/>
+          <p:cNvSpPr/>
+          <p:nvPr/>
+        </p:nvSpPr>
+        <p:spPr>
+          <a:xfrm>
+            <a:off x="1024128" y="7690283"/>
+            <a:ext cx="16239744" cy="892754"/>
+          </a:xfrm>
+          <a:prstGeom prst="roundRect">
+            <a:avLst>
+              <a:gd name="adj" fmla="val 12290"/>
+            </a:avLst>
+          </a:prstGeom>
+          <a:solidFill>
+            <a:srgbClr val="000000"/>
+          </a:solidFill>
+          <a:ln>
+            <a:noFill/>
+          </a:ln>
+        </p:spPr>
+      </p:sp>
+      <p:sp>
+        <p:nvSpPr>
+          <p:cNvPr id="46" name="Conclusion bar 46"/>
+          <p:cNvSpPr/>
+          <p:nvPr/>
+        </p:nvSpPr>
+        <p:spPr>
+          <a:xfrm>
+            <a:off x="1379601" y="7953333"/>
+            <a:ext cx="61722" cy="366654"/>
+          </a:xfrm>
+          <a:prstGeom prst="rect">
+            <a:avLst/>
+          </a:prstGeom>
+          <a:solidFill>
+            <a:srgbClr val="C2D076"/>
+          </a:solidFill>
+          <a:ln>
+            <a:noFill/>
+          </a:ln>
+        </p:spPr>
+      </p:sp>
+      <p:sp>
+        <p:nvSpPr>
+          <p:cNvPr id="47" name="Conclusion 47"/>
           <p:cNvSpPr txBox="1"/>
           <p:nvPr/>
         </p:nvSpPr>
         <p:spPr>
           <a:xfrm>
-            <a:off x="1459382" y="5209094"/>
-            <a:ext cx="4250132" cy="1927181"/>
+            <a:off x="1725701" y="7910676"/>
+            <a:ext cx="15182698" cy="451968"/>
           </a:xfrm>
           <a:prstGeom prst="rect">
             <a:avLst/>
@@ -8231,9 +9130,6 @@
               <a:lnSpc>
                 <a:spcPct val="100000"/>
               </a:lnSpc>
-              <a:spcAft>
-                <a:spcPts val="1539"/>
-              </a:spcAft>
               <a:buNone/>
             </a:pPr>
             <a:r>
@@ -8244,394 +9140,27 @@
                 <a:latin typeface="Inter Light"/>
                 <a:cs typeface="Inter Light"/>
               </a:rPr>
-              <a:t>Qwen3.8-⁠27B</a:t>
+              <a:t>Все шаблоны укладываются в лимит </a:t>
             </a:r>
-            <a:endParaRPr lang="ru-RU" sz="2799"/>
-          </a:p>
-          <a:p>
-            <a:pPr algn="l" marL="0" indent="0">
-              <a:lnSpc>
-                <a:spcPct val="100000"/>
-              </a:lnSpc>
-              <a:buNone/>
-            </a:pPr>
             <a:r>
               <a:rPr lang="ru-RU" sz="2799" b="0" cap="none" spc="0" baseline="0" dirty="0">
                 <a:solidFill>
-                  <a:srgbClr val="FFFFFF"/>
+                  <a:srgbClr val="C2D076"/>
                 </a:solidFill>
                 <a:latin typeface="Inter Light"/>
                 <a:cs typeface="Inter Light"/>
               </a:rPr>
-              <a:t>Основная модель, инференс VK, конфиг готов</a:t>
+              <a:t>5 минут</a:t>
             </a:r>
-            <a:endParaRPr lang="ru-RU" sz="2799"/>
-          </a:p>
-        </p:txBody>
-      </p:sp>
-      <p:sp>
-        <p:nvSpPr>
-          <p:cNvPr id="46" name="Card 46"/>
-          <p:cNvSpPr/>
-          <p:nvPr/>
-        </p:nvSpPr>
-        <p:spPr>
-          <a:xfrm>
-            <a:off x="6583680" y="3947718"/>
-            <a:ext cx="5120640" cy="3623811"/>
-          </a:xfrm>
-          <a:prstGeom prst="roundRect">
-            <a:avLst>
-              <a:gd name="adj" fmla="val 3027"/>
-            </a:avLst>
-          </a:prstGeom>
-          <a:solidFill>
-            <a:srgbClr val="000000"/>
-          </a:solidFill>
-          <a:ln>
-            <a:noFill/>
-          </a:ln>
-        </p:spPr>
-      </p:sp>
-      <p:sp>
-        <p:nvSpPr>
-          <p:cNvPr id="47" name="Index 47"/>
-          <p:cNvSpPr txBox="1"/>
-          <p:nvPr/>
-        </p:nvSpPr>
-        <p:spPr>
-          <a:xfrm>
-            <a:off x="7018934" y="4382972"/>
-            <a:ext cx="4250132" cy="718109"/>
-          </a:xfrm>
-          <a:prstGeom prst="rect">
-            <a:avLst/>
-          </a:prstGeom>
-          <a:noFill/>
-        </p:spPr>
-        <p:txBody>
-          <a:bodyPr wrap="square" lIns="0" tIns="0" rIns="0" bIns="0" anchor="t" rtlCol="0">
-            <a:noAutofit/>
-          </a:bodyPr>
-          <a:lstStyle/>
-          <a:p>
-            <a:pPr algn="l" marL="0" indent="0">
-              <a:lnSpc>
-                <a:spcPct val="100000"/>
-              </a:lnSpc>
-              <a:buNone/>
-            </a:pPr>
             <a:r>
-              <a:rPr lang="ru-RU" sz="4712" b="0" cap="none" spc="0" baseline="0" dirty="0">
+              <a:rPr lang="ru-RU" sz="2799" b="0" cap="none" spc="0" baseline="0" dirty="0">
                 <a:solidFill>
                   <a:srgbClr val="C2D076"/>
                 </a:solidFill>
                 <a:latin typeface="Inter Light"/>
                 <a:cs typeface="Inter Light"/>
               </a:rPr>
-              <a:t>02</a:t>
-            </a:r>
-            <a:endParaRPr lang="ru-RU" sz="4712"/>
-          </a:p>
-        </p:txBody>
-      </p:sp>
-      <p:sp>
-        <p:nvSpPr>
-          <p:cNvPr id="48" name="Card text 48"/>
-          <p:cNvSpPr txBox="1"/>
-          <p:nvPr/>
-        </p:nvSpPr>
-        <p:spPr>
-          <a:xfrm>
-            <a:off x="7018934" y="5209094"/>
-            <a:ext cx="4250132" cy="1927181"/>
-          </a:xfrm>
-          <a:prstGeom prst="rect">
-            <a:avLst/>
-          </a:prstGeom>
-          <a:noFill/>
-        </p:spPr>
-        <p:txBody>
-          <a:bodyPr wrap="square" lIns="0" tIns="0" rIns="0" bIns="0" anchor="t" rtlCol="0">
-            <a:noAutofit/>
-          </a:bodyPr>
-          <a:lstStyle/>
-          <a:p>
-            <a:pPr algn="l" marL="0" indent="0">
-              <a:lnSpc>
-                <a:spcPct val="100000"/>
-              </a:lnSpc>
-              <a:spcAft>
-                <a:spcPts val="1539"/>
-              </a:spcAft>
-              <a:buNone/>
-            </a:pPr>
-            <a:r>
-              <a:rPr lang="ru-RU" sz="2799" b="0" cap="none" spc="0" baseline="0" dirty="0">
-                <a:solidFill>
-                  <a:srgbClr val="C2D076"/>
-                </a:solidFill>
-                <a:latin typeface="Inter Light"/>
-                <a:cs typeface="Inter Light"/>
-              </a:rPr>
-              <a:t>Qwen3-⁠32B</a:t>
-            </a:r>
-            <a:endParaRPr lang="ru-RU" sz="2799"/>
-          </a:p>
-          <a:p>
-            <a:pPr algn="l" marL="0" indent="0">
-              <a:lnSpc>
-                <a:spcPct val="100000"/>
-              </a:lnSpc>
-              <a:buNone/>
-            </a:pPr>
-            <a:r>
-              <a:rPr lang="ru-RU" sz="2799" b="0" cap="none" spc="0" baseline="0" dirty="0">
-                <a:solidFill>
-                  <a:srgbClr val="FFFFFF"/>
-                </a:solidFill>
-                <a:latin typeface="Inter Light"/>
-                <a:cs typeface="Inter Light"/>
-              </a:rPr>
-              <a:t>Запасное звено на Cloud.ru</a:t>
-            </a:r>
-            <a:endParaRPr lang="ru-RU" sz="2799"/>
-          </a:p>
-        </p:txBody>
-      </p:sp>
-      <p:sp>
-        <p:nvSpPr>
-          <p:cNvPr id="49" name="Card 49"/>
-          <p:cNvSpPr/>
-          <p:nvPr/>
-        </p:nvSpPr>
-        <p:spPr>
-          <a:xfrm>
-            <a:off x="12143232" y="3947718"/>
-            <a:ext cx="5120640" cy="3623811"/>
-          </a:xfrm>
-          <a:prstGeom prst="roundRect">
-            <a:avLst>
-              <a:gd name="adj" fmla="val 3027"/>
-            </a:avLst>
-          </a:prstGeom>
-          <a:solidFill>
-            <a:srgbClr val="000000"/>
-          </a:solidFill>
-          <a:ln>
-            <a:noFill/>
-          </a:ln>
-        </p:spPr>
-      </p:sp>
-      <p:sp>
-        <p:nvSpPr>
-          <p:cNvPr id="50" name="Index 50"/>
-          <p:cNvSpPr txBox="1"/>
-          <p:nvPr/>
-        </p:nvSpPr>
-        <p:spPr>
-          <a:xfrm>
-            <a:off x="12578486" y="4382972"/>
-            <a:ext cx="4250132" cy="718109"/>
-          </a:xfrm>
-          <a:prstGeom prst="rect">
-            <a:avLst/>
-          </a:prstGeom>
-          <a:noFill/>
-        </p:spPr>
-        <p:txBody>
-          <a:bodyPr wrap="square" lIns="0" tIns="0" rIns="0" bIns="0" anchor="t" rtlCol="0">
-            <a:noAutofit/>
-          </a:bodyPr>
-          <a:lstStyle/>
-          <a:p>
-            <a:pPr algn="l" marL="0" indent="0">
-              <a:lnSpc>
-                <a:spcPct val="100000"/>
-              </a:lnSpc>
-              <a:buNone/>
-            </a:pPr>
-            <a:r>
-              <a:rPr lang="ru-RU" sz="4712" b="0" cap="none" spc="0" baseline="0" dirty="0">
-                <a:solidFill>
-                  <a:srgbClr val="C2D076"/>
-                </a:solidFill>
-                <a:latin typeface="Inter Light"/>
-                <a:cs typeface="Inter Light"/>
-              </a:rPr>
-              <a:t>03</a:t>
-            </a:r>
-            <a:endParaRPr lang="ru-RU" sz="4712"/>
-          </a:p>
-        </p:txBody>
-      </p:sp>
-      <p:sp>
-        <p:nvSpPr>
-          <p:cNvPr id="51" name="Card text 51"/>
-          <p:cNvSpPr txBox="1"/>
-          <p:nvPr/>
-        </p:nvSpPr>
-        <p:spPr>
-          <a:xfrm>
-            <a:off x="12578486" y="5209094"/>
-            <a:ext cx="4250132" cy="1927181"/>
-          </a:xfrm>
-          <a:prstGeom prst="rect">
-            <a:avLst/>
-          </a:prstGeom>
-          <a:noFill/>
-        </p:spPr>
-        <p:txBody>
-          <a:bodyPr wrap="square" lIns="0" tIns="0" rIns="0" bIns="0" anchor="t" rtlCol="0">
-            <a:noAutofit/>
-          </a:bodyPr>
-          <a:lstStyle/>
-          <a:p>
-            <a:pPr algn="l" marL="0" indent="0">
-              <a:lnSpc>
-                <a:spcPct val="100000"/>
-              </a:lnSpc>
-              <a:spcAft>
-                <a:spcPts val="1539"/>
-              </a:spcAft>
-              <a:buNone/>
-            </a:pPr>
-            <a:r>
-              <a:rPr lang="ru-RU" sz="2799" b="0" cap="none" spc="0" baseline="0" dirty="0">
-                <a:solidFill>
-                  <a:srgbClr val="C2D076"/>
-                </a:solidFill>
-                <a:latin typeface="Inter Light"/>
-                <a:cs typeface="Inter Light"/>
-              </a:rPr>
-              <a:t>Gemma 4 и Qwen3-⁠VL</a:t>
-            </a:r>
-            <a:endParaRPr lang="ru-RU" sz="2799"/>
-          </a:p>
-          <a:p>
-            <a:pPr algn="l" marL="0" indent="0">
-              <a:lnSpc>
-                <a:spcPct val="100000"/>
-              </a:lnSpc>
-              <a:buNone/>
-            </a:pPr>
-            <a:r>
-              <a:rPr lang="ru-RU" sz="2799" b="0" cap="none" spc="0" baseline="0" dirty="0">
-                <a:solidFill>
-                  <a:srgbClr val="FFFFFF"/>
-                </a:solidFill>
-                <a:latin typeface="Inter Light"/>
-                <a:cs typeface="Inter Light"/>
-              </a:rPr>
-              <a:t>Два запасных звена цепочки</a:t>
-            </a:r>
-            <a:endParaRPr lang="ru-RU" sz="2799"/>
-          </a:p>
-        </p:txBody>
-      </p:sp>
-      <p:sp>
-        <p:nvSpPr>
-          <p:cNvPr id="52" name="Conclusion strip 52"/>
-          <p:cNvSpPr/>
-          <p:nvPr/>
-        </p:nvSpPr>
-        <p:spPr>
-          <a:xfrm>
-            <a:off x="1024128" y="8003583"/>
-            <a:ext cx="16239744" cy="892754"/>
-          </a:xfrm>
-          <a:prstGeom prst="roundRect">
-            <a:avLst>
-              <a:gd name="adj" fmla="val 12290"/>
-            </a:avLst>
-          </a:prstGeom>
-          <a:solidFill>
-            <a:srgbClr val="000000"/>
-          </a:solidFill>
-          <a:ln>
-            <a:noFill/>
-          </a:ln>
-        </p:spPr>
-      </p:sp>
-      <p:sp>
-        <p:nvSpPr>
-          <p:cNvPr id="53" name="Conclusion bar 53"/>
-          <p:cNvSpPr/>
-          <p:nvPr/>
-        </p:nvSpPr>
-        <p:spPr>
-          <a:xfrm>
-            <a:off x="1379601" y="8266633"/>
-            <a:ext cx="61722" cy="366654"/>
-          </a:xfrm>
-          <a:prstGeom prst="rect">
-            <a:avLst/>
-          </a:prstGeom>
-          <a:solidFill>
-            <a:srgbClr val="C2D076"/>
-          </a:solidFill>
-          <a:ln>
-            <a:noFill/>
-          </a:ln>
-        </p:spPr>
-      </p:sp>
-      <p:sp>
-        <p:nvSpPr>
-          <p:cNvPr id="54" name="Conclusion 54"/>
-          <p:cNvSpPr txBox="1"/>
-          <p:nvPr/>
-        </p:nvSpPr>
-        <p:spPr>
-          <a:xfrm>
-            <a:off x="1725701" y="8223976"/>
-            <a:ext cx="15182698" cy="451968"/>
-          </a:xfrm>
-          <a:prstGeom prst="rect">
-            <a:avLst/>
-          </a:prstGeom>
-          <a:noFill/>
-        </p:spPr>
-        <p:txBody>
-          <a:bodyPr wrap="square" lIns="0" tIns="0" rIns="0" bIns="0" anchor="t" rtlCol="0">
-            <a:noAutofit/>
-          </a:bodyPr>
-          <a:lstStyle/>
-          <a:p>
-            <a:pPr algn="l" marL="0" indent="0">
-              <a:lnSpc>
-                <a:spcPct val="100000"/>
-              </a:lnSpc>
-              <a:buNone/>
-            </a:pPr>
-            <a:r>
-              <a:rPr lang="ru-RU" sz="2799" b="0" cap="none" spc="0" baseline="0" dirty="0">
-                <a:solidFill>
-                  <a:srgbClr val="C2D076"/>
-                </a:solidFill>
-                <a:latin typeface="Inter Light"/>
-                <a:cs typeface="Inter Light"/>
-              </a:rPr>
-              <a:t>Все модели поддерживают масштаб до </a:t>
-            </a:r>
-            <a:r>
-              <a:rPr lang="ru-RU" sz="2799" b="0" cap="none" spc="0" baseline="0" dirty="0">
-                <a:solidFill>
-                  <a:srgbClr val="C2D076"/>
-                </a:solidFill>
-                <a:latin typeface="Inter Light"/>
-                <a:cs typeface="Inter Light"/>
-              </a:rPr>
-              <a:t>35 </a:t>
-            </a:r>
-            <a:r>
-              <a:rPr lang="ru-RU" sz="2799" b="0" cap="none" spc="0" baseline="0" dirty="0">
-                <a:solidFill>
-                  <a:srgbClr val="C2D076"/>
-                </a:solidFill>
-                <a:latin typeface="Inter Light"/>
-                <a:cs typeface="Inter Light"/>
-              </a:rPr>
-              <a:t>миллиардов параметров</a:t>
+              <a:t> с запасом</a:t>
             </a:r>
             <a:endParaRPr lang="ru-RU" sz="2799"/>
           </a:p>

--- a/examples/outputs/video/dark-minimalist/structured/deck.pptx
+++ b/examples/outputs/video/dark-minimalist/structured/deck.pptx
@@ -18,6 +18,7 @@
     <p:sldId id="284" r:id="rId46"/>
     <p:sldId id="285" r:id="rId47"/>
     <p:sldId id="286" r:id="rId48"/>
+    <p:sldId id="287" r:id="rId49"/>
   </p:sldIdLst>
   <p:sldSz cy="10287000" cx="18288000"/>
   <p:notesSz cx="6858000" cy="9144000"/>
@@ -321,7 +322,7 @@
               <c:strCache>
                 <c:ptCount val="1"/>
                 <c:pt idx="0">
-                  <c:v>Состав</c:v>
+                  <c:v>Доля фигур</c:v>
                 </c:pt>
               </c:strCache>
             </c:strRef>
@@ -570,9 +571,9 @@
           <c:xMode val="edge"/>
           <c:yMode val="edge"/>
           <c:x val="0.1503"/>
-          <c:y val="0.0218"/>
+          <c:y val="0.0258"/>
           <c:w val="0.7988"/>
-          <c:h val="0.9564"/>
+          <c:h val="0.9485"/>
         </c:manualLayout>
       </c:layout>
       <c:barChart>
@@ -719,7 +720,7 @@
           </c:val>
         </c:ser>
         <c:dLbls>
-          <c:numFmt formatCode="#,##0;&quot;−&quot;#,##0;" sourceLinked="0"/>
+          <c:numFmt formatCode="#,##0&quot; проверок&quot;;&quot;−&quot;#,##0&quot; проверок&quot;;" sourceLinked="0"/>
           <c:spPr>
             <a:noFill/>
             <a:ln>
@@ -1601,12 +1602,12 @@
           <a:p>
             <a:r>
               <a:rPr lang="ru-RU"/>
-              <a:t>ИИ пока не способен воспроизводить фирменный стиль, а шаблоны не дают понятной инструкции для новых слайдов.</a:t>
-            </a:r>
-          </a:p>
-          <a:p>
-            <a:r>
-              <a:t>[verstka:sl2]</a:t>
+              <a:t>Verstka — цифровой дизайнер презентаций. Команда «Рекрут 2», задача № 4 VK Tech.</a:t>
+            </a:r>
+          </a:p>
+          <a:p>
+            <a:r>
+              <a:t>[verstka:sl1]</a:t>
             </a:r>
           </a:p>
         </p:txBody>
@@ -1665,12 +1666,12 @@
           <a:p>
             <a:r>
               <a:rPr lang="ru-RU"/>
-              <a:t>В реальных шаблонах 95% фигур — свободные, поэтому правила оформления приходится выводить из самих слайдов-образцов, включая палитру, кегли, сетку, поля, логотипы и колонтитулы.</a:t>
-            </a:r>
-          </a:p>
-          <a:p>
-            <a:r>
-              <a:t>[verstka:sl3]</a:t>
+              <a:t>ИИ может помочь с текстом, но не с дизайном.</a:t>
+            </a:r>
+          </a:p>
+          <a:p>
+            <a:r>
+              <a:t>[verstka:sl2]</a:t>
             </a:r>
           </a:p>
         </p:txBody>
@@ -1729,12 +1730,12 @@
           <a:p>
             <a:r>
               <a:rPr lang="ru-RU"/>
-              <a:t>Verstka использует шаблон как набор правил, а не макетов, чтобы автоматически создать три редактируемые презентации на основе текста.</a:t>
-            </a:r>
-          </a:p>
-          <a:p>
-            <a:r>
-              <a:t>[verstka:sl4]</a:t>
+              <a:t>В реальных шаблонах 95% фигур — свободные, и только 5% — плейсхолдеры. Это означает, что правила оформления нельзя просто применить, их нужно выводить из самих слайдов-образцов, включая палитру, кегли, сетку, поля, логотипы и колонтитулы.</a:t>
+            </a:r>
+          </a:p>
+          <a:p>
+            <a:r>
+              <a:t>[verstka:sl3]</a:t>
             </a:r>
           </a:p>
         </p:txBody>
@@ -1793,12 +1794,12 @@
           <a:p>
             <a:r>
               <a:rPr lang="ru-RU"/>
-              <a:t>Агент работает на открытых моделях до 35 миллиардов параметров с лицензией Apache 2.0. Процесс включает анализ текста, проектирование, проверку и вёрстку слайдов.</a:t>
-            </a:r>
-          </a:p>
-          <a:p>
-            <a:r>
-              <a:t>[verstka:sl5]</a:t>
+              <a:t>Verstka автоматически создаёт три редактируемые презентации на основе шаблона и текста, сохраняя фирменный стиль без необходимости ручной вёрстки.</a:t>
+            </a:r>
+          </a:p>
+          <a:p>
+            <a:r>
+              <a:t>[verstka:sl4]</a:t>
             </a:r>
           </a:p>
         </p:txBody>
@@ -1857,12 +1858,12 @@
           <a:p>
             <a:r>
               <a:rPr lang="ru-RU"/>
-              <a:t>Содержание одно, подача разная. | Вариант | Подача | Когда подходит |. |---|---|---|. | Структурный | одна мысль на слайд, строгая сетка | отчёт и защита проекта |. | Визуальный | крупные цифры и наглядные схемы | питч и выступление со сцены |. | Компактный | вывод первой строкой, данные справа | рассылка руководителю |.</a:t>
-            </a:r>
-          </a:p>
-          <a:p>
-            <a:r>
-              <a:t>[verstka:sl6]</a:t>
+              <a:t>Агент работает на открытых моделях до 35 миллиардов параметров с лицензией Apache 2.0. Пять шагов: аналитик находит в тексте слайды, ряды данных и просьбы; дизайнер продумывает каждый слайд отдельно; критик сверяет план с текстом и правилами шаблона; компилятор проверяет каждое число; вёрстка собирает слайды по дизайн-системе шаблона.</a:t>
+            </a:r>
+          </a:p>
+          <a:p>
+            <a:r>
+              <a:t>[verstka:sl5]</a:t>
             </a:r>
           </a:p>
         </p:txBody>
@@ -1921,12 +1922,12 @@
           <a:p>
             <a:r>
               <a:rPr lang="ru-RU"/>
-              <a:t>Каждый слайд проходит 41 проверку: 12 на целостность, 11 на вёрстку, 7 на шаблон, 6 на контент и 5 на плотность. Найденные проблемы помечаются на слайде и исправляются автоматически.</a:t>
-            </a:r>
-          </a:p>
-          <a:p>
-            <a:r>
-              <a:t>[verstka:sl7]</a:t>
+              <a:t>Содержание одно, подача разная. | Вариант | Подача | Когда подходит |. |---|---|---|. | Структурный | одна мысль на слайд, строгая сетка | отчёт и защита проекта |. | Визуальный | крупные цифры и наглядные схемы | питч и выступление со сцены |. | Компактный | вывод первой строкой, данные справа | рассылка руководителю |.</a:t>
+            </a:r>
+          </a:p>
+          <a:p>
+            <a:r>
+              <a:t>[verstka:sl6]</a:t>
             </a:r>
           </a:p>
         </p:txBody>
@@ -1985,12 +1986,12 @@
           <a:p>
             <a:r>
               <a:rPr lang="ru-RU"/>
-              <a:t>Каждое число в презентации сверяется дважды: до вёрстки и после. Всего было подготовлено 9 демонстрационных презентаций без выдуманных чисел.</a:t>
-            </a:r>
-          </a:p>
-          <a:p>
-            <a:r>
-              <a:t>[verstka:sl8]</a:t>
+              <a:t>Каждый слайд проходит 41 проверку: 12 на целостность, 11 на вёрстку, 7 на шаблон, 6 на контент и 5 на плотность. Найденные проблемы исправляются автоматически.</a:t>
+            </a:r>
+          </a:p>
+          <a:p>
+            <a:r>
+              <a:t>[verstka:sl7]</a:t>
             </a:r>
           </a:p>
         </p:txBody>
@@ -2049,12 +2050,12 @@
           <a:p>
             <a:r>
               <a:rPr lang="ru-RU"/>
-              <a:t>Сервис поддерживает 12 форматов файлов, включая pptx, potx, ppt, odp, thmx и другие. Он проверяет качество презентаций по 87 чужим шаблонам, средняя оценка качества — 99 из 100.</a:t>
-            </a:r>
-          </a:p>
-          <a:p>
-            <a:r>
-              <a:t>[verstka:sl9]</a:t>
+              <a:t>В итоге не было выдумано ни одного числа.</a:t>
+            </a:r>
+          </a:p>
+          <a:p>
+            <a:r>
+              <a:t>[verstka:sl8]</a:t>
             </a:r>
           </a:p>
         </p:txBody>
@@ -2113,12 +2114,12 @@
           <a:p>
             <a:r>
               <a:rPr lang="ru-RU"/>
-              <a:t>Время генерации трёх вариантов на шаблонах датасета: VK Tech — 113 секунд, VK Education — 145 секунд, VK WorkSpace — 175 секунд. Все значения значительно ниже установленного лимита в 5 минут.</a:t>
-            </a:r>
-          </a:p>
-          <a:p>
-            <a:r>
-              <a:t>[verstka:sl10]</a:t>
+              <a:t>Сервис поддерживает 12 форматов, включая pptx, potx, ppt, odp, thmx и другие.</a:t>
+            </a:r>
+          </a:p>
+          <a:p>
+            <a:r>
+              <a:t>[verstka:sl9]</a:t>
             </a:r>
           </a:p>
         </p:txBody>
@@ -2177,9 +2178,67 @@
           <a:p>
             <a:r>
               <a:rPr lang="ru-RU"/>
-              <a:t>После финала компания планирует три ключевых шага: переход на более мощные технологии инференса, внедрение генерации изображений в слайдах и запуск пилота на шаблонах и сценариях VK Tech.</a:t>
-            </a:r>
-          </a:p>
+              <a:t>Время генерации всех шаблонов меньше 5 минут.</a:t>
+            </a:r>
+          </a:p>
+          <a:p>
+            <a:r>
+              <a:t>[verstka:sl10]</a:t>
+            </a:r>
+          </a:p>
+        </p:txBody>
+      </p:sp>
+    </p:spTree>
+  </p:cSld>
+  <p:clrMapOvr>
+    <a:masterClrMapping/>
+  </p:clrMapOvr>
+</p:notes>
+</file>
+
+<file path=ppt/notesSlides/notesSlide32.xml><?xml version="1.0" encoding="utf-8"?>
+<p:notes xmlns:a="http://schemas.openxmlformats.org/drawingml/2006/main" xmlns:p="http://schemas.openxmlformats.org/presentationml/2006/main" xmlns:r="http://schemas.openxmlformats.org/officeDocument/2006/relationships">
+  <p:cSld>
+    <p:spTree>
+      <p:nvGrpSpPr>
+        <p:cNvPr id="1" name=""/>
+        <p:cNvGrpSpPr/>
+        <p:nvPr/>
+      </p:nvGrpSpPr>
+      <p:grpSpPr>
+        <a:xfrm>
+          <a:off x="0" y="0"/>
+          <a:ext cx="0" cy="0"/>
+          <a:chOff x="0" y="0"/>
+          <a:chExt cx="0" cy="0"/>
+        </a:xfrm>
+      </p:grpSpPr>
+      <p:sp>
+        <p:nvSpPr>
+          <p:cNvPr id="2" name="Slide Image Placeholder 1"/>
+          <p:cNvSpPr>
+            <a:spLocks noGrp="1"/>
+          </p:cNvSpPr>
+          <p:nvPr>
+            <p:ph type="sldImg" idx="2"/>
+          </p:nvPr>
+        </p:nvSpPr>
+        <p:spPr/>
+      </p:sp>
+      <p:sp>
+        <p:nvSpPr>
+          <p:cNvPr id="3" name="Notes Placeholder 2"/>
+          <p:cNvSpPr>
+            <a:spLocks noGrp="1"/>
+          </p:cNvSpPr>
+          <p:nvPr>
+            <p:ph type="body" idx="1"/>
+          </p:nvPr>
+        </p:nvSpPr>
+        <p:spPr/>
+        <p:txBody>
+          <a:bodyPr/>
+          <a:lstStyle/>
           <a:p>
             <a:r>
               <a:t>[verstka:sl11]</a:t>
@@ -4503,16 +4562,42 @@
         <p:nvPr/>
       </p:nvGrpSpPr>
       <p:grpSpPr/>
-      <p:sp>
-        <p:nvSpPr>
-          <p:cNvPr id="42" name="Google Shape;42;p8"/>
+      <p:cxnSp>
+        <p:nvCxnSpPr>
+          <p:cNvPr id="25" name="Google Shape;25;p6"/>
+          <p:cNvCxnSpPr/>
+          <p:nvPr/>
+        </p:nvCxnSpPr>
+        <p:spPr>
+          <a:xfrm>
+            <a:off x="1028700" y="9258300"/>
+            <a:ext cx="16230600" cy="0"/>
+          </a:xfrm>
+          <a:prstGeom prst="straightConnector1">
+            <a:avLst/>
+          </a:prstGeom>
+          <a:noFill/>
+          <a:ln cap="flat" cmpd="sng" w="38100">
+            <a:solidFill>
+              <a:srgbClr val="C2D076"/>
+            </a:solidFill>
+            <a:prstDash val="solid"/>
+            <a:round/>
+            <a:headEnd len="sm" w="sm" type="none"/>
+            <a:tailEnd len="sm" w="sm" type="none"/>
+          </a:ln>
+        </p:spPr>
+      </p:cxnSp>
+      <p:sp>
+        <p:nvSpPr>
+          <p:cNvPr id="26" name="Google Shape;26;p6"/>
           <p:cNvSpPr txBox="1"/>
           <p:nvPr/>
         </p:nvSpPr>
         <p:spPr>
           <a:xfrm>
-            <a:off x="619057" y="2623820"/>
-            <a:ext cx="9651876" cy="1527657"/>
+            <a:off x="1028700" y="4650572"/>
+            <a:ext cx="10740300" cy="3001517"/>
           </a:xfrm>
           <a:prstGeom prst="rect">
             <a:avLst/>
@@ -4524,13 +4609,13 @@
         </p:spPr>
         <p:txBody>
           <a:bodyPr anchorCtr="0" anchor="t" bIns="0" lIns="0" spcFirstLastPara="1" rIns="0" wrap="square" tIns="0">
-            <a:spAutoFit/>
+            <a:noAutofit/>
           </a:bodyPr>
           <a:lstStyle/>
           <a:p>
-            <a:pPr indent="0" lvl="1" marL="0" marR="0" rtl="0" algn="l">
+            <a:pPr indent="0" lvl="0" marL="0" marR="0" rtl="0" algn="l">
               <a:lnSpc>
-                <a:spcPct val="120000"/>
+                <a:spcPct val="80000"/>
               </a:lnSpc>
               <a:spcBef>
                 <a:spcPts val="0"/>
@@ -4538,15 +4623,10 @@
               <a:spcAft>
                 <a:spcPts val="0"/>
               </a:spcAft>
-              <a:buClr>
-                <a:srgbClr val="C2D076"/>
-              </a:buClr>
-              <a:buSzPts val="5600"/>
-              <a:buFont typeface="Inter Medium"/>
               <a:buNone/>
             </a:pPr>
             <a:r>
-              <a:rPr i="0" lang="ru-RU" sz="2799" u="none" cap="none" strike="noStrike">
+              <a:rPr i="0" lang="en-US" sz="7800" u="none" cap="none" strike="noStrike" b="0">
                 <a:solidFill>
                   <a:srgbClr val="C2D076"/>
                 </a:solidFill>
@@ -4555,9 +4635,55 @@
                 <a:cs typeface="Inter Medium"/>
                 <a:sym typeface="Inter Medium"/>
               </a:rPr>
-              <a:t>Вёрстка забирает больше времени, чем написание текста</a:t>
-            </a:r>
-            <a:endParaRPr>
+              <a:t>Verstka —</a:t>
+            </a:r>
+            <a:br>
+              <a:rPr i="0" lang="en-US" sz="7800" u="none" cap="none" strike="noStrike" b="0">
+                <a:solidFill>
+                  <a:srgbClr val="C2D076"/>
+                </a:solidFill>
+                <a:latin typeface="Inter Medium"/>
+                <a:ea typeface="Inter Medium"/>
+                <a:cs typeface="Inter Medium"/>
+                <a:sym typeface="Inter Medium"/>
+              </a:rPr>
+            </a:br>
+            <a:r>
+              <a:rPr i="0" lang="ru-RU" sz="7800" u="none" cap="none" strike="noStrike" b="0">
+                <a:solidFill>
+                  <a:srgbClr val="C2D076"/>
+                </a:solidFill>
+                <a:latin typeface="Inter Medium"/>
+                <a:ea typeface="Inter Medium"/>
+                <a:cs typeface="Inter Medium"/>
+                <a:sym typeface="Inter Medium"/>
+              </a:rPr>
+              <a:t>цифровой дизайнер</a:t>
+            </a:r>
+            <a:br>
+              <a:rPr i="0" lang="en-US" sz="7800" u="none" cap="none" strike="noStrike" b="0">
+                <a:solidFill>
+                  <a:srgbClr val="C2D076"/>
+                </a:solidFill>
+                <a:latin typeface="Inter Medium"/>
+                <a:ea typeface="Inter Medium"/>
+                <a:cs typeface="Inter Medium"/>
+                <a:sym typeface="Inter Medium"/>
+              </a:rPr>
+            </a:br>
+            <a:r>
+              <a:rPr i="0" lang="ru-RU" sz="7800" u="none" cap="none" strike="noStrike" b="0">
+                <a:solidFill>
+                  <a:srgbClr val="C2D076"/>
+                </a:solidFill>
+                <a:latin typeface="Inter Medium"/>
+                <a:ea typeface="Inter Medium"/>
+                <a:cs typeface="Inter Medium"/>
+                <a:sym typeface="Inter Medium"/>
+              </a:rPr>
+              <a:t>презентаций</a:t>
+            </a:r>
+            <a:endParaRPr b="0">
               <a:latin typeface="Inter Medium"/>
               <a:ea typeface="Inter Medium"/>
               <a:cs typeface="Inter Medium"/>
@@ -4568,479 +4694,60 @@
       </p:sp>
       <p:sp>
         <p:nvSpPr>
-          <p:cNvPr id="43" name="Card 43"/>
-          <p:cNvSpPr/>
-          <p:nvPr/>
-        </p:nvSpPr>
-        <p:spPr>
-          <a:xfrm>
-            <a:off x="1024128" y="4665827"/>
-            <a:ext cx="5120640" cy="3261861"/>
-          </a:xfrm>
-          <a:prstGeom prst="roundRect">
-            <a:avLst>
-              <a:gd name="adj" fmla="val 3363"/>
-            </a:avLst>
-          </a:prstGeom>
-          <a:solidFill>
-            <a:srgbClr val="000000"/>
-          </a:solidFill>
+          <p:cNvPr id="30" name="Подзаголовок"/>
+          <p:cNvSpPr txBox="1"/>
+          <p:nvPr/>
+        </p:nvSpPr>
+        <p:spPr>
+          <a:xfrm>
+            <a:off x="1028700" y="8097859"/>
+            <a:ext cx="10740300" cy="404945"/>
+          </a:xfrm>
+          <a:prstGeom prst="rect">
+            <a:avLst/>
+          </a:prstGeom>
+          <a:noFill/>
           <a:ln>
             <a:noFill/>
           </a:ln>
         </p:spPr>
-      </p:sp>
-      <p:sp>
-        <p:nvSpPr>
-          <p:cNvPr id="44" name="Index 44"/>
-          <p:cNvSpPr txBox="1"/>
-          <p:nvPr/>
-        </p:nvSpPr>
-        <p:spPr>
-          <a:xfrm>
-            <a:off x="1459382" y="5101081"/>
-            <a:ext cx="4250132" cy="718109"/>
-          </a:xfrm>
-          <a:prstGeom prst="rect">
-            <a:avLst/>
-          </a:prstGeom>
-          <a:noFill/>
-        </p:spPr>
         <p:txBody>
-          <a:bodyPr wrap="square" lIns="0" tIns="0" rIns="0" bIns="0" anchor="t" rtlCol="0">
+          <a:bodyPr anchorCtr="0" anchor="t" bIns="0" lIns="0" spcFirstLastPara="1" rIns="0" wrap="square" tIns="0">
             <a:noAutofit/>
           </a:bodyPr>
           <a:lstStyle/>
           <a:p>
-            <a:pPr algn="l" marL="0" indent="0">
+            <a:pPr indent="0" lvl="0" marL="0" marR="0" rtl="0" algn="l">
               <a:lnSpc>
                 <a:spcPct val="100000"/>
               </a:lnSpc>
+              <a:spcBef>
+                <a:spcPts val="0"/>
+              </a:spcBef>
+              <a:spcAft>
+                <a:spcPts val="0"/>
+              </a:spcAft>
               <a:buNone/>
             </a:pPr>
             <a:r>
-              <a:rPr lang="ru-RU" sz="4712" b="0" cap="none" spc="0" baseline="0" dirty="0">
+              <a:rPr i="0" lang="ru-RU" sz="2199" u="none" cap="none" strike="noStrike" b="0" spc="0">
                 <a:solidFill>
                   <a:srgbClr val="C2D076"/>
                 </a:solidFill>
-                <a:latin typeface="Inter Light"/>
-                <a:cs typeface="Inter Light"/>
+                <a:latin typeface="Inter Medium"/>
+                <a:ea typeface="Inter Medium"/>
+                <a:sym typeface="Inter Medium"/>
               </a:rPr>
-              <a:t>01</a:t>
-            </a:r>
-            <a:endParaRPr lang="ru-RU" sz="4712"/>
-          </a:p>
-        </p:txBody>
-      </p:sp>
-      <p:sp>
-        <p:nvSpPr>
-          <p:cNvPr id="45" name="Card text 45"/>
-          <p:cNvSpPr txBox="1"/>
-          <p:nvPr/>
-        </p:nvSpPr>
-        <p:spPr>
-          <a:xfrm>
-            <a:off x="1459382" y="5927203"/>
-            <a:ext cx="4250132" cy="1565231"/>
-          </a:xfrm>
-          <a:prstGeom prst="rect">
-            <a:avLst/>
-          </a:prstGeom>
-          <a:noFill/>
-        </p:spPr>
-        <p:txBody>
-          <a:bodyPr wrap="square" lIns="0" tIns="0" rIns="0" bIns="0" anchor="t" rtlCol="0">
-            <a:noAutofit/>
-          </a:bodyPr>
-          <a:lstStyle/>
-          <a:p>
-            <a:pPr algn="l" marL="0" indent="0">
-              <a:lnSpc>
-                <a:spcPct val="100000"/>
-              </a:lnSpc>
-              <a:spcAft>
-                <a:spcPts val="1209"/>
-              </a:spcAft>
-              <a:buNone/>
-            </a:pPr>
-            <a:r>
-              <a:rPr lang="ru-RU" sz="2499" b="0" cap="none" spc="0" baseline="0" dirty="0">
-                <a:solidFill>
-                  <a:srgbClr val="C2D076"/>
-                </a:solidFill>
-                <a:latin typeface="Inter Light"/>
-                <a:cs typeface="Inter Light"/>
-              </a:rPr>
-              <a:t>Ручная вёрстка</a:t>
-            </a:r>
-            <a:endParaRPr lang="ru-RU" sz="2499"/>
-          </a:p>
-          <a:p>
-            <a:pPr algn="l" marL="0" indent="0">
-              <a:lnSpc>
-                <a:spcPct val="100000"/>
-              </a:lnSpc>
-              <a:buNone/>
-            </a:pPr>
-            <a:r>
-              <a:rPr lang="ru-RU" sz="2199" b="0" cap="none" spc="0" baseline="0" dirty="0">
-                <a:solidFill>
-                  <a:srgbClr val="FFFFFF"/>
-                </a:solidFill>
-                <a:latin typeface="Inter Light"/>
-                <a:cs typeface="Inter Light"/>
-              </a:rPr>
-              <a:t>Подобрать макет, подвинуть блоки, подогнать цвета под фирменный стиль</a:t>
-            </a:r>
-            <a:endParaRPr lang="ru-RU" sz="2199"/>
-          </a:p>
-        </p:txBody>
-      </p:sp>
-      <p:sp>
-        <p:nvSpPr>
-          <p:cNvPr id="46" name="Card 46"/>
-          <p:cNvSpPr/>
-          <p:nvPr/>
-        </p:nvSpPr>
-        <p:spPr>
-          <a:xfrm>
-            <a:off x="6583680" y="4665827"/>
-            <a:ext cx="5120640" cy="3261861"/>
-          </a:xfrm>
-          <a:prstGeom prst="roundRect">
-            <a:avLst>
-              <a:gd name="adj" fmla="val 3363"/>
-            </a:avLst>
-          </a:prstGeom>
-          <a:solidFill>
-            <a:srgbClr val="000000"/>
-          </a:solidFill>
-          <a:ln>
-            <a:noFill/>
-          </a:ln>
-        </p:spPr>
-      </p:sp>
-      <p:sp>
-        <p:nvSpPr>
-          <p:cNvPr id="47" name="Index 47"/>
-          <p:cNvSpPr txBox="1"/>
-          <p:nvPr/>
-        </p:nvSpPr>
-        <p:spPr>
-          <a:xfrm>
-            <a:off x="7018934" y="5101081"/>
-            <a:ext cx="4250132" cy="718109"/>
-          </a:xfrm>
-          <a:prstGeom prst="rect">
-            <a:avLst/>
-          </a:prstGeom>
-          <a:noFill/>
-        </p:spPr>
-        <p:txBody>
-          <a:bodyPr wrap="square" lIns="0" tIns="0" rIns="0" bIns="0" anchor="t" rtlCol="0">
-            <a:noAutofit/>
-          </a:bodyPr>
-          <a:lstStyle/>
-          <a:p>
-            <a:pPr algn="l" marL="0" indent="0">
-              <a:lnSpc>
-                <a:spcPct val="100000"/>
-              </a:lnSpc>
-              <a:buNone/>
-            </a:pPr>
-            <a:r>
-              <a:rPr lang="ru-RU" sz="4712" b="0" cap="none" spc="0" baseline="0" dirty="0">
-                <a:solidFill>
-                  <a:srgbClr val="C2D076"/>
-                </a:solidFill>
-                <a:latin typeface="Inter Light"/>
-                <a:cs typeface="Inter Light"/>
-              </a:rPr>
-              <a:t>02</a:t>
-            </a:r>
-            <a:endParaRPr lang="ru-RU" sz="4712"/>
-          </a:p>
-        </p:txBody>
-      </p:sp>
-      <p:sp>
-        <p:nvSpPr>
-          <p:cNvPr id="48" name="Card text 48"/>
-          <p:cNvSpPr txBox="1"/>
-          <p:nvPr/>
-        </p:nvSpPr>
-        <p:spPr>
-          <a:xfrm>
-            <a:off x="7018934" y="5927203"/>
-            <a:ext cx="4250132" cy="1565231"/>
-          </a:xfrm>
-          <a:prstGeom prst="rect">
-            <a:avLst/>
-          </a:prstGeom>
-          <a:noFill/>
-        </p:spPr>
-        <p:txBody>
-          <a:bodyPr wrap="square" lIns="0" tIns="0" rIns="0" bIns="0" anchor="t" rtlCol="0">
-            <a:noAutofit/>
-          </a:bodyPr>
-          <a:lstStyle/>
-          <a:p>
-            <a:pPr algn="l" marL="0" indent="0">
-              <a:lnSpc>
-                <a:spcPct val="100000"/>
-              </a:lnSpc>
-              <a:spcAft>
-                <a:spcPts val="1209"/>
-              </a:spcAft>
-              <a:buNone/>
-            </a:pPr>
-            <a:r>
-              <a:rPr lang="ru-RU" sz="2499" b="0" cap="none" spc="0" baseline="0" dirty="0">
-                <a:solidFill>
-                  <a:srgbClr val="C2D076"/>
-                </a:solidFill>
-                <a:latin typeface="Inter Light"/>
-                <a:cs typeface="Inter Light"/>
-              </a:rPr>
-              <a:t>ИИ ломает стиль</a:t>
-            </a:r>
-            <a:endParaRPr lang="ru-RU" sz="2499"/>
-          </a:p>
-          <a:p>
-            <a:pPr algn="l" marL="0" indent="0">
-              <a:lnSpc>
-                <a:spcPct val="100000"/>
-              </a:lnSpc>
-              <a:buNone/>
-            </a:pPr>
-            <a:r>
-              <a:rPr lang="ru-RU" sz="2199" b="0" cap="none" spc="0" baseline="0" dirty="0">
-                <a:solidFill>
-                  <a:srgbClr val="FFFFFF"/>
-                </a:solidFill>
-                <a:latin typeface="Inter Light"/>
-                <a:cs typeface="Inter Light"/>
-              </a:rPr>
-              <a:t>Нейросети пишут текст, но не воспроизводят дизайн-⁠систему</a:t>
-            </a:r>
-            <a:endParaRPr lang="ru-RU" sz="2199"/>
-          </a:p>
-        </p:txBody>
-      </p:sp>
-      <p:sp>
-        <p:nvSpPr>
-          <p:cNvPr id="49" name="Card 49"/>
-          <p:cNvSpPr/>
-          <p:nvPr/>
-        </p:nvSpPr>
-        <p:spPr>
-          <a:xfrm>
-            <a:off x="12143232" y="4665827"/>
-            <a:ext cx="5120640" cy="3261861"/>
-          </a:xfrm>
-          <a:prstGeom prst="roundRect">
-            <a:avLst>
-              <a:gd name="adj" fmla="val 3363"/>
-            </a:avLst>
-          </a:prstGeom>
-          <a:solidFill>
-            <a:srgbClr val="000000"/>
-          </a:solidFill>
-          <a:ln>
-            <a:noFill/>
-          </a:ln>
-        </p:spPr>
-      </p:sp>
-      <p:sp>
-        <p:nvSpPr>
-          <p:cNvPr id="50" name="Index 50"/>
-          <p:cNvSpPr txBox="1"/>
-          <p:nvPr/>
-        </p:nvSpPr>
-        <p:spPr>
-          <a:xfrm>
-            <a:off x="12578486" y="5101081"/>
-            <a:ext cx="4250132" cy="718109"/>
-          </a:xfrm>
-          <a:prstGeom prst="rect">
-            <a:avLst/>
-          </a:prstGeom>
-          <a:noFill/>
-        </p:spPr>
-        <p:txBody>
-          <a:bodyPr wrap="square" lIns="0" tIns="0" rIns="0" bIns="0" anchor="t" rtlCol="0">
-            <a:noAutofit/>
-          </a:bodyPr>
-          <a:lstStyle/>
-          <a:p>
-            <a:pPr algn="l" marL="0" indent="0">
-              <a:lnSpc>
-                <a:spcPct val="100000"/>
-              </a:lnSpc>
-              <a:buNone/>
-            </a:pPr>
-            <a:r>
-              <a:rPr lang="ru-RU" sz="4712" b="0" cap="none" spc="0" baseline="0" dirty="0">
-                <a:solidFill>
-                  <a:srgbClr val="C2D076"/>
-                </a:solidFill>
-                <a:latin typeface="Inter Light"/>
-                <a:cs typeface="Inter Light"/>
-              </a:rPr>
-              <a:t>03</a:t>
-            </a:r>
-            <a:endParaRPr lang="ru-RU" sz="4712"/>
-          </a:p>
-        </p:txBody>
-      </p:sp>
-      <p:sp>
-        <p:nvSpPr>
-          <p:cNvPr id="51" name="Card text 51"/>
-          <p:cNvSpPr txBox="1"/>
-          <p:nvPr/>
-        </p:nvSpPr>
-        <p:spPr>
-          <a:xfrm>
-            <a:off x="12578486" y="5927203"/>
-            <a:ext cx="4250132" cy="1565231"/>
-          </a:xfrm>
-          <a:prstGeom prst="rect">
-            <a:avLst/>
-          </a:prstGeom>
-          <a:noFill/>
-        </p:spPr>
-        <p:txBody>
-          <a:bodyPr wrap="square" lIns="0" tIns="0" rIns="0" bIns="0" anchor="t" rtlCol="0">
-            <a:noAutofit/>
-          </a:bodyPr>
-          <a:lstStyle/>
-          <a:p>
-            <a:pPr algn="l" marL="0" indent="0">
-              <a:lnSpc>
-                <a:spcPct val="100000"/>
-              </a:lnSpc>
-              <a:spcAft>
-                <a:spcPts val="1209"/>
-              </a:spcAft>
-              <a:buNone/>
-            </a:pPr>
-            <a:r>
-              <a:rPr lang="ru-RU" sz="2499" b="0" cap="none" spc="0" baseline="0" dirty="0">
-                <a:solidFill>
-                  <a:srgbClr val="C2D076"/>
-                </a:solidFill>
-                <a:latin typeface="Inter Light"/>
-                <a:cs typeface="Inter Light"/>
-              </a:rPr>
-              <a:t>Шаблон — не инструкция</a:t>
-            </a:r>
-            <a:endParaRPr lang="ru-RU" sz="2499"/>
-          </a:p>
-          <a:p>
-            <a:pPr algn="l" marL="0" indent="0">
-              <a:lnSpc>
-                <a:spcPct val="100000"/>
-              </a:lnSpc>
-              <a:buNone/>
-            </a:pPr>
-            <a:r>
-              <a:rPr lang="ru-RU" sz="2199" b="0" cap="none" spc="0" baseline="0" dirty="0">
-                <a:solidFill>
-                  <a:srgbClr val="FFFFFF"/>
-                </a:solidFill>
-                <a:latin typeface="Inter Light"/>
-                <a:cs typeface="Inter Light"/>
-              </a:rPr>
-              <a:t>по слайдам-⁠образцам не понять, как собрать новый слайд</a:t>
-            </a:r>
-            <a:endParaRPr lang="ru-RU" sz="2199"/>
-          </a:p>
-        </p:txBody>
-      </p:sp>
-      <p:sp>
-        <p:nvSpPr>
-          <p:cNvPr id="52" name="Conclusion strip 52"/>
-          <p:cNvSpPr/>
-          <p:nvPr/>
-        </p:nvSpPr>
-        <p:spPr>
-          <a:xfrm>
-            <a:off x="1024128" y="8355259"/>
-            <a:ext cx="16239744" cy="892754"/>
-          </a:xfrm>
-          <a:prstGeom prst="roundRect">
-            <a:avLst>
-              <a:gd name="adj" fmla="val 12290"/>
-            </a:avLst>
-          </a:prstGeom>
-          <a:solidFill>
-            <a:srgbClr val="000000"/>
-          </a:solidFill>
-          <a:ln>
-            <a:noFill/>
-          </a:ln>
-        </p:spPr>
-      </p:sp>
-      <p:sp>
-        <p:nvSpPr>
-          <p:cNvPr id="53" name="Conclusion bar 53"/>
-          <p:cNvSpPr/>
-          <p:nvPr/>
-        </p:nvSpPr>
-        <p:spPr>
-          <a:xfrm>
-            <a:off x="1379601" y="8618309"/>
-            <a:ext cx="61722" cy="366654"/>
-          </a:xfrm>
-          <a:prstGeom prst="rect">
-            <a:avLst/>
-          </a:prstGeom>
-          <a:solidFill>
-            <a:srgbClr val="C2D076"/>
-          </a:solidFill>
-          <a:ln>
-            <a:noFill/>
-          </a:ln>
-        </p:spPr>
-      </p:sp>
-      <p:sp>
-        <p:nvSpPr>
-          <p:cNvPr id="54" name="Conclusion 54"/>
-          <p:cNvSpPr txBox="1"/>
-          <p:nvPr/>
-        </p:nvSpPr>
-        <p:spPr>
-          <a:xfrm>
-            <a:off x="1725701" y="8575652"/>
-            <a:ext cx="15182698" cy="451968"/>
-          </a:xfrm>
-          <a:prstGeom prst="rect">
-            <a:avLst/>
-          </a:prstGeom>
-          <a:noFill/>
-        </p:spPr>
-        <p:txBody>
-          <a:bodyPr wrap="square" lIns="0" tIns="0" rIns="0" bIns="0" anchor="t" rtlCol="0">
-            <a:noAutofit/>
-          </a:bodyPr>
-          <a:lstStyle/>
-          <a:p>
-            <a:pPr algn="l" marL="0" indent="0">
-              <a:lnSpc>
-                <a:spcPct val="100000"/>
-              </a:lnSpc>
-              <a:buNone/>
-            </a:pPr>
-            <a:r>
-              <a:rPr lang="ru-RU" sz="2799" b="0" cap="none" spc="0" baseline="0" dirty="0">
-                <a:solidFill>
-                  <a:srgbClr val="C2D076"/>
-                </a:solidFill>
-                <a:latin typeface="Inter Light"/>
-                <a:cs typeface="Inter Light"/>
-              </a:rPr>
-              <a:t>Ручная вёрстка, ИИ и шаблоны — три проблемы, которые тормозят</a:t>
-            </a:r>
-            <a:endParaRPr lang="ru-RU" sz="2799"/>
+              <a:t>Команда «Рекрут 2» · задача № 4 VK Tech · ЛЦТ 2026</a:t>
+            </a:r>
+            <a:endParaRPr b="0" cap="none" spc="0">
+              <a:solidFill>
+                <a:srgbClr val="C2D076"/>
+              </a:solidFill>
+              <a:latin typeface="Inter Medium"/>
+              <a:ea typeface="Inter Medium"/>
+              <a:sym typeface="Inter Medium"/>
+            </a:endParaRPr>
           </a:p>
         </p:txBody>
       </p:sp>
@@ -5078,7 +4785,7 @@
         <p:spPr>
           <a:xfrm>
             <a:off x="619057" y="2623820"/>
-            <a:ext cx="15727680" cy="944880"/>
+            <a:ext cx="15727680" cy="809548"/>
           </a:xfrm>
           <a:prstGeom prst="rect">
             <a:avLst/>
@@ -5121,7 +4828,263 @@
                 <a:cs typeface="Inter Medium"/>
                 <a:sym typeface="Inter Medium"/>
               </a:rPr>
-              <a:t>Три шага развития после финала</a:t>
+              <a:t>VK WorkSpace — самый долгий, но всё в лимите</a:t>
+            </a:r>
+            <a:endParaRPr>
+              <a:latin typeface="Inter Medium"/>
+              <a:ea typeface="Inter Medium"/>
+              <a:cs typeface="Inter Medium"/>
+              <a:sym typeface="Inter Medium"/>
+            </a:endParaRPr>
+          </a:p>
+        </p:txBody>
+      </p:sp>
+      <p:sp>
+        <p:nvSpPr>
+          <p:cNvPr id="43" name="Unit 43"/>
+          <p:cNvSpPr txBox="1"/>
+          <p:nvPr/>
+        </p:nvSpPr>
+        <p:spPr>
+          <a:xfrm>
+            <a:off x="1024128" y="3947718"/>
+            <a:ext cx="16239744" cy="299720"/>
+          </a:xfrm>
+          <a:prstGeom prst="rect">
+            <a:avLst/>
+          </a:prstGeom>
+          <a:noFill/>
+        </p:spPr>
+        <p:txBody>
+          <a:bodyPr wrap="square" lIns="0" tIns="0" rIns="0" bIns="0" anchor="t" rtlCol="0">
+            <a:noAutofit/>
+          </a:bodyPr>
+          <a:lstStyle/>
+          <a:p>
+            <a:pPr algn="l" marL="0" indent="0">
+              <a:lnSpc>
+                <a:spcPct val="100000"/>
+              </a:lnSpc>
+              <a:buNone/>
+            </a:pPr>
+            <a:r>
+              <a:rPr lang="ru-RU" sz="1800" b="0" cap="none" spc="0" baseline="0" dirty="0">
+                <a:solidFill>
+                  <a:srgbClr val="FFFFFF"/>
+                </a:solidFill>
+                <a:latin typeface="Inter Light"/>
+                <a:cs typeface="Inter Light"/>
+              </a:rPr>
+              <a:t>Время генерации трёх вариантов на шаблонах датасета, секунд</a:t>
+            </a:r>
+            <a:endParaRPr lang="ru-RU" sz="1800"/>
+          </a:p>
+        </p:txBody>
+      </p:sp>
+      <p:graphicFrame>
+        <p:nvGraphicFramePr>
+          <p:cNvPr id="44" name="Chart 43"/>
+          <p:cNvGraphicFramePr>
+            <a:graphicFrameLocks noGrp="1"/>
+          </p:cNvGraphicFramePr>
+          <p:nvPr/>
+        </p:nvGraphicFramePr>
+        <p:xfrm>
+          <a:off x="1024128" y="4340021"/>
+          <a:ext cx="16239744" cy="2918208"/>
+        </p:xfrm>
+        <a:graphic>
+          <a:graphicData uri="http://schemas.openxmlformats.org/drawingml/2006/chart">
+            <c:chart xmlns:c="http://schemas.openxmlformats.org/drawingml/2006/chart" r:id="rId2"/>
+          </a:graphicData>
+        </a:graphic>
+      </p:graphicFrame>
+      <p:sp>
+        <p:nvSpPr>
+          <p:cNvPr id="45" name="Conclusion strip 45"/>
+          <p:cNvSpPr/>
+          <p:nvPr/>
+        </p:nvSpPr>
+        <p:spPr>
+          <a:xfrm>
+            <a:off x="1024128" y="7690283"/>
+            <a:ext cx="16239744" cy="892754"/>
+          </a:xfrm>
+          <a:prstGeom prst="roundRect">
+            <a:avLst>
+              <a:gd name="adj" fmla="val 12290"/>
+            </a:avLst>
+          </a:prstGeom>
+          <a:solidFill>
+            <a:srgbClr val="000000"/>
+          </a:solidFill>
+          <a:ln>
+            <a:noFill/>
+          </a:ln>
+        </p:spPr>
+      </p:sp>
+      <p:sp>
+        <p:nvSpPr>
+          <p:cNvPr id="46" name="Conclusion bar 46"/>
+          <p:cNvSpPr/>
+          <p:nvPr/>
+        </p:nvSpPr>
+        <p:spPr>
+          <a:xfrm>
+            <a:off x="1379601" y="7953333"/>
+            <a:ext cx="61722" cy="366654"/>
+          </a:xfrm>
+          <a:prstGeom prst="rect">
+            <a:avLst/>
+          </a:prstGeom>
+          <a:solidFill>
+            <a:srgbClr val="C2D076"/>
+          </a:solidFill>
+          <a:ln>
+            <a:noFill/>
+          </a:ln>
+        </p:spPr>
+      </p:sp>
+      <p:sp>
+        <p:nvSpPr>
+          <p:cNvPr id="47" name="Conclusion 47"/>
+          <p:cNvSpPr txBox="1"/>
+          <p:nvPr/>
+        </p:nvSpPr>
+        <p:spPr>
+          <a:xfrm>
+            <a:off x="1725701" y="7910676"/>
+            <a:ext cx="15182698" cy="451968"/>
+          </a:xfrm>
+          <a:prstGeom prst="rect">
+            <a:avLst/>
+          </a:prstGeom>
+          <a:noFill/>
+        </p:spPr>
+        <p:txBody>
+          <a:bodyPr wrap="square" lIns="0" tIns="0" rIns="0" bIns="0" anchor="t" rtlCol="0">
+            <a:noAutofit/>
+          </a:bodyPr>
+          <a:lstStyle/>
+          <a:p>
+            <a:pPr algn="l" marL="0" indent="0">
+              <a:lnSpc>
+                <a:spcPct val="100000"/>
+              </a:lnSpc>
+              <a:buNone/>
+            </a:pPr>
+            <a:r>
+              <a:rPr lang="ru-RU" sz="2799" b="0" cap="none" spc="0" baseline="0" dirty="0">
+                <a:solidFill>
+                  <a:srgbClr val="C2D076"/>
+                </a:solidFill>
+                <a:latin typeface="Inter Light"/>
+                <a:cs typeface="Inter Light"/>
+              </a:rPr>
+              <a:t>Все шаблоны укладываются в лимит </a:t>
+            </a:r>
+            <a:r>
+              <a:rPr lang="ru-RU" sz="2799" b="0" cap="none" spc="0" baseline="0" dirty="0">
+                <a:solidFill>
+                  <a:srgbClr val="C2D076"/>
+                </a:solidFill>
+                <a:latin typeface="Inter Light"/>
+                <a:cs typeface="Inter Light"/>
+              </a:rPr>
+              <a:t>5 минут</a:t>
+            </a:r>
+            <a:r>
+              <a:rPr lang="ru-RU" sz="2799" b="0" cap="none" spc="0" baseline="0" dirty="0">
+                <a:solidFill>
+                  <a:srgbClr val="C2D076"/>
+                </a:solidFill>
+                <a:latin typeface="Inter Light"/>
+                <a:cs typeface="Inter Light"/>
+              </a:rPr>
+              <a:t> с запасом</a:t>
+            </a:r>
+            <a:endParaRPr lang="ru-RU" sz="2799"/>
+          </a:p>
+        </p:txBody>
+      </p:sp>
+    </p:spTree>
+  </p:cSld>
+  <p:clrMapOvr>
+    <a:masterClrMapping/>
+  </p:clrMapOvr>
+</p:sld>
+</file>
+
+<file path=ppt/slides/slide11.xml><?xml version="1.0" encoding="utf-8"?>
+<p:sld xmlns:a="http://schemas.openxmlformats.org/drawingml/2006/main" xmlns:p="http://schemas.openxmlformats.org/presentationml/2006/main" xmlns:r="http://schemas.openxmlformats.org/officeDocument/2006/relationships">
+  <p:cSld>
+    <p:bg>
+      <p:bgPr>
+        <a:solidFill>
+          <a:srgbClr val="001514"/>
+        </a:solidFill>
+      </p:bgPr>
+    </p:bg>
+    <p:spTree>
+      <p:nvGrpSpPr>
+        <p:cNvPr id="1" name=""/>
+        <p:cNvGrpSpPr/>
+        <p:nvPr/>
+      </p:nvGrpSpPr>
+      <p:grpSpPr/>
+      <p:sp>
+        <p:nvSpPr>
+          <p:cNvPr id="42" name="Google Shape;42;p8"/>
+          <p:cNvSpPr txBox="1"/>
+          <p:nvPr/>
+        </p:nvSpPr>
+        <p:spPr>
+          <a:xfrm>
+            <a:off x="619057" y="2623820"/>
+            <a:ext cx="15727680" cy="944880"/>
+          </a:xfrm>
+          <a:prstGeom prst="rect">
+            <a:avLst/>
+          </a:prstGeom>
+          <a:noFill/>
+          <a:ln>
+            <a:noFill/>
+          </a:ln>
+        </p:spPr>
+        <p:txBody>
+          <a:bodyPr anchorCtr="0" anchor="t" bIns="0" lIns="0" spcFirstLastPara="1" rIns="0" wrap="square" tIns="0">
+            <a:spAutoFit/>
+          </a:bodyPr>
+          <a:lstStyle/>
+          <a:p>
+            <a:pPr indent="0" lvl="1" marL="0" marR="0" rtl="0" algn="l">
+              <a:lnSpc>
+                <a:spcPct val="120000"/>
+              </a:lnSpc>
+              <a:spcBef>
+                <a:spcPts val="0"/>
+              </a:spcBef>
+              <a:spcAft>
+                <a:spcPts val="0"/>
+              </a:spcAft>
+              <a:buClr>
+                <a:srgbClr val="C2D076"/>
+              </a:buClr>
+              <a:buSzPts val="5600"/>
+              <a:buFont typeface="Inter Medium"/>
+              <a:buNone/>
+            </a:pPr>
+            <a:r>
+              <a:rPr i="0" lang="ru-RU" sz="4712" u="none" cap="none" strike="noStrike">
+                <a:solidFill>
+                  <a:srgbClr val="C2D076"/>
+                </a:solidFill>
+                <a:latin typeface="Inter Medium"/>
+                <a:ea typeface="Inter Medium"/>
+                <a:cs typeface="Inter Medium"/>
+                <a:sym typeface="Inter Medium"/>
+              </a:rPr>
+              <a:t>Три шага после финала</a:t>
             </a:r>
             <a:endParaRPr>
               <a:latin typeface="Inter Medium"/>
@@ -5400,7 +5363,7 @@
         <p:spPr>
           <a:xfrm>
             <a:off x="619057" y="2623820"/>
-            <a:ext cx="15727680" cy="809548"/>
+            <a:ext cx="9215842" cy="1527657"/>
           </a:xfrm>
           <a:prstGeom prst="rect">
             <a:avLst/>
@@ -5434,7 +5397,7 @@
               <a:buNone/>
             </a:pPr>
             <a:r>
-              <a:rPr i="0" lang="ru-RU" sz="4712" u="none" cap="none" strike="noStrike">
+              <a:rPr i="0" lang="ru-RU" sz="2799" u="none" cap="none" strike="noStrike">
                 <a:solidFill>
                   <a:srgbClr val="C2D076"/>
                 </a:solidFill>
@@ -5443,7 +5406,7 @@
                 <a:cs typeface="Inter Medium"/>
                 <a:sym typeface="Inter Medium"/>
               </a:rPr>
-              <a:t>95% фигур — свободные, 5% — плейсхолдеры</a:t>
+              <a:t>Вёрстка занимает больше времени, чем создание текста</a:t>
             </a:r>
             <a:endParaRPr>
               <a:latin typeface="Inter Medium"/>
@@ -5454,34 +5417,40 @@
           </a:p>
         </p:txBody>
       </p:sp>
-      <p:graphicFrame>
-        <p:nvGraphicFramePr>
-          <p:cNvPr id="43" name="Chart 42"/>
-          <p:cNvGraphicFramePr>
-            <a:graphicFrameLocks noGrp="1"/>
-          </p:cNvGraphicFramePr>
-          <p:nvPr/>
-        </p:nvGraphicFramePr>
-        <p:xfrm>
-          <a:off x="1024128" y="3947718"/>
-          <a:ext cx="4687877" cy="4687877"/>
-        </p:xfrm>
-        <a:graphic>
-          <a:graphicData uri="http://schemas.openxmlformats.org/drawingml/2006/chart">
-            <c:chart xmlns:c="http://schemas.openxmlformats.org/drawingml/2006/chart" r:id="rId2"/>
-          </a:graphicData>
-        </a:graphic>
-      </p:graphicFrame>
-      <p:sp>
-        <p:nvSpPr>
-          <p:cNvPr id="44" name="Legend title 44"/>
+      <p:sp>
+        <p:nvSpPr>
+          <p:cNvPr id="43" name="Card 43"/>
+          <p:cNvSpPr/>
+          <p:nvPr/>
+        </p:nvSpPr>
+        <p:spPr>
+          <a:xfrm>
+            <a:off x="1024128" y="4665827"/>
+            <a:ext cx="5120640" cy="4050378"/>
+          </a:xfrm>
+          <a:prstGeom prst="roundRect">
+            <a:avLst>
+              <a:gd name="adj" fmla="val 2709"/>
+            </a:avLst>
+          </a:prstGeom>
+          <a:solidFill>
+            <a:srgbClr val="000000"/>
+          </a:solidFill>
+          <a:ln>
+            <a:noFill/>
+          </a:ln>
+        </p:spPr>
+      </p:sp>
+      <p:sp>
+        <p:nvSpPr>
+          <p:cNvPr id="44" name="Index 44"/>
           <p:cNvSpPr txBox="1"/>
           <p:nvPr/>
         </p:nvSpPr>
         <p:spPr>
           <a:xfrm>
-            <a:off x="6589829" y="5400421"/>
-            <a:ext cx="4827735" cy="700799"/>
+            <a:off x="1459382" y="5101081"/>
+            <a:ext cx="4250132" cy="718109"/>
           </a:xfrm>
           <a:prstGeom prst="rect">
             <a:avLst/>
@@ -5501,53 +5470,29 @@
               <a:buNone/>
             </a:pPr>
             <a:r>
-              <a:rPr lang="ru-RU" sz="2799" b="0" cap="none" spc="0" baseline="0" dirty="0">
-                <a:solidFill>
-                  <a:srgbClr val="FFFFFF"/>
+              <a:rPr lang="ru-RU" sz="4712" b="0" cap="none" spc="0" baseline="0" dirty="0">
+                <a:solidFill>
+                  <a:srgbClr val="C2D076"/>
                 </a:solidFill>
                 <a:latin typeface="Inter Light"/>
                 <a:cs typeface="Inter Light"/>
               </a:rPr>
-              <a:t>Состав фигур в шаблоне</a:t>
-            </a:r>
-            <a:endParaRPr lang="ru-RU" sz="2799"/>
+              <a:t>01</a:t>
+            </a:r>
+            <a:endParaRPr lang="ru-RU" sz="4712"/>
           </a:p>
         </p:txBody>
       </p:sp>
       <p:sp>
         <p:nvSpPr>
-          <p:cNvPr id="45" name="Swatch 45"/>
-          <p:cNvSpPr/>
-          <p:nvPr/>
-        </p:nvSpPr>
-        <p:spPr>
-          <a:xfrm>
-            <a:off x="6589829" y="6186533"/>
-            <a:ext cx="255941" cy="255941"/>
-          </a:xfrm>
-          <a:prstGeom prst="roundRect">
-            <a:avLst>
-              <a:gd name="adj" fmla="val 24999"/>
-            </a:avLst>
-          </a:prstGeom>
-          <a:solidFill>
-            <a:srgbClr val="C2D076"/>
-          </a:solidFill>
-          <a:ln>
-            <a:noFill/>
-          </a:ln>
-        </p:spPr>
-      </p:sp>
-      <p:sp>
-        <p:nvSpPr>
-          <p:cNvPr id="46" name="Legend 46"/>
+          <p:cNvPr id="45" name="Card text 45"/>
           <p:cNvSpPr txBox="1"/>
           <p:nvPr/>
         </p:nvSpPr>
         <p:spPr>
           <a:xfrm>
-            <a:off x="7050522" y="6101220"/>
-            <a:ext cx="3451310" cy="451968"/>
+            <a:off x="1459382" y="5927203"/>
+            <a:ext cx="4250132" cy="2353748"/>
           </a:xfrm>
           <a:prstGeom prst="rect">
             <a:avLst/>
@@ -5564,32 +5509,78 @@
               <a:lnSpc>
                 <a:spcPct val="100000"/>
               </a:lnSpc>
+              <a:spcAft>
+                <a:spcPts val="4898"/>
+              </a:spcAft>
               <a:buNone/>
             </a:pPr>
             <a:r>
               <a:rPr lang="ru-RU" sz="2799" b="0" cap="none" spc="0" baseline="0" dirty="0">
                 <a:solidFill>
-                  <a:srgbClr val="FFFFFF"/>
+                  <a:srgbClr val="C2D076"/>
                 </a:solidFill>
                 <a:latin typeface="Inter Light"/>
                 <a:cs typeface="Inter Light"/>
               </a:rPr>
-              <a:t>Свободные фигуры</a:t>
+              <a:t>Ручная вёрстка</a:t>
             </a:r>
             <a:endParaRPr lang="ru-RU" sz="2799"/>
           </a:p>
+          <a:p>
+            <a:pPr algn="l" marL="0" indent="0">
+              <a:lnSpc>
+                <a:spcPct val="100000"/>
+              </a:lnSpc>
+              <a:buNone/>
+            </a:pPr>
+            <a:r>
+              <a:rPr lang="ru-RU" sz="2799" b="0" cap="none" spc="0" baseline="0" dirty="0">
+                <a:solidFill>
+                  <a:srgbClr val="FFFFFF"/>
+                </a:solidFill>
+                <a:latin typeface="Inter Light"/>
+                <a:cs typeface="Inter Light"/>
+              </a:rPr>
+              <a:t>Подбор макета, подгонка цветов и блоков</a:t>
+            </a:r>
+            <a:endParaRPr lang="ru-RU" sz="2799"/>
+          </a:p>
         </p:txBody>
       </p:sp>
       <p:sp>
         <p:nvSpPr>
-          <p:cNvPr id="47" name="Share 47"/>
+          <p:cNvPr id="46" name="Card 46"/>
+          <p:cNvSpPr/>
+          <p:nvPr/>
+        </p:nvSpPr>
+        <p:spPr>
+          <a:xfrm>
+            <a:off x="6583680" y="4665827"/>
+            <a:ext cx="5120640" cy="4050378"/>
+          </a:xfrm>
+          <a:prstGeom prst="roundRect">
+            <a:avLst>
+              <a:gd name="adj" fmla="val 2709"/>
+            </a:avLst>
+          </a:prstGeom>
+          <a:solidFill>
+            <a:srgbClr val="000000"/>
+          </a:solidFill>
+          <a:ln>
+            <a:noFill/>
+          </a:ln>
+        </p:spPr>
+      </p:sp>
+      <p:sp>
+        <p:nvSpPr>
+          <p:cNvPr id="47" name="Index 47"/>
           <p:cNvSpPr txBox="1"/>
           <p:nvPr/>
         </p:nvSpPr>
         <p:spPr>
           <a:xfrm>
-            <a:off x="10501832" y="6101220"/>
-            <a:ext cx="915732" cy="451968"/>
+            <a:off x="7018934" y="5101081"/>
+            <a:ext cx="4250132" cy="718109"/>
           </a:xfrm>
           <a:prstGeom prst="rect">
             <a:avLst/>
@@ -5602,60 +5593,36 @@
           </a:bodyPr>
           <a:lstStyle/>
           <a:p>
-            <a:pPr algn="r" marL="0" indent="0">
+            <a:pPr algn="l" marL="0" indent="0">
               <a:lnSpc>
                 <a:spcPct val="100000"/>
               </a:lnSpc>
               <a:buNone/>
             </a:pPr>
             <a:r>
-              <a:rPr lang="ru-RU" sz="2799" b="1" cap="none" spc="0" baseline="0" dirty="0">
+              <a:rPr lang="ru-RU" sz="4712" b="0" cap="none" spc="0" baseline="0" dirty="0">
                 <a:solidFill>
                   <a:srgbClr val="C2D076"/>
                 </a:solidFill>
                 <a:latin typeface="Inter Light"/>
                 <a:cs typeface="Inter Light"/>
               </a:rPr>
-              <a:t>95%</a:t>
-            </a:r>
-            <a:endParaRPr lang="ru-RU" sz="2799"/>
+              <a:t>02</a:t>
+            </a:r>
+            <a:endParaRPr lang="ru-RU" sz="4712"/>
           </a:p>
         </p:txBody>
       </p:sp>
       <p:sp>
         <p:nvSpPr>
-          <p:cNvPr id="48" name="Swatch 48"/>
-          <p:cNvSpPr/>
-          <p:nvPr/>
-        </p:nvSpPr>
-        <p:spPr>
-          <a:xfrm>
-            <a:off x="6589829" y="6816237"/>
-            <a:ext cx="255941" cy="255941"/>
-          </a:xfrm>
-          <a:prstGeom prst="roundRect">
-            <a:avLst>
-              <a:gd name="adj" fmla="val 24999"/>
-            </a:avLst>
-          </a:prstGeom>
-          <a:solidFill>
-            <a:srgbClr val="E8EDCB"/>
-          </a:solidFill>
-          <a:ln>
-            <a:noFill/>
-          </a:ln>
-        </p:spPr>
-      </p:sp>
-      <p:sp>
-        <p:nvSpPr>
-          <p:cNvPr id="49" name="Legend 49"/>
+          <p:cNvPr id="48" name="Card text 48"/>
           <p:cNvSpPr txBox="1"/>
           <p:nvPr/>
         </p:nvSpPr>
         <p:spPr>
           <a:xfrm>
-            <a:off x="7050522" y="6730924"/>
-            <a:ext cx="3451310" cy="451968"/>
+            <a:off x="7018934" y="5927203"/>
+            <a:ext cx="4250132" cy="2353748"/>
           </a:xfrm>
           <a:prstGeom prst="rect">
             <a:avLst/>
@@ -5672,32 +5639,78 @@
               <a:lnSpc>
                 <a:spcPct val="100000"/>
               </a:lnSpc>
+              <a:spcAft>
+                <a:spcPts val="4898"/>
+              </a:spcAft>
               <a:buNone/>
             </a:pPr>
             <a:r>
               <a:rPr lang="ru-RU" sz="2799" b="0" cap="none" spc="0" baseline="0" dirty="0">
                 <a:solidFill>
-                  <a:srgbClr val="FFFFFF"/>
+                  <a:srgbClr val="C2D076"/>
                 </a:solidFill>
                 <a:latin typeface="Inter Light"/>
                 <a:cs typeface="Inter Light"/>
               </a:rPr>
-              <a:t>Плейсхолдеры</a:t>
+              <a:t>ИИ ломает стиль</a:t>
             </a:r>
             <a:endParaRPr lang="ru-RU" sz="2799"/>
           </a:p>
+          <a:p>
+            <a:pPr algn="l" marL="0" indent="0">
+              <a:lnSpc>
+                <a:spcPct val="100000"/>
+              </a:lnSpc>
+              <a:buNone/>
+            </a:pPr>
+            <a:r>
+              <a:rPr lang="ru-RU" sz="2799" b="0" cap="none" spc="0" baseline="0" dirty="0">
+                <a:solidFill>
+                  <a:srgbClr val="FFFFFF"/>
+                </a:solidFill>
+                <a:latin typeface="Inter Light"/>
+                <a:cs typeface="Inter Light"/>
+              </a:rPr>
+              <a:t>Нейросети пишут текст, но не воспроизводят дизайн</a:t>
+            </a:r>
+            <a:endParaRPr lang="ru-RU" sz="2799"/>
+          </a:p>
         </p:txBody>
       </p:sp>
       <p:sp>
         <p:nvSpPr>
-          <p:cNvPr id="50" name="Share 50"/>
+          <p:cNvPr id="49" name="Card 49"/>
+          <p:cNvSpPr/>
+          <p:nvPr/>
+        </p:nvSpPr>
+        <p:spPr>
+          <a:xfrm>
+            <a:off x="12143232" y="4665827"/>
+            <a:ext cx="5120640" cy="4050378"/>
+          </a:xfrm>
+          <a:prstGeom prst="roundRect">
+            <a:avLst>
+              <a:gd name="adj" fmla="val 2709"/>
+            </a:avLst>
+          </a:prstGeom>
+          <a:solidFill>
+            <a:srgbClr val="000000"/>
+          </a:solidFill>
+          <a:ln>
+            <a:noFill/>
+          </a:ln>
+        </p:spPr>
+      </p:sp>
+      <p:sp>
+        <p:nvSpPr>
+          <p:cNvPr id="50" name="Index 50"/>
           <p:cNvSpPr txBox="1"/>
           <p:nvPr/>
         </p:nvSpPr>
         <p:spPr>
           <a:xfrm>
-            <a:off x="10501832" y="6730924"/>
-            <a:ext cx="915732" cy="451968"/>
+            <a:off x="12578486" y="5101081"/>
+            <a:ext cx="4250132" cy="718109"/>
           </a:xfrm>
           <a:prstGeom prst="rect">
             <a:avLst/>
@@ -5710,57 +5723,36 @@
           </a:bodyPr>
           <a:lstStyle/>
           <a:p>
-            <a:pPr algn="r" marL="0" indent="0">
+            <a:pPr algn="l" marL="0" indent="0">
               <a:lnSpc>
                 <a:spcPct val="100000"/>
               </a:lnSpc>
               <a:buNone/>
             </a:pPr>
             <a:r>
-              <a:rPr lang="ru-RU" sz="2799" b="1" cap="none" spc="0" baseline="0" dirty="0">
-                <a:solidFill>
-                  <a:srgbClr val="FFFFFF"/>
+              <a:rPr lang="ru-RU" sz="4712" b="0" cap="none" spc="0" baseline="0" dirty="0">
+                <a:solidFill>
+                  <a:srgbClr val="C2D076"/>
                 </a:solidFill>
                 <a:latin typeface="Inter Light"/>
                 <a:cs typeface="Inter Light"/>
               </a:rPr>
-              <a:t>5%</a:t>
-            </a:r>
-            <a:endParaRPr lang="ru-RU" sz="2799"/>
+              <a:t>03</a:t>
+            </a:r>
+            <a:endParaRPr lang="ru-RU" sz="4712"/>
           </a:p>
         </p:txBody>
       </p:sp>
-      <p:cxnSp>
-        <p:nvCxnSpPr>
-          <p:cNvPr id="51" name="Line 51"/>
-          <p:cNvCxnSpPr/>
-          <p:nvPr/>
-        </p:nvCxnSpPr>
-        <p:spPr>
-          <a:xfrm>
-            <a:off x="11856476" y="4680418"/>
-            <a:ext cx="0" cy="3206864"/>
-          </a:xfrm>
-          <a:prstGeom prst="line">
-            <a:avLst/>
-          </a:prstGeom>
-          <a:ln w="12700">
-            <a:solidFill>
-              <a:srgbClr val="384848"/>
-            </a:solidFill>
-          </a:ln>
-        </p:spPr>
-      </p:cxnSp>
-      <p:sp>
-        <p:nvSpPr>
-          <p:cNvPr id="52" name="Takeaway 52"/>
+      <p:sp>
+        <p:nvSpPr>
+          <p:cNvPr id="51" name="Card text 51"/>
           <p:cNvSpPr txBox="1"/>
           <p:nvPr/>
         </p:nvSpPr>
         <p:spPr>
           <a:xfrm>
-            <a:off x="12295388" y="4680418"/>
-            <a:ext cx="4968484" cy="3206864"/>
+            <a:off x="12578486" y="5927203"/>
+            <a:ext cx="4250132" cy="2353748"/>
           </a:xfrm>
           <a:prstGeom prst="rect">
             <a:avLst/>
@@ -5773,44 +5765,33 @@
           </a:bodyPr>
           <a:lstStyle/>
           <a:p>
-            <a:pPr algn="l" marL="391020" indent="-391020">
+            <a:pPr algn="l" marL="0" indent="0">
               <a:lnSpc>
                 <a:spcPct val="100000"/>
               </a:lnSpc>
               <a:spcAft>
                 <a:spcPts val="1539"/>
               </a:spcAft>
-              <a:buClr>
-                <a:srgbClr val="C2D076"/>
-              </a:buClr>
-              <a:buFont typeface="Arial"/>
-              <a:buChar char="•"/>
+              <a:buNone/>
             </a:pPr>
             <a:r>
               <a:rPr lang="ru-RU" sz="2799" b="0" cap="none" spc="0" baseline="0" dirty="0">
                 <a:solidFill>
-                  <a:srgbClr val="FFFFFF"/>
+                  <a:srgbClr val="C2D076"/>
                 </a:solidFill>
                 <a:latin typeface="Inter Light"/>
                 <a:cs typeface="Inter Light"/>
               </a:rPr>
-              <a:t>Правила оформления приходится выводить из образцов</a:t>
+              <a:t>Шаблон — не инструкция</a:t>
             </a:r>
             <a:endParaRPr lang="ru-RU" sz="2799"/>
           </a:p>
           <a:p>
-            <a:pPr algn="l" marL="391020" indent="-391020">
+            <a:pPr algn="l" marL="0" indent="0">
               <a:lnSpc>
                 <a:spcPct val="100000"/>
               </a:lnSpc>
-              <a:spcAft>
-                <a:spcPts val="1539"/>
-              </a:spcAft>
-              <a:buClr>
-                <a:srgbClr val="C2D076"/>
-              </a:buClr>
-              <a:buFont typeface="Arial"/>
-              <a:buChar char="•"/>
+              <a:buNone/>
             </a:pPr>
             <a:r>
               <a:rPr lang="ru-RU" sz="2799" b="0" cap="none" spc="0" baseline="0" dirty="0">
@@ -5820,7 +5801,7 @@
                 <a:latin typeface="Inter Light"/>
                 <a:cs typeface="Inter Light"/>
               </a:rPr>
-              <a:t>Палитра, кегли, сетка, поля, логотипы и колонтитулы не автоматизированы</a:t>
+              <a:t>Слайды-⁠образцы не показывают, как собрать новый слайд</a:t>
             </a:r>
             <a:endParaRPr lang="ru-RU" sz="2799"/>
           </a:p>
@@ -5860,7 +5841,7 @@
         <p:spPr>
           <a:xfrm>
             <a:off x="619057" y="2623820"/>
-            <a:ext cx="15727680" cy="944880"/>
+            <a:ext cx="15727680" cy="809548"/>
           </a:xfrm>
           <a:prstGeom prst="rect">
             <a:avLst/>
@@ -5903,7 +5884,7 @@
                 <a:cs typeface="Inter Medium"/>
                 <a:sym typeface="Inter Medium"/>
               </a:rPr>
-              <a:t>Шаблон читается как набор правил</a:t>
+              <a:t>95% фигур — свободные, 5% — плейсхолдеры</a:t>
             </a:r>
             <a:endParaRPr>
               <a:latin typeface="Inter Medium"/>
@@ -5914,40 +5895,34 @@
           </a:p>
         </p:txBody>
       </p:sp>
-      <p:sp>
-        <p:nvSpPr>
-          <p:cNvPr id="43" name="Card 43"/>
-          <p:cNvSpPr/>
-          <p:nvPr/>
-        </p:nvSpPr>
-        <p:spPr>
-          <a:xfrm>
-            <a:off x="1024128" y="4137660"/>
-            <a:ext cx="5120640" cy="3825588"/>
-          </a:xfrm>
-          <a:prstGeom prst="roundRect">
-            <a:avLst>
-              <a:gd name="adj" fmla="val 2868"/>
-            </a:avLst>
-          </a:prstGeom>
-          <a:solidFill>
-            <a:srgbClr val="000000"/>
-          </a:solidFill>
-          <a:ln>
-            <a:noFill/>
-          </a:ln>
-        </p:spPr>
-      </p:sp>
-      <p:sp>
-        <p:nvSpPr>
-          <p:cNvPr id="44" name="Index 44"/>
+      <p:graphicFrame>
+        <p:nvGraphicFramePr>
+          <p:cNvPr id="43" name="Chart 42"/>
+          <p:cNvGraphicFramePr>
+            <a:graphicFrameLocks noGrp="1"/>
+          </p:cNvGraphicFramePr>
+          <p:nvPr/>
+        </p:nvGraphicFramePr>
+        <p:xfrm>
+          <a:off x="1024128" y="3947718"/>
+          <a:ext cx="4687877" cy="4687877"/>
+        </p:xfrm>
+        <a:graphic>
+          <a:graphicData uri="http://schemas.openxmlformats.org/drawingml/2006/chart">
+            <c:chart xmlns:c="http://schemas.openxmlformats.org/drawingml/2006/chart" r:id="rId2"/>
+          </a:graphicData>
+        </a:graphic>
+      </p:graphicFrame>
+      <p:sp>
+        <p:nvSpPr>
+          <p:cNvPr id="44" name="Legend title 44"/>
           <p:cNvSpPr txBox="1"/>
           <p:nvPr/>
         </p:nvSpPr>
         <p:spPr>
           <a:xfrm>
-            <a:off x="1459382" y="4572914"/>
-            <a:ext cx="4250132" cy="718109"/>
+            <a:off x="6589829" y="5400421"/>
+            <a:ext cx="4827735" cy="700799"/>
           </a:xfrm>
           <a:prstGeom prst="rect">
             <a:avLst/>
@@ -5967,380 +5942,34 @@
               <a:buNone/>
             </a:pPr>
             <a:r>
-              <a:rPr lang="ru-RU" sz="4712" b="0" cap="none" spc="0" baseline="0" dirty="0">
-                <a:solidFill>
-                  <a:srgbClr val="C2D076"/>
+              <a:rPr lang="ru-RU" sz="2799" b="0" cap="none" spc="0" baseline="0" dirty="0">
+                <a:solidFill>
+                  <a:srgbClr val="FFFFFF"/>
                 </a:solidFill>
                 <a:latin typeface="Inter Light"/>
                 <a:cs typeface="Inter Light"/>
               </a:rPr>
-              <a:t>01</a:t>
-            </a:r>
-            <a:endParaRPr lang="ru-RU" sz="4712"/>
+              <a:t>Состав фигур в шаблонах</a:t>
+            </a:r>
+            <a:endParaRPr lang="ru-RU" sz="2799"/>
           </a:p>
         </p:txBody>
       </p:sp>
       <p:sp>
         <p:nvSpPr>
-          <p:cNvPr id="45" name="Card text 45"/>
-          <p:cNvSpPr txBox="1"/>
-          <p:nvPr/>
-        </p:nvSpPr>
-        <p:spPr>
-          <a:xfrm>
-            <a:off x="1459382" y="5399036"/>
-            <a:ext cx="4250132" cy="2128958"/>
-          </a:xfrm>
-          <a:prstGeom prst="rect">
-            <a:avLst/>
-          </a:prstGeom>
-          <a:noFill/>
-        </p:spPr>
-        <p:txBody>
-          <a:bodyPr wrap="square" lIns="0" tIns="0" rIns="0" bIns="0" anchor="t" rtlCol="0">
-            <a:noAutofit/>
-          </a:bodyPr>
-          <a:lstStyle/>
-          <a:p>
-            <a:pPr algn="l" marL="0" indent="0">
-              <a:lnSpc>
-                <a:spcPct val="100000"/>
-              </a:lnSpc>
-              <a:spcAft>
-                <a:spcPts val="4568"/>
-              </a:spcAft>
-              <a:buNone/>
-            </a:pPr>
-            <a:r>
-              <a:rPr lang="ru-RU" sz="2799" b="0" cap="none" spc="0" baseline="0" dirty="0">
-                <a:solidFill>
-                  <a:srgbClr val="C2D076"/>
-                </a:solidFill>
-                <a:latin typeface="Inter Light"/>
-                <a:cs typeface="Inter Light"/>
-              </a:rPr>
-              <a:t>На входе — шаблон и текст</a:t>
-            </a:r>
-            <a:endParaRPr lang="ru-RU" sz="2799"/>
-          </a:p>
-          <a:p>
-            <a:pPr algn="l" marL="0" indent="0">
-              <a:lnSpc>
-                <a:spcPct val="100000"/>
-              </a:lnSpc>
-              <a:buNone/>
-            </a:pPr>
-            <a:r>
-              <a:rPr lang="ru-RU" sz="2199" b="0" cap="none" spc="0" baseline="0" dirty="0">
-                <a:solidFill>
-                  <a:srgbClr val="FFFFFF"/>
-                </a:solidFill>
-                <a:latin typeface="Inter Light"/>
-                <a:cs typeface="Inter Light"/>
-              </a:rPr>
-              <a:t>Verstka берёт шаблон и текст</a:t>
-            </a:r>
-            <a:endParaRPr lang="ru-RU" sz="2199"/>
-          </a:p>
-        </p:txBody>
-      </p:sp>
-      <p:sp>
-        <p:nvSpPr>
-          <p:cNvPr id="46" name="Card 46"/>
+          <p:cNvPr id="45" name="Swatch 45"/>
           <p:cNvSpPr/>
           <p:nvPr/>
         </p:nvSpPr>
         <p:spPr>
           <a:xfrm>
-            <a:off x="6583680" y="4137660"/>
-            <a:ext cx="5120640" cy="3825588"/>
+            <a:off x="6589829" y="6186533"/>
+            <a:ext cx="255941" cy="255941"/>
           </a:xfrm>
           <a:prstGeom prst="roundRect">
             <a:avLst>
-              <a:gd name="adj" fmla="val 2868"/>
+              <a:gd name="adj" fmla="val 24999"/>
             </a:avLst>
-          </a:prstGeom>
-          <a:solidFill>
-            <a:srgbClr val="000000"/>
-          </a:solidFill>
-          <a:ln>
-            <a:noFill/>
-          </a:ln>
-        </p:spPr>
-      </p:sp>
-      <p:sp>
-        <p:nvSpPr>
-          <p:cNvPr id="47" name="Index 47"/>
-          <p:cNvSpPr txBox="1"/>
-          <p:nvPr/>
-        </p:nvSpPr>
-        <p:spPr>
-          <a:xfrm>
-            <a:off x="7018934" y="4572914"/>
-            <a:ext cx="4250132" cy="718109"/>
-          </a:xfrm>
-          <a:prstGeom prst="rect">
-            <a:avLst/>
-          </a:prstGeom>
-          <a:noFill/>
-        </p:spPr>
-        <p:txBody>
-          <a:bodyPr wrap="square" lIns="0" tIns="0" rIns="0" bIns="0" anchor="t" rtlCol="0">
-            <a:noAutofit/>
-          </a:bodyPr>
-          <a:lstStyle/>
-          <a:p>
-            <a:pPr algn="l" marL="0" indent="0">
-              <a:lnSpc>
-                <a:spcPct val="100000"/>
-              </a:lnSpc>
-              <a:buNone/>
-            </a:pPr>
-            <a:r>
-              <a:rPr lang="ru-RU" sz="4712" b="0" cap="none" spc="0" baseline="0" dirty="0">
-                <a:solidFill>
-                  <a:srgbClr val="C2D076"/>
-                </a:solidFill>
-                <a:latin typeface="Inter Light"/>
-                <a:cs typeface="Inter Light"/>
-              </a:rPr>
-              <a:t>02</a:t>
-            </a:r>
-            <a:endParaRPr lang="ru-RU" sz="4712"/>
-          </a:p>
-        </p:txBody>
-      </p:sp>
-      <p:sp>
-        <p:nvSpPr>
-          <p:cNvPr id="48" name="Card text 48"/>
-          <p:cNvSpPr txBox="1"/>
-          <p:nvPr/>
-        </p:nvSpPr>
-        <p:spPr>
-          <a:xfrm>
-            <a:off x="7018934" y="5399036"/>
-            <a:ext cx="4250132" cy="2128958"/>
-          </a:xfrm>
-          <a:prstGeom prst="rect">
-            <a:avLst/>
-          </a:prstGeom>
-          <a:noFill/>
-        </p:spPr>
-        <p:txBody>
-          <a:bodyPr wrap="square" lIns="0" tIns="0" rIns="0" bIns="0" anchor="t" rtlCol="0">
-            <a:noAutofit/>
-          </a:bodyPr>
-          <a:lstStyle/>
-          <a:p>
-            <a:pPr algn="l" marL="0" indent="0">
-              <a:lnSpc>
-                <a:spcPct val="100000"/>
-              </a:lnSpc>
-              <a:spcAft>
-                <a:spcPts val="7927"/>
-              </a:spcAft>
-              <a:buNone/>
-            </a:pPr>
-            <a:r>
-              <a:rPr lang="ru-RU" sz="2799" b="0" cap="none" spc="0" baseline="0" dirty="0">
-                <a:solidFill>
-                  <a:srgbClr val="C2D076"/>
-                </a:solidFill>
-                <a:latin typeface="Inter Light"/>
-                <a:cs typeface="Inter Light"/>
-              </a:rPr>
-              <a:t>Шаблон — набор правил</a:t>
-            </a:r>
-            <a:endParaRPr lang="ru-RU" sz="2799"/>
-          </a:p>
-          <a:p>
-            <a:pPr algn="l" marL="0" indent="0">
-              <a:lnSpc>
-                <a:spcPct val="100000"/>
-              </a:lnSpc>
-              <a:buNone/>
-            </a:pPr>
-            <a:r>
-              <a:rPr lang="ru-RU" sz="2199" b="0" cap="none" spc="0" baseline="0" dirty="0">
-                <a:solidFill>
-                  <a:srgbClr val="FFFFFF"/>
-                </a:solidFill>
-                <a:latin typeface="Inter Light"/>
-                <a:cs typeface="Inter Light"/>
-              </a:rPr>
-              <a:t>Шаблон читается как набор правил, а не как набор макетов</a:t>
-            </a:r>
-            <a:endParaRPr lang="ru-RU" sz="2199"/>
-          </a:p>
-        </p:txBody>
-      </p:sp>
-      <p:sp>
-        <p:nvSpPr>
-          <p:cNvPr id="49" name="Card 49"/>
-          <p:cNvSpPr/>
-          <p:nvPr/>
-        </p:nvSpPr>
-        <p:spPr>
-          <a:xfrm>
-            <a:off x="12143232" y="4137660"/>
-            <a:ext cx="5120640" cy="3825588"/>
-          </a:xfrm>
-          <a:prstGeom prst="roundRect">
-            <a:avLst>
-              <a:gd name="adj" fmla="val 2868"/>
-            </a:avLst>
-          </a:prstGeom>
-          <a:solidFill>
-            <a:srgbClr val="000000"/>
-          </a:solidFill>
-          <a:ln>
-            <a:noFill/>
-          </a:ln>
-        </p:spPr>
-      </p:sp>
-      <p:sp>
-        <p:nvSpPr>
-          <p:cNvPr id="50" name="Index 50"/>
-          <p:cNvSpPr txBox="1"/>
-          <p:nvPr/>
-        </p:nvSpPr>
-        <p:spPr>
-          <a:xfrm>
-            <a:off x="12578486" y="4572914"/>
-            <a:ext cx="4250132" cy="718109"/>
-          </a:xfrm>
-          <a:prstGeom prst="rect">
-            <a:avLst/>
-          </a:prstGeom>
-          <a:noFill/>
-        </p:spPr>
-        <p:txBody>
-          <a:bodyPr wrap="square" lIns="0" tIns="0" rIns="0" bIns="0" anchor="t" rtlCol="0">
-            <a:noAutofit/>
-          </a:bodyPr>
-          <a:lstStyle/>
-          <a:p>
-            <a:pPr algn="l" marL="0" indent="0">
-              <a:lnSpc>
-                <a:spcPct val="100000"/>
-              </a:lnSpc>
-              <a:buNone/>
-            </a:pPr>
-            <a:r>
-              <a:rPr lang="ru-RU" sz="4712" b="0" cap="none" spc="0" baseline="0" dirty="0">
-                <a:solidFill>
-                  <a:srgbClr val="C2D076"/>
-                </a:solidFill>
-                <a:latin typeface="Inter Light"/>
-                <a:cs typeface="Inter Light"/>
-              </a:rPr>
-              <a:t>03</a:t>
-            </a:r>
-            <a:endParaRPr lang="ru-RU" sz="4712"/>
-          </a:p>
-        </p:txBody>
-      </p:sp>
-      <p:sp>
-        <p:nvSpPr>
-          <p:cNvPr id="51" name="Card text 51"/>
-          <p:cNvSpPr txBox="1"/>
-          <p:nvPr/>
-        </p:nvSpPr>
-        <p:spPr>
-          <a:xfrm>
-            <a:off x="12578486" y="5399036"/>
-            <a:ext cx="4250132" cy="2128958"/>
-          </a:xfrm>
-          <a:prstGeom prst="rect">
-            <a:avLst/>
-          </a:prstGeom>
-          <a:noFill/>
-        </p:spPr>
-        <p:txBody>
-          <a:bodyPr wrap="square" lIns="0" tIns="0" rIns="0" bIns="0" anchor="t" rtlCol="0">
-            <a:noAutofit/>
-          </a:bodyPr>
-          <a:lstStyle/>
-          <a:p>
-            <a:pPr algn="l" marL="0" indent="0">
-              <a:lnSpc>
-                <a:spcPct val="100000"/>
-              </a:lnSpc>
-              <a:spcAft>
-                <a:spcPts val="1209"/>
-              </a:spcAft>
-              <a:buNone/>
-            </a:pPr>
-            <a:r>
-              <a:rPr lang="ru-RU" sz="2799" b="0" cap="none" spc="0" baseline="0" dirty="0">
-                <a:solidFill>
-                  <a:srgbClr val="C2D076"/>
-                </a:solidFill>
-                <a:latin typeface="Inter Light"/>
-                <a:cs typeface="Inter Light"/>
-              </a:rPr>
-              <a:t>На выходе — три редактируемые презентации</a:t>
-            </a:r>
-            <a:endParaRPr lang="ru-RU" sz="2799"/>
-          </a:p>
-          <a:p>
-            <a:pPr algn="l" marL="0" indent="0">
-              <a:lnSpc>
-                <a:spcPct val="100000"/>
-              </a:lnSpc>
-              <a:buNone/>
-            </a:pPr>
-            <a:r>
-              <a:rPr lang="ru-RU" sz="2199" b="0" cap="none" spc="0" baseline="0" dirty="0">
-                <a:solidFill>
-                  <a:srgbClr val="FFFFFF"/>
-                </a:solidFill>
-                <a:latin typeface="Inter Light"/>
-                <a:cs typeface="Inter Light"/>
-              </a:rPr>
-              <a:t>Создаются три редактируемые презентации в стиле шаблона</a:t>
-            </a:r>
-            <a:endParaRPr lang="ru-RU" sz="2199"/>
-          </a:p>
-        </p:txBody>
-      </p:sp>
-      <p:sp>
-        <p:nvSpPr>
-          <p:cNvPr id="52" name="Conclusion strip 52"/>
-          <p:cNvSpPr/>
-          <p:nvPr/>
-        </p:nvSpPr>
-        <p:spPr>
-          <a:xfrm>
-            <a:off x="1024128" y="8355259"/>
-            <a:ext cx="16239744" cy="892754"/>
-          </a:xfrm>
-          <a:prstGeom prst="roundRect">
-            <a:avLst>
-              <a:gd name="adj" fmla="val 12290"/>
-            </a:avLst>
-          </a:prstGeom>
-          <a:solidFill>
-            <a:srgbClr val="000000"/>
-          </a:solidFill>
-          <a:ln>
-            <a:noFill/>
-          </a:ln>
-        </p:spPr>
-      </p:sp>
-      <p:sp>
-        <p:nvSpPr>
-          <p:cNvPr id="53" name="Conclusion bar 53"/>
-          <p:cNvSpPr/>
-          <p:nvPr/>
-        </p:nvSpPr>
-        <p:spPr>
-          <a:xfrm>
-            <a:off x="1379601" y="8618309"/>
-            <a:ext cx="61722" cy="366654"/>
-          </a:xfrm>
-          <a:prstGeom prst="rect">
-            <a:avLst/>
           </a:prstGeom>
           <a:solidFill>
             <a:srgbClr val="C2D076"/>
@@ -6352,14 +5981,14 @@
       </p:sp>
       <p:sp>
         <p:nvSpPr>
-          <p:cNvPr id="54" name="Conclusion 54"/>
+          <p:cNvPr id="46" name="Legend 46"/>
           <p:cNvSpPr txBox="1"/>
           <p:nvPr/>
         </p:nvSpPr>
         <p:spPr>
           <a:xfrm>
-            <a:off x="1725701" y="8575652"/>
-            <a:ext cx="15182698" cy="451968"/>
+            <a:off x="7050522" y="6101220"/>
+            <a:ext cx="3451310" cy="451968"/>
           </a:xfrm>
           <a:prstGeom prst="rect">
             <a:avLst/>
@@ -6381,12 +6010,228 @@
             <a:r>
               <a:rPr lang="ru-RU" sz="2799" b="0" cap="none" spc="0" baseline="0" dirty="0">
                 <a:solidFill>
-                  <a:srgbClr val="C2D076"/>
+                  <a:srgbClr val="FFFFFF"/>
                 </a:solidFill>
                 <a:latin typeface="Inter Light"/>
                 <a:cs typeface="Inter Light"/>
               </a:rPr>
-              <a:t>Презентация в фирменном стиле без ручной вёрстки</a:t>
+              <a:t>Свободные фигуры</a:t>
+            </a:r>
+            <a:endParaRPr lang="ru-RU" sz="2799"/>
+          </a:p>
+        </p:txBody>
+      </p:sp>
+      <p:sp>
+        <p:nvSpPr>
+          <p:cNvPr id="47" name="Share 47"/>
+          <p:cNvSpPr txBox="1"/>
+          <p:nvPr/>
+        </p:nvSpPr>
+        <p:spPr>
+          <a:xfrm>
+            <a:off x="10501832" y="6101220"/>
+            <a:ext cx="915732" cy="451968"/>
+          </a:xfrm>
+          <a:prstGeom prst="rect">
+            <a:avLst/>
+          </a:prstGeom>
+          <a:noFill/>
+        </p:spPr>
+        <p:txBody>
+          <a:bodyPr wrap="square" lIns="0" tIns="0" rIns="0" bIns="0" anchor="t" rtlCol="0">
+            <a:noAutofit/>
+          </a:bodyPr>
+          <a:lstStyle/>
+          <a:p>
+            <a:pPr algn="r" marL="0" indent="0">
+              <a:lnSpc>
+                <a:spcPct val="100000"/>
+              </a:lnSpc>
+              <a:buNone/>
+            </a:pPr>
+            <a:r>
+              <a:rPr lang="ru-RU" sz="2799" b="1" cap="none" spc="0" baseline="0" dirty="0">
+                <a:solidFill>
+                  <a:srgbClr val="C2D076"/>
+                </a:solidFill>
+                <a:latin typeface="Inter Light"/>
+                <a:cs typeface="Inter Light"/>
+              </a:rPr>
+              <a:t>95%</a:t>
+            </a:r>
+            <a:endParaRPr lang="ru-RU" sz="2799"/>
+          </a:p>
+        </p:txBody>
+      </p:sp>
+      <p:sp>
+        <p:nvSpPr>
+          <p:cNvPr id="48" name="Swatch 48"/>
+          <p:cNvSpPr/>
+          <p:nvPr/>
+        </p:nvSpPr>
+        <p:spPr>
+          <a:xfrm>
+            <a:off x="6589829" y="6816237"/>
+            <a:ext cx="255941" cy="255941"/>
+          </a:xfrm>
+          <a:prstGeom prst="roundRect">
+            <a:avLst>
+              <a:gd name="adj" fmla="val 24999"/>
+            </a:avLst>
+          </a:prstGeom>
+          <a:solidFill>
+            <a:srgbClr val="E8EDCB"/>
+          </a:solidFill>
+          <a:ln>
+            <a:noFill/>
+          </a:ln>
+        </p:spPr>
+      </p:sp>
+      <p:sp>
+        <p:nvSpPr>
+          <p:cNvPr id="49" name="Legend 49"/>
+          <p:cNvSpPr txBox="1"/>
+          <p:nvPr/>
+        </p:nvSpPr>
+        <p:spPr>
+          <a:xfrm>
+            <a:off x="7050522" y="6730924"/>
+            <a:ext cx="3451310" cy="451968"/>
+          </a:xfrm>
+          <a:prstGeom prst="rect">
+            <a:avLst/>
+          </a:prstGeom>
+          <a:noFill/>
+        </p:spPr>
+        <p:txBody>
+          <a:bodyPr wrap="square" lIns="0" tIns="0" rIns="0" bIns="0" anchor="t" rtlCol="0">
+            <a:noAutofit/>
+          </a:bodyPr>
+          <a:lstStyle/>
+          <a:p>
+            <a:pPr algn="l" marL="0" indent="0">
+              <a:lnSpc>
+                <a:spcPct val="100000"/>
+              </a:lnSpc>
+              <a:buNone/>
+            </a:pPr>
+            <a:r>
+              <a:rPr lang="ru-RU" sz="2799" b="0" cap="none" spc="0" baseline="0" dirty="0">
+                <a:solidFill>
+                  <a:srgbClr val="FFFFFF"/>
+                </a:solidFill>
+                <a:latin typeface="Inter Light"/>
+                <a:cs typeface="Inter Light"/>
+              </a:rPr>
+              <a:t>Плейсхолдеры</a:t>
+            </a:r>
+            <a:endParaRPr lang="ru-RU" sz="2799"/>
+          </a:p>
+        </p:txBody>
+      </p:sp>
+      <p:sp>
+        <p:nvSpPr>
+          <p:cNvPr id="50" name="Share 50"/>
+          <p:cNvSpPr txBox="1"/>
+          <p:nvPr/>
+        </p:nvSpPr>
+        <p:spPr>
+          <a:xfrm>
+            <a:off x="10501832" y="6730924"/>
+            <a:ext cx="915732" cy="451968"/>
+          </a:xfrm>
+          <a:prstGeom prst="rect">
+            <a:avLst/>
+          </a:prstGeom>
+          <a:noFill/>
+        </p:spPr>
+        <p:txBody>
+          <a:bodyPr wrap="square" lIns="0" tIns="0" rIns="0" bIns="0" anchor="t" rtlCol="0">
+            <a:noAutofit/>
+          </a:bodyPr>
+          <a:lstStyle/>
+          <a:p>
+            <a:pPr algn="r" marL="0" indent="0">
+              <a:lnSpc>
+                <a:spcPct val="100000"/>
+              </a:lnSpc>
+              <a:buNone/>
+            </a:pPr>
+            <a:r>
+              <a:rPr lang="ru-RU" sz="2799" b="1" cap="none" spc="0" baseline="0" dirty="0">
+                <a:solidFill>
+                  <a:srgbClr val="FFFFFF"/>
+                </a:solidFill>
+                <a:latin typeface="Inter Light"/>
+                <a:cs typeface="Inter Light"/>
+              </a:rPr>
+              <a:t>5%</a:t>
+            </a:r>
+            <a:endParaRPr lang="ru-RU" sz="2799"/>
+          </a:p>
+        </p:txBody>
+      </p:sp>
+      <p:cxnSp>
+        <p:nvCxnSpPr>
+          <p:cNvPr id="51" name="Line 51"/>
+          <p:cNvCxnSpPr/>
+          <p:nvPr/>
+        </p:nvCxnSpPr>
+        <p:spPr>
+          <a:xfrm>
+            <a:off x="11856476" y="5346035"/>
+            <a:ext cx="0" cy="1305103"/>
+          </a:xfrm>
+          <a:prstGeom prst="line">
+            <a:avLst/>
+          </a:prstGeom>
+          <a:ln w="12700">
+            <a:solidFill>
+              <a:srgbClr val="384848"/>
+            </a:solidFill>
+          </a:ln>
+        </p:spPr>
+      </p:cxnSp>
+      <p:sp>
+        <p:nvSpPr>
+          <p:cNvPr id="52" name="Takeaway 52"/>
+          <p:cNvSpPr txBox="1"/>
+          <p:nvPr/>
+        </p:nvSpPr>
+        <p:spPr>
+          <a:xfrm>
+            <a:off x="12295388" y="5346035"/>
+            <a:ext cx="4968484" cy="1305103"/>
+          </a:xfrm>
+          <a:prstGeom prst="rect">
+            <a:avLst/>
+          </a:prstGeom>
+          <a:noFill/>
+        </p:spPr>
+        <p:txBody>
+          <a:bodyPr wrap="square" lIns="0" tIns="0" rIns="0" bIns="0" anchor="t" rtlCol="0">
+            <a:noAutofit/>
+          </a:bodyPr>
+          <a:lstStyle/>
+          <a:p>
+            <a:pPr algn="l" marL="0" indent="0">
+              <a:lnSpc>
+                <a:spcPct val="100000"/>
+              </a:lnSpc>
+              <a:spcAft>
+                <a:spcPts val="1539"/>
+              </a:spcAft>
+              <a:buNone/>
+            </a:pPr>
+            <a:r>
+              <a:rPr lang="ru-RU" sz="2799" b="0" cap="none" spc="0" baseline="0" dirty="0">
+                <a:solidFill>
+                  <a:srgbClr val="FFFFFF"/>
+                </a:solidFill>
+                <a:latin typeface="Inter Light"/>
+                <a:cs typeface="Inter Light"/>
+              </a:rPr>
+              <a:t>Правила оформления нужно выводить из образцов</a:t>
             </a:r>
             <a:endParaRPr lang="ru-RU" sz="2799"/>
           </a:p>
@@ -6426,7 +6271,7 @@
         <p:spPr>
           <a:xfrm>
             <a:off x="619057" y="2623820"/>
-            <a:ext cx="10417162" cy="1527657"/>
+            <a:ext cx="15727680" cy="944880"/>
           </a:xfrm>
           <a:prstGeom prst="rect">
             <a:avLst/>
@@ -6460,7 +6305,7 @@
               <a:buNone/>
             </a:pPr>
             <a:r>
-              <a:rPr i="0" lang="ru-RU" sz="2799" u="none" cap="none" strike="noStrike">
+              <a:rPr i="0" lang="ru-RU" sz="4712" u="none" cap="none" strike="noStrike">
                 <a:solidFill>
                   <a:srgbClr val="C2D076"/>
                 </a:solidFill>
@@ -6469,7 +6314,7 @@
                 <a:cs typeface="Inter Medium"/>
                 <a:sym typeface="Inter Medium"/>
               </a:rPr>
-              <a:t>Открытые модели до 35 млрд параметров создают презентации</a:t>
+              <a:t>Решение</a:t>
             </a:r>
             <a:endParaRPr>
               <a:latin typeface="Inter Medium"/>
@@ -6480,76 +6325,342 @@
           </a:p>
         </p:txBody>
       </p:sp>
-      <p:cxnSp>
-        <p:nvCxnSpPr>
-          <p:cNvPr id="76" name="Axis 76"/>
-          <p:cNvCxnSpPr/>
-          <p:nvPr/>
-        </p:nvCxnSpPr>
-        <p:spPr>
-          <a:xfrm>
-            <a:off x="1409890" y="5051589"/>
-            <a:ext cx="13202472" cy="0"/>
-          </a:xfrm>
-          <a:prstGeom prst="line">
-            <a:avLst/>
-          </a:prstGeom>
-          <a:ln w="19050">
-            <a:solidFill>
-              <a:srgbClr val="C2D076"/>
-            </a:solidFill>
-          </a:ln>
-        </p:spPr>
-      </p:cxnSp>
-      <p:sp>
-        <p:nvSpPr>
-          <p:cNvPr id="77" name="Badge 77"/>
+      <p:sp>
+        <p:nvSpPr>
+          <p:cNvPr id="43" name="Card 43"/>
           <p:cNvSpPr/>
           <p:nvPr/>
         </p:nvSpPr>
         <p:spPr>
           <a:xfrm>
-            <a:off x="1024128" y="4665827"/>
-            <a:ext cx="771525" cy="771525"/>
-          </a:xfrm>
-          <a:prstGeom prst="ellipse">
-            <a:avLst/>
+            <a:off x="1024128" y="4137660"/>
+            <a:ext cx="5120640" cy="3812512"/>
+          </a:xfrm>
+          <a:prstGeom prst="roundRect">
+            <a:avLst>
+              <a:gd name="adj" fmla="val 2878"/>
+            </a:avLst>
           </a:prstGeom>
           <a:solidFill>
-            <a:srgbClr val="C2D076"/>
+            <a:srgbClr val="000000"/>
           </a:solidFill>
           <a:ln>
             <a:noFill/>
           </a:ln>
         </p:spPr>
+      </p:sp>
+      <p:sp>
+        <p:nvSpPr>
+          <p:cNvPr id="44" name="Index 44"/>
+          <p:cNvSpPr txBox="1"/>
+          <p:nvPr/>
+        </p:nvSpPr>
+        <p:spPr>
+          <a:xfrm>
+            <a:off x="1285280" y="4398812"/>
+            <a:ext cx="4598336" cy="718109"/>
+          </a:xfrm>
+          <a:prstGeom prst="rect">
+            <a:avLst/>
+          </a:prstGeom>
+          <a:noFill/>
+        </p:spPr>
         <p:txBody>
-          <a:bodyPr lIns="0" tIns="0" rIns="0" bIns="0" anchor="ctr" wrap="none"/>
+          <a:bodyPr wrap="square" lIns="0" tIns="0" rIns="0" bIns="0" anchor="t" rtlCol="0">
+            <a:noAutofit/>
+          </a:bodyPr>
           <a:lstStyle/>
           <a:p>
-            <a:pPr algn="ctr"/>
-            <a:r>
-              <a:rPr lang="ru-RU" sz="2799" b="0" cap="none" spc="0" baseline="0">
-                <a:solidFill>
-                  <a:srgbClr val="000000"/>
+            <a:pPr algn="l" marL="0" indent="0">
+              <a:lnSpc>
+                <a:spcPct val="100000"/>
+              </a:lnSpc>
+              <a:buNone/>
+            </a:pPr>
+            <a:r>
+              <a:rPr lang="ru-RU" sz="4712" b="0" cap="none" spc="0" baseline="0" dirty="0">
+                <a:solidFill>
+                  <a:srgbClr val="C2D076"/>
                 </a:solidFill>
                 <a:latin typeface="Inter Light"/>
                 <a:cs typeface="Inter Light"/>
               </a:rPr>
-              <a:t>1</a:t>
-            </a:r>
+              <a:t>01</a:t>
+            </a:r>
+            <a:endParaRPr lang="ru-RU" sz="4712"/>
           </a:p>
         </p:txBody>
       </p:sp>
       <p:sp>
         <p:nvSpPr>
-          <p:cNvPr id="78" name="Step 78"/>
+          <p:cNvPr id="45" name="Card text 45"/>
           <p:cNvSpPr txBox="1"/>
           <p:nvPr/>
         </p:nvSpPr>
         <p:spPr>
           <a:xfrm>
-            <a:off x="1024128" y="5715101"/>
-            <a:ext cx="3037271" cy="1610951"/>
+            <a:off x="1285280" y="5224934"/>
+            <a:ext cx="4598336" cy="2464086"/>
+          </a:xfrm>
+          <a:prstGeom prst="rect">
+            <a:avLst/>
+          </a:prstGeom>
+          <a:noFill/>
+        </p:spPr>
+        <p:txBody>
+          <a:bodyPr wrap="square" lIns="0" tIns="0" rIns="0" bIns="0" anchor="t" rtlCol="0">
+            <a:noAutofit/>
+          </a:bodyPr>
+          <a:lstStyle/>
+          <a:p>
+            <a:pPr algn="l" marL="0" indent="0">
+              <a:lnSpc>
+                <a:spcPct val="100000"/>
+              </a:lnSpc>
+              <a:spcAft>
+                <a:spcPts val="4568"/>
+              </a:spcAft>
+              <a:buNone/>
+            </a:pPr>
+            <a:r>
+              <a:rPr lang="ru-RU" sz="2799" b="0" cap="none" spc="0" baseline="0" dirty="0">
+                <a:solidFill>
+                  <a:srgbClr val="C2D076"/>
+                </a:solidFill>
+                <a:latin typeface="Inter Light"/>
+                <a:cs typeface="Inter Light"/>
+              </a:rPr>
+              <a:t>На входе — шаблон и текст</a:t>
+            </a:r>
+            <a:endParaRPr lang="ru-RU" sz="2799"/>
+          </a:p>
+          <a:p>
+            <a:pPr algn="l" marL="0" indent="0">
+              <a:lnSpc>
+                <a:spcPct val="100000"/>
+              </a:lnSpc>
+              <a:buNone/>
+            </a:pPr>
+            <a:r>
+              <a:rPr lang="ru-RU" sz="2199" b="0" cap="none" spc="0" baseline="0" dirty="0">
+                <a:solidFill>
+                  <a:srgbClr val="FFFFFF"/>
+                </a:solidFill>
+                <a:latin typeface="Inter Light"/>
+                <a:cs typeface="Inter Light"/>
+              </a:rPr>
+              <a:t>Verstka использует любой шаблон PowerPoint и текст для создания презентации.</a:t>
+            </a:r>
+            <a:endParaRPr lang="ru-RU" sz="2199"/>
+          </a:p>
+        </p:txBody>
+      </p:sp>
+      <p:sp>
+        <p:nvSpPr>
+          <p:cNvPr id="46" name="Card 46"/>
+          <p:cNvSpPr/>
+          <p:nvPr/>
+        </p:nvSpPr>
+        <p:spPr>
+          <a:xfrm>
+            <a:off x="6583680" y="4137660"/>
+            <a:ext cx="5120640" cy="3812512"/>
+          </a:xfrm>
+          <a:prstGeom prst="roundRect">
+            <a:avLst>
+              <a:gd name="adj" fmla="val 2878"/>
+            </a:avLst>
+          </a:prstGeom>
+          <a:solidFill>
+            <a:srgbClr val="000000"/>
+          </a:solidFill>
+          <a:ln>
+            <a:noFill/>
+          </a:ln>
+        </p:spPr>
+      </p:sp>
+      <p:sp>
+        <p:nvSpPr>
+          <p:cNvPr id="47" name="Index 47"/>
+          <p:cNvSpPr txBox="1"/>
+          <p:nvPr/>
+        </p:nvSpPr>
+        <p:spPr>
+          <a:xfrm>
+            <a:off x="6844832" y="4398812"/>
+            <a:ext cx="4598336" cy="718109"/>
+          </a:xfrm>
+          <a:prstGeom prst="rect">
+            <a:avLst/>
+          </a:prstGeom>
+          <a:noFill/>
+        </p:spPr>
+        <p:txBody>
+          <a:bodyPr wrap="square" lIns="0" tIns="0" rIns="0" bIns="0" anchor="t" rtlCol="0">
+            <a:noAutofit/>
+          </a:bodyPr>
+          <a:lstStyle/>
+          <a:p>
+            <a:pPr algn="l" marL="0" indent="0">
+              <a:lnSpc>
+                <a:spcPct val="100000"/>
+              </a:lnSpc>
+              <a:buNone/>
+            </a:pPr>
+            <a:r>
+              <a:rPr lang="ru-RU" sz="4712" b="0" cap="none" spc="0" baseline="0" dirty="0">
+                <a:solidFill>
+                  <a:srgbClr val="C2D076"/>
+                </a:solidFill>
+                <a:latin typeface="Inter Light"/>
+                <a:cs typeface="Inter Light"/>
+              </a:rPr>
+              <a:t>02</a:t>
+            </a:r>
+            <a:endParaRPr lang="ru-RU" sz="4712"/>
+          </a:p>
+        </p:txBody>
+      </p:sp>
+      <p:sp>
+        <p:nvSpPr>
+          <p:cNvPr id="48" name="Card text 48"/>
+          <p:cNvSpPr txBox="1"/>
+          <p:nvPr/>
+        </p:nvSpPr>
+        <p:spPr>
+          <a:xfrm>
+            <a:off x="6844832" y="5224934"/>
+            <a:ext cx="4598336" cy="2464086"/>
+          </a:xfrm>
+          <a:prstGeom prst="rect">
+            <a:avLst/>
+          </a:prstGeom>
+          <a:noFill/>
+        </p:spPr>
+        <p:txBody>
+          <a:bodyPr wrap="square" lIns="0" tIns="0" rIns="0" bIns="0" anchor="t" rtlCol="0">
+            <a:noAutofit/>
+          </a:bodyPr>
+          <a:lstStyle/>
+          <a:p>
+            <a:pPr algn="l" marL="0" indent="0">
+              <a:lnSpc>
+                <a:spcPct val="100000"/>
+              </a:lnSpc>
+              <a:spcAft>
+                <a:spcPts val="7927"/>
+              </a:spcAft>
+              <a:buNone/>
+            </a:pPr>
+            <a:r>
+              <a:rPr lang="ru-RU" sz="2799" b="0" cap="none" spc="0" baseline="0" dirty="0">
+                <a:solidFill>
+                  <a:srgbClr val="C2D076"/>
+                </a:solidFill>
+                <a:latin typeface="Inter Light"/>
+                <a:cs typeface="Inter Light"/>
+              </a:rPr>
+              <a:t>Шаблон — набор правил</a:t>
+            </a:r>
+            <a:endParaRPr lang="ru-RU" sz="2799"/>
+          </a:p>
+          <a:p>
+            <a:pPr algn="l" marL="0" indent="0">
+              <a:lnSpc>
+                <a:spcPct val="100000"/>
+              </a:lnSpc>
+              <a:buNone/>
+            </a:pPr>
+            <a:r>
+              <a:rPr lang="ru-RU" sz="2199" b="0" cap="none" spc="0" baseline="0" dirty="0">
+                <a:solidFill>
+                  <a:srgbClr val="FFFFFF"/>
+                </a:solidFill>
+                <a:latin typeface="Inter Light"/>
+                <a:cs typeface="Inter Light"/>
+              </a:rPr>
+              <a:t>Шаблон интерпретируется как набор правил, а не макетов.</a:t>
+            </a:r>
+            <a:endParaRPr lang="ru-RU" sz="2199"/>
+          </a:p>
+        </p:txBody>
+      </p:sp>
+      <p:sp>
+        <p:nvSpPr>
+          <p:cNvPr id="49" name="Card 49"/>
+          <p:cNvSpPr/>
+          <p:nvPr/>
+        </p:nvSpPr>
+        <p:spPr>
+          <a:xfrm>
+            <a:off x="12143232" y="4137660"/>
+            <a:ext cx="5120640" cy="3812512"/>
+          </a:xfrm>
+          <a:prstGeom prst="roundRect">
+            <a:avLst>
+              <a:gd name="adj" fmla="val 2878"/>
+            </a:avLst>
+          </a:prstGeom>
+          <a:solidFill>
+            <a:srgbClr val="000000"/>
+          </a:solidFill>
+          <a:ln>
+            <a:noFill/>
+          </a:ln>
+        </p:spPr>
+      </p:sp>
+      <p:sp>
+        <p:nvSpPr>
+          <p:cNvPr id="50" name="Index 50"/>
+          <p:cNvSpPr txBox="1"/>
+          <p:nvPr/>
+        </p:nvSpPr>
+        <p:spPr>
+          <a:xfrm>
+            <a:off x="12404384" y="4398812"/>
+            <a:ext cx="4598336" cy="718109"/>
+          </a:xfrm>
+          <a:prstGeom prst="rect">
+            <a:avLst/>
+          </a:prstGeom>
+          <a:noFill/>
+        </p:spPr>
+        <p:txBody>
+          <a:bodyPr wrap="square" lIns="0" tIns="0" rIns="0" bIns="0" anchor="t" rtlCol="0">
+            <a:noAutofit/>
+          </a:bodyPr>
+          <a:lstStyle/>
+          <a:p>
+            <a:pPr algn="l" marL="0" indent="0">
+              <a:lnSpc>
+                <a:spcPct val="100000"/>
+              </a:lnSpc>
+              <a:buNone/>
+            </a:pPr>
+            <a:r>
+              <a:rPr lang="ru-RU" sz="4712" b="0" cap="none" spc="0" baseline="0" dirty="0">
+                <a:solidFill>
+                  <a:srgbClr val="C2D076"/>
+                </a:solidFill>
+                <a:latin typeface="Inter Light"/>
+                <a:cs typeface="Inter Light"/>
+              </a:rPr>
+              <a:t>03</a:t>
+            </a:r>
+            <a:endParaRPr lang="ru-RU" sz="4712"/>
+          </a:p>
+        </p:txBody>
+      </p:sp>
+      <p:sp>
+        <p:nvSpPr>
+          <p:cNvPr id="51" name="Card text 51"/>
+          <p:cNvSpPr txBox="1"/>
+          <p:nvPr/>
+        </p:nvSpPr>
+        <p:spPr>
+          <a:xfrm>
+            <a:off x="12404384" y="5224934"/>
+            <a:ext cx="4598336" cy="2464086"/>
           </a:xfrm>
           <a:prstGeom prst="rect">
             <a:avLst/>
@@ -6579,7 +6690,7 @@
                 <a:latin typeface="Inter Light"/>
                 <a:cs typeface="Inter Light"/>
               </a:rPr>
-              <a:t>Аналитик</a:t>
+              <a:t>На выходе — три редактируемые презентации</a:t>
             </a:r>
             <a:endParaRPr lang="ru-RU" sz="2799"/>
           </a:p>
@@ -6598,7 +6709,7 @@
                 <a:latin typeface="Inter Light"/>
                 <a:cs typeface="Inter Light"/>
               </a:rPr>
-              <a:t>Находит слайды, ряды данных и просьбы</a:t>
+              <a:t>Результат — три презентации в стиле шаблона, готовые к редактированию.</a:t>
             </a:r>
             <a:endParaRPr lang="ru-RU" sz="2199"/>
           </a:p>
@@ -6606,16 +6717,40 @@
       </p:sp>
       <p:sp>
         <p:nvSpPr>
-          <p:cNvPr id="79" name="Badge 79"/>
+          <p:cNvPr id="52" name="Conclusion strip 52"/>
           <p:cNvSpPr/>
           <p:nvPr/>
         </p:nvSpPr>
         <p:spPr>
           <a:xfrm>
-            <a:off x="4324746" y="4665827"/>
-            <a:ext cx="771525" cy="771525"/>
-          </a:xfrm>
-          <a:prstGeom prst="ellipse">
+            <a:off x="1024128" y="8355259"/>
+            <a:ext cx="16239744" cy="892754"/>
+          </a:xfrm>
+          <a:prstGeom prst="roundRect">
+            <a:avLst>
+              <a:gd name="adj" fmla="val 12290"/>
+            </a:avLst>
+          </a:prstGeom>
+          <a:solidFill>
+            <a:srgbClr val="000000"/>
+          </a:solidFill>
+          <a:ln>
+            <a:noFill/>
+          </a:ln>
+        </p:spPr>
+      </p:sp>
+      <p:sp>
+        <p:nvSpPr>
+          <p:cNvPr id="53" name="Conclusion bar 53"/>
+          <p:cNvSpPr/>
+          <p:nvPr/>
+        </p:nvSpPr>
+        <p:spPr>
+          <a:xfrm>
+            <a:off x="1379601" y="8618309"/>
+            <a:ext cx="61722" cy="366654"/>
+          </a:xfrm>
+          <a:prstGeom prst="rect">
             <a:avLst/>
           </a:prstGeom>
           <a:solidFill>
@@ -6625,34 +6760,17 @@
             <a:noFill/>
           </a:ln>
         </p:spPr>
-        <p:txBody>
-          <a:bodyPr lIns="0" tIns="0" rIns="0" bIns="0" anchor="ctr" wrap="none"/>
-          <a:lstStyle/>
-          <a:p>
-            <a:pPr algn="ctr"/>
-            <a:r>
-              <a:rPr lang="ru-RU" sz="2799" b="0" cap="none" spc="0" baseline="0">
-                <a:solidFill>
-                  <a:srgbClr val="000000"/>
-                </a:solidFill>
-                <a:latin typeface="Inter Light"/>
-                <a:cs typeface="Inter Light"/>
-              </a:rPr>
-              <a:t>2</a:t>
-            </a:r>
-          </a:p>
-        </p:txBody>
-      </p:sp>
-      <p:sp>
-        <p:nvSpPr>
-          <p:cNvPr id="80" name="Step 80"/>
+      </p:sp>
+      <p:sp>
+        <p:nvSpPr>
+          <p:cNvPr id="54" name="Conclusion 54"/>
           <p:cNvSpPr txBox="1"/>
           <p:nvPr/>
         </p:nvSpPr>
         <p:spPr>
           <a:xfrm>
-            <a:off x="4324746" y="5715101"/>
-            <a:ext cx="3037271" cy="1610951"/>
+            <a:off x="1725701" y="8575652"/>
+            <a:ext cx="15182698" cy="451968"/>
           </a:xfrm>
           <a:prstGeom prst="rect">
             <a:avLst/>
@@ -6669,9 +6787,6 @@
               <a:lnSpc>
                 <a:spcPct val="100000"/>
               </a:lnSpc>
-              <a:spcAft>
-                <a:spcPts val="1209"/>
-              </a:spcAft>
               <a:buNone/>
             </a:pPr>
             <a:r>
@@ -6682,337 +6797,9 @@
                 <a:latin typeface="Inter Light"/>
                 <a:cs typeface="Inter Light"/>
               </a:rPr>
-              <a:t>Дизайнер</a:t>
+              <a:t>Презентация в фирменном стиле без ручной вёрстки</a:t>
             </a:r>
             <a:endParaRPr lang="ru-RU" sz="2799"/>
-          </a:p>
-          <a:p>
-            <a:pPr algn="l" marL="0" indent="0">
-              <a:lnSpc>
-                <a:spcPct val="100000"/>
-              </a:lnSpc>
-              <a:buNone/>
-            </a:pPr>
-            <a:r>
-              <a:rPr lang="ru-RU" sz="2199" b="0" cap="none" spc="0" baseline="0" dirty="0">
-                <a:solidFill>
-                  <a:srgbClr val="FFFFFF"/>
-                </a:solidFill>
-                <a:latin typeface="Inter Light"/>
-                <a:cs typeface="Inter Light"/>
-              </a:rPr>
-              <a:t>Продумывает каждый слайд отдельно</a:t>
-            </a:r>
-            <a:endParaRPr lang="ru-RU" sz="2199"/>
-          </a:p>
-        </p:txBody>
-      </p:sp>
-      <p:sp>
-        <p:nvSpPr>
-          <p:cNvPr id="81" name="Badge 81"/>
-          <p:cNvSpPr/>
-          <p:nvPr/>
-        </p:nvSpPr>
-        <p:spPr>
-          <a:xfrm>
-            <a:off x="7625364" y="4665827"/>
-            <a:ext cx="771525" cy="771525"/>
-          </a:xfrm>
-          <a:prstGeom prst="ellipse">
-            <a:avLst/>
-          </a:prstGeom>
-          <a:solidFill>
-            <a:srgbClr val="C2D076"/>
-          </a:solidFill>
-          <a:ln>
-            <a:noFill/>
-          </a:ln>
-        </p:spPr>
-        <p:txBody>
-          <a:bodyPr lIns="0" tIns="0" rIns="0" bIns="0" anchor="ctr" wrap="none"/>
-          <a:lstStyle/>
-          <a:p>
-            <a:pPr algn="ctr"/>
-            <a:r>
-              <a:rPr lang="ru-RU" sz="2799" b="0" cap="none" spc="0" baseline="0">
-                <a:solidFill>
-                  <a:srgbClr val="000000"/>
-                </a:solidFill>
-                <a:latin typeface="Inter Light"/>
-                <a:cs typeface="Inter Light"/>
-              </a:rPr>
-              <a:t>3</a:t>
-            </a:r>
-          </a:p>
-        </p:txBody>
-      </p:sp>
-      <p:sp>
-        <p:nvSpPr>
-          <p:cNvPr id="82" name="Step 82"/>
-          <p:cNvSpPr txBox="1"/>
-          <p:nvPr/>
-        </p:nvSpPr>
-        <p:spPr>
-          <a:xfrm>
-            <a:off x="7625364" y="5715101"/>
-            <a:ext cx="3037271" cy="1610951"/>
-          </a:xfrm>
-          <a:prstGeom prst="rect">
-            <a:avLst/>
-          </a:prstGeom>
-          <a:noFill/>
-        </p:spPr>
-        <p:txBody>
-          <a:bodyPr wrap="square" lIns="0" tIns="0" rIns="0" bIns="0" anchor="t" rtlCol="0">
-            <a:noAutofit/>
-          </a:bodyPr>
-          <a:lstStyle/>
-          <a:p>
-            <a:pPr algn="l" marL="0" indent="0">
-              <a:lnSpc>
-                <a:spcPct val="100000"/>
-              </a:lnSpc>
-              <a:spcAft>
-                <a:spcPts val="1209"/>
-              </a:spcAft>
-              <a:buNone/>
-            </a:pPr>
-            <a:r>
-              <a:rPr lang="ru-RU" sz="2799" b="0" cap="none" spc="0" baseline="0" dirty="0">
-                <a:solidFill>
-                  <a:srgbClr val="C2D076"/>
-                </a:solidFill>
-                <a:latin typeface="Inter Light"/>
-                <a:cs typeface="Inter Light"/>
-              </a:rPr>
-              <a:t>Критик</a:t>
-            </a:r>
-            <a:endParaRPr lang="ru-RU" sz="2799"/>
-          </a:p>
-          <a:p>
-            <a:pPr algn="l" marL="0" indent="0">
-              <a:lnSpc>
-                <a:spcPct val="100000"/>
-              </a:lnSpc>
-              <a:buNone/>
-            </a:pPr>
-            <a:r>
-              <a:rPr lang="ru-RU" sz="2199" b="0" cap="none" spc="0" baseline="0" dirty="0">
-                <a:solidFill>
-                  <a:srgbClr val="FFFFFF"/>
-                </a:solidFill>
-                <a:latin typeface="Inter Light"/>
-                <a:cs typeface="Inter Light"/>
-              </a:rPr>
-              <a:t>Сверяет план с текстом и правилами шаблона</a:t>
-            </a:r>
-            <a:endParaRPr lang="ru-RU" sz="2199"/>
-          </a:p>
-        </p:txBody>
-      </p:sp>
-      <p:sp>
-        <p:nvSpPr>
-          <p:cNvPr id="83" name="Badge 83"/>
-          <p:cNvSpPr/>
-          <p:nvPr/>
-        </p:nvSpPr>
-        <p:spPr>
-          <a:xfrm>
-            <a:off x="10925982" y="4665827"/>
-            <a:ext cx="771525" cy="771525"/>
-          </a:xfrm>
-          <a:prstGeom prst="ellipse">
-            <a:avLst/>
-          </a:prstGeom>
-          <a:solidFill>
-            <a:srgbClr val="C2D076"/>
-          </a:solidFill>
-          <a:ln>
-            <a:noFill/>
-          </a:ln>
-        </p:spPr>
-        <p:txBody>
-          <a:bodyPr lIns="0" tIns="0" rIns="0" bIns="0" anchor="ctr" wrap="none"/>
-          <a:lstStyle/>
-          <a:p>
-            <a:pPr algn="ctr"/>
-            <a:r>
-              <a:rPr lang="ru-RU" sz="2799" b="0" cap="none" spc="0" baseline="0">
-                <a:solidFill>
-                  <a:srgbClr val="000000"/>
-                </a:solidFill>
-                <a:latin typeface="Inter Light"/>
-                <a:cs typeface="Inter Light"/>
-              </a:rPr>
-              <a:t>4</a:t>
-            </a:r>
-          </a:p>
-        </p:txBody>
-      </p:sp>
-      <p:sp>
-        <p:nvSpPr>
-          <p:cNvPr id="84" name="Step 84"/>
-          <p:cNvSpPr txBox="1"/>
-          <p:nvPr/>
-        </p:nvSpPr>
-        <p:spPr>
-          <a:xfrm>
-            <a:off x="10925982" y="5715101"/>
-            <a:ext cx="3037271" cy="1610951"/>
-          </a:xfrm>
-          <a:prstGeom prst="rect">
-            <a:avLst/>
-          </a:prstGeom>
-          <a:noFill/>
-        </p:spPr>
-        <p:txBody>
-          <a:bodyPr wrap="square" lIns="0" tIns="0" rIns="0" bIns="0" anchor="t" rtlCol="0">
-            <a:noAutofit/>
-          </a:bodyPr>
-          <a:lstStyle/>
-          <a:p>
-            <a:pPr algn="l" marL="0" indent="0">
-              <a:lnSpc>
-                <a:spcPct val="100000"/>
-              </a:lnSpc>
-              <a:spcAft>
-                <a:spcPts val="1209"/>
-              </a:spcAft>
-              <a:buNone/>
-            </a:pPr>
-            <a:r>
-              <a:rPr lang="ru-RU" sz="2799" b="0" cap="none" spc="0" baseline="0" dirty="0">
-                <a:solidFill>
-                  <a:srgbClr val="C2D076"/>
-                </a:solidFill>
-                <a:latin typeface="Inter Light"/>
-                <a:cs typeface="Inter Light"/>
-              </a:rPr>
-              <a:t>Компилятор</a:t>
-            </a:r>
-            <a:endParaRPr lang="ru-RU" sz="2799"/>
-          </a:p>
-          <a:p>
-            <a:pPr algn="l" marL="0" indent="0">
-              <a:lnSpc>
-                <a:spcPct val="100000"/>
-              </a:lnSpc>
-              <a:buNone/>
-            </a:pPr>
-            <a:r>
-              <a:rPr lang="ru-RU" sz="2199" b="0" cap="none" spc="0" baseline="0" dirty="0">
-                <a:solidFill>
-                  <a:srgbClr val="FFFFFF"/>
-                </a:solidFill>
-                <a:latin typeface="Inter Light"/>
-                <a:cs typeface="Inter Light"/>
-              </a:rPr>
-              <a:t>Проверяет каждое число</a:t>
-            </a:r>
-            <a:endParaRPr lang="ru-RU" sz="2199"/>
-          </a:p>
-        </p:txBody>
-      </p:sp>
-      <p:sp>
-        <p:nvSpPr>
-          <p:cNvPr id="85" name="Badge 85"/>
-          <p:cNvSpPr/>
-          <p:nvPr/>
-        </p:nvSpPr>
-        <p:spPr>
-          <a:xfrm>
-            <a:off x="14226600" y="4665827"/>
-            <a:ext cx="771525" cy="771525"/>
-          </a:xfrm>
-          <a:prstGeom prst="ellipse">
-            <a:avLst/>
-          </a:prstGeom>
-          <a:solidFill>
-            <a:srgbClr val="C2D076"/>
-          </a:solidFill>
-          <a:ln>
-            <a:noFill/>
-          </a:ln>
-        </p:spPr>
-        <p:txBody>
-          <a:bodyPr lIns="0" tIns="0" rIns="0" bIns="0" anchor="ctr" wrap="none"/>
-          <a:lstStyle/>
-          <a:p>
-            <a:pPr algn="ctr"/>
-            <a:r>
-              <a:rPr lang="ru-RU" sz="2799" b="0" cap="none" spc="0" baseline="0">
-                <a:solidFill>
-                  <a:srgbClr val="000000"/>
-                </a:solidFill>
-                <a:latin typeface="Inter Light"/>
-                <a:cs typeface="Inter Light"/>
-              </a:rPr>
-              <a:t>5</a:t>
-            </a:r>
-          </a:p>
-        </p:txBody>
-      </p:sp>
-      <p:sp>
-        <p:nvSpPr>
-          <p:cNvPr id="86" name="Step 86"/>
-          <p:cNvSpPr txBox="1"/>
-          <p:nvPr/>
-        </p:nvSpPr>
-        <p:spPr>
-          <a:xfrm>
-            <a:off x="14226600" y="5715101"/>
-            <a:ext cx="3037271" cy="1610951"/>
-          </a:xfrm>
-          <a:prstGeom prst="rect">
-            <a:avLst/>
-          </a:prstGeom>
-          <a:noFill/>
-        </p:spPr>
-        <p:txBody>
-          <a:bodyPr wrap="square" lIns="0" tIns="0" rIns="0" bIns="0" anchor="t" rtlCol="0">
-            <a:noAutofit/>
-          </a:bodyPr>
-          <a:lstStyle/>
-          <a:p>
-            <a:pPr algn="l" marL="0" indent="0">
-              <a:lnSpc>
-                <a:spcPct val="100000"/>
-              </a:lnSpc>
-              <a:spcAft>
-                <a:spcPts val="1209"/>
-              </a:spcAft>
-              <a:buNone/>
-            </a:pPr>
-            <a:r>
-              <a:rPr lang="ru-RU" sz="2799" b="0" cap="none" spc="0" baseline="0" dirty="0">
-                <a:solidFill>
-                  <a:srgbClr val="C2D076"/>
-                </a:solidFill>
-                <a:latin typeface="Inter Light"/>
-                <a:cs typeface="Inter Light"/>
-              </a:rPr>
-              <a:t>Вёрстка</a:t>
-            </a:r>
-            <a:endParaRPr lang="ru-RU" sz="2799"/>
-          </a:p>
-          <a:p>
-            <a:pPr algn="l" marL="0" indent="0">
-              <a:lnSpc>
-                <a:spcPct val="100000"/>
-              </a:lnSpc>
-              <a:buNone/>
-            </a:pPr>
-            <a:r>
-              <a:rPr lang="ru-RU" sz="2199" b="0" cap="none" spc="0" baseline="0" dirty="0">
-                <a:solidFill>
-                  <a:srgbClr val="FFFFFF"/>
-                </a:solidFill>
-                <a:latin typeface="Inter Light"/>
-                <a:cs typeface="Inter Light"/>
-              </a:rPr>
-              <a:t>Собирает слайды по дизайн-⁠системе шаблона</a:t>
-            </a:r>
-            <a:endParaRPr lang="ru-RU" sz="2199"/>
           </a:p>
         </p:txBody>
       </p:sp>
@@ -7050,7 +6837,7 @@
         <p:spPr>
           <a:xfrm>
             <a:off x="619057" y="2623820"/>
-            <a:ext cx="15727680" cy="944880"/>
+            <a:ext cx="12707676" cy="1527657"/>
           </a:xfrm>
           <a:prstGeom prst="rect">
             <a:avLst/>
@@ -7084,7 +6871,7 @@
               <a:buNone/>
             </a:pPr>
             <a:r>
-              <a:rPr i="0" lang="ru-RU" sz="4712" u="none" cap="none" strike="noStrike">
+              <a:rPr i="0" lang="ru-RU" sz="2799" u="none" cap="none" strike="noStrike">
                 <a:solidFill>
                   <a:srgbClr val="C2D076"/>
                 </a:solidFill>
@@ -7093,7 +6880,719 @@
                 <a:cs typeface="Inter Medium"/>
                 <a:sym typeface="Inter Medium"/>
               </a:rPr>
-              <a:t>Одно содержание, три подхода к подаче</a:t>
+              <a:t>Открытые модели до 35 млрд параметров создают презентации по правилам</a:t>
+            </a:r>
+            <a:endParaRPr>
+              <a:latin typeface="Inter Medium"/>
+              <a:ea typeface="Inter Medium"/>
+              <a:cs typeface="Inter Medium"/>
+              <a:sym typeface="Inter Medium"/>
+            </a:endParaRPr>
+          </a:p>
+        </p:txBody>
+      </p:sp>
+      <p:cxnSp>
+        <p:nvCxnSpPr>
+          <p:cNvPr id="43" name="Axis 43"/>
+          <p:cNvCxnSpPr/>
+          <p:nvPr/>
+        </p:nvCxnSpPr>
+        <p:spPr>
+          <a:xfrm>
+            <a:off x="1409890" y="5051589"/>
+            <a:ext cx="13202472" cy="0"/>
+          </a:xfrm>
+          <a:prstGeom prst="line">
+            <a:avLst/>
+          </a:prstGeom>
+          <a:ln w="19050">
+            <a:solidFill>
+              <a:srgbClr val="C2D076"/>
+            </a:solidFill>
+          </a:ln>
+        </p:spPr>
+      </p:cxnSp>
+      <p:sp>
+        <p:nvSpPr>
+          <p:cNvPr id="44" name="Badge 44"/>
+          <p:cNvSpPr/>
+          <p:nvPr/>
+        </p:nvSpPr>
+        <p:spPr>
+          <a:xfrm>
+            <a:off x="1024128" y="4665827"/>
+            <a:ext cx="771525" cy="771525"/>
+          </a:xfrm>
+          <a:prstGeom prst="ellipse">
+            <a:avLst/>
+          </a:prstGeom>
+          <a:solidFill>
+            <a:srgbClr val="C2D076"/>
+          </a:solidFill>
+          <a:ln>
+            <a:noFill/>
+          </a:ln>
+        </p:spPr>
+        <p:txBody>
+          <a:bodyPr lIns="0" tIns="0" rIns="0" bIns="0" anchor="ctr" wrap="none"/>
+          <a:lstStyle/>
+          <a:p>
+            <a:pPr algn="ctr"/>
+            <a:r>
+              <a:rPr lang="ru-RU" sz="2799" b="0" cap="none" spc="0" baseline="0">
+                <a:solidFill>
+                  <a:srgbClr val="000000"/>
+                </a:solidFill>
+                <a:latin typeface="Inter Light"/>
+                <a:cs typeface="Inter Light"/>
+              </a:rPr>
+              <a:t>1</a:t>
+            </a:r>
+          </a:p>
+        </p:txBody>
+      </p:sp>
+      <p:sp>
+        <p:nvSpPr>
+          <p:cNvPr id="45" name="Step 45"/>
+          <p:cNvSpPr txBox="1"/>
+          <p:nvPr/>
+        </p:nvSpPr>
+        <p:spPr>
+          <a:xfrm>
+            <a:off x="1024128" y="5715101"/>
+            <a:ext cx="3037271" cy="1610951"/>
+          </a:xfrm>
+          <a:prstGeom prst="rect">
+            <a:avLst/>
+          </a:prstGeom>
+          <a:noFill/>
+        </p:spPr>
+        <p:txBody>
+          <a:bodyPr wrap="square" lIns="0" tIns="0" rIns="0" bIns="0" anchor="t" rtlCol="0">
+            <a:noAutofit/>
+          </a:bodyPr>
+          <a:lstStyle/>
+          <a:p>
+            <a:pPr algn="l" marL="0" indent="0">
+              <a:lnSpc>
+                <a:spcPct val="100000"/>
+              </a:lnSpc>
+              <a:spcAft>
+                <a:spcPts val="1209"/>
+              </a:spcAft>
+              <a:buNone/>
+            </a:pPr>
+            <a:r>
+              <a:rPr lang="ru-RU" sz="2799" b="0" cap="none" spc="0" baseline="0" dirty="0">
+                <a:solidFill>
+                  <a:srgbClr val="C2D076"/>
+                </a:solidFill>
+                <a:latin typeface="Inter Light"/>
+                <a:cs typeface="Inter Light"/>
+              </a:rPr>
+              <a:t>Аналитик</a:t>
+            </a:r>
+            <a:endParaRPr lang="ru-RU" sz="2799"/>
+          </a:p>
+          <a:p>
+            <a:pPr algn="l" marL="0" indent="0">
+              <a:lnSpc>
+                <a:spcPct val="100000"/>
+              </a:lnSpc>
+              <a:buNone/>
+            </a:pPr>
+            <a:r>
+              <a:rPr lang="ru-RU" sz="2199" b="0" cap="none" spc="0" baseline="0" dirty="0">
+                <a:solidFill>
+                  <a:srgbClr val="FFFFFF"/>
+                </a:solidFill>
+                <a:latin typeface="Inter Light"/>
+                <a:cs typeface="Inter Light"/>
+              </a:rPr>
+              <a:t>Находит в тексте слайды, ряды данных и просьбы</a:t>
+            </a:r>
+            <a:endParaRPr lang="ru-RU" sz="2199"/>
+          </a:p>
+        </p:txBody>
+      </p:sp>
+      <p:sp>
+        <p:nvSpPr>
+          <p:cNvPr id="46" name="Badge 46"/>
+          <p:cNvSpPr/>
+          <p:nvPr/>
+        </p:nvSpPr>
+        <p:spPr>
+          <a:xfrm>
+            <a:off x="4324746" y="4665827"/>
+            <a:ext cx="771525" cy="771525"/>
+          </a:xfrm>
+          <a:prstGeom prst="ellipse">
+            <a:avLst/>
+          </a:prstGeom>
+          <a:solidFill>
+            <a:srgbClr val="C2D076"/>
+          </a:solidFill>
+          <a:ln>
+            <a:noFill/>
+          </a:ln>
+        </p:spPr>
+        <p:txBody>
+          <a:bodyPr lIns="0" tIns="0" rIns="0" bIns="0" anchor="ctr" wrap="none"/>
+          <a:lstStyle/>
+          <a:p>
+            <a:pPr algn="ctr"/>
+            <a:r>
+              <a:rPr lang="ru-RU" sz="2799" b="0" cap="none" spc="0" baseline="0">
+                <a:solidFill>
+                  <a:srgbClr val="000000"/>
+                </a:solidFill>
+                <a:latin typeface="Inter Light"/>
+                <a:cs typeface="Inter Light"/>
+              </a:rPr>
+              <a:t>2</a:t>
+            </a:r>
+          </a:p>
+        </p:txBody>
+      </p:sp>
+      <p:sp>
+        <p:nvSpPr>
+          <p:cNvPr id="47" name="Step 47"/>
+          <p:cNvSpPr txBox="1"/>
+          <p:nvPr/>
+        </p:nvSpPr>
+        <p:spPr>
+          <a:xfrm>
+            <a:off x="4324746" y="5715101"/>
+            <a:ext cx="3037271" cy="1610951"/>
+          </a:xfrm>
+          <a:prstGeom prst="rect">
+            <a:avLst/>
+          </a:prstGeom>
+          <a:noFill/>
+        </p:spPr>
+        <p:txBody>
+          <a:bodyPr wrap="square" lIns="0" tIns="0" rIns="0" bIns="0" anchor="t" rtlCol="0">
+            <a:noAutofit/>
+          </a:bodyPr>
+          <a:lstStyle/>
+          <a:p>
+            <a:pPr algn="l" marL="0" indent="0">
+              <a:lnSpc>
+                <a:spcPct val="100000"/>
+              </a:lnSpc>
+              <a:spcAft>
+                <a:spcPts val="1209"/>
+              </a:spcAft>
+              <a:buNone/>
+            </a:pPr>
+            <a:r>
+              <a:rPr lang="ru-RU" sz="2799" b="0" cap="none" spc="0" baseline="0" dirty="0">
+                <a:solidFill>
+                  <a:srgbClr val="C2D076"/>
+                </a:solidFill>
+                <a:latin typeface="Inter Light"/>
+                <a:cs typeface="Inter Light"/>
+              </a:rPr>
+              <a:t>Дизайнер</a:t>
+            </a:r>
+            <a:endParaRPr lang="ru-RU" sz="2799"/>
+          </a:p>
+          <a:p>
+            <a:pPr algn="l" marL="0" indent="0">
+              <a:lnSpc>
+                <a:spcPct val="100000"/>
+              </a:lnSpc>
+              <a:buNone/>
+            </a:pPr>
+            <a:r>
+              <a:rPr lang="ru-RU" sz="2199" b="0" cap="none" spc="0" baseline="0" dirty="0">
+                <a:solidFill>
+                  <a:srgbClr val="FFFFFF"/>
+                </a:solidFill>
+                <a:latin typeface="Inter Light"/>
+                <a:cs typeface="Inter Light"/>
+              </a:rPr>
+              <a:t>Продумывает каждый слайд отдельно</a:t>
+            </a:r>
+            <a:endParaRPr lang="ru-RU" sz="2199"/>
+          </a:p>
+        </p:txBody>
+      </p:sp>
+      <p:sp>
+        <p:nvSpPr>
+          <p:cNvPr id="48" name="Badge 48"/>
+          <p:cNvSpPr/>
+          <p:nvPr/>
+        </p:nvSpPr>
+        <p:spPr>
+          <a:xfrm>
+            <a:off x="7625364" y="4665827"/>
+            <a:ext cx="771525" cy="771525"/>
+          </a:xfrm>
+          <a:prstGeom prst="ellipse">
+            <a:avLst/>
+          </a:prstGeom>
+          <a:solidFill>
+            <a:srgbClr val="C2D076"/>
+          </a:solidFill>
+          <a:ln>
+            <a:noFill/>
+          </a:ln>
+        </p:spPr>
+        <p:txBody>
+          <a:bodyPr lIns="0" tIns="0" rIns="0" bIns="0" anchor="ctr" wrap="none"/>
+          <a:lstStyle/>
+          <a:p>
+            <a:pPr algn="ctr"/>
+            <a:r>
+              <a:rPr lang="ru-RU" sz="2799" b="0" cap="none" spc="0" baseline="0">
+                <a:solidFill>
+                  <a:srgbClr val="000000"/>
+                </a:solidFill>
+                <a:latin typeface="Inter Light"/>
+                <a:cs typeface="Inter Light"/>
+              </a:rPr>
+              <a:t>3</a:t>
+            </a:r>
+          </a:p>
+        </p:txBody>
+      </p:sp>
+      <p:sp>
+        <p:nvSpPr>
+          <p:cNvPr id="49" name="Step 49"/>
+          <p:cNvSpPr txBox="1"/>
+          <p:nvPr/>
+        </p:nvSpPr>
+        <p:spPr>
+          <a:xfrm>
+            <a:off x="7625364" y="5715101"/>
+            <a:ext cx="3037271" cy="1610951"/>
+          </a:xfrm>
+          <a:prstGeom prst="rect">
+            <a:avLst/>
+          </a:prstGeom>
+          <a:noFill/>
+        </p:spPr>
+        <p:txBody>
+          <a:bodyPr wrap="square" lIns="0" tIns="0" rIns="0" bIns="0" anchor="t" rtlCol="0">
+            <a:noAutofit/>
+          </a:bodyPr>
+          <a:lstStyle/>
+          <a:p>
+            <a:pPr algn="l" marL="0" indent="0">
+              <a:lnSpc>
+                <a:spcPct val="100000"/>
+              </a:lnSpc>
+              <a:spcAft>
+                <a:spcPts val="1209"/>
+              </a:spcAft>
+              <a:buNone/>
+            </a:pPr>
+            <a:r>
+              <a:rPr lang="ru-RU" sz="2799" b="0" cap="none" spc="0" baseline="0" dirty="0">
+                <a:solidFill>
+                  <a:srgbClr val="C2D076"/>
+                </a:solidFill>
+                <a:latin typeface="Inter Light"/>
+                <a:cs typeface="Inter Light"/>
+              </a:rPr>
+              <a:t>Критик</a:t>
+            </a:r>
+            <a:endParaRPr lang="ru-RU" sz="2799"/>
+          </a:p>
+          <a:p>
+            <a:pPr algn="l" marL="0" indent="0">
+              <a:lnSpc>
+                <a:spcPct val="100000"/>
+              </a:lnSpc>
+              <a:buNone/>
+            </a:pPr>
+            <a:r>
+              <a:rPr lang="ru-RU" sz="2199" b="0" cap="none" spc="0" baseline="0" dirty="0">
+                <a:solidFill>
+                  <a:srgbClr val="FFFFFF"/>
+                </a:solidFill>
+                <a:latin typeface="Inter Light"/>
+                <a:cs typeface="Inter Light"/>
+              </a:rPr>
+              <a:t>Сверяет план с текстом и правилами шаблона</a:t>
+            </a:r>
+            <a:endParaRPr lang="ru-RU" sz="2199"/>
+          </a:p>
+        </p:txBody>
+      </p:sp>
+      <p:sp>
+        <p:nvSpPr>
+          <p:cNvPr id="50" name="Badge 50"/>
+          <p:cNvSpPr/>
+          <p:nvPr/>
+        </p:nvSpPr>
+        <p:spPr>
+          <a:xfrm>
+            <a:off x="10925982" y="4665827"/>
+            <a:ext cx="771525" cy="771525"/>
+          </a:xfrm>
+          <a:prstGeom prst="ellipse">
+            <a:avLst/>
+          </a:prstGeom>
+          <a:solidFill>
+            <a:srgbClr val="C2D076"/>
+          </a:solidFill>
+          <a:ln>
+            <a:noFill/>
+          </a:ln>
+        </p:spPr>
+        <p:txBody>
+          <a:bodyPr lIns="0" tIns="0" rIns="0" bIns="0" anchor="ctr" wrap="none"/>
+          <a:lstStyle/>
+          <a:p>
+            <a:pPr algn="ctr"/>
+            <a:r>
+              <a:rPr lang="ru-RU" sz="2799" b="0" cap="none" spc="0" baseline="0">
+                <a:solidFill>
+                  <a:srgbClr val="000000"/>
+                </a:solidFill>
+                <a:latin typeface="Inter Light"/>
+                <a:cs typeface="Inter Light"/>
+              </a:rPr>
+              <a:t>4</a:t>
+            </a:r>
+          </a:p>
+        </p:txBody>
+      </p:sp>
+      <p:sp>
+        <p:nvSpPr>
+          <p:cNvPr id="51" name="Step 51"/>
+          <p:cNvSpPr txBox="1"/>
+          <p:nvPr/>
+        </p:nvSpPr>
+        <p:spPr>
+          <a:xfrm>
+            <a:off x="10925982" y="5715101"/>
+            <a:ext cx="3037271" cy="1610951"/>
+          </a:xfrm>
+          <a:prstGeom prst="rect">
+            <a:avLst/>
+          </a:prstGeom>
+          <a:noFill/>
+        </p:spPr>
+        <p:txBody>
+          <a:bodyPr wrap="square" lIns="0" tIns="0" rIns="0" bIns="0" anchor="t" rtlCol="0">
+            <a:noAutofit/>
+          </a:bodyPr>
+          <a:lstStyle/>
+          <a:p>
+            <a:pPr algn="l" marL="0" indent="0">
+              <a:lnSpc>
+                <a:spcPct val="100000"/>
+              </a:lnSpc>
+              <a:spcAft>
+                <a:spcPts val="1209"/>
+              </a:spcAft>
+              <a:buNone/>
+            </a:pPr>
+            <a:r>
+              <a:rPr lang="ru-RU" sz="2799" b="0" cap="none" spc="0" baseline="0" dirty="0">
+                <a:solidFill>
+                  <a:srgbClr val="C2D076"/>
+                </a:solidFill>
+                <a:latin typeface="Inter Light"/>
+                <a:cs typeface="Inter Light"/>
+              </a:rPr>
+              <a:t>Компилятор</a:t>
+            </a:r>
+            <a:endParaRPr lang="ru-RU" sz="2799"/>
+          </a:p>
+          <a:p>
+            <a:pPr algn="l" marL="0" indent="0">
+              <a:lnSpc>
+                <a:spcPct val="100000"/>
+              </a:lnSpc>
+              <a:buNone/>
+            </a:pPr>
+            <a:r>
+              <a:rPr lang="ru-RU" sz="2199" b="0" cap="none" spc="0" baseline="0" dirty="0">
+                <a:solidFill>
+                  <a:srgbClr val="FFFFFF"/>
+                </a:solidFill>
+                <a:latin typeface="Inter Light"/>
+                <a:cs typeface="Inter Light"/>
+              </a:rPr>
+              <a:t>Проверяет каждое число</a:t>
+            </a:r>
+            <a:endParaRPr lang="ru-RU" sz="2199"/>
+          </a:p>
+        </p:txBody>
+      </p:sp>
+      <p:sp>
+        <p:nvSpPr>
+          <p:cNvPr id="52" name="Badge 52"/>
+          <p:cNvSpPr/>
+          <p:nvPr/>
+        </p:nvSpPr>
+        <p:spPr>
+          <a:xfrm>
+            <a:off x="14226600" y="4665827"/>
+            <a:ext cx="771525" cy="771525"/>
+          </a:xfrm>
+          <a:prstGeom prst="ellipse">
+            <a:avLst/>
+          </a:prstGeom>
+          <a:solidFill>
+            <a:srgbClr val="C2D076"/>
+          </a:solidFill>
+          <a:ln>
+            <a:noFill/>
+          </a:ln>
+        </p:spPr>
+        <p:txBody>
+          <a:bodyPr lIns="0" tIns="0" rIns="0" bIns="0" anchor="ctr" wrap="none"/>
+          <a:lstStyle/>
+          <a:p>
+            <a:pPr algn="ctr"/>
+            <a:r>
+              <a:rPr lang="ru-RU" sz="2799" b="0" cap="none" spc="0" baseline="0">
+                <a:solidFill>
+                  <a:srgbClr val="000000"/>
+                </a:solidFill>
+                <a:latin typeface="Inter Light"/>
+                <a:cs typeface="Inter Light"/>
+              </a:rPr>
+              <a:t>5</a:t>
+            </a:r>
+          </a:p>
+        </p:txBody>
+      </p:sp>
+      <p:sp>
+        <p:nvSpPr>
+          <p:cNvPr id="53" name="Step 53"/>
+          <p:cNvSpPr txBox="1"/>
+          <p:nvPr/>
+        </p:nvSpPr>
+        <p:spPr>
+          <a:xfrm>
+            <a:off x="14226600" y="5715101"/>
+            <a:ext cx="3037271" cy="1610951"/>
+          </a:xfrm>
+          <a:prstGeom prst="rect">
+            <a:avLst/>
+          </a:prstGeom>
+          <a:noFill/>
+        </p:spPr>
+        <p:txBody>
+          <a:bodyPr wrap="square" lIns="0" tIns="0" rIns="0" bIns="0" anchor="t" rtlCol="0">
+            <a:noAutofit/>
+          </a:bodyPr>
+          <a:lstStyle/>
+          <a:p>
+            <a:pPr algn="l" marL="0" indent="0">
+              <a:lnSpc>
+                <a:spcPct val="100000"/>
+              </a:lnSpc>
+              <a:spcAft>
+                <a:spcPts val="1209"/>
+              </a:spcAft>
+              <a:buNone/>
+            </a:pPr>
+            <a:r>
+              <a:rPr lang="ru-RU" sz="2799" b="0" cap="none" spc="0" baseline="0" dirty="0">
+                <a:solidFill>
+                  <a:srgbClr val="C2D076"/>
+                </a:solidFill>
+                <a:latin typeface="Inter Light"/>
+                <a:cs typeface="Inter Light"/>
+              </a:rPr>
+              <a:t>Вёрстка</a:t>
+            </a:r>
+            <a:endParaRPr lang="ru-RU" sz="2799"/>
+          </a:p>
+          <a:p>
+            <a:pPr algn="l" marL="0" indent="0">
+              <a:lnSpc>
+                <a:spcPct val="100000"/>
+              </a:lnSpc>
+              <a:buNone/>
+            </a:pPr>
+            <a:r>
+              <a:rPr lang="ru-RU" sz="2199" b="0" cap="none" spc="0" baseline="0" dirty="0">
+                <a:solidFill>
+                  <a:srgbClr val="FFFFFF"/>
+                </a:solidFill>
+                <a:latin typeface="Inter Light"/>
+                <a:cs typeface="Inter Light"/>
+              </a:rPr>
+              <a:t>Собирает слайды по дизайн-⁠системе шаблона</a:t>
+            </a:r>
+            <a:endParaRPr lang="ru-RU" sz="2199"/>
+          </a:p>
+        </p:txBody>
+      </p:sp>
+      <p:sp>
+        <p:nvSpPr>
+          <p:cNvPr id="54" name="Conclusion strip 54"/>
+          <p:cNvSpPr/>
+          <p:nvPr/>
+        </p:nvSpPr>
+        <p:spPr>
+          <a:xfrm>
+            <a:off x="1024128" y="7758106"/>
+            <a:ext cx="16239744" cy="892754"/>
+          </a:xfrm>
+          <a:prstGeom prst="roundRect">
+            <a:avLst>
+              <a:gd name="adj" fmla="val 12290"/>
+            </a:avLst>
+          </a:prstGeom>
+          <a:solidFill>
+            <a:srgbClr val="000000"/>
+          </a:solidFill>
+          <a:ln>
+            <a:noFill/>
+          </a:ln>
+        </p:spPr>
+      </p:sp>
+      <p:sp>
+        <p:nvSpPr>
+          <p:cNvPr id="55" name="Conclusion bar 55"/>
+          <p:cNvSpPr/>
+          <p:nvPr/>
+        </p:nvSpPr>
+        <p:spPr>
+          <a:xfrm>
+            <a:off x="1379601" y="8021156"/>
+            <a:ext cx="61722" cy="366654"/>
+          </a:xfrm>
+          <a:prstGeom prst="rect">
+            <a:avLst/>
+          </a:prstGeom>
+          <a:solidFill>
+            <a:srgbClr val="C2D076"/>
+          </a:solidFill>
+          <a:ln>
+            <a:noFill/>
+          </a:ln>
+        </p:spPr>
+      </p:sp>
+      <p:sp>
+        <p:nvSpPr>
+          <p:cNvPr id="56" name="Conclusion 56"/>
+          <p:cNvSpPr txBox="1"/>
+          <p:nvPr/>
+        </p:nvSpPr>
+        <p:spPr>
+          <a:xfrm>
+            <a:off x="1725701" y="7978499"/>
+            <a:ext cx="15182698" cy="451968"/>
+          </a:xfrm>
+          <a:prstGeom prst="rect">
+            <a:avLst/>
+          </a:prstGeom>
+          <a:noFill/>
+        </p:spPr>
+        <p:txBody>
+          <a:bodyPr wrap="square" lIns="0" tIns="0" rIns="0" bIns="0" anchor="t" rtlCol="0">
+            <a:noAutofit/>
+          </a:bodyPr>
+          <a:lstStyle/>
+          <a:p>
+            <a:pPr algn="l" marL="0" indent="0">
+              <a:lnSpc>
+                <a:spcPct val="100000"/>
+              </a:lnSpc>
+              <a:buNone/>
+            </a:pPr>
+            <a:r>
+              <a:rPr lang="ru-RU" sz="2799" b="0" cap="none" spc="0" baseline="0" dirty="0">
+                <a:solidFill>
+                  <a:srgbClr val="C2D076"/>
+                </a:solidFill>
+                <a:latin typeface="Inter Light"/>
+                <a:cs typeface="Inter Light"/>
+              </a:rPr>
+              <a:t>Работа агента включает анализ, проектирование, проверку и сборку слайдов</a:t>
+            </a:r>
+            <a:endParaRPr lang="ru-RU" sz="2799"/>
+          </a:p>
+        </p:txBody>
+      </p:sp>
+    </p:spTree>
+  </p:cSld>
+  <p:clrMapOvr>
+    <a:masterClrMapping/>
+  </p:clrMapOvr>
+</p:sld>
+</file>
+
+<file path=ppt/slides/slide6.xml><?xml version="1.0" encoding="utf-8"?>
+<p:sld xmlns:a="http://schemas.openxmlformats.org/drawingml/2006/main" xmlns:p="http://schemas.openxmlformats.org/presentationml/2006/main" xmlns:r="http://schemas.openxmlformats.org/officeDocument/2006/relationships">
+  <p:cSld>
+    <p:bg>
+      <p:bgPr>
+        <a:solidFill>
+          <a:srgbClr val="001514"/>
+        </a:solidFill>
+      </p:bgPr>
+    </p:bg>
+    <p:spTree>
+      <p:nvGrpSpPr>
+        <p:cNvPr id="1" name=""/>
+        <p:cNvGrpSpPr/>
+        <p:nvPr/>
+      </p:nvGrpSpPr>
+      <p:grpSpPr/>
+      <p:sp>
+        <p:nvSpPr>
+          <p:cNvPr id="42" name="Google Shape;42;p8"/>
+          <p:cNvSpPr txBox="1"/>
+          <p:nvPr/>
+        </p:nvSpPr>
+        <p:spPr>
+          <a:xfrm>
+            <a:off x="619057" y="2623820"/>
+            <a:ext cx="15727680" cy="944880"/>
+          </a:xfrm>
+          <a:prstGeom prst="rect">
+            <a:avLst/>
+          </a:prstGeom>
+          <a:noFill/>
+          <a:ln>
+            <a:noFill/>
+          </a:ln>
+        </p:spPr>
+        <p:txBody>
+          <a:bodyPr anchorCtr="0" anchor="t" bIns="0" lIns="0" spcFirstLastPara="1" rIns="0" wrap="square" tIns="0">
+            <a:spAutoFit/>
+          </a:bodyPr>
+          <a:lstStyle/>
+          <a:p>
+            <a:pPr indent="0" lvl="1" marL="0" marR="0" rtl="0" algn="l">
+              <a:lnSpc>
+                <a:spcPct val="120000"/>
+              </a:lnSpc>
+              <a:spcBef>
+                <a:spcPts val="0"/>
+              </a:spcBef>
+              <a:spcAft>
+                <a:spcPts val="0"/>
+              </a:spcAft>
+              <a:buClr>
+                <a:srgbClr val="C2D076"/>
+              </a:buClr>
+              <a:buSzPts val="5600"/>
+              <a:buFont typeface="Inter Medium"/>
+              <a:buNone/>
+            </a:pPr>
+            <a:r>
+              <a:rPr i="0" lang="ru-RU" sz="4712" u="none" cap="none" strike="noStrike">
+                <a:solidFill>
+                  <a:srgbClr val="C2D076"/>
+                </a:solidFill>
+                <a:latin typeface="Inter Medium"/>
+                <a:ea typeface="Inter Medium"/>
+                <a:cs typeface="Inter Medium"/>
+                <a:sym typeface="Inter Medium"/>
+              </a:rPr>
+              <a:t>Содержание одно, подача разная</a:t>
             </a:r>
             <a:endParaRPr>
               <a:latin typeface="Inter Medium"/>
@@ -7684,318 +8183,6 @@
 </p:sld>
 </file>
 
-<file path=ppt/slides/slide6.xml><?xml version="1.0" encoding="utf-8"?>
-<p:sld xmlns:a="http://schemas.openxmlformats.org/drawingml/2006/main" xmlns:p="http://schemas.openxmlformats.org/presentationml/2006/main" xmlns:r="http://schemas.openxmlformats.org/officeDocument/2006/relationships">
-  <p:cSld>
-    <p:bg>
-      <p:bgPr>
-        <a:solidFill>
-          <a:srgbClr val="001514"/>
-        </a:solidFill>
-      </p:bgPr>
-    </p:bg>
-    <p:spTree>
-      <p:nvGrpSpPr>
-        <p:cNvPr id="1" name=""/>
-        <p:cNvGrpSpPr/>
-        <p:nvPr/>
-      </p:nvGrpSpPr>
-      <p:grpSpPr/>
-      <p:sp>
-        <p:nvSpPr>
-          <p:cNvPr id="42" name="Google Shape;42;p8"/>
-          <p:cNvSpPr txBox="1"/>
-          <p:nvPr/>
-        </p:nvSpPr>
-        <p:spPr>
-          <a:xfrm>
-            <a:off x="619057" y="2623820"/>
-            <a:ext cx="15727680" cy="944880"/>
-          </a:xfrm>
-          <a:prstGeom prst="rect">
-            <a:avLst/>
-          </a:prstGeom>
-          <a:noFill/>
-          <a:ln>
-            <a:noFill/>
-          </a:ln>
-        </p:spPr>
-        <p:txBody>
-          <a:bodyPr anchorCtr="0" anchor="t" bIns="0" lIns="0" spcFirstLastPara="1" rIns="0" wrap="square" tIns="0">
-            <a:spAutoFit/>
-          </a:bodyPr>
-          <a:lstStyle/>
-          <a:p>
-            <a:pPr indent="0" lvl="1" marL="0" marR="0" rtl="0" algn="l">
-              <a:lnSpc>
-                <a:spcPct val="120000"/>
-              </a:lnSpc>
-              <a:spcBef>
-                <a:spcPts val="0"/>
-              </a:spcBef>
-              <a:spcAft>
-                <a:spcPts val="0"/>
-              </a:spcAft>
-              <a:buClr>
-                <a:srgbClr val="C2D076"/>
-              </a:buClr>
-              <a:buSzPts val="5600"/>
-              <a:buFont typeface="Inter Medium"/>
-              <a:buNone/>
-            </a:pPr>
-            <a:r>
-              <a:rPr i="0" lang="ru-RU" sz="4712" u="none" cap="none" strike="noStrike">
-                <a:solidFill>
-                  <a:srgbClr val="C2D076"/>
-                </a:solidFill>
-                <a:latin typeface="Inter Medium"/>
-                <a:ea typeface="Inter Medium"/>
-                <a:cs typeface="Inter Medium"/>
-                <a:sym typeface="Inter Medium"/>
-              </a:rPr>
-              <a:t>41 проверка качества на слайд</a:t>
-            </a:r>
-            <a:endParaRPr>
-              <a:latin typeface="Inter Medium"/>
-              <a:ea typeface="Inter Medium"/>
-              <a:cs typeface="Inter Medium"/>
-              <a:sym typeface="Inter Medium"/>
-            </a:endParaRPr>
-          </a:p>
-        </p:txBody>
-      </p:sp>
-      <p:sp>
-        <p:nvSpPr>
-          <p:cNvPr id="43" name="Unit 43"/>
-          <p:cNvSpPr txBox="1"/>
-          <p:nvPr/>
-        </p:nvSpPr>
-        <p:spPr>
-          <a:xfrm>
-            <a:off x="1024128" y="4137660"/>
-            <a:ext cx="10393436" cy="299720"/>
-          </a:xfrm>
-          <a:prstGeom prst="rect">
-            <a:avLst/>
-          </a:prstGeom>
-          <a:noFill/>
-        </p:spPr>
-        <p:txBody>
-          <a:bodyPr wrap="square" lIns="0" tIns="0" rIns="0" bIns="0" anchor="t" rtlCol="0">
-            <a:noAutofit/>
-          </a:bodyPr>
-          <a:lstStyle/>
-          <a:p>
-            <a:pPr algn="l" marL="0" indent="0">
-              <a:lnSpc>
-                <a:spcPct val="100000"/>
-              </a:lnSpc>
-              <a:buNone/>
-            </a:pPr>
-            <a:r>
-              <a:rPr lang="ru-RU" sz="1800" b="0" cap="none" spc="0" baseline="0" dirty="0">
-                <a:solidFill>
-                  <a:srgbClr val="FFFFFF"/>
-                </a:solidFill>
-                <a:latin typeface="Inter Light"/>
-                <a:cs typeface="Inter Light"/>
-              </a:rPr>
-              <a:t>Число проверок по категориям</a:t>
-            </a:r>
-            <a:endParaRPr lang="ru-RU" sz="1800"/>
-          </a:p>
-        </p:txBody>
-      </p:sp>
-      <p:graphicFrame>
-        <p:nvGraphicFramePr>
-          <p:cNvPr id="44" name="Chart 43"/>
-          <p:cNvGraphicFramePr>
-            <a:graphicFrameLocks noGrp="1"/>
-          </p:cNvGraphicFramePr>
-          <p:nvPr/>
-        </p:nvGraphicFramePr>
-        <p:xfrm>
-          <a:off x="1024128" y="4529963"/>
-          <a:ext cx="10393436" cy="3147182"/>
-        </p:xfrm>
-        <a:graphic>
-          <a:graphicData uri="http://schemas.openxmlformats.org/drawingml/2006/chart">
-            <c:chart xmlns:c="http://schemas.openxmlformats.org/drawingml/2006/chart" r:id="rId2"/>
-          </a:graphicData>
-        </a:graphic>
-      </p:graphicFrame>
-      <p:cxnSp>
-        <p:nvCxnSpPr>
-          <p:cNvPr id="45" name="Line 45"/>
-          <p:cNvCxnSpPr/>
-          <p:nvPr/>
-        </p:nvCxnSpPr>
-        <p:spPr>
-          <a:xfrm>
-            <a:off x="11856476" y="5176716"/>
-            <a:ext cx="0" cy="878535"/>
-          </a:xfrm>
-          <a:prstGeom prst="line">
-            <a:avLst/>
-          </a:prstGeom>
-          <a:ln w="12700">
-            <a:solidFill>
-              <a:srgbClr val="384848"/>
-            </a:solidFill>
-          </a:ln>
-        </p:spPr>
-      </p:cxnSp>
-      <p:sp>
-        <p:nvSpPr>
-          <p:cNvPr id="46" name="Takeaway 46"/>
-          <p:cNvSpPr txBox="1"/>
-          <p:nvPr/>
-        </p:nvSpPr>
-        <p:spPr>
-          <a:xfrm>
-            <a:off x="12295388" y="5176716"/>
-            <a:ext cx="4968484" cy="878535"/>
-          </a:xfrm>
-          <a:prstGeom prst="rect">
-            <a:avLst/>
-          </a:prstGeom>
-          <a:noFill/>
-        </p:spPr>
-        <p:txBody>
-          <a:bodyPr wrap="square" lIns="0" tIns="0" rIns="0" bIns="0" anchor="t" rtlCol="0">
-            <a:noAutofit/>
-          </a:bodyPr>
-          <a:lstStyle/>
-          <a:p>
-            <a:pPr algn="l" marL="0" indent="0">
-              <a:lnSpc>
-                <a:spcPct val="100000"/>
-              </a:lnSpc>
-              <a:spcAft>
-                <a:spcPts val="1539"/>
-              </a:spcAft>
-              <a:buNone/>
-            </a:pPr>
-            <a:r>
-              <a:rPr lang="ru-RU" sz="2799" b="0" cap="none" spc="0" baseline="0" dirty="0">
-                <a:solidFill>
-                  <a:srgbClr val="FFFFFF"/>
-                </a:solidFill>
-                <a:latin typeface="Inter Light"/>
-                <a:cs typeface="Inter Light"/>
-              </a:rPr>
-              <a:t>Найденные проблемы помечаются на слайде</a:t>
-            </a:r>
-            <a:endParaRPr lang="ru-RU" sz="2799"/>
-          </a:p>
-        </p:txBody>
-      </p:sp>
-      <p:sp>
-        <p:nvSpPr>
-          <p:cNvPr id="47" name="Conclusion strip 47"/>
-          <p:cNvSpPr/>
-          <p:nvPr/>
-        </p:nvSpPr>
-        <p:spPr>
-          <a:xfrm>
-            <a:off x="1024128" y="8109199"/>
-            <a:ext cx="16239744" cy="892754"/>
-          </a:xfrm>
-          <a:prstGeom prst="roundRect">
-            <a:avLst>
-              <a:gd name="adj" fmla="val 12290"/>
-            </a:avLst>
-          </a:prstGeom>
-          <a:solidFill>
-            <a:srgbClr val="000000"/>
-          </a:solidFill>
-          <a:ln>
-            <a:noFill/>
-          </a:ln>
-        </p:spPr>
-      </p:sp>
-      <p:sp>
-        <p:nvSpPr>
-          <p:cNvPr id="48" name="Conclusion bar 48"/>
-          <p:cNvSpPr/>
-          <p:nvPr/>
-        </p:nvSpPr>
-        <p:spPr>
-          <a:xfrm>
-            <a:off x="1379601" y="8372249"/>
-            <a:ext cx="61722" cy="366654"/>
-          </a:xfrm>
-          <a:prstGeom prst="rect">
-            <a:avLst/>
-          </a:prstGeom>
-          <a:solidFill>
-            <a:srgbClr val="C2D076"/>
-          </a:solidFill>
-          <a:ln>
-            <a:noFill/>
-          </a:ln>
-        </p:spPr>
-      </p:sp>
-      <p:sp>
-        <p:nvSpPr>
-          <p:cNvPr id="49" name="Conclusion 49"/>
-          <p:cNvSpPr txBox="1"/>
-          <p:nvPr/>
-        </p:nvSpPr>
-        <p:spPr>
-          <a:xfrm>
-            <a:off x="1725701" y="8329592"/>
-            <a:ext cx="15182698" cy="451968"/>
-          </a:xfrm>
-          <a:prstGeom prst="rect">
-            <a:avLst/>
-          </a:prstGeom>
-          <a:noFill/>
-        </p:spPr>
-        <p:txBody>
-          <a:bodyPr wrap="square" lIns="0" tIns="0" rIns="0" bIns="0" anchor="t" rtlCol="0">
-            <a:noAutofit/>
-          </a:bodyPr>
-          <a:lstStyle/>
-          <a:p>
-            <a:pPr algn="l" marL="0" indent="0">
-              <a:lnSpc>
-                <a:spcPct val="100000"/>
-              </a:lnSpc>
-              <a:buNone/>
-            </a:pPr>
-            <a:r>
-              <a:rPr lang="ru-RU" sz="2799" b="0" cap="none" spc="0" baseline="0" dirty="0">
-                <a:solidFill>
-                  <a:srgbClr val="C2D076"/>
-                </a:solidFill>
-                <a:latin typeface="Inter Light"/>
-                <a:cs typeface="Inter Light"/>
-              </a:rPr>
-              <a:t>12 </a:t>
-            </a:r>
-            <a:r>
-              <a:rPr lang="ru-RU" sz="2799" b="0" cap="none" spc="0" baseline="0" dirty="0">
-                <a:solidFill>
-                  <a:srgbClr val="C2D076"/>
-                </a:solidFill>
-                <a:latin typeface="Inter Light"/>
-                <a:cs typeface="Inter Light"/>
-              </a:rPr>
-              <a:t>проверок на целостность — самая большая группа</a:t>
-            </a:r>
-            <a:endParaRPr lang="ru-RU" sz="2799"/>
-          </a:p>
-        </p:txBody>
-      </p:sp>
-    </p:spTree>
-  </p:cSld>
-  <p:clrMapOvr>
-    <a:masterClrMapping/>
-  </p:clrMapOvr>
-</p:sld>
-</file>
-
 <file path=ppt/slides/slide7.xml><?xml version="1.0" encoding="utf-8"?>
 <p:sld xmlns:a="http://schemas.openxmlformats.org/drawingml/2006/main" xmlns:p="http://schemas.openxmlformats.org/presentationml/2006/main" xmlns:r="http://schemas.openxmlformats.org/officeDocument/2006/relationships">
   <p:cSld>
@@ -8022,7 +8209,7 @@
         <p:spPr>
           <a:xfrm>
             <a:off x="619057" y="2623820"/>
-            <a:ext cx="10495470" cy="1527657"/>
+            <a:ext cx="8911509" cy="1527657"/>
           </a:xfrm>
           <a:prstGeom prst="rect">
             <a:avLst/>
@@ -8065,7 +8252,7 @@
                 <a:cs typeface="Inter Medium"/>
                 <a:sym typeface="Inter Medium"/>
               </a:rPr>
-              <a:t>9 демонстрационных презентаций без выдуманных чисел</a:t>
+              <a:t>Все проблемы исправляются автоматически в пайплайне</a:t>
             </a:r>
             <a:endParaRPr>
               <a:latin typeface="Inter Medium"/>
@@ -8078,18 +8265,174 @@
       </p:sp>
       <p:sp>
         <p:nvSpPr>
-          <p:cNvPr id="61" name="Card 61"/>
+          <p:cNvPr id="43" name="Unit 43"/>
+          <p:cNvSpPr txBox="1"/>
+          <p:nvPr/>
+        </p:nvSpPr>
+        <p:spPr>
+          <a:xfrm>
+            <a:off x="1024128" y="4665827"/>
+            <a:ext cx="10393436" cy="299720"/>
+          </a:xfrm>
+          <a:prstGeom prst="rect">
+            <a:avLst/>
+          </a:prstGeom>
+          <a:noFill/>
+        </p:spPr>
+        <p:txBody>
+          <a:bodyPr wrap="square" lIns="0" tIns="0" rIns="0" bIns="0" anchor="t" rtlCol="0">
+            <a:noAutofit/>
+          </a:bodyPr>
+          <a:lstStyle/>
+          <a:p>
+            <a:pPr algn="l" marL="0" indent="0">
+              <a:lnSpc>
+                <a:spcPct val="100000"/>
+              </a:lnSpc>
+              <a:buNone/>
+            </a:pPr>
+            <a:r>
+              <a:rPr lang="ru-RU" sz="1800" b="0" cap="none" spc="0" baseline="0" dirty="0">
+                <a:solidFill>
+                  <a:srgbClr val="FFFFFF"/>
+                </a:solidFill>
+                <a:latin typeface="Inter Light"/>
+                <a:cs typeface="Inter Light"/>
+              </a:rPr>
+              <a:t>Проверки, проверок</a:t>
+            </a:r>
+            <a:endParaRPr lang="ru-RU" sz="1800"/>
+          </a:p>
+        </p:txBody>
+      </p:sp>
+      <p:graphicFrame>
+        <p:nvGraphicFramePr>
+          <p:cNvPr id="44" name="Chart 43"/>
+          <p:cNvGraphicFramePr>
+            <a:graphicFrameLocks noGrp="1"/>
+          </p:cNvGraphicFramePr>
+          <p:nvPr/>
+        </p:nvGraphicFramePr>
+        <p:xfrm>
+          <a:off x="1024128" y="5058130"/>
+          <a:ext cx="10393436" cy="2661269"/>
+        </p:xfrm>
+        <a:graphic>
+          <a:graphicData uri="http://schemas.openxmlformats.org/drawingml/2006/chart">
+            <c:chart xmlns:c="http://schemas.openxmlformats.org/drawingml/2006/chart" r:id="rId2"/>
+          </a:graphicData>
+        </a:graphic>
+      </p:graphicFrame>
+      <p:cxnSp>
+        <p:nvCxnSpPr>
+          <p:cNvPr id="45" name="Line 45"/>
+          <p:cNvCxnSpPr/>
+          <p:nvPr/>
+        </p:nvCxnSpPr>
+        <p:spPr>
+          <a:xfrm>
+            <a:off x="11856476" y="5003706"/>
+            <a:ext cx="0" cy="2353729"/>
+          </a:xfrm>
+          <a:prstGeom prst="line">
+            <a:avLst/>
+          </a:prstGeom>
+          <a:ln w="12700">
+            <a:solidFill>
+              <a:srgbClr val="384848"/>
+            </a:solidFill>
+          </a:ln>
+        </p:spPr>
+      </p:cxnSp>
+      <p:sp>
+        <p:nvSpPr>
+          <p:cNvPr id="46" name="Takeaway 46"/>
+          <p:cNvSpPr txBox="1"/>
+          <p:nvPr/>
+        </p:nvSpPr>
+        <p:spPr>
+          <a:xfrm>
+            <a:off x="12295388" y="5003706"/>
+            <a:ext cx="4968484" cy="2353729"/>
+          </a:xfrm>
+          <a:prstGeom prst="rect">
+            <a:avLst/>
+          </a:prstGeom>
+          <a:noFill/>
+        </p:spPr>
+        <p:txBody>
+          <a:bodyPr wrap="square" lIns="0" tIns="0" rIns="0" bIns="0" anchor="t" rtlCol="0">
+            <a:noAutofit/>
+          </a:bodyPr>
+          <a:lstStyle/>
+          <a:p>
+            <a:pPr algn="l" marL="391020" indent="-391020">
+              <a:lnSpc>
+                <a:spcPct val="100000"/>
+              </a:lnSpc>
+              <a:spcAft>
+                <a:spcPts val="1539"/>
+              </a:spcAft>
+              <a:buClr>
+                <a:srgbClr val="C2D076"/>
+              </a:buClr>
+              <a:buFont typeface="Arial"/>
+              <a:buChar char="•"/>
+            </a:pPr>
+            <a:r>
+              <a:rPr lang="ru-RU" sz="2799" b="0" cap="none" spc="0" baseline="0" dirty="0">
+                <a:solidFill>
+                  <a:srgbClr val="FFFFFF"/>
+                </a:solidFill>
+                <a:latin typeface="Inter Light"/>
+                <a:cs typeface="Inter Light"/>
+              </a:rPr>
+              <a:t>41 проверка на каждый слайд</a:t>
+            </a:r>
+            <a:endParaRPr lang="ru-RU" sz="2799"/>
+          </a:p>
+          <a:p>
+            <a:pPr algn="l" marL="391020" indent="-391020">
+              <a:lnSpc>
+                <a:spcPct val="100000"/>
+              </a:lnSpc>
+              <a:spcAft>
+                <a:spcPts val="1539"/>
+              </a:spcAft>
+              <a:buClr>
+                <a:srgbClr val="C2D076"/>
+              </a:buClr>
+              <a:buFont typeface="Arial"/>
+              <a:buChar char="•"/>
+            </a:pPr>
+            <a:r>
+              <a:rPr lang="ru-RU" sz="2799" b="0" cap="none" spc="0" baseline="0" dirty="0">
+                <a:solidFill>
+                  <a:srgbClr val="FFFFFF"/>
+                </a:solidFill>
+                <a:latin typeface="Inter Light"/>
+                <a:cs typeface="Inter Light"/>
+              </a:rPr>
+              <a:t>Найденные проблемы помечаются и исправляются</a:t>
+            </a:r>
+            <a:endParaRPr lang="ru-RU" sz="2799"/>
+          </a:p>
+        </p:txBody>
+      </p:sp>
+      <p:sp>
+        <p:nvSpPr>
+          <p:cNvPr id="47" name="Conclusion strip 47"/>
           <p:cNvSpPr/>
           <p:nvPr/>
         </p:nvSpPr>
         <p:spPr>
           <a:xfrm>
-            <a:off x="1024128" y="4665827"/>
-            <a:ext cx="5120640" cy="3818208"/>
+            <a:off x="1024128" y="8151453"/>
+            <a:ext cx="16239744" cy="892754"/>
           </a:xfrm>
           <a:prstGeom prst="roundRect">
             <a:avLst>
-              <a:gd name="adj" fmla="val 2873"/>
+              <a:gd name="adj" fmla="val 12290"/>
             </a:avLst>
           </a:prstGeom>
           <a:solidFill>
@@ -8102,56 +8445,36 @@
       </p:sp>
       <p:sp>
         <p:nvSpPr>
-          <p:cNvPr id="62" name="Figure 62"/>
-          <p:cNvSpPr txBox="1"/>
-          <p:nvPr/>
-        </p:nvSpPr>
-        <p:spPr>
-          <a:xfrm>
-            <a:off x="1536192" y="5004954"/>
-            <a:ext cx="4096512" cy="975208"/>
+          <p:cNvPr id="48" name="Conclusion bar 48"/>
+          <p:cNvSpPr/>
+          <p:nvPr/>
+        </p:nvSpPr>
+        <p:spPr>
+          <a:xfrm>
+            <a:off x="1379601" y="8414503"/>
+            <a:ext cx="61722" cy="366654"/>
           </a:xfrm>
           <a:prstGeom prst="rect">
             <a:avLst/>
           </a:prstGeom>
-          <a:noFill/>
-        </p:spPr>
-        <p:txBody>
-          <a:bodyPr wrap="square" lIns="0" tIns="0" rIns="0" bIns="0" anchor="b" rtlCol="0">
-            <a:noAutofit/>
-          </a:bodyPr>
-          <a:lstStyle/>
-          <a:p>
-            <a:pPr algn="l" marL="0" indent="0">
-              <a:lnSpc>
-                <a:spcPct val="100000"/>
-              </a:lnSpc>
-              <a:buNone/>
-            </a:pPr>
-            <a:r>
-              <a:rPr lang="ru-RU" sz="6399" b="1" cap="none" spc="0" baseline="0" dirty="0">
-                <a:solidFill>
-                  <a:srgbClr val="C2D076"/>
-                </a:solidFill>
-                <a:latin typeface="Inter Light"/>
-                <a:cs typeface="Inter Light"/>
-              </a:rPr>
-              <a:t>9</a:t>
-            </a:r>
-            <a:endParaRPr lang="ru-RU" sz="6399"/>
-          </a:p>
-        </p:txBody>
-      </p:sp>
-      <p:sp>
-        <p:nvSpPr>
-          <p:cNvPr id="63" name="Label 63"/>
+          <a:solidFill>
+            <a:srgbClr val="C2D076"/>
+          </a:solidFill>
+          <a:ln>
+            <a:noFill/>
+          </a:ln>
+        </p:spPr>
+      </p:sp>
+      <p:sp>
+        <p:nvSpPr>
+          <p:cNvPr id="49" name="Conclusion 49"/>
           <p:cNvSpPr txBox="1"/>
           <p:nvPr/>
         </p:nvSpPr>
         <p:spPr>
           <a:xfrm>
-            <a:off x="1536192" y="6088175"/>
-            <a:ext cx="4096512" cy="1883796"/>
+            <a:off x="1725701" y="8371846"/>
+            <a:ext cx="15182698" cy="451968"/>
           </a:xfrm>
           <a:prstGeom prst="rect">
             <a:avLst/>
@@ -8173,228 +8496,32 @@
             <a:r>
               <a:rPr lang="ru-RU" sz="2799" b="0" cap="none" spc="0" baseline="0" dirty="0">
                 <a:solidFill>
-                  <a:srgbClr val="FFFFFF"/>
+                  <a:srgbClr val="C2D076"/>
                 </a:solidFill>
                 <a:latin typeface="Inter Light"/>
                 <a:cs typeface="Inter Light"/>
               </a:rPr>
-              <a:t>Демо-⁠презентаций</a:t>
-            </a:r>
-            <a:endParaRPr lang="ru-RU" sz="2799"/>
-          </a:p>
-        </p:txBody>
-      </p:sp>
-      <p:sp>
-        <p:nvSpPr>
-          <p:cNvPr id="64" name="Card 64"/>
-          <p:cNvSpPr/>
-          <p:nvPr/>
-        </p:nvSpPr>
-        <p:spPr>
-          <a:xfrm>
-            <a:off x="6583680" y="4665827"/>
-            <a:ext cx="5120640" cy="3818208"/>
-          </a:xfrm>
-          <a:prstGeom prst="roundRect">
-            <a:avLst>
-              <a:gd name="adj" fmla="val 2873"/>
-            </a:avLst>
-          </a:prstGeom>
-          <a:solidFill>
-            <a:srgbClr val="000000"/>
-          </a:solidFill>
-          <a:ln>
-            <a:noFill/>
-          </a:ln>
-        </p:spPr>
-      </p:sp>
-      <p:sp>
-        <p:nvSpPr>
-          <p:cNvPr id="65" name="Figure 65"/>
-          <p:cNvSpPr txBox="1"/>
-          <p:nvPr/>
-        </p:nvSpPr>
-        <p:spPr>
-          <a:xfrm>
-            <a:off x="7082239" y="5004954"/>
-            <a:ext cx="4110017" cy="975208"/>
-          </a:xfrm>
-          <a:prstGeom prst="rect">
-            <a:avLst/>
-          </a:prstGeom>
-          <a:noFill/>
-        </p:spPr>
-        <p:txBody>
-          <a:bodyPr wrap="square" lIns="0" tIns="0" rIns="0" bIns="0" anchor="b" rtlCol="0">
-            <a:noAutofit/>
-          </a:bodyPr>
-          <a:lstStyle/>
-          <a:p>
-            <a:pPr algn="l" marL="0" indent="0">
-              <a:lnSpc>
-                <a:spcPct val="100000"/>
-              </a:lnSpc>
-              <a:buNone/>
-            </a:pPr>
-            <a:r>
-              <a:rPr lang="ru-RU" sz="6399" b="1" cap="none" spc="0" baseline="0" dirty="0">
+              <a:t>Наибольшее число проверок — на целостность (</a:t>
+            </a:r>
+            <a:r>
+              <a:rPr lang="ru-RU" sz="2799" b="0" cap="none" spc="0" baseline="0" dirty="0">
                 <a:solidFill>
                   <a:srgbClr val="C2D076"/>
                 </a:solidFill>
                 <a:latin typeface="Inter Light"/>
                 <a:cs typeface="Inter Light"/>
               </a:rPr>
-              <a:t>116⁠–⁠123</a:t>
-            </a:r>
-            <a:endParaRPr lang="ru-RU" sz="6399"/>
-          </a:p>
-        </p:txBody>
-      </p:sp>
-      <p:sp>
-        <p:nvSpPr>
-          <p:cNvPr id="66" name="Label 66"/>
-          <p:cNvSpPr txBox="1"/>
-          <p:nvPr/>
-        </p:nvSpPr>
-        <p:spPr>
-          <a:xfrm>
-            <a:off x="7095744" y="6088175"/>
-            <a:ext cx="4096512" cy="1883796"/>
-          </a:xfrm>
-          <a:prstGeom prst="rect">
-            <a:avLst/>
-          </a:prstGeom>
-          <a:noFill/>
-        </p:spPr>
-        <p:txBody>
-          <a:bodyPr wrap="square" lIns="0" tIns="0" rIns="0" bIns="0" anchor="t" rtlCol="0">
-            <a:noAutofit/>
-          </a:bodyPr>
-          <a:lstStyle/>
-          <a:p>
-            <a:pPr algn="l" marL="0" indent="0">
-              <a:lnSpc>
-                <a:spcPct val="100000"/>
-              </a:lnSpc>
-              <a:buNone/>
-            </a:pPr>
+              <a:t>12</a:t>
+            </a:r>
             <a:r>
               <a:rPr lang="ru-RU" sz="2799" b="0" cap="none" spc="0" baseline="0" dirty="0">
                 <a:solidFill>
-                  <a:srgbClr val="FFFFFF"/>
+                  <a:srgbClr val="C2D076"/>
                 </a:solidFill>
                 <a:latin typeface="Inter Light"/>
                 <a:cs typeface="Inter Light"/>
               </a:rPr>
-              <a:t>Проверенных чисел</a:t>
-            </a:r>
-            <a:endParaRPr lang="ru-RU" sz="2799"/>
-          </a:p>
-        </p:txBody>
-      </p:sp>
-      <p:sp>
-        <p:nvSpPr>
-          <p:cNvPr id="67" name="Card 67"/>
-          <p:cNvSpPr/>
-          <p:nvPr/>
-        </p:nvSpPr>
-        <p:spPr>
-          <a:xfrm>
-            <a:off x="12143232" y="4665827"/>
-            <a:ext cx="5120640" cy="3818208"/>
-          </a:xfrm>
-          <a:prstGeom prst="roundRect">
-            <a:avLst>
-              <a:gd name="adj" fmla="val 2873"/>
-            </a:avLst>
-          </a:prstGeom>
-          <a:solidFill>
-            <a:srgbClr val="000000"/>
-          </a:solidFill>
-          <a:ln>
-            <a:noFill/>
-          </a:ln>
-        </p:spPr>
-      </p:sp>
-      <p:sp>
-        <p:nvSpPr>
-          <p:cNvPr id="68" name="Figure 68"/>
-          <p:cNvSpPr txBox="1"/>
-          <p:nvPr/>
-        </p:nvSpPr>
-        <p:spPr>
-          <a:xfrm>
-            <a:off x="12655296" y="5004954"/>
-            <a:ext cx="4096512" cy="975208"/>
-          </a:xfrm>
-          <a:prstGeom prst="rect">
-            <a:avLst/>
-          </a:prstGeom>
-          <a:noFill/>
-        </p:spPr>
-        <p:txBody>
-          <a:bodyPr wrap="square" lIns="0" tIns="0" rIns="0" bIns="0" anchor="b" rtlCol="0">
-            <a:noAutofit/>
-          </a:bodyPr>
-          <a:lstStyle/>
-          <a:p>
-            <a:pPr algn="l" marL="0" indent="0">
-              <a:lnSpc>
-                <a:spcPct val="100000"/>
-              </a:lnSpc>
-              <a:buNone/>
-            </a:pPr>
-            <a:r>
-              <a:rPr lang="ru-RU" sz="6399" b="1" cap="none" spc="0" baseline="0" dirty="0">
-                <a:solidFill>
-                  <a:srgbClr val="C2D076"/>
-                </a:solidFill>
-                <a:latin typeface="Inter Light"/>
-                <a:cs typeface="Inter Light"/>
-              </a:rPr>
-              <a:t>0</a:t>
-            </a:r>
-            <a:endParaRPr lang="ru-RU" sz="6399"/>
-          </a:p>
-        </p:txBody>
-      </p:sp>
-      <p:sp>
-        <p:nvSpPr>
-          <p:cNvPr id="69" name="Label 69"/>
-          <p:cNvSpPr txBox="1"/>
-          <p:nvPr/>
-        </p:nvSpPr>
-        <p:spPr>
-          <a:xfrm>
-            <a:off x="12655296" y="6088175"/>
-            <a:ext cx="4096512" cy="1883796"/>
-          </a:xfrm>
-          <a:prstGeom prst="rect">
-            <a:avLst/>
-          </a:prstGeom>
-          <a:noFill/>
-        </p:spPr>
-        <p:txBody>
-          <a:bodyPr wrap="square" lIns="0" tIns="0" rIns="0" bIns="0" anchor="t" rtlCol="0">
-            <a:noAutofit/>
-          </a:bodyPr>
-          <a:lstStyle/>
-          <a:p>
-            <a:pPr algn="l" marL="0" indent="0">
-              <a:lnSpc>
-                <a:spcPct val="100000"/>
-              </a:lnSpc>
-              <a:buNone/>
-            </a:pPr>
-            <a:r>
-              <a:rPr lang="ru-RU" sz="2799" b="0" cap="none" spc="0" baseline="0" dirty="0">
-                <a:solidFill>
-                  <a:srgbClr val="FFFFFF"/>
-                </a:solidFill>
-                <a:latin typeface="Inter Light"/>
-                <a:cs typeface="Inter Light"/>
-              </a:rPr>
-              <a:t>Выдуманных чисел</a:t>
+              <a:t>)</a:t>
             </a:r>
             <a:endParaRPr lang="ru-RU" sz="2799"/>
           </a:p>
@@ -8434,7 +8561,7 @@
         <p:spPr>
           <a:xfrm>
             <a:off x="619057" y="2623820"/>
-            <a:ext cx="15727680" cy="944880"/>
+            <a:ext cx="15727680" cy="809548"/>
           </a:xfrm>
           <a:prstGeom prst="rect">
             <a:avLst/>
@@ -8477,7 +8604,7 @@
                 <a:cs typeface="Inter Medium"/>
                 <a:sym typeface="Inter Medium"/>
               </a:rPr>
-              <a:t>87 шаблонов, 99 из 100 и 12 форматов</a:t>
+              <a:t>9 готовых презентаций без выдуманных чисел</a:t>
             </a:r>
             <a:endParaRPr>
               <a:latin typeface="Inter Medium"/>
@@ -8490,18 +8617,18 @@
       </p:sp>
       <p:sp>
         <p:nvSpPr>
-          <p:cNvPr id="43" name="Card 43"/>
+          <p:cNvPr id="61" name="Card 61"/>
           <p:cNvSpPr/>
           <p:nvPr/>
         </p:nvSpPr>
         <p:spPr>
           <a:xfrm>
-            <a:off x="1024128" y="4137660"/>
-            <a:ext cx="5120640" cy="3113971"/>
+            <a:off x="1024128" y="3947718"/>
+            <a:ext cx="5120640" cy="2949747"/>
           </a:xfrm>
           <a:prstGeom prst="roundRect">
             <a:avLst>
-              <a:gd name="adj" fmla="val 3523"/>
+              <a:gd name="adj" fmla="val 3719"/>
             </a:avLst>
           </a:prstGeom>
           <a:solidFill>
@@ -8514,14 +8641,14 @@
       </p:sp>
       <p:sp>
         <p:nvSpPr>
-          <p:cNvPr id="44" name="Figure 44"/>
+          <p:cNvPr id="62" name="Figure 62"/>
           <p:cNvSpPr txBox="1"/>
           <p:nvPr/>
         </p:nvSpPr>
         <p:spPr>
           <a:xfrm>
-            <a:off x="1536192" y="4411899"/>
-            <a:ext cx="4096512" cy="1341120"/>
+            <a:off x="1536192" y="4384137"/>
+            <a:ext cx="4096512" cy="426568"/>
           </a:xfrm>
           <a:prstGeom prst="rect">
             <a:avLst/>
@@ -8541,29 +8668,29 @@
               <a:buNone/>
             </a:pPr>
             <a:r>
-              <a:rPr lang="ru-RU" sz="8800" b="1" cap="none" spc="0" baseline="0" dirty="0">
+              <a:rPr lang="ru-RU" sz="2799" b="1" cap="none" spc="0" baseline="0" dirty="0">
                 <a:solidFill>
                   <a:srgbClr val="C2D076"/>
                 </a:solidFill>
                 <a:latin typeface="Inter Light"/>
                 <a:cs typeface="Inter Light"/>
               </a:rPr>
-              <a:t>87</a:t>
-            </a:r>
-            <a:endParaRPr lang="ru-RU" sz="8800"/>
+              <a:t>9</a:t>
+            </a:r>
+            <a:endParaRPr lang="ru-RU" sz="2799"/>
           </a:p>
         </p:txBody>
       </p:sp>
       <p:sp>
         <p:nvSpPr>
-          <p:cNvPr id="45" name="Label 45"/>
+          <p:cNvPr id="63" name="Label 63"/>
           <p:cNvSpPr txBox="1"/>
           <p:nvPr/>
         </p:nvSpPr>
         <p:spPr>
           <a:xfrm>
-            <a:off x="1536192" y="5861032"/>
-            <a:ext cx="4096512" cy="878535"/>
+            <a:off x="1536192" y="4918718"/>
+            <a:ext cx="4096512" cy="1466683"/>
           </a:xfrm>
           <a:prstGeom prst="rect">
             <a:avLst/>
@@ -8583,33 +8710,33 @@
               <a:buNone/>
             </a:pPr>
             <a:r>
-              <a:rPr lang="ru-RU" sz="2799" b="0" cap="none" spc="0" baseline="0" dirty="0">
+              <a:rPr lang="ru-RU" sz="2199" b="0" cap="none" spc="0" baseline="0" dirty="0">
                 <a:solidFill>
                   <a:srgbClr val="FFFFFF"/>
                 </a:solidFill>
                 <a:latin typeface="Inter Light"/>
                 <a:cs typeface="Inter Light"/>
               </a:rPr>
-              <a:t>Чужих шаблонов</a:t>
-            </a:r>
-            <a:endParaRPr lang="ru-RU" sz="2799"/>
+              <a:t>Демо-⁠презентаций</a:t>
+            </a:r>
+            <a:endParaRPr lang="ru-RU" sz="2199"/>
           </a:p>
         </p:txBody>
       </p:sp>
       <p:sp>
         <p:nvSpPr>
-          <p:cNvPr id="46" name="Card 46"/>
+          <p:cNvPr id="64" name="Card 64"/>
           <p:cNvSpPr/>
           <p:nvPr/>
         </p:nvSpPr>
         <p:spPr>
           <a:xfrm>
-            <a:off x="6583680" y="4137660"/>
-            <a:ext cx="5120640" cy="3113971"/>
+            <a:off x="6583680" y="3947718"/>
+            <a:ext cx="5120640" cy="2949747"/>
           </a:xfrm>
           <a:prstGeom prst="roundRect">
             <a:avLst>
-              <a:gd name="adj" fmla="val 3523"/>
+              <a:gd name="adj" fmla="val 3719"/>
             </a:avLst>
           </a:prstGeom>
           <a:solidFill>
@@ -8622,14 +8749,14 @@
       </p:sp>
       <p:sp>
         <p:nvSpPr>
-          <p:cNvPr id="47" name="Figure 47"/>
+          <p:cNvPr id="65" name="Figure 65"/>
           <p:cNvSpPr txBox="1"/>
           <p:nvPr/>
         </p:nvSpPr>
         <p:spPr>
           <a:xfrm>
-            <a:off x="7087565" y="4411899"/>
-            <a:ext cx="4104691" cy="1341120"/>
+            <a:off x="7095744" y="4384137"/>
+            <a:ext cx="4096512" cy="426568"/>
           </a:xfrm>
           <a:prstGeom prst="rect">
             <a:avLst/>
@@ -8649,39 +8776,29 @@
               <a:buNone/>
             </a:pPr>
             <a:r>
-              <a:rPr lang="ru-RU" sz="8800" b="1" cap="none" spc="0" baseline="0" dirty="0">
+              <a:rPr lang="ru-RU" sz="2799" b="1" cap="none" spc="0" baseline="0" dirty="0">
                 <a:solidFill>
                   <a:srgbClr val="C2D076"/>
                 </a:solidFill>
                 <a:latin typeface="Inter Light"/>
                 <a:cs typeface="Inter Light"/>
               </a:rPr>
-              <a:t>99</a:t>
-            </a:r>
-            <a:r>
-              <a:rPr lang="ru-RU" sz="4712" b="1" cap="none" spc="0" baseline="0" dirty="0">
-                <a:solidFill>
-                  <a:srgbClr val="C2D076"/>
-                </a:solidFill>
-                <a:latin typeface="Inter Light"/>
-                <a:cs typeface="Inter Light"/>
-              </a:rPr>
-              <a:t> из 100</a:t>
-            </a:r>
-            <a:endParaRPr lang="ru-RU" sz="8800"/>
+              <a:t>от 116 до 123</a:t>
+            </a:r>
+            <a:endParaRPr lang="ru-RU" sz="2799"/>
           </a:p>
         </p:txBody>
       </p:sp>
       <p:sp>
         <p:nvSpPr>
-          <p:cNvPr id="48" name="Label 48"/>
+          <p:cNvPr id="66" name="Label 66"/>
           <p:cNvSpPr txBox="1"/>
           <p:nvPr/>
         </p:nvSpPr>
         <p:spPr>
           <a:xfrm>
-            <a:off x="7095744" y="5861032"/>
-            <a:ext cx="4096512" cy="878535"/>
+            <a:off x="7095744" y="4918718"/>
+            <a:ext cx="4096512" cy="1466683"/>
           </a:xfrm>
           <a:prstGeom prst="rect">
             <a:avLst/>
@@ -8701,33 +8818,33 @@
               <a:buNone/>
             </a:pPr>
             <a:r>
-              <a:rPr lang="ru-RU" sz="2799" b="0" cap="none" spc="0" baseline="0" dirty="0">
+              <a:rPr lang="ru-RU" sz="2199" b="0" cap="none" spc="0" baseline="0" dirty="0">
                 <a:solidFill>
                   <a:srgbClr val="FFFFFF"/>
                 </a:solidFill>
                 <a:latin typeface="Inter Light"/>
                 <a:cs typeface="Inter Light"/>
               </a:rPr>
-              <a:t>Средняя оценка качества</a:t>
-            </a:r>
-            <a:endParaRPr lang="ru-RU" sz="2799"/>
+              <a:t>Проверенных чисел</a:t>
+            </a:r>
+            <a:endParaRPr lang="ru-RU" sz="2199"/>
           </a:p>
         </p:txBody>
       </p:sp>
       <p:sp>
         <p:nvSpPr>
-          <p:cNvPr id="49" name="Card 49"/>
+          <p:cNvPr id="67" name="Card 67"/>
           <p:cNvSpPr/>
           <p:nvPr/>
         </p:nvSpPr>
         <p:spPr>
           <a:xfrm>
-            <a:off x="12143232" y="4137660"/>
-            <a:ext cx="5120640" cy="3113971"/>
+            <a:off x="12143232" y="3947718"/>
+            <a:ext cx="5120640" cy="2949747"/>
           </a:xfrm>
           <a:prstGeom prst="roundRect">
             <a:avLst>
-              <a:gd name="adj" fmla="val 3523"/>
+              <a:gd name="adj" fmla="val 3719"/>
             </a:avLst>
           </a:prstGeom>
           <a:solidFill>
@@ -8740,14 +8857,14 @@
       </p:sp>
       <p:sp>
         <p:nvSpPr>
-          <p:cNvPr id="50" name="Figure 50"/>
+          <p:cNvPr id="68" name="Figure 68"/>
           <p:cNvSpPr txBox="1"/>
           <p:nvPr/>
         </p:nvSpPr>
         <p:spPr>
           <a:xfrm>
-            <a:off x="12623648" y="4411899"/>
-            <a:ext cx="4128160" cy="1341120"/>
+            <a:off x="12655296" y="4384137"/>
+            <a:ext cx="4096512" cy="426568"/>
           </a:xfrm>
           <a:prstGeom prst="rect">
             <a:avLst/>
@@ -8767,29 +8884,29 @@
               <a:buNone/>
             </a:pPr>
             <a:r>
-              <a:rPr lang="ru-RU" sz="8800" b="1" cap="none" spc="0" baseline="0" dirty="0">
+              <a:rPr lang="ru-RU" sz="2799" b="1" cap="none" spc="0" baseline="0" dirty="0">
                 <a:solidFill>
                   <a:srgbClr val="C2D076"/>
                 </a:solidFill>
                 <a:latin typeface="Inter Light"/>
                 <a:cs typeface="Inter Light"/>
               </a:rPr>
-              <a:t>12</a:t>
-            </a:r>
-            <a:endParaRPr lang="ru-RU" sz="8800"/>
+              <a:t>0</a:t>
+            </a:r>
+            <a:endParaRPr lang="ru-RU" sz="2799"/>
           </a:p>
         </p:txBody>
       </p:sp>
       <p:sp>
         <p:nvSpPr>
-          <p:cNvPr id="51" name="Label 51"/>
+          <p:cNvPr id="69" name="Label 69"/>
           <p:cNvSpPr txBox="1"/>
           <p:nvPr/>
         </p:nvSpPr>
         <p:spPr>
           <a:xfrm>
-            <a:off x="12655296" y="5861032"/>
-            <a:ext cx="4096512" cy="878535"/>
+            <a:off x="12655296" y="4918718"/>
+            <a:ext cx="4096512" cy="1466683"/>
           </a:xfrm>
           <a:prstGeom prst="rect">
             <a:avLst/>
@@ -8809,28 +8926,28 @@
               <a:buNone/>
             </a:pPr>
             <a:r>
-              <a:rPr lang="ru-RU" sz="2799" b="0" cap="none" spc="0" baseline="0" dirty="0">
+              <a:rPr lang="ru-RU" sz="2199" b="0" cap="none" spc="0" baseline="0" dirty="0">
                 <a:solidFill>
                   <a:srgbClr val="FFFFFF"/>
                 </a:solidFill>
                 <a:latin typeface="Inter Light"/>
                 <a:cs typeface="Inter Light"/>
               </a:rPr>
-              <a:t>Форматов</a:t>
-            </a:r>
-            <a:endParaRPr lang="ru-RU" sz="2799"/>
+              <a:t>Выдуманных чисел</a:t>
+            </a:r>
+            <a:endParaRPr lang="ru-RU" sz="2199"/>
           </a:p>
         </p:txBody>
       </p:sp>
       <p:sp>
         <p:nvSpPr>
-          <p:cNvPr id="52" name="Conclusion strip 52"/>
+          <p:cNvPr id="70" name="Conclusion strip 70"/>
           <p:cNvSpPr/>
           <p:nvPr/>
         </p:nvSpPr>
         <p:spPr>
           <a:xfrm>
-            <a:off x="1024128" y="7683685"/>
+            <a:off x="1024128" y="7329519"/>
             <a:ext cx="16239744" cy="892754"/>
           </a:xfrm>
           <a:prstGeom prst="roundRect">
@@ -8848,13 +8965,13 @@
       </p:sp>
       <p:sp>
         <p:nvSpPr>
-          <p:cNvPr id="53" name="Conclusion bar 53"/>
+          <p:cNvPr id="71" name="Conclusion bar 71"/>
           <p:cNvSpPr/>
           <p:nvPr/>
         </p:nvSpPr>
         <p:spPr>
           <a:xfrm>
-            <a:off x="1379601" y="7946735"/>
+            <a:off x="1379601" y="7592569"/>
             <a:ext cx="61722" cy="366654"/>
           </a:xfrm>
           <a:prstGeom prst="rect">
@@ -8870,13 +8987,13 @@
       </p:sp>
       <p:sp>
         <p:nvSpPr>
-          <p:cNvPr id="54" name="Conclusion 54"/>
+          <p:cNvPr id="72" name="Conclusion 72"/>
           <p:cNvSpPr txBox="1"/>
           <p:nvPr/>
         </p:nvSpPr>
         <p:spPr>
           <a:xfrm>
-            <a:off x="1725701" y="7904078"/>
+            <a:off x="1725701" y="7549912"/>
             <a:ext cx="15182698" cy="451968"/>
           </a:xfrm>
           <a:prstGeom prst="rect">
@@ -8904,7 +9021,7 @@
                 <a:latin typeface="Inter Light"/>
                 <a:cs typeface="Inter Light"/>
               </a:rPr>
-              <a:t>Сервис работает с любыми шаблонами и форматами</a:t>
+              <a:t>Все числа проверены дважды — до и после вёрстки</a:t>
             </a:r>
             <a:endParaRPr lang="ru-RU" sz="2799"/>
           </a:p>
@@ -8944,7 +9061,7 @@
         <p:spPr>
           <a:xfrm>
             <a:off x="619057" y="2623820"/>
-            <a:ext cx="15727680" cy="809548"/>
+            <a:ext cx="12440716" cy="1527657"/>
           </a:xfrm>
           <a:prstGeom prst="rect">
             <a:avLst/>
@@ -8978,7 +9095,7 @@
               <a:buNone/>
             </a:pPr>
             <a:r>
-              <a:rPr i="0" lang="ru-RU" sz="4712" u="none" cap="none" strike="noStrike">
+              <a:rPr i="0" lang="ru-RU" sz="2799" u="none" cap="none" strike="noStrike">
                 <a:solidFill>
                   <a:srgbClr val="C2D076"/>
                 </a:solidFill>
@@ -8987,7 +9104,7 @@
                 <a:cs typeface="Inter Medium"/>
                 <a:sym typeface="Inter Medium"/>
               </a:rPr>
-              <a:t>VK WorkSpace — самый долгий, но всё в лимите</a:t>
+              <a:t>87 шаблонов, 99 из 100 и 12 форматов — универсальный инструмент</a:t>
             </a:r>
             <a:endParaRPr>
               <a:latin typeface="Inter Medium"/>
@@ -9000,78 +9117,18 @@
       </p:sp>
       <p:sp>
         <p:nvSpPr>
-          <p:cNvPr id="43" name="Unit 43"/>
-          <p:cNvSpPr txBox="1"/>
-          <p:nvPr/>
-        </p:nvSpPr>
-        <p:spPr>
-          <a:xfrm>
-            <a:off x="1024128" y="3947718"/>
-            <a:ext cx="16239744" cy="299720"/>
-          </a:xfrm>
-          <a:prstGeom prst="rect">
-            <a:avLst/>
-          </a:prstGeom>
-          <a:noFill/>
-        </p:spPr>
-        <p:txBody>
-          <a:bodyPr wrap="square" lIns="0" tIns="0" rIns="0" bIns="0" anchor="t" rtlCol="0">
-            <a:noAutofit/>
-          </a:bodyPr>
-          <a:lstStyle/>
-          <a:p>
-            <a:pPr algn="l" marL="0" indent="0">
-              <a:lnSpc>
-                <a:spcPct val="100000"/>
-              </a:lnSpc>
-              <a:buNone/>
-            </a:pPr>
-            <a:r>
-              <a:rPr lang="ru-RU" sz="1800" b="0" cap="none" spc="0" baseline="0" dirty="0">
-                <a:solidFill>
-                  <a:srgbClr val="FFFFFF"/>
-                </a:solidFill>
-                <a:latin typeface="Inter Light"/>
-                <a:cs typeface="Inter Light"/>
-              </a:rPr>
-              <a:t>Время генерации трёх вариантов на шаблонах датасета, секунд</a:t>
-            </a:r>
-            <a:endParaRPr lang="ru-RU" sz="1800"/>
-          </a:p>
-        </p:txBody>
-      </p:sp>
-      <p:graphicFrame>
-        <p:nvGraphicFramePr>
-          <p:cNvPr id="44" name="Chart 43"/>
-          <p:cNvGraphicFramePr>
-            <a:graphicFrameLocks noGrp="1"/>
-          </p:cNvGraphicFramePr>
-          <p:nvPr/>
-        </p:nvGraphicFramePr>
-        <p:xfrm>
-          <a:off x="1024128" y="4340021"/>
-          <a:ext cx="16239744" cy="2918208"/>
-        </p:xfrm>
-        <a:graphic>
-          <a:graphicData uri="http://schemas.openxmlformats.org/drawingml/2006/chart">
-            <c:chart xmlns:c="http://schemas.openxmlformats.org/drawingml/2006/chart" r:id="rId2"/>
-          </a:graphicData>
-        </a:graphic>
-      </p:graphicFrame>
-      <p:sp>
-        <p:nvSpPr>
-          <p:cNvPr id="45" name="Conclusion strip 45"/>
+          <p:cNvPr id="43" name="Card 43"/>
           <p:cNvSpPr/>
           <p:nvPr/>
         </p:nvSpPr>
         <p:spPr>
           <a:xfrm>
-            <a:off x="1024128" y="7690283"/>
-            <a:ext cx="16239744" cy="892754"/>
+            <a:off x="1024128" y="4665827"/>
+            <a:ext cx="5120640" cy="3139341"/>
           </a:xfrm>
           <a:prstGeom prst="roundRect">
             <a:avLst>
-              <a:gd name="adj" fmla="val 12290"/>
+              <a:gd name="adj" fmla="val 3495"/>
             </a:avLst>
           </a:prstGeom>
           <a:solidFill>
@@ -9084,13 +9141,375 @@
       </p:sp>
       <p:sp>
         <p:nvSpPr>
-          <p:cNvPr id="46" name="Conclusion bar 46"/>
+          <p:cNvPr id="44" name="Figure 44"/>
+          <p:cNvSpPr txBox="1"/>
+          <p:nvPr/>
+        </p:nvSpPr>
+        <p:spPr>
+          <a:xfrm>
+            <a:off x="1536192" y="5026548"/>
+            <a:ext cx="4096512" cy="1280008"/>
+          </a:xfrm>
+          <a:prstGeom prst="rect">
+            <a:avLst/>
+          </a:prstGeom>
+          <a:noFill/>
+        </p:spPr>
+        <p:txBody>
+          <a:bodyPr wrap="square" lIns="0" tIns="0" rIns="0" bIns="0" anchor="b" rtlCol="0">
+            <a:noAutofit/>
+          </a:bodyPr>
+          <a:lstStyle/>
+          <a:p>
+            <a:pPr algn="l" marL="0" indent="0">
+              <a:lnSpc>
+                <a:spcPct val="100000"/>
+              </a:lnSpc>
+              <a:buNone/>
+            </a:pPr>
+            <a:r>
+              <a:rPr lang="ru-RU" sz="5600" b="1" cap="none" spc="0" baseline="0" dirty="0">
+                <a:solidFill>
+                  <a:srgbClr val="C2D076"/>
+                </a:solidFill>
+                <a:latin typeface="Inter Light"/>
+                <a:cs typeface="Inter Light"/>
+              </a:rPr>
+              <a:t>87</a:t>
+            </a:r>
+            <a:endParaRPr lang="ru-RU" sz="5600"/>
+          </a:p>
+          <a:p>
+            <a:pPr algn="l" marL="0" indent="0">
+              <a:lnSpc>
+                <a:spcPct val="100000"/>
+              </a:lnSpc>
+              <a:buNone/>
+            </a:pPr>
+            <a:r>
+              <a:rPr lang="ru-RU" sz="2799" b="1" cap="none" spc="0" baseline="0" dirty="0">
+                <a:solidFill>
+                  <a:srgbClr val="C2D076"/>
+                </a:solidFill>
+                <a:latin typeface="Inter Light"/>
+                <a:cs typeface="Inter Light"/>
+              </a:rPr>
+              <a:t>шаблонов</a:t>
+            </a:r>
+            <a:endParaRPr lang="ru-RU" sz="2799"/>
+          </a:p>
+        </p:txBody>
+      </p:sp>
+      <p:sp>
+        <p:nvSpPr>
+          <p:cNvPr id="45" name="Label 45"/>
+          <p:cNvSpPr txBox="1"/>
+          <p:nvPr/>
+        </p:nvSpPr>
+        <p:spPr>
+          <a:xfrm>
+            <a:off x="1536192" y="6414569"/>
+            <a:ext cx="4096512" cy="878535"/>
+          </a:xfrm>
+          <a:prstGeom prst="rect">
+            <a:avLst/>
+          </a:prstGeom>
+          <a:noFill/>
+        </p:spPr>
+        <p:txBody>
+          <a:bodyPr wrap="square" lIns="0" tIns="0" rIns="0" bIns="0" anchor="t" rtlCol="0">
+            <a:noAutofit/>
+          </a:bodyPr>
+          <a:lstStyle/>
+          <a:p>
+            <a:pPr algn="l" marL="0" indent="0">
+              <a:lnSpc>
+                <a:spcPct val="100000"/>
+              </a:lnSpc>
+              <a:buNone/>
+            </a:pPr>
+            <a:r>
+              <a:rPr lang="ru-RU" sz="2799" b="0" cap="none" spc="0" baseline="0" dirty="0">
+                <a:solidFill>
+                  <a:srgbClr val="FFFFFF"/>
+                </a:solidFill>
+                <a:latin typeface="Inter Light"/>
+                <a:cs typeface="Inter Light"/>
+              </a:rPr>
+              <a:t>Чужих шаблонов</a:t>
+            </a:r>
+            <a:endParaRPr lang="ru-RU" sz="2799"/>
+          </a:p>
+        </p:txBody>
+      </p:sp>
+      <p:sp>
+        <p:nvSpPr>
+          <p:cNvPr id="46" name="Card 46"/>
           <p:cNvSpPr/>
           <p:nvPr/>
         </p:nvSpPr>
         <p:spPr>
           <a:xfrm>
-            <a:off x="1379601" y="7953333"/>
+            <a:off x="6583680" y="4665827"/>
+            <a:ext cx="5120640" cy="3139341"/>
+          </a:xfrm>
+          <a:prstGeom prst="roundRect">
+            <a:avLst>
+              <a:gd name="adj" fmla="val 3495"/>
+            </a:avLst>
+          </a:prstGeom>
+          <a:solidFill>
+            <a:srgbClr val="000000"/>
+          </a:solidFill>
+          <a:ln>
+            <a:noFill/>
+          </a:ln>
+        </p:spPr>
+      </p:sp>
+      <p:sp>
+        <p:nvSpPr>
+          <p:cNvPr id="47" name="Figure 47"/>
+          <p:cNvSpPr txBox="1"/>
+          <p:nvPr/>
+        </p:nvSpPr>
+        <p:spPr>
+          <a:xfrm>
+            <a:off x="7095744" y="5026548"/>
+            <a:ext cx="4096512" cy="853440"/>
+          </a:xfrm>
+          <a:prstGeom prst="rect">
+            <a:avLst/>
+          </a:prstGeom>
+          <a:noFill/>
+        </p:spPr>
+        <p:txBody>
+          <a:bodyPr wrap="square" lIns="0" tIns="0" rIns="0" bIns="0" anchor="b" rtlCol="0">
+            <a:noAutofit/>
+          </a:bodyPr>
+          <a:lstStyle/>
+          <a:p>
+            <a:pPr algn="l" marL="0" indent="0">
+              <a:lnSpc>
+                <a:spcPct val="100000"/>
+              </a:lnSpc>
+              <a:buNone/>
+            </a:pPr>
+            <a:r>
+              <a:rPr lang="ru-RU" sz="5600" b="1" cap="none" spc="0" baseline="0" dirty="0">
+                <a:solidFill>
+                  <a:srgbClr val="C2D076"/>
+                </a:solidFill>
+                <a:latin typeface="Inter Light"/>
+                <a:cs typeface="Inter Light"/>
+              </a:rPr>
+              <a:t>99 из 100</a:t>
+            </a:r>
+            <a:endParaRPr lang="ru-RU" sz="5600"/>
+          </a:p>
+        </p:txBody>
+      </p:sp>
+      <p:sp>
+        <p:nvSpPr>
+          <p:cNvPr id="48" name="Label 48"/>
+          <p:cNvSpPr txBox="1"/>
+          <p:nvPr/>
+        </p:nvSpPr>
+        <p:spPr>
+          <a:xfrm>
+            <a:off x="7095744" y="6414569"/>
+            <a:ext cx="4096512" cy="878535"/>
+          </a:xfrm>
+          <a:prstGeom prst="rect">
+            <a:avLst/>
+          </a:prstGeom>
+          <a:noFill/>
+        </p:spPr>
+        <p:txBody>
+          <a:bodyPr wrap="square" lIns="0" tIns="0" rIns="0" bIns="0" anchor="t" rtlCol="0">
+            <a:noAutofit/>
+          </a:bodyPr>
+          <a:lstStyle/>
+          <a:p>
+            <a:pPr algn="l" marL="0" indent="0">
+              <a:lnSpc>
+                <a:spcPct val="100000"/>
+              </a:lnSpc>
+              <a:buNone/>
+            </a:pPr>
+            <a:r>
+              <a:rPr lang="ru-RU" sz="2799" b="0" cap="none" spc="0" baseline="0" dirty="0">
+                <a:solidFill>
+                  <a:srgbClr val="FFFFFF"/>
+                </a:solidFill>
+                <a:latin typeface="Inter Light"/>
+                <a:cs typeface="Inter Light"/>
+              </a:rPr>
+              <a:t>Средняя оценка качества</a:t>
+            </a:r>
+            <a:endParaRPr lang="ru-RU" sz="2799"/>
+          </a:p>
+        </p:txBody>
+      </p:sp>
+      <p:sp>
+        <p:nvSpPr>
+          <p:cNvPr id="49" name="Card 49"/>
+          <p:cNvSpPr/>
+          <p:nvPr/>
+        </p:nvSpPr>
+        <p:spPr>
+          <a:xfrm>
+            <a:off x="12143232" y="4665827"/>
+            <a:ext cx="5120640" cy="3139341"/>
+          </a:xfrm>
+          <a:prstGeom prst="roundRect">
+            <a:avLst>
+              <a:gd name="adj" fmla="val 3495"/>
+            </a:avLst>
+          </a:prstGeom>
+          <a:solidFill>
+            <a:srgbClr val="000000"/>
+          </a:solidFill>
+          <a:ln>
+            <a:noFill/>
+          </a:ln>
+        </p:spPr>
+      </p:sp>
+      <p:sp>
+        <p:nvSpPr>
+          <p:cNvPr id="50" name="Figure 50"/>
+          <p:cNvSpPr txBox="1"/>
+          <p:nvPr/>
+        </p:nvSpPr>
+        <p:spPr>
+          <a:xfrm>
+            <a:off x="12647828" y="5026548"/>
+            <a:ext cx="4103980" cy="1280008"/>
+          </a:xfrm>
+          <a:prstGeom prst="rect">
+            <a:avLst/>
+          </a:prstGeom>
+          <a:noFill/>
+        </p:spPr>
+        <p:txBody>
+          <a:bodyPr wrap="square" lIns="0" tIns="0" rIns="0" bIns="0" anchor="b" rtlCol="0">
+            <a:noAutofit/>
+          </a:bodyPr>
+          <a:lstStyle/>
+          <a:p>
+            <a:pPr algn="l" marL="0" indent="0">
+              <a:lnSpc>
+                <a:spcPct val="100000"/>
+              </a:lnSpc>
+              <a:buNone/>
+            </a:pPr>
+            <a:r>
+              <a:rPr lang="ru-RU" sz="5600" b="1" cap="none" spc="0" baseline="0" dirty="0">
+                <a:solidFill>
+                  <a:srgbClr val="C2D076"/>
+                </a:solidFill>
+                <a:latin typeface="Inter Light"/>
+                <a:cs typeface="Inter Light"/>
+              </a:rPr>
+              <a:t>12</a:t>
+            </a:r>
+            <a:endParaRPr lang="ru-RU" sz="5600"/>
+          </a:p>
+          <a:p>
+            <a:pPr algn="l" marL="0" indent="0">
+              <a:lnSpc>
+                <a:spcPct val="100000"/>
+              </a:lnSpc>
+              <a:buNone/>
+            </a:pPr>
+            <a:r>
+              <a:rPr lang="ru-RU" sz="2799" b="1" cap="none" spc="0" baseline="0" dirty="0">
+                <a:solidFill>
+                  <a:srgbClr val="C2D076"/>
+                </a:solidFill>
+                <a:latin typeface="Inter Light"/>
+                <a:cs typeface="Inter Light"/>
+              </a:rPr>
+              <a:t>форматов</a:t>
+            </a:r>
+            <a:endParaRPr lang="ru-RU" sz="2799"/>
+          </a:p>
+        </p:txBody>
+      </p:sp>
+      <p:sp>
+        <p:nvSpPr>
+          <p:cNvPr id="51" name="Label 51"/>
+          <p:cNvSpPr txBox="1"/>
+          <p:nvPr/>
+        </p:nvSpPr>
+        <p:spPr>
+          <a:xfrm>
+            <a:off x="12655296" y="6414569"/>
+            <a:ext cx="4096512" cy="878535"/>
+          </a:xfrm>
+          <a:prstGeom prst="rect">
+            <a:avLst/>
+          </a:prstGeom>
+          <a:noFill/>
+        </p:spPr>
+        <p:txBody>
+          <a:bodyPr wrap="square" lIns="0" tIns="0" rIns="0" bIns="0" anchor="t" rtlCol="0">
+            <a:noAutofit/>
+          </a:bodyPr>
+          <a:lstStyle/>
+          <a:p>
+            <a:pPr algn="l" marL="0" indent="0">
+              <a:lnSpc>
+                <a:spcPct val="100000"/>
+              </a:lnSpc>
+              <a:buNone/>
+            </a:pPr>
+            <a:r>
+              <a:rPr lang="ru-RU" sz="2799" b="0" cap="none" spc="0" baseline="0" dirty="0">
+                <a:solidFill>
+                  <a:srgbClr val="FFFFFF"/>
+                </a:solidFill>
+                <a:latin typeface="Inter Light"/>
+                <a:cs typeface="Inter Light"/>
+              </a:rPr>
+              <a:t>Форматов поддержки</a:t>
+            </a:r>
+            <a:endParaRPr lang="ru-RU" sz="2799"/>
+          </a:p>
+        </p:txBody>
+      </p:sp>
+      <p:sp>
+        <p:nvSpPr>
+          <p:cNvPr id="52" name="Conclusion strip 52"/>
+          <p:cNvSpPr/>
+          <p:nvPr/>
+        </p:nvSpPr>
+        <p:spPr>
+          <a:xfrm>
+            <a:off x="1024128" y="8237222"/>
+            <a:ext cx="16239744" cy="892754"/>
+          </a:xfrm>
+          <a:prstGeom prst="roundRect">
+            <a:avLst>
+              <a:gd name="adj" fmla="val 12290"/>
+            </a:avLst>
+          </a:prstGeom>
+          <a:solidFill>
+            <a:srgbClr val="000000"/>
+          </a:solidFill>
+          <a:ln>
+            <a:noFill/>
+          </a:ln>
+        </p:spPr>
+      </p:sp>
+      <p:sp>
+        <p:nvSpPr>
+          <p:cNvPr id="53" name="Conclusion bar 53"/>
+          <p:cNvSpPr/>
+          <p:nvPr/>
+        </p:nvSpPr>
+        <p:spPr>
+          <a:xfrm>
+            <a:off x="1379601" y="8500272"/>
             <a:ext cx="61722" cy="366654"/>
           </a:xfrm>
           <a:prstGeom prst="rect">
@@ -9106,13 +9525,13 @@
       </p:sp>
       <p:sp>
         <p:nvSpPr>
-          <p:cNvPr id="47" name="Conclusion 47"/>
+          <p:cNvPr id="54" name="Conclusion 54"/>
           <p:cNvSpPr txBox="1"/>
           <p:nvPr/>
         </p:nvSpPr>
         <p:spPr>
           <a:xfrm>
-            <a:off x="1725701" y="7910676"/>
+            <a:off x="1725701" y="8457615"/>
             <a:ext cx="15182698" cy="451968"/>
           </a:xfrm>
           <a:prstGeom prst="rect">
@@ -9140,27 +9559,7 @@
                 <a:latin typeface="Inter Light"/>
                 <a:cs typeface="Inter Light"/>
               </a:rPr>
-              <a:t>Все шаблоны укладываются в лимит </a:t>
-            </a:r>
-            <a:r>
-              <a:rPr lang="ru-RU" sz="2799" b="0" cap="none" spc="0" baseline="0" dirty="0">
-                <a:solidFill>
-                  <a:srgbClr val="C2D076"/>
-                </a:solidFill>
-                <a:latin typeface="Inter Light"/>
-                <a:cs typeface="Inter Light"/>
-              </a:rPr>
-              <a:t>5 минут</a:t>
-            </a:r>
-            <a:r>
-              <a:rPr lang="ru-RU" sz="2799" b="0" cap="none" spc="0" baseline="0" dirty="0">
-                <a:solidFill>
-                  <a:srgbClr val="C2D076"/>
-                </a:solidFill>
-                <a:latin typeface="Inter Light"/>
-                <a:cs typeface="Inter Light"/>
-              </a:rPr>
-              <a:t> с запасом</a:t>
+              <a:t>Сервис работает с любыми шаблонами и форматами</a:t>
             </a:r>
             <a:endParaRPr lang="ru-RU" sz="2799"/>
           </a:p>
